--- a/output/LINK. voorstel GrowOn Agency.pptx
+++ b/output/LINK. voorstel GrowOn Agency.pptx
@@ -17,9 +17,11 @@
     <p:sldId id="265" r:id="rId11"/>
     <p:sldId id="266" r:id="rId12"/>
     <p:sldId id="267" r:id="rId13"/>
+    <p:sldId id="268" r:id="rId14"/>
+    <p:sldId id="269" r:id="rId15"/>
   </p:sldIdLst>
   <p:notesMasterIdLst>
-    <p:notesMasterId r:id="rId14"/>
+    <p:notesMasterId r:id="rId16"/>
   </p:notesMasterIdLst>
   <p:sldSz cx="12191970" cy="6858000"/>
   <p:notesSz cx="6858000" cy="12191970"/>
@@ -801,6 +803,182 @@
             <a:fld id="{F7021451-1387-4CA6-816F-3879F97B5CBC}" type="slidenum">
               <a:rPr lang="en-US"/>
               <a:t>12</a:t>
+            </a:fld>
+            <a:endParaRPr lang="en-US"/>
+          </a:p>
+        </p:txBody>
+      </p:sp>
+    </p:spTree>
+    <p:extLst>
+      <p:ext uri="{BB962C8B-B14F-4D97-AF65-F5344CB8AC3E}">
+        <p14:creationId xmlns:p14="http://schemas.microsoft.com/office/powerpoint/2010/main" val="1024086991"/>
+      </p:ext>
+    </p:extLst>
+  </p:cSld>
+  <p:clrMapOvr>
+    <a:masterClrMapping/>
+  </p:clrMapOvr>
+</p:notes>
+</file>
+
+<file path=ppt/notesSlides/notesSlide13.xml><?xml version="1.0" encoding="utf-8"?>
+<p:notes xmlns:a="http://schemas.openxmlformats.org/drawingml/2006/main" xmlns:r="http://schemas.openxmlformats.org/officeDocument/2006/relationships" xmlns:p="http://schemas.openxmlformats.org/presentationml/2006/main">
+  <p:cSld>
+    <p:spTree>
+      <p:nvGrpSpPr>
+        <p:cNvPr id="1" name=""/>
+        <p:cNvGrpSpPr/>
+        <p:nvPr/>
+      </p:nvGrpSpPr>
+      <p:grpSpPr>
+        <a:xfrm>
+          <a:off x="0" y="0"/>
+          <a:ext cx="0" cy="0"/>
+          <a:chOff x="0" y="0"/>
+          <a:chExt cx="0" cy="0"/>
+        </a:xfrm>
+      </p:grpSpPr>
+      <p:sp>
+        <p:nvSpPr>
+          <p:cNvPr id="2" name="Slide Image Placeholder 1"/>
+          <p:cNvSpPr>
+            <a:spLocks noGrp="1" noRot="1" noChangeAspect="1"/>
+          </p:cNvSpPr>
+          <p:nvPr>
+            <p:ph type="sldImg"/>
+          </p:nvPr>
+        </p:nvSpPr>
+        <p:spPr/>
+      </p:sp>
+      <p:sp>
+        <p:nvSpPr>
+          <p:cNvPr id="3" name="Notes Placeholder 2"/>
+          <p:cNvSpPr>
+            <a:spLocks noGrp="1"/>
+          </p:cNvSpPr>
+          <p:nvPr>
+            <p:ph type="body" idx="1"/>
+          </p:nvPr>
+        </p:nvSpPr>
+        <p:spPr/>
+        <p:txBody>
+          <a:bodyPr/>
+          <a:lstStyle/>
+          <a:p>
+            <a:r>
+              <a:rPr lang="en-US" dirty="0"/>
+              <a:t/>
+            </a:r>
+            <a:endParaRPr lang="en-US" dirty="0"/>
+          </a:p>
+        </p:txBody>
+      </p:sp>
+      <p:sp>
+        <p:nvSpPr>
+          <p:cNvPr id="4" name="Slide Number Placeholder 3"/>
+          <p:cNvSpPr>
+            <a:spLocks noGrp="1"/>
+          </p:cNvSpPr>
+          <p:nvPr>
+            <p:ph type="sldNum" sz="quarter" idx="10"/>
+          </p:nvPr>
+        </p:nvSpPr>
+        <p:spPr/>
+        <p:txBody>
+          <a:bodyPr/>
+          <a:lstStyle/>
+          <a:p>
+            <a:fld id="{F7021451-1387-4CA6-816F-3879F97B5CBC}" type="slidenum">
+              <a:rPr lang="en-US"/>
+              <a:t>13</a:t>
+            </a:fld>
+            <a:endParaRPr lang="en-US"/>
+          </a:p>
+        </p:txBody>
+      </p:sp>
+    </p:spTree>
+    <p:extLst>
+      <p:ext uri="{BB962C8B-B14F-4D97-AF65-F5344CB8AC3E}">
+        <p14:creationId xmlns:p14="http://schemas.microsoft.com/office/powerpoint/2010/main" val="1024086991"/>
+      </p:ext>
+    </p:extLst>
+  </p:cSld>
+  <p:clrMapOvr>
+    <a:masterClrMapping/>
+  </p:clrMapOvr>
+</p:notes>
+</file>
+
+<file path=ppt/notesSlides/notesSlide14.xml><?xml version="1.0" encoding="utf-8"?>
+<p:notes xmlns:a="http://schemas.openxmlformats.org/drawingml/2006/main" xmlns:r="http://schemas.openxmlformats.org/officeDocument/2006/relationships" xmlns:p="http://schemas.openxmlformats.org/presentationml/2006/main">
+  <p:cSld>
+    <p:spTree>
+      <p:nvGrpSpPr>
+        <p:cNvPr id="1" name=""/>
+        <p:cNvGrpSpPr/>
+        <p:nvPr/>
+      </p:nvGrpSpPr>
+      <p:grpSpPr>
+        <a:xfrm>
+          <a:off x="0" y="0"/>
+          <a:ext cx="0" cy="0"/>
+          <a:chOff x="0" y="0"/>
+          <a:chExt cx="0" cy="0"/>
+        </a:xfrm>
+      </p:grpSpPr>
+      <p:sp>
+        <p:nvSpPr>
+          <p:cNvPr id="2" name="Slide Image Placeholder 1"/>
+          <p:cNvSpPr>
+            <a:spLocks noGrp="1" noRot="1" noChangeAspect="1"/>
+          </p:cNvSpPr>
+          <p:nvPr>
+            <p:ph type="sldImg"/>
+          </p:nvPr>
+        </p:nvSpPr>
+        <p:spPr/>
+      </p:sp>
+      <p:sp>
+        <p:nvSpPr>
+          <p:cNvPr id="3" name="Notes Placeholder 2"/>
+          <p:cNvSpPr>
+            <a:spLocks noGrp="1"/>
+          </p:cNvSpPr>
+          <p:nvPr>
+            <p:ph type="body" idx="1"/>
+          </p:nvPr>
+        </p:nvSpPr>
+        <p:spPr/>
+        <p:txBody>
+          <a:bodyPr/>
+          <a:lstStyle/>
+          <a:p>
+            <a:r>
+              <a:rPr lang="en-US" dirty="0"/>
+              <a:t/>
+            </a:r>
+            <a:endParaRPr lang="en-US" dirty="0"/>
+          </a:p>
+        </p:txBody>
+      </p:sp>
+      <p:sp>
+        <p:nvSpPr>
+          <p:cNvPr id="4" name="Slide Number Placeholder 3"/>
+          <p:cNvSpPr>
+            <a:spLocks noGrp="1"/>
+          </p:cNvSpPr>
+          <p:nvPr>
+            <p:ph type="sldNum" sz="quarter" idx="10"/>
+          </p:nvPr>
+        </p:nvSpPr>
+        <p:spPr/>
+        <p:txBody>
+          <a:bodyPr/>
+          <a:lstStyle/>
+          <a:p>
+            <a:fld id="{F7021451-1387-4CA6-816F-3879F97B5CBC}" type="slidenum">
+              <a:rPr lang="en-US"/>
+              <a:t>14</a:t>
             </a:fld>
             <a:endParaRPr lang="en-US"/>
           </a:p>
@@ -2540,7 +2718,7 @@
                 <a:ea typeface="Arial" pitchFamily="34" charset="-122"/>
                 <a:cs typeface="Arial" pitchFamily="34" charset="-120"/>
               </a:rPr>
-              <a:t>1 / 12</a:t>
+              <a:t>1 / 14</a:t>
             </a:r>
             <a:endParaRPr lang="en-US" sz="750" dirty="0"/>
           </a:p>
@@ -2870,7 +3048,7 @@
     <p:bg>
       <p:bgPr>
         <a:solidFill>
-          <a:srgbClr val="E9E0CD"/>
+          <a:srgbClr val="141821"/>
         </a:solidFill>
       </p:bgPr>
     </p:bg>
@@ -2915,7 +3093,7 @@
             <a:r>
               <a:rPr lang="en-US" sz="1800" b="1" dirty="0">
                 <a:solidFill>
-                  <a:srgbClr val="1C2230"/>
+                  <a:srgbClr val="F2EFE6"/>
                 </a:solidFill>
                 <a:latin typeface="Arial" pitchFamily="34" charset="0"/>
                 <a:ea typeface="Arial" pitchFamily="34" charset="-122"/>
@@ -2968,7 +3146,7 @@
             <a:r>
               <a:rPr lang="en-US" sz="750" b="1" spc="100" kern="0" dirty="0">
                 <a:solidFill>
-                  <a:srgbClr val="6F6A5C"/>
+                  <a:srgbClr val="BDC3CE"/>
                 </a:solidFill>
                 <a:latin typeface="Arial" pitchFamily="34" charset="0"/>
                 <a:ea typeface="Arial" pitchFamily="34" charset="-122"/>
@@ -3007,13 +3185,13 @@
             <a:r>
               <a:rPr lang="en-US" sz="750" b="1" spc="100" kern="0" dirty="0">
                 <a:solidFill>
-                  <a:srgbClr val="6F6A5C"/>
-                </a:solidFill>
-                <a:latin typeface="Arial" pitchFamily="34" charset="0"/>
-                <a:ea typeface="Arial" pitchFamily="34" charset="-122"/>
-                <a:cs typeface="Arial" pitchFamily="34" charset="-120"/>
-              </a:rPr>
-              <a:t>10 / 12</a:t>
+                  <a:srgbClr val="BDC3CE"/>
+                </a:solidFill>
+                <a:latin typeface="Arial" pitchFamily="34" charset="0"/>
+                <a:ea typeface="Arial" pitchFamily="34" charset="-122"/>
+                <a:cs typeface="Arial" pitchFamily="34" charset="-120"/>
+              </a:rPr>
+              <a:t>10 / 14</a:t>
             </a:r>
             <a:endParaRPr lang="en-US" sz="750" dirty="0"/>
           </a:p>
@@ -3052,7 +3230,7 @@
                 <a:ea typeface="Arial" pitchFamily="34" charset="-122"/>
                 <a:cs typeface="Arial" pitchFamily="34" charset="-120"/>
               </a:rPr>
-              <a:t>WAT WE VAN GROWON NODIG HEBBEN</a:t>
+              <a:t>HOE WE AFREKENEN</a:t>
             </a:r>
             <a:endParaRPr lang="en-US" sz="950" dirty="0"/>
           </a:p>
@@ -3088,13 +3266,13 @@
             <a:r>
               <a:rPr lang="en-US" sz="3200" b="1" dirty="0">
                 <a:solidFill>
-                  <a:srgbClr val="1C2230"/>
-                </a:solidFill>
-                <a:latin typeface="Arial" pitchFamily="34" charset="0"/>
-                <a:ea typeface="Arial" pitchFamily="34" charset="-122"/>
-                <a:cs typeface="Arial" pitchFamily="34" charset="-120"/>
-              </a:rPr>
-              <a:t>Weinig, want het </a:t>
+                  <a:srgbClr val="F2EFE6"/>
+                </a:solidFill>
+                <a:latin typeface="Arial" pitchFamily="34" charset="0"/>
+                <a:ea typeface="Arial" pitchFamily="34" charset="-122"/>
+                <a:cs typeface="Arial" pitchFamily="34" charset="-120"/>
+              </a:rPr>
+              <a:t>Vooraf een vaste prijs, achteraf geen </a:t>
             </a:r>
             <a:pPr algn="l" indent="0" marL="0">
               <a:lnSpc>
@@ -3105,13 +3283,13 @@
             <a:r>
               <a:rPr lang="en-US" sz="3000" i="1" dirty="0">
                 <a:solidFill>
-                  <a:srgbClr val="1C2230"/>
+                  <a:srgbClr val="F2EFE6"/>
                 </a:solidFill>
                 <a:latin typeface="Georgia" pitchFamily="34" charset="0"/>
                 <a:ea typeface="Georgia" pitchFamily="34" charset="-122"/>
                 <a:cs typeface="Georgia" pitchFamily="34" charset="-120"/>
               </a:rPr>
-              <a:t>draait al</a:t>
+              <a:t>verrassingen</a:t>
             </a:r>
             <a:pPr algn="l" indent="0" marL="0">
               <a:lnSpc>
@@ -3122,7 +3300,7 @@
             <a:r>
               <a:rPr lang="en-US" sz="3200" b="1" dirty="0">
                 <a:solidFill>
-                  <a:srgbClr val="1C2230"/>
+                  <a:srgbClr val="F2EFE6"/>
                 </a:solidFill>
                 <a:latin typeface="Arial" pitchFamily="34" charset="0"/>
                 <a:ea typeface="Arial" pitchFamily="34" charset="-122"/>
@@ -3142,18 +3320,23 @@
         </p:nvSpPr>
         <p:spPr>
           <a:xfrm>
-            <a:off x="609598" y="2793993"/>
-            <a:ext cx="5397487" cy="1530346"/>
+            <a:off x="609598" y="2463794"/>
+            <a:ext cx="2628893" cy="2362194"/>
           </a:xfrm>
           <a:prstGeom prst="roundRect">
             <a:avLst>
-              <a:gd name="adj" fmla="val 6639"/>
+              <a:gd name="adj" fmla="val 4301"/>
             </a:avLst>
           </a:prstGeom>
           <a:solidFill>
-            <a:srgbClr val="F8F4EB"/>
+            <a:srgbClr val="1B2130"/>
           </a:solidFill>
-          <a:ln/>
+          <a:ln w="9525">
+            <a:solidFill>
+              <a:srgbClr val="3A4152"/>
+            </a:solidFill>
+            <a:prstDash val="solid"/>
+          </a:ln>
         </p:spPr>
       </p:sp>
       <p:sp>
@@ -3164,23 +3347,826 @@
         </p:nvSpPr>
         <p:spPr>
           <a:xfrm>
-            <a:off x="939798" y="3098792"/>
-            <a:ext cx="380999" cy="380999"/>
+            <a:off x="825498" y="2692393"/>
+            <a:ext cx="292099" cy="292099"/>
+          </a:xfrm>
+          <a:prstGeom prst="ellipse">
+            <a:avLst/>
+          </a:prstGeom>
+          <a:ln w="15240">
+            <a:solidFill>
+              <a:srgbClr val="38B6FF"/>
+            </a:solidFill>
+            <a:prstDash val="solid"/>
+          </a:ln>
+        </p:spPr>
+      </p:sp>
+      <p:sp>
+        <p:nvSpPr>
+          <p:cNvPr id="9" name="Text 7"/>
+          <p:cNvSpPr txBox="1"/>
+          <p:nvPr/>
+        </p:nvSpPr>
+        <p:spPr>
+          <a:xfrm>
+            <a:off x="825498" y="2692393"/>
+            <a:ext cx="292099" cy="292099"/>
+          </a:xfrm>
+          <a:prstGeom prst="rect">
+            <a:avLst/>
+          </a:prstGeom>
+          <a:noFill/>
+          <a:ln/>
+        </p:spPr>
+        <p:txBody>
+          <a:bodyPr wrap="square" lIns="0" tIns="0" rIns="0" bIns="0" rtlCol="0" anchor="ctr"/>
+          <a:lstStyle/>
+          <a:p>
+            <a:pPr algn="ctr" indent="0" marL="0">
+              <a:buNone/>
+            </a:pPr>
+            <a:r>
+              <a:rPr lang="en-US" sz="1000" b="1" dirty="0">
+                <a:solidFill>
+                  <a:srgbClr val="38B6FF"/>
+                </a:solidFill>
+                <a:latin typeface="Arial" pitchFamily="34" charset="0"/>
+                <a:ea typeface="Arial" pitchFamily="34" charset="-122"/>
+                <a:cs typeface="Arial" pitchFamily="34" charset="-120"/>
+              </a:rPr>
+              <a:t>1</a:t>
+            </a:r>
+            <a:endParaRPr lang="en-US" sz="1000" dirty="0"/>
+          </a:p>
+        </p:txBody>
+      </p:sp>
+      <p:sp>
+        <p:nvSpPr>
+          <p:cNvPr id="10" name="Text 8"/>
+          <p:cNvSpPr txBox="1"/>
+          <p:nvPr/>
+        </p:nvSpPr>
+        <p:spPr>
+          <a:xfrm>
+            <a:off x="825498" y="3136892"/>
+            <a:ext cx="2197095" cy="406399"/>
+          </a:xfrm>
+          <a:prstGeom prst="rect">
+            <a:avLst/>
+          </a:prstGeom>
+          <a:noFill/>
+          <a:ln/>
+        </p:spPr>
+        <p:txBody>
+          <a:bodyPr wrap="square" lIns="0" tIns="0" rIns="0" bIns="0" rtlCol="0" anchor="t"/>
+          <a:lstStyle/>
+          <a:p>
+            <a:pPr indent="0" marL="0">
+              <a:lnSpc>
+                <a:spcPct val="115000"/>
+              </a:lnSpc>
+              <a:buNone/>
+            </a:pPr>
+            <a:r>
+              <a:rPr lang="en-US" sz="1150" b="1" dirty="0">
+                <a:solidFill>
+                  <a:srgbClr val="F2EFE6"/>
+                </a:solidFill>
+                <a:latin typeface="Arial" pitchFamily="34" charset="0"/>
+                <a:ea typeface="Arial" pitchFamily="34" charset="-122"/>
+                <a:cs typeface="Arial" pitchFamily="34" charset="-120"/>
+              </a:rPr>
+              <a:t>Vaste prijs per beldag</a:t>
+            </a:r>
+            <a:endParaRPr lang="en-US" sz="1150" dirty="0"/>
+          </a:p>
+        </p:txBody>
+      </p:sp>
+      <p:sp>
+        <p:nvSpPr>
+          <p:cNvPr id="11" name="Text 9"/>
+          <p:cNvSpPr txBox="1"/>
+          <p:nvPr/>
+        </p:nvSpPr>
+        <p:spPr>
+          <a:xfrm>
+            <a:off x="825498" y="3594091"/>
+            <a:ext cx="2197095" cy="1079497"/>
+          </a:xfrm>
+          <a:prstGeom prst="rect">
+            <a:avLst/>
+          </a:prstGeom>
+          <a:noFill/>
+          <a:ln/>
+        </p:spPr>
+        <p:txBody>
+          <a:bodyPr wrap="square" lIns="0" tIns="0" rIns="0" bIns="0" rtlCol="0" anchor="t"/>
+          <a:lstStyle/>
+          <a:p>
+            <a:pPr indent="0" marL="0">
+              <a:lnSpc>
+                <a:spcPct val="130000"/>
+              </a:lnSpc>
+              <a:buNone/>
+            </a:pPr>
+            <a:r>
+              <a:rPr lang="en-US" sz="875" dirty="0">
+                <a:solidFill>
+                  <a:srgbClr val="C2C8D2"/>
+                </a:solidFill>
+                <a:latin typeface="Arial" pitchFamily="34" charset="0"/>
+                <a:ea typeface="Arial" pitchFamily="34" charset="-122"/>
+                <a:cs typeface="Arial" pitchFamily="34" charset="-120"/>
+              </a:rPr>
+              <a:t>Je betaalt per beldag, vooraf gefactureerd per werkperiode. Geen nacalculatie, geen rekening per afspraak en geen succesfee meer.</a:t>
+            </a:r>
+            <a:endParaRPr lang="en-US" sz="875" dirty="0"/>
+          </a:p>
+        </p:txBody>
+      </p:sp>
+      <p:sp>
+        <p:nvSpPr>
+          <p:cNvPr id="12" name="Shape 10"/>
+          <p:cNvSpPr/>
+          <p:nvPr/>
+        </p:nvSpPr>
+        <p:spPr>
+          <a:xfrm>
+            <a:off x="3390892" y="2463794"/>
+            <a:ext cx="2628893" cy="2362194"/>
           </a:xfrm>
           <a:prstGeom prst="roundRect">
             <a:avLst>
-              <a:gd name="adj" fmla="val 23333"/>
+              <a:gd name="adj" fmla="val 4301"/>
             </a:avLst>
           </a:prstGeom>
           <a:solidFill>
-            <a:srgbClr val="DDEBF3"/>
+            <a:srgbClr val="1B2130"/>
           </a:solidFill>
-          <a:ln/>
+          <a:ln w="9525">
+            <a:solidFill>
+              <a:srgbClr val="3A4152"/>
+            </a:solidFill>
+            <a:prstDash val="solid"/>
+          </a:ln>
+        </p:spPr>
+      </p:sp>
+      <p:sp>
+        <p:nvSpPr>
+          <p:cNvPr id="13" name="Shape 11"/>
+          <p:cNvSpPr/>
+          <p:nvPr/>
+        </p:nvSpPr>
+        <p:spPr>
+          <a:xfrm>
+            <a:off x="3606791" y="2692393"/>
+            <a:ext cx="292099" cy="292099"/>
+          </a:xfrm>
+          <a:prstGeom prst="ellipse">
+            <a:avLst/>
+          </a:prstGeom>
+          <a:ln w="15240">
+            <a:solidFill>
+              <a:srgbClr val="38B6FF"/>
+            </a:solidFill>
+            <a:prstDash val="solid"/>
+          </a:ln>
+        </p:spPr>
+      </p:sp>
+      <p:sp>
+        <p:nvSpPr>
+          <p:cNvPr id="14" name="Text 12"/>
+          <p:cNvSpPr txBox="1"/>
+          <p:nvPr/>
+        </p:nvSpPr>
+        <p:spPr>
+          <a:xfrm>
+            <a:off x="3606791" y="2692393"/>
+            <a:ext cx="292099" cy="292099"/>
+          </a:xfrm>
+          <a:prstGeom prst="rect">
+            <a:avLst/>
+          </a:prstGeom>
+          <a:noFill/>
+          <a:ln/>
+        </p:spPr>
+        <p:txBody>
+          <a:bodyPr wrap="square" lIns="0" tIns="0" rIns="0" bIns="0" rtlCol="0" anchor="ctr"/>
+          <a:lstStyle/>
+          <a:p>
+            <a:pPr algn="ctr" indent="0" marL="0">
+              <a:buNone/>
+            </a:pPr>
+            <a:r>
+              <a:rPr lang="en-US" sz="1000" b="1" dirty="0">
+                <a:solidFill>
+                  <a:srgbClr val="38B6FF"/>
+                </a:solidFill>
+                <a:latin typeface="Arial" pitchFamily="34" charset="0"/>
+                <a:ea typeface="Arial" pitchFamily="34" charset="-122"/>
+                <a:cs typeface="Arial" pitchFamily="34" charset="-120"/>
+              </a:rPr>
+              <a:t>2</a:t>
+            </a:r>
+            <a:endParaRPr lang="en-US" sz="1000" dirty="0"/>
+          </a:p>
+        </p:txBody>
+      </p:sp>
+      <p:sp>
+        <p:nvSpPr>
+          <p:cNvPr id="15" name="Text 13"/>
+          <p:cNvSpPr txBox="1"/>
+          <p:nvPr/>
+        </p:nvSpPr>
+        <p:spPr>
+          <a:xfrm>
+            <a:off x="3606791" y="3136892"/>
+            <a:ext cx="2197095" cy="406399"/>
+          </a:xfrm>
+          <a:prstGeom prst="rect">
+            <a:avLst/>
+          </a:prstGeom>
+          <a:noFill/>
+          <a:ln/>
+        </p:spPr>
+        <p:txBody>
+          <a:bodyPr wrap="square" lIns="0" tIns="0" rIns="0" bIns="0" rtlCol="0" anchor="t"/>
+          <a:lstStyle/>
+          <a:p>
+            <a:pPr indent="0" marL="0">
+              <a:lnSpc>
+                <a:spcPct val="115000"/>
+              </a:lnSpc>
+              <a:buNone/>
+            </a:pPr>
+            <a:r>
+              <a:rPr lang="en-US" sz="1150" b="1" dirty="0">
+                <a:solidFill>
+                  <a:srgbClr val="F2EFE6"/>
+                </a:solidFill>
+                <a:latin typeface="Arial" pitchFamily="34" charset="0"/>
+                <a:ea typeface="Arial" pitchFamily="34" charset="-122"/>
+                <a:cs typeface="Arial" pitchFamily="34" charset="-120"/>
+              </a:rPr>
+              <a:t>Target van twee per beldag</a:t>
+            </a:r>
+            <a:endParaRPr lang="en-US" sz="1150" dirty="0"/>
+          </a:p>
+        </p:txBody>
+      </p:sp>
+      <p:sp>
+        <p:nvSpPr>
+          <p:cNvPr id="16" name="Text 14"/>
+          <p:cNvSpPr txBox="1"/>
+          <p:nvPr/>
+        </p:nvSpPr>
+        <p:spPr>
+          <a:xfrm>
+            <a:off x="3606791" y="3594091"/>
+            <a:ext cx="2197095" cy="1079497"/>
+          </a:xfrm>
+          <a:prstGeom prst="rect">
+            <a:avLst/>
+          </a:prstGeom>
+          <a:noFill/>
+          <a:ln/>
+        </p:spPr>
+        <p:txBody>
+          <a:bodyPr wrap="square" lIns="0" tIns="0" rIns="0" bIns="0" rtlCol="0" anchor="t"/>
+          <a:lstStyle/>
+          <a:p>
+            <a:pPr indent="0" marL="0">
+              <a:lnSpc>
+                <a:spcPct val="130000"/>
+              </a:lnSpc>
+              <a:buNone/>
+            </a:pPr>
+            <a:r>
+              <a:rPr lang="en-US" sz="875" dirty="0">
+                <a:solidFill>
+                  <a:srgbClr val="C2C8D2"/>
+                </a:solidFill>
+                <a:latin typeface="Arial" pitchFamily="34" charset="0"/>
+                <a:ea typeface="Arial" pitchFamily="34" charset="-122"/>
+                <a:cs typeface="Arial" pitchFamily="34" charset="-120"/>
+              </a:rPr>
+              <a:t>Twee gekwalificeerde afspraken per beldag, het gemiddelde uit jullie eigen pilot. We meten per werkperiode, want de ene dag is de andere niet.</a:t>
+            </a:r>
+            <a:endParaRPr lang="en-US" sz="875" dirty="0"/>
+          </a:p>
+        </p:txBody>
+      </p:sp>
+      <p:sp>
+        <p:nvSpPr>
+          <p:cNvPr id="17" name="Shape 15"/>
+          <p:cNvSpPr/>
+          <p:nvPr/>
+        </p:nvSpPr>
+        <p:spPr>
+          <a:xfrm>
+            <a:off x="6172185" y="2463794"/>
+            <a:ext cx="2628893" cy="2362194"/>
+          </a:xfrm>
+          <a:prstGeom prst="roundRect">
+            <a:avLst>
+              <a:gd name="adj" fmla="val 4301"/>
+            </a:avLst>
+          </a:prstGeom>
+          <a:solidFill>
+            <a:srgbClr val="1B2130"/>
+          </a:solidFill>
+          <a:ln w="9525">
+            <a:solidFill>
+              <a:srgbClr val="3A4152"/>
+            </a:solidFill>
+            <a:prstDash val="solid"/>
+          </a:ln>
+        </p:spPr>
+      </p:sp>
+      <p:sp>
+        <p:nvSpPr>
+          <p:cNvPr id="18" name="Shape 16"/>
+          <p:cNvSpPr/>
+          <p:nvPr/>
+        </p:nvSpPr>
+        <p:spPr>
+          <a:xfrm>
+            <a:off x="6388084" y="2692393"/>
+            <a:ext cx="292099" cy="292099"/>
+          </a:xfrm>
+          <a:prstGeom prst="ellipse">
+            <a:avLst/>
+          </a:prstGeom>
+          <a:ln w="15240">
+            <a:solidFill>
+              <a:srgbClr val="38B6FF"/>
+            </a:solidFill>
+            <a:prstDash val="solid"/>
+          </a:ln>
+        </p:spPr>
+      </p:sp>
+      <p:sp>
+        <p:nvSpPr>
+          <p:cNvPr id="19" name="Text 17"/>
+          <p:cNvSpPr txBox="1"/>
+          <p:nvPr/>
+        </p:nvSpPr>
+        <p:spPr>
+          <a:xfrm>
+            <a:off x="6388084" y="2692393"/>
+            <a:ext cx="292099" cy="292099"/>
+          </a:xfrm>
+          <a:prstGeom prst="rect">
+            <a:avLst/>
+          </a:prstGeom>
+          <a:noFill/>
+          <a:ln/>
+        </p:spPr>
+        <p:txBody>
+          <a:bodyPr wrap="square" lIns="0" tIns="0" rIns="0" bIns="0" rtlCol="0" anchor="ctr"/>
+          <a:lstStyle/>
+          <a:p>
+            <a:pPr algn="ctr" indent="0" marL="0">
+              <a:buNone/>
+            </a:pPr>
+            <a:r>
+              <a:rPr lang="en-US" sz="1000" b="1" dirty="0">
+                <a:solidFill>
+                  <a:srgbClr val="38B6FF"/>
+                </a:solidFill>
+                <a:latin typeface="Arial" pitchFamily="34" charset="0"/>
+                <a:ea typeface="Arial" pitchFamily="34" charset="-122"/>
+                <a:cs typeface="Arial" pitchFamily="34" charset="-120"/>
+              </a:rPr>
+              <a:t>3</a:t>
+            </a:r>
+            <a:endParaRPr lang="en-US" sz="1000" dirty="0"/>
+          </a:p>
+        </p:txBody>
+      </p:sp>
+      <p:sp>
+        <p:nvSpPr>
+          <p:cNvPr id="20" name="Text 18"/>
+          <p:cNvSpPr txBox="1"/>
+          <p:nvPr/>
+        </p:nvSpPr>
+        <p:spPr>
+          <a:xfrm>
+            <a:off x="6388084" y="3136892"/>
+            <a:ext cx="2197095" cy="406399"/>
+          </a:xfrm>
+          <a:prstGeom prst="rect">
+            <a:avLst/>
+          </a:prstGeom>
+          <a:noFill/>
+          <a:ln/>
+        </p:spPr>
+        <p:txBody>
+          <a:bodyPr wrap="square" lIns="0" tIns="0" rIns="0" bIns="0" rtlCol="0" anchor="t"/>
+          <a:lstStyle/>
+          <a:p>
+            <a:pPr indent="0" marL="0">
+              <a:lnSpc>
+                <a:spcPct val="115000"/>
+              </a:lnSpc>
+              <a:buNone/>
+            </a:pPr>
+            <a:r>
+              <a:rPr lang="en-US" sz="1150" b="1" dirty="0">
+                <a:solidFill>
+                  <a:srgbClr val="F2EFE6"/>
+                </a:solidFill>
+                <a:latin typeface="Arial" pitchFamily="34" charset="0"/>
+                <a:ea typeface="Arial" pitchFamily="34" charset="-122"/>
+                <a:cs typeface="Arial" pitchFamily="34" charset="-120"/>
+              </a:rPr>
+              <a:t>Inhaaldag als vangnet</a:t>
+            </a:r>
+            <a:endParaRPr lang="en-US" sz="1150" dirty="0"/>
+          </a:p>
+        </p:txBody>
+      </p:sp>
+      <p:sp>
+        <p:nvSpPr>
+          <p:cNvPr id="21" name="Text 19"/>
+          <p:cNvSpPr txBox="1"/>
+          <p:nvPr/>
+        </p:nvSpPr>
+        <p:spPr>
+          <a:xfrm>
+            <a:off x="6388084" y="3594091"/>
+            <a:ext cx="2197095" cy="1079497"/>
+          </a:xfrm>
+          <a:prstGeom prst="rect">
+            <a:avLst/>
+          </a:prstGeom>
+          <a:noFill/>
+          <a:ln/>
+        </p:spPr>
+        <p:txBody>
+          <a:bodyPr wrap="square" lIns="0" tIns="0" rIns="0" bIns="0" rtlCol="0" anchor="t"/>
+          <a:lstStyle/>
+          <a:p>
+            <a:pPr indent="0" marL="0">
+              <a:lnSpc>
+                <a:spcPct val="130000"/>
+              </a:lnSpc>
+              <a:buNone/>
+            </a:pPr>
+            <a:r>
+              <a:rPr lang="en-US" sz="875" dirty="0">
+                <a:solidFill>
+                  <a:srgbClr val="C2C8D2"/>
+                </a:solidFill>
+                <a:latin typeface="Arial" pitchFamily="34" charset="0"/>
+                <a:ea typeface="Arial" pitchFamily="34" charset="-122"/>
+                <a:cs typeface="Arial" pitchFamily="34" charset="-120"/>
+              </a:rPr>
+              <a:t>Blijft een werkperiode onder target, dan bellen we de volgende periode een dag extra die niet op de rekening komt. Maximaal één per periode.</a:t>
+            </a:r>
+            <a:endParaRPr lang="en-US" sz="875" dirty="0"/>
+          </a:p>
+        </p:txBody>
+      </p:sp>
+      <p:sp>
+        <p:nvSpPr>
+          <p:cNvPr id="22" name="Shape 20"/>
+          <p:cNvSpPr/>
+          <p:nvPr/>
+        </p:nvSpPr>
+        <p:spPr>
+          <a:xfrm>
+            <a:off x="8953478" y="2463794"/>
+            <a:ext cx="2628893" cy="2362194"/>
+          </a:xfrm>
+          <a:prstGeom prst="roundRect">
+            <a:avLst>
+              <a:gd name="adj" fmla="val 4301"/>
+            </a:avLst>
+          </a:prstGeom>
+          <a:solidFill>
+            <a:srgbClr val="1B2130"/>
+          </a:solidFill>
+          <a:ln w="15240">
+            <a:solidFill>
+              <a:srgbClr val="38B6FF"/>
+            </a:solidFill>
+            <a:prstDash val="solid"/>
+          </a:ln>
+        </p:spPr>
+      </p:sp>
+      <p:sp>
+        <p:nvSpPr>
+          <p:cNvPr id="23" name="Shape 21"/>
+          <p:cNvSpPr/>
+          <p:nvPr/>
+        </p:nvSpPr>
+        <p:spPr>
+          <a:xfrm>
+            <a:off x="9169377" y="2692393"/>
+            <a:ext cx="292099" cy="292099"/>
+          </a:xfrm>
+          <a:prstGeom prst="ellipse">
+            <a:avLst/>
+          </a:prstGeom>
+          <a:ln w="15240">
+            <a:solidFill>
+              <a:srgbClr val="38B6FF"/>
+            </a:solidFill>
+            <a:prstDash val="solid"/>
+          </a:ln>
+        </p:spPr>
+      </p:sp>
+      <p:sp>
+        <p:nvSpPr>
+          <p:cNvPr id="24" name="Text 22"/>
+          <p:cNvSpPr txBox="1"/>
+          <p:nvPr/>
+        </p:nvSpPr>
+        <p:spPr>
+          <a:xfrm>
+            <a:off x="9169377" y="2692393"/>
+            <a:ext cx="292099" cy="292099"/>
+          </a:xfrm>
+          <a:prstGeom prst="rect">
+            <a:avLst/>
+          </a:prstGeom>
+          <a:noFill/>
+          <a:ln/>
+        </p:spPr>
+        <p:txBody>
+          <a:bodyPr wrap="square" lIns="0" tIns="0" rIns="0" bIns="0" rtlCol="0" anchor="ctr"/>
+          <a:lstStyle/>
+          <a:p>
+            <a:pPr algn="ctr" indent="0" marL="0">
+              <a:buNone/>
+            </a:pPr>
+            <a:r>
+              <a:rPr lang="en-US" sz="1000" b="1" dirty="0">
+                <a:solidFill>
+                  <a:srgbClr val="38B6FF"/>
+                </a:solidFill>
+                <a:latin typeface="Arial" pitchFamily="34" charset="0"/>
+                <a:ea typeface="Arial" pitchFamily="34" charset="-122"/>
+                <a:cs typeface="Arial" pitchFamily="34" charset="-120"/>
+              </a:rPr>
+              <a:t>4</a:t>
+            </a:r>
+            <a:endParaRPr lang="en-US" sz="1000" dirty="0"/>
+          </a:p>
+        </p:txBody>
+      </p:sp>
+      <p:sp>
+        <p:nvSpPr>
+          <p:cNvPr id="25" name="Text 23"/>
+          <p:cNvSpPr txBox="1"/>
+          <p:nvPr/>
+        </p:nvSpPr>
+        <p:spPr>
+          <a:xfrm>
+            <a:off x="9169377" y="3136892"/>
+            <a:ext cx="2197095" cy="406399"/>
+          </a:xfrm>
+          <a:prstGeom prst="rect">
+            <a:avLst/>
+          </a:prstGeom>
+          <a:noFill/>
+          <a:ln/>
+        </p:spPr>
+        <p:txBody>
+          <a:bodyPr wrap="square" lIns="0" tIns="0" rIns="0" bIns="0" rtlCol="0" anchor="t"/>
+          <a:lstStyle/>
+          <a:p>
+            <a:pPr indent="0" marL="0">
+              <a:lnSpc>
+                <a:spcPct val="115000"/>
+              </a:lnSpc>
+              <a:buNone/>
+            </a:pPr>
+            <a:r>
+              <a:rPr lang="en-US" sz="1150" b="1" dirty="0">
+                <a:solidFill>
+                  <a:srgbClr val="38B6FF"/>
+                </a:solidFill>
+                <a:latin typeface="Arial" pitchFamily="34" charset="0"/>
+                <a:ea typeface="Arial" pitchFamily="34" charset="-122"/>
+                <a:cs typeface="Arial" pitchFamily="34" charset="-120"/>
+              </a:rPr>
+              <a:t>Elke periode opnieuw kiezen</a:t>
+            </a:r>
+            <a:endParaRPr lang="en-US" sz="1150" dirty="0"/>
+          </a:p>
+        </p:txBody>
+      </p:sp>
+      <p:sp>
+        <p:nvSpPr>
+          <p:cNvPr id="26" name="Text 24"/>
+          <p:cNvSpPr txBox="1"/>
+          <p:nvPr/>
+        </p:nvSpPr>
+        <p:spPr>
+          <a:xfrm>
+            <a:off x="9169377" y="3594091"/>
+            <a:ext cx="2197095" cy="1079497"/>
+          </a:xfrm>
+          <a:prstGeom prst="rect">
+            <a:avLst/>
+          </a:prstGeom>
+          <a:noFill/>
+          <a:ln/>
+        </p:spPr>
+        <p:txBody>
+          <a:bodyPr wrap="square" lIns="0" tIns="0" rIns="0" bIns="0" rtlCol="0" anchor="t"/>
+          <a:lstStyle/>
+          <a:p>
+            <a:pPr indent="0" marL="0">
+              <a:lnSpc>
+                <a:spcPct val="130000"/>
+              </a:lnSpc>
+              <a:buNone/>
+            </a:pPr>
+            <a:r>
+              <a:rPr lang="en-US" sz="875" dirty="0">
+                <a:solidFill>
+                  <a:srgbClr val="C2C8D2"/>
+                </a:solidFill>
+                <a:latin typeface="Arial" pitchFamily="34" charset="0"/>
+                <a:ea typeface="Arial" pitchFamily="34" charset="-122"/>
+                <a:cs typeface="Arial" pitchFamily="34" charset="-120"/>
+              </a:rPr>
+              <a:t>Jullie bepalen per werkperiode het aantal beldagen, vanaf vier. Een maand opzegtermijn, geen jaarcontract.</a:t>
+            </a:r>
+            <a:endParaRPr lang="en-US" sz="875" dirty="0"/>
+          </a:p>
+        </p:txBody>
+      </p:sp>
+      <p:sp>
+        <p:nvSpPr>
+          <p:cNvPr id="27" name="Shape 25"/>
+          <p:cNvSpPr/>
+          <p:nvPr/>
+        </p:nvSpPr>
+        <p:spPr>
+          <a:xfrm>
+            <a:off x="609598" y="5079987"/>
+            <a:ext cx="10972773" cy="1028697"/>
+          </a:xfrm>
+          <a:prstGeom prst="roundRect">
+            <a:avLst>
+              <a:gd name="adj" fmla="val 9877"/>
+            </a:avLst>
+          </a:prstGeom>
+          <a:solidFill>
+            <a:srgbClr val="38B6FF"/>
+          </a:solidFill>
+          <a:ln/>
+        </p:spPr>
+      </p:sp>
+      <p:sp>
+        <p:nvSpPr>
+          <p:cNvPr id="28" name="Text 26"/>
+          <p:cNvSpPr txBox="1"/>
+          <p:nvPr/>
+        </p:nvSpPr>
+        <p:spPr>
+          <a:xfrm>
+            <a:off x="914398" y="5245087"/>
+            <a:ext cx="1904995" cy="165100"/>
+          </a:xfrm>
+          <a:prstGeom prst="rect">
+            <a:avLst/>
+          </a:prstGeom>
+          <a:noFill/>
+          <a:ln/>
+        </p:spPr>
+        <p:txBody>
+          <a:bodyPr wrap="square" lIns="0" tIns="0" rIns="0" bIns="0" rtlCol="0" anchor="ctr"/>
+          <a:lstStyle/>
+          <a:p>
+            <a:pPr indent="0" marL="0">
+              <a:buNone/>
+            </a:pPr>
+            <a:r>
+              <a:rPr lang="en-US" sz="800" b="1" spc="200" kern="0" dirty="0">
+                <a:solidFill>
+                  <a:srgbClr val="0D1420"/>
+                </a:solidFill>
+                <a:latin typeface="Arial" pitchFamily="34" charset="0"/>
+                <a:ea typeface="Arial" pitchFamily="34" charset="-122"/>
+                <a:cs typeface="Arial" pitchFamily="34" charset="-120"/>
+              </a:rPr>
+              <a:t>PRIJS PER BELDAG</a:t>
+            </a:r>
+            <a:endParaRPr lang="en-US" sz="800" dirty="0"/>
+          </a:p>
+        </p:txBody>
+      </p:sp>
+      <p:sp>
+        <p:nvSpPr>
+          <p:cNvPr id="29" name="Text 27"/>
+          <p:cNvSpPr txBox="1"/>
+          <p:nvPr/>
+        </p:nvSpPr>
+        <p:spPr>
+          <a:xfrm>
+            <a:off x="914398" y="5410186"/>
+            <a:ext cx="1904995" cy="406399"/>
+          </a:xfrm>
+          <a:prstGeom prst="rect">
+            <a:avLst/>
+          </a:prstGeom>
+          <a:noFill/>
+          <a:ln/>
+        </p:spPr>
+        <p:txBody>
+          <a:bodyPr wrap="square" lIns="0" tIns="0" rIns="0" bIns="0" rtlCol="0" anchor="ctr"/>
+          <a:lstStyle/>
+          <a:p>
+            <a:pPr indent="0" marL="0">
+              <a:buNone/>
+            </a:pPr>
+            <a:r>
+              <a:rPr lang="en-US" sz="2900" b="1" dirty="0">
+                <a:solidFill>
+                  <a:srgbClr val="0D1420"/>
+                </a:solidFill>
+                <a:latin typeface="Arial" pitchFamily="34" charset="0"/>
+                <a:ea typeface="Arial" pitchFamily="34" charset="-122"/>
+                <a:cs typeface="Arial" pitchFamily="34" charset="-120"/>
+              </a:rPr>
+              <a:t>€ 600</a:t>
+            </a:r>
+            <a:endParaRPr lang="en-US" sz="2900" dirty="0"/>
+          </a:p>
+        </p:txBody>
+      </p:sp>
+      <p:sp>
+        <p:nvSpPr>
+          <p:cNvPr id="30" name="Text 28"/>
+          <p:cNvSpPr txBox="1"/>
+          <p:nvPr/>
+        </p:nvSpPr>
+        <p:spPr>
+          <a:xfrm>
+            <a:off x="914398" y="5829285"/>
+            <a:ext cx="2031995" cy="165100"/>
+          </a:xfrm>
+          <a:prstGeom prst="rect">
+            <a:avLst/>
+          </a:prstGeom>
+          <a:noFill/>
+          <a:ln/>
+        </p:spPr>
+        <p:txBody>
+          <a:bodyPr wrap="square" lIns="0" tIns="0" rIns="0" bIns="0" rtlCol="0" anchor="ctr"/>
+          <a:lstStyle/>
+          <a:p>
+            <a:pPr indent="0" marL="0">
+              <a:buNone/>
+            </a:pPr>
+            <a:r>
+              <a:rPr lang="en-US" sz="800" b="1" dirty="0">
+                <a:solidFill>
+                  <a:srgbClr val="0D1420"/>
+                </a:solidFill>
+                <a:latin typeface="Arial" pitchFamily="34" charset="0"/>
+                <a:ea typeface="Arial" pitchFamily="34" charset="-122"/>
+                <a:cs typeface="Arial" pitchFamily="34" charset="-120"/>
+              </a:rPr>
+              <a:t>vanaf 8 beldagen € 500, excl. btw</a:t>
+            </a:r>
+            <a:endParaRPr lang="en-US" sz="800" dirty="0"/>
+          </a:p>
+        </p:txBody>
+      </p:sp>
+      <p:sp>
+        <p:nvSpPr>
+          <p:cNvPr id="31" name="Shape 29"/>
+          <p:cNvSpPr/>
+          <p:nvPr/>
+        </p:nvSpPr>
+        <p:spPr>
+          <a:xfrm>
+            <a:off x="3174992" y="5257787"/>
+            <a:ext cx="0" cy="673098"/>
+          </a:xfrm>
+          <a:prstGeom prst="line">
+            <a:avLst/>
+          </a:prstGeom>
+          <a:noFill/>
+          <a:ln w="9525">
+            <a:solidFill>
+              <a:srgbClr val="0D1420">
+                <a:alpha val="40000"/>
+              </a:srgbClr>
+            </a:solidFill>
+            <a:prstDash val="solid"/>
+          </a:ln>
         </p:spPr>
       </p:sp>
       <p:pic>
         <p:nvPicPr>
-          <p:cNvPr id="9" name="Image 0" descr="preencoded.png">    </p:cNvPr>
+          <p:cNvPr id="32" name="Image 0" descr="preencoded.png">    </p:cNvPr>
           <p:cNvPicPr>
             <a:picLocks noChangeAspect="1"/>
           </p:cNvPicPr>
@@ -3194,8 +4180,8 @@
         </p:blipFill>
         <p:spPr>
           <a:xfrm>
-            <a:off x="1035047" y="3194042"/>
-            <a:ext cx="190500" cy="190500"/>
+            <a:off x="3530591" y="5276837"/>
+            <a:ext cx="127000" cy="127000"/>
           </a:xfrm>
           <a:prstGeom prst="rect">
             <a:avLst/>
@@ -3204,14 +4190,14 @@
       </p:pic>
       <p:sp>
         <p:nvSpPr>
-          <p:cNvPr id="10" name="Text 7"/>
-          <p:cNvSpPr txBox="1"/>
-          <p:nvPr/>
-        </p:nvSpPr>
-        <p:spPr>
-          <a:xfrm>
-            <a:off x="1549396" y="3073392"/>
-            <a:ext cx="4127490" cy="279399"/>
+          <p:cNvPr id="33" name="Text 30"/>
+          <p:cNvSpPr txBox="1"/>
+          <p:nvPr/>
+        </p:nvSpPr>
+        <p:spPr>
+          <a:xfrm>
+            <a:off x="3733791" y="5245087"/>
+            <a:ext cx="3555991" cy="215899"/>
           </a:xfrm>
           <a:prstGeom prst="rect">
             <a:avLst/>
@@ -3227,109 +4213,23 @@
               <a:buNone/>
             </a:pPr>
             <a:r>
-              <a:rPr lang="en-US" sz="1450" b="1" dirty="0">
-                <a:solidFill>
-                  <a:srgbClr val="1C2230"/>
-                </a:solidFill>
-                <a:latin typeface="Arial" pitchFamily="34" charset="0"/>
-                <a:ea typeface="Arial" pitchFamily="34" charset="-122"/>
-                <a:cs typeface="Arial" pitchFamily="34" charset="-120"/>
-              </a:rPr>
-              <a:t>Scherper profiel</a:t>
-            </a:r>
-            <a:endParaRPr lang="en-US" sz="1450" dirty="0"/>
-          </a:p>
-        </p:txBody>
-      </p:sp>
-      <p:sp>
-        <p:nvSpPr>
-          <p:cNvPr id="11" name="Text 8"/>
-          <p:cNvSpPr txBox="1"/>
-          <p:nvPr/>
-        </p:nvSpPr>
-        <p:spPr>
-          <a:xfrm>
-            <a:off x="1549396" y="3403591"/>
-            <a:ext cx="4063990" cy="698498"/>
-          </a:xfrm>
-          <a:prstGeom prst="rect">
-            <a:avLst/>
-          </a:prstGeom>
-          <a:noFill/>
-          <a:ln/>
-        </p:spPr>
-        <p:txBody>
-          <a:bodyPr wrap="square" lIns="0" tIns="0" rIns="0" bIns="0" rtlCol="0" anchor="t"/>
-          <a:lstStyle/>
-          <a:p>
-            <a:pPr indent="0" marL="0">
-              <a:lnSpc>
-                <a:spcPct val="135000"/>
-              </a:lnSpc>
-              <a:buNone/>
-            </a:pPr>
-            <a:r>
-              <a:rPr lang="en-US" sz="1050" dirty="0">
-                <a:solidFill>
-                  <a:srgbClr val="6F6A5C"/>
-                </a:solidFill>
-                <a:latin typeface="Arial" pitchFamily="34" charset="0"/>
-                <a:ea typeface="Arial" pitchFamily="34" charset="-122"/>
-                <a:cs typeface="Arial" pitchFamily="34" charset="-120"/>
-              </a:rPr>
-              <a:t>Een halfuur om de doelgroep verder aan te scherpen op wat in de pilot het beste werkte: draaiende webshop, lopende advertenties en budget.</a:t>
-            </a:r>
-            <a:endParaRPr lang="en-US" sz="1050" dirty="0"/>
-          </a:p>
-        </p:txBody>
-      </p:sp>
-      <p:sp>
-        <p:nvSpPr>
-          <p:cNvPr id="12" name="Shape 9"/>
-          <p:cNvSpPr/>
-          <p:nvPr/>
-        </p:nvSpPr>
-        <p:spPr>
-          <a:xfrm>
-            <a:off x="6184885" y="2793993"/>
-            <a:ext cx="5397487" cy="1530346"/>
-          </a:xfrm>
-          <a:prstGeom prst="roundRect">
-            <a:avLst>
-              <a:gd name="adj" fmla="val 6639"/>
-            </a:avLst>
-          </a:prstGeom>
-          <a:solidFill>
-            <a:srgbClr val="F8F4EB"/>
-          </a:solidFill>
-          <a:ln/>
-        </p:spPr>
-      </p:sp>
-      <p:sp>
-        <p:nvSpPr>
-          <p:cNvPr id="13" name="Shape 10"/>
-          <p:cNvSpPr/>
-          <p:nvPr/>
-        </p:nvSpPr>
-        <p:spPr>
-          <a:xfrm>
-            <a:off x="6515084" y="3098792"/>
-            <a:ext cx="380999" cy="380999"/>
-          </a:xfrm>
-          <a:prstGeom prst="roundRect">
-            <a:avLst>
-              <a:gd name="adj" fmla="val 23333"/>
-            </a:avLst>
-          </a:prstGeom>
-          <a:solidFill>
-            <a:srgbClr val="DDEBF3"/>
-          </a:solidFill>
-          <a:ln/>
-        </p:spPr>
+              <a:rPr lang="en-US" sz="900" b="1" dirty="0">
+                <a:solidFill>
+                  <a:srgbClr val="0D1420"/>
+                </a:solidFill>
+                <a:latin typeface="Arial" pitchFamily="34" charset="0"/>
+                <a:ea typeface="Arial" pitchFamily="34" charset="-122"/>
+                <a:cs typeface="Arial" pitchFamily="34" charset="-120"/>
+              </a:rPr>
+              <a:t>Vooraf gefactureerd per werkperiode</a:t>
+            </a:r>
+            <a:endParaRPr lang="en-US" sz="900" dirty="0"/>
+          </a:p>
+        </p:txBody>
       </p:sp>
       <p:pic>
         <p:nvPicPr>
-          <p:cNvPr id="14" name="Image 1" descr="preencoded.png">    </p:cNvPr>
+          <p:cNvPr id="34" name="Image 1" descr="preencoded.png">    </p:cNvPr>
           <p:cNvPicPr>
             <a:picLocks noChangeAspect="1"/>
           </p:cNvPicPr>
@@ -3343,8 +4243,8 @@
         </p:blipFill>
         <p:spPr>
           <a:xfrm>
-            <a:off x="6610333" y="3194042"/>
-            <a:ext cx="190500" cy="190500"/>
+            <a:off x="7340582" y="5276837"/>
+            <a:ext cx="127000" cy="127000"/>
           </a:xfrm>
           <a:prstGeom prst="rect">
             <a:avLst/>
@@ -3353,14 +4253,14 @@
       </p:pic>
       <p:sp>
         <p:nvSpPr>
-          <p:cNvPr id="15" name="Text 11"/>
-          <p:cNvSpPr txBox="1"/>
-          <p:nvPr/>
-        </p:nvSpPr>
-        <p:spPr>
-          <a:xfrm>
-            <a:off x="7124682" y="3073392"/>
-            <a:ext cx="4127490" cy="279399"/>
+          <p:cNvPr id="35" name="Text 31"/>
+          <p:cNvSpPr txBox="1"/>
+          <p:nvPr/>
+        </p:nvSpPr>
+        <p:spPr>
+          <a:xfrm>
+            <a:off x="7543781" y="5245087"/>
+            <a:ext cx="3555991" cy="215899"/>
           </a:xfrm>
           <a:prstGeom prst="rect">
             <a:avLst/>
@@ -3376,109 +4276,23 @@
               <a:buNone/>
             </a:pPr>
             <a:r>
-              <a:rPr lang="en-US" sz="1450" b="1" dirty="0">
-                <a:solidFill>
-                  <a:srgbClr val="1C2230"/>
-                </a:solidFill>
-                <a:latin typeface="Arial" pitchFamily="34" charset="0"/>
-                <a:ea typeface="Arial" pitchFamily="34" charset="-122"/>
-                <a:cs typeface="Arial" pitchFamily="34" charset="-120"/>
-              </a:rPr>
-              <a:t>Uitsluitlijst</a:t>
-            </a:r>
-            <a:endParaRPr lang="en-US" sz="1450" dirty="0"/>
-          </a:p>
-        </p:txBody>
-      </p:sp>
-      <p:sp>
-        <p:nvSpPr>
-          <p:cNvPr id="16" name="Text 12"/>
-          <p:cNvSpPr txBox="1"/>
-          <p:nvPr/>
-        </p:nvSpPr>
-        <p:spPr>
-          <a:xfrm>
-            <a:off x="7124682" y="3403591"/>
-            <a:ext cx="4063990" cy="698498"/>
-          </a:xfrm>
-          <a:prstGeom prst="rect">
-            <a:avLst/>
-          </a:prstGeom>
-          <a:noFill/>
-          <a:ln/>
-        </p:spPr>
-        <p:txBody>
-          <a:bodyPr wrap="square" lIns="0" tIns="0" rIns="0" bIns="0" rtlCol="0" anchor="t"/>
-          <a:lstStyle/>
-          <a:p>
-            <a:pPr indent="0" marL="0">
-              <a:lnSpc>
-                <a:spcPct val="135000"/>
-              </a:lnSpc>
-              <a:buNone/>
-            </a:pPr>
-            <a:r>
-              <a:rPr lang="en-US" sz="1050" dirty="0">
-                <a:solidFill>
-                  <a:srgbClr val="6F6A5C"/>
-                </a:solidFill>
-                <a:latin typeface="Arial" pitchFamily="34" charset="0"/>
-                <a:ea typeface="Arial" pitchFamily="34" charset="-122"/>
-                <a:cs typeface="Arial" pitchFamily="34" charset="-120"/>
-              </a:rPr>
-              <a:t>Bedrijven die al klant zijn of waar Jaap zelf al in gesprek is.</a:t>
-            </a:r>
-            <a:endParaRPr lang="en-US" sz="1050" dirty="0"/>
-          </a:p>
-        </p:txBody>
-      </p:sp>
-      <p:sp>
-        <p:nvSpPr>
-          <p:cNvPr id="17" name="Shape 13"/>
-          <p:cNvSpPr/>
-          <p:nvPr/>
-        </p:nvSpPr>
-        <p:spPr>
-          <a:xfrm>
-            <a:off x="609598" y="4502139"/>
-            <a:ext cx="5397487" cy="1530346"/>
-          </a:xfrm>
-          <a:prstGeom prst="roundRect">
-            <a:avLst>
-              <a:gd name="adj" fmla="val 6639"/>
-            </a:avLst>
-          </a:prstGeom>
-          <a:solidFill>
-            <a:srgbClr val="F8F4EB"/>
-          </a:solidFill>
-          <a:ln/>
-        </p:spPr>
-      </p:sp>
-      <p:sp>
-        <p:nvSpPr>
-          <p:cNvPr id="18" name="Shape 14"/>
-          <p:cNvSpPr/>
-          <p:nvPr/>
-        </p:nvSpPr>
-        <p:spPr>
-          <a:xfrm>
-            <a:off x="939798" y="4806938"/>
-            <a:ext cx="380999" cy="380999"/>
-          </a:xfrm>
-          <a:prstGeom prst="roundRect">
-            <a:avLst>
-              <a:gd name="adj" fmla="val 23333"/>
-            </a:avLst>
-          </a:prstGeom>
-          <a:solidFill>
-            <a:srgbClr val="DDEBF3"/>
-          </a:solidFill>
-          <a:ln/>
-        </p:spPr>
+              <a:rPr lang="en-US" sz="900" b="1" dirty="0">
+                <a:solidFill>
+                  <a:srgbClr val="0D1420"/>
+                </a:solidFill>
+                <a:latin typeface="Arial" pitchFamily="34" charset="0"/>
+                <a:ea typeface="Arial" pitchFamily="34" charset="-122"/>
+                <a:cs typeface="Arial" pitchFamily="34" charset="-120"/>
+              </a:rPr>
+              <a:t>Geen kosten per afspraak</a:t>
+            </a:r>
+            <a:endParaRPr lang="en-US" sz="900" dirty="0"/>
+          </a:p>
+        </p:txBody>
       </p:sp>
       <p:pic>
         <p:nvPicPr>
-          <p:cNvPr id="19" name="Image 2" descr="preencoded.png">    </p:cNvPr>
+          <p:cNvPr id="36" name="Image 2" descr="preencoded.png">    </p:cNvPr>
           <p:cNvPicPr>
             <a:picLocks noChangeAspect="1"/>
           </p:cNvPicPr>
@@ -3492,8 +4306,8 @@
         </p:blipFill>
         <p:spPr>
           <a:xfrm>
-            <a:off x="1035047" y="4902188"/>
-            <a:ext cx="190500" cy="190500"/>
+            <a:off x="3530591" y="5530836"/>
+            <a:ext cx="127000" cy="127000"/>
           </a:xfrm>
           <a:prstGeom prst="rect">
             <a:avLst/>
@@ -3502,14 +4316,14 @@
       </p:pic>
       <p:sp>
         <p:nvSpPr>
-          <p:cNvPr id="20" name="Text 15"/>
-          <p:cNvSpPr txBox="1"/>
-          <p:nvPr/>
-        </p:nvSpPr>
-        <p:spPr>
-          <a:xfrm>
-            <a:off x="1549396" y="4781538"/>
-            <a:ext cx="4127490" cy="279399"/>
+          <p:cNvPr id="37" name="Text 32"/>
+          <p:cNvSpPr txBox="1"/>
+          <p:nvPr/>
+        </p:nvSpPr>
+        <p:spPr>
+          <a:xfrm>
+            <a:off x="3733791" y="5499086"/>
+            <a:ext cx="3555991" cy="215899"/>
           </a:xfrm>
           <a:prstGeom prst="rect">
             <a:avLst/>
@@ -3525,109 +4339,23 @@
               <a:buNone/>
             </a:pPr>
             <a:r>
-              <a:rPr lang="en-US" sz="1450" b="1" dirty="0">
-                <a:solidFill>
-                  <a:srgbClr val="1C2230"/>
-                </a:solidFill>
-                <a:latin typeface="Arial" pitchFamily="34" charset="0"/>
-                <a:ea typeface="Arial" pitchFamily="34" charset="-122"/>
-                <a:cs typeface="Arial" pitchFamily="34" charset="-120"/>
-              </a:rPr>
-              <a:t>Terugkoppeling op afspraken</a:t>
-            </a:r>
-            <a:endParaRPr lang="en-US" sz="1450" dirty="0"/>
-          </a:p>
-        </p:txBody>
-      </p:sp>
-      <p:sp>
-        <p:nvSpPr>
-          <p:cNvPr id="21" name="Text 16"/>
-          <p:cNvSpPr txBox="1"/>
-          <p:nvPr/>
-        </p:nvSpPr>
-        <p:spPr>
-          <a:xfrm>
-            <a:off x="1549396" y="5111737"/>
-            <a:ext cx="4063990" cy="698498"/>
-          </a:xfrm>
-          <a:prstGeom prst="rect">
-            <a:avLst/>
-          </a:prstGeom>
-          <a:noFill/>
-          <a:ln/>
-        </p:spPr>
-        <p:txBody>
-          <a:bodyPr wrap="square" lIns="0" tIns="0" rIns="0" bIns="0" rtlCol="0" anchor="t"/>
-          <a:lstStyle/>
-          <a:p>
-            <a:pPr indent="0" marL="0">
-              <a:lnSpc>
-                <a:spcPct val="135000"/>
-              </a:lnSpc>
-              <a:buNone/>
-            </a:pPr>
-            <a:r>
-              <a:rPr lang="en-US" sz="1050" dirty="0">
-                <a:solidFill>
-                  <a:srgbClr val="6F6A5C"/>
-                </a:solidFill>
-                <a:latin typeface="Arial" pitchFamily="34" charset="0"/>
-                <a:ea typeface="Arial" pitchFamily="34" charset="-122"/>
-                <a:cs typeface="Arial" pitchFamily="34" charset="-120"/>
-              </a:rPr>
-              <a:t>Kort laten weten hoe een afspraak verliep, zodat we de kwalificatie blijven bijstellen.</a:t>
-            </a:r>
-            <a:endParaRPr lang="en-US" sz="1050" dirty="0"/>
-          </a:p>
-        </p:txBody>
-      </p:sp>
-      <p:sp>
-        <p:nvSpPr>
-          <p:cNvPr id="22" name="Shape 17"/>
-          <p:cNvSpPr/>
-          <p:nvPr/>
-        </p:nvSpPr>
-        <p:spPr>
-          <a:xfrm>
-            <a:off x="6184885" y="4502139"/>
-            <a:ext cx="5397487" cy="1530346"/>
-          </a:xfrm>
-          <a:prstGeom prst="roundRect">
-            <a:avLst>
-              <a:gd name="adj" fmla="val 6639"/>
-            </a:avLst>
-          </a:prstGeom>
-          <a:solidFill>
-            <a:srgbClr val="F8F4EB"/>
-          </a:solidFill>
-          <a:ln/>
-        </p:spPr>
-      </p:sp>
-      <p:sp>
-        <p:nvSpPr>
-          <p:cNvPr id="23" name="Shape 18"/>
-          <p:cNvSpPr/>
-          <p:nvPr/>
-        </p:nvSpPr>
-        <p:spPr>
-          <a:xfrm>
-            <a:off x="6515084" y="4806938"/>
-            <a:ext cx="380999" cy="380999"/>
-          </a:xfrm>
-          <a:prstGeom prst="roundRect">
-            <a:avLst>
-              <a:gd name="adj" fmla="val 23333"/>
-            </a:avLst>
-          </a:prstGeom>
-          <a:solidFill>
-            <a:srgbClr val="DDEBF3"/>
-          </a:solidFill>
-          <a:ln/>
-        </p:spPr>
+              <a:rPr lang="en-US" sz="900" b="1" dirty="0">
+                <a:solidFill>
+                  <a:srgbClr val="0D1420"/>
+                </a:solidFill>
+                <a:latin typeface="Arial" pitchFamily="34" charset="0"/>
+                <a:ea typeface="Arial" pitchFamily="34" charset="-122"/>
+                <a:cs typeface="Arial" pitchFamily="34" charset="-120"/>
+              </a:rPr>
+              <a:t>Target van 2 afspraken per beldag</a:t>
+            </a:r>
+            <a:endParaRPr lang="en-US" sz="900" dirty="0"/>
+          </a:p>
+        </p:txBody>
       </p:sp>
       <p:pic>
         <p:nvPicPr>
-          <p:cNvPr id="24" name="Image 3" descr="preencoded.png">    </p:cNvPr>
+          <p:cNvPr id="38" name="Image 3" descr="preencoded.png">    </p:cNvPr>
           <p:cNvPicPr>
             <a:picLocks noChangeAspect="1"/>
           </p:cNvPicPr>
@@ -3641,8 +4369,8 @@
         </p:blipFill>
         <p:spPr>
           <a:xfrm>
-            <a:off x="6610333" y="4902188"/>
-            <a:ext cx="190500" cy="190500"/>
+            <a:off x="7340582" y="5530836"/>
+            <a:ext cx="127000" cy="127000"/>
           </a:xfrm>
           <a:prstGeom prst="rect">
             <a:avLst/>
@@ -3651,14 +4379,14 @@
       </p:pic>
       <p:sp>
         <p:nvSpPr>
-          <p:cNvPr id="25" name="Text 19"/>
-          <p:cNvSpPr txBox="1"/>
-          <p:nvPr/>
-        </p:nvSpPr>
-        <p:spPr>
-          <a:xfrm>
-            <a:off x="7124682" y="4781538"/>
-            <a:ext cx="4127490" cy="279399"/>
+          <p:cNvPr id="39" name="Text 33"/>
+          <p:cNvSpPr txBox="1"/>
+          <p:nvPr/>
+        </p:nvSpPr>
+        <p:spPr>
+          <a:xfrm>
+            <a:off x="7543781" y="5499086"/>
+            <a:ext cx="3555991" cy="215899"/>
           </a:xfrm>
           <a:prstGeom prst="rect">
             <a:avLst/>
@@ -3674,59 +4402,143 @@
               <a:buNone/>
             </a:pPr>
             <a:r>
-              <a:rPr lang="en-US" sz="1450" b="1" dirty="0">
-                <a:solidFill>
-                  <a:srgbClr val="1C2230"/>
-                </a:solidFill>
-                <a:latin typeface="Arial" pitchFamily="34" charset="0"/>
-                <a:ea typeface="Arial" pitchFamily="34" charset="-122"/>
-                <a:cs typeface="Arial" pitchFamily="34" charset="-120"/>
-              </a:rPr>
-              <a:t>Opvolging van afspraken</a:t>
-            </a:r>
-            <a:endParaRPr lang="en-US" sz="1450" dirty="0"/>
-          </a:p>
-        </p:txBody>
-      </p:sp>
-      <p:sp>
-        <p:nvSpPr>
-          <p:cNvPr id="26" name="Text 20"/>
-          <p:cNvSpPr txBox="1"/>
-          <p:nvPr/>
-        </p:nvSpPr>
-        <p:spPr>
-          <a:xfrm>
-            <a:off x="7124682" y="5111737"/>
-            <a:ext cx="4063990" cy="698498"/>
-          </a:xfrm>
-          <a:prstGeom prst="rect">
-            <a:avLst/>
-          </a:prstGeom>
-          <a:noFill/>
-          <a:ln/>
-        </p:spPr>
-        <p:txBody>
-          <a:bodyPr wrap="square" lIns="0" tIns="0" rIns="0" bIns="0" rtlCol="0" anchor="t"/>
+              <a:rPr lang="en-US" sz="900" b="1" dirty="0">
+                <a:solidFill>
+                  <a:srgbClr val="0D1420"/>
+                </a:solidFill>
+                <a:latin typeface="Arial" pitchFamily="34" charset="0"/>
+                <a:ea typeface="Arial" pitchFamily="34" charset="-122"/>
+                <a:cs typeface="Arial" pitchFamily="34" charset="-120"/>
+              </a:rPr>
+              <a:t>Inhaaldag als we eronder blijven</a:t>
+            </a:r>
+            <a:endParaRPr lang="en-US" sz="900" dirty="0"/>
+          </a:p>
+        </p:txBody>
+      </p:sp>
+      <p:pic>
+        <p:nvPicPr>
+          <p:cNvPr id="40" name="Image 4" descr="preencoded.png">    </p:cNvPr>
+          <p:cNvPicPr>
+            <a:picLocks noChangeAspect="1"/>
+          </p:cNvPicPr>
+          <p:nvPr/>
+        </p:nvPicPr>
+        <p:blipFill>
+          <a:blip r:embed="rId5"/>
+          <a:stretch>
+            <a:fillRect/>
+          </a:stretch>
+        </p:blipFill>
+        <p:spPr>
+          <a:xfrm>
+            <a:off x="3530591" y="5784836"/>
+            <a:ext cx="127000" cy="127000"/>
+          </a:xfrm>
+          <a:prstGeom prst="rect">
+            <a:avLst/>
+          </a:prstGeom>
+        </p:spPr>
+      </p:pic>
+      <p:sp>
+        <p:nvSpPr>
+          <p:cNvPr id="41" name="Text 34"/>
+          <p:cNvSpPr txBox="1"/>
+          <p:nvPr/>
+        </p:nvSpPr>
+        <p:spPr>
+          <a:xfrm>
+            <a:off x="3733791" y="5753086"/>
+            <a:ext cx="3555991" cy="215899"/>
+          </a:xfrm>
+          <a:prstGeom prst="rect">
+            <a:avLst/>
+          </a:prstGeom>
+          <a:noFill/>
+          <a:ln/>
+        </p:spPr>
+        <p:txBody>
+          <a:bodyPr wrap="square" lIns="0" tIns="0" rIns="0" bIns="0" rtlCol="0" anchor="ctr"/>
           <a:lstStyle/>
           <a:p>
             <a:pPr indent="0" marL="0">
-              <a:lnSpc>
-                <a:spcPct val="135000"/>
-              </a:lnSpc>
-              <a:buNone/>
-            </a:pPr>
-            <a:r>
-              <a:rPr lang="en-US" sz="1050" dirty="0">
-                <a:solidFill>
-                  <a:srgbClr val="6F6A5C"/>
-                </a:solidFill>
-                <a:latin typeface="Arial" pitchFamily="34" charset="0"/>
-                <a:ea typeface="Arial" pitchFamily="34" charset="-122"/>
-                <a:cs typeface="Arial" pitchFamily="34" charset="-120"/>
-              </a:rPr>
-              <a:t>Eén vaste persoon bij GrowOn die de afspraken voert. Tot nu toe is dat Jaap zelf.</a:t>
-            </a:r>
-            <a:endParaRPr lang="en-US" sz="1050" dirty="0"/>
+              <a:buNone/>
+            </a:pPr>
+            <a:r>
+              <a:rPr lang="en-US" sz="900" b="1" dirty="0">
+                <a:solidFill>
+                  <a:srgbClr val="0D1420"/>
+                </a:solidFill>
+                <a:latin typeface="Arial" pitchFamily="34" charset="0"/>
+                <a:ea typeface="Arial" pitchFamily="34" charset="-122"/>
+                <a:cs typeface="Arial" pitchFamily="34" charset="-120"/>
+              </a:rPr>
+              <a:t>Bellijst, belsysteem en nummer inbegrepen</a:t>
+            </a:r>
+            <a:endParaRPr lang="en-US" sz="900" dirty="0"/>
+          </a:p>
+        </p:txBody>
+      </p:sp>
+      <p:pic>
+        <p:nvPicPr>
+          <p:cNvPr id="42" name="Image 5" descr="preencoded.png">    </p:cNvPr>
+          <p:cNvPicPr>
+            <a:picLocks noChangeAspect="1"/>
+          </p:cNvPicPr>
+          <p:nvPr/>
+        </p:nvPicPr>
+        <p:blipFill>
+          <a:blip r:embed="rId6"/>
+          <a:stretch>
+            <a:fillRect/>
+          </a:stretch>
+        </p:blipFill>
+        <p:spPr>
+          <a:xfrm>
+            <a:off x="7340582" y="5784836"/>
+            <a:ext cx="127000" cy="127000"/>
+          </a:xfrm>
+          <a:prstGeom prst="rect">
+            <a:avLst/>
+          </a:prstGeom>
+        </p:spPr>
+      </p:pic>
+      <p:sp>
+        <p:nvSpPr>
+          <p:cNvPr id="43" name="Text 35"/>
+          <p:cNvSpPr txBox="1"/>
+          <p:nvPr/>
+        </p:nvSpPr>
+        <p:spPr>
+          <a:xfrm>
+            <a:off x="7543781" y="5753086"/>
+            <a:ext cx="3555991" cy="215899"/>
+          </a:xfrm>
+          <a:prstGeom prst="rect">
+            <a:avLst/>
+          </a:prstGeom>
+          <a:noFill/>
+          <a:ln/>
+        </p:spPr>
+        <p:txBody>
+          <a:bodyPr wrap="square" lIns="0" tIns="0" rIns="0" bIns="0" rtlCol="0" anchor="ctr"/>
+          <a:lstStyle/>
+          <a:p>
+            <a:pPr indent="0" marL="0">
+              <a:buNone/>
+            </a:pPr>
+            <a:r>
+              <a:rPr lang="en-US" sz="900" b="1" dirty="0">
+                <a:solidFill>
+                  <a:srgbClr val="0D1420"/>
+                </a:solidFill>
+                <a:latin typeface="Arial" pitchFamily="34" charset="0"/>
+                <a:ea typeface="Arial" pitchFamily="34" charset="-122"/>
+                <a:cs typeface="Arial" pitchFamily="34" charset="-120"/>
+              </a:rPr>
+              <a:t>Wekelijkse rapportage</a:t>
+            </a:r>
+            <a:endParaRPr lang="en-US" sz="900" dirty="0"/>
           </a:p>
         </p:txBody>
       </p:sp>
@@ -3887,7 +4699,7 @@
                 <a:ea typeface="Arial" pitchFamily="34" charset="-122"/>
                 <a:cs typeface="Arial" pitchFamily="34" charset="-120"/>
               </a:rPr>
-              <a:t>11 / 12</a:t>
+              <a:t>11 / 14</a:t>
             </a:r>
             <a:endParaRPr lang="en-US" sz="750" dirty="0"/>
           </a:p>
@@ -3926,7 +4738,7 @@
                 <a:ea typeface="Arial" pitchFamily="34" charset="-122"/>
                 <a:cs typeface="Arial" pitchFamily="34" charset="-120"/>
               </a:rPr>
-              <a:t>SPELREGELS</a:t>
+              <a:t>OPSCHALEN</a:t>
             </a:r>
             <a:endParaRPr lang="en-US" sz="950" dirty="0"/>
           </a:p>
@@ -3968,7 +4780,7 @@
                 <a:ea typeface="Arial" pitchFamily="34" charset="-122"/>
                 <a:cs typeface="Arial" pitchFamily="34" charset="-120"/>
               </a:rPr>
-              <a:t>Transparant en zonder </a:t>
+              <a:t>Hetzelfde ritme, of </a:t>
             </a:r>
             <a:pPr algn="l" indent="0" marL="0">
               <a:lnSpc>
@@ -3985,7 +4797,7 @@
                 <a:ea typeface="Georgia" pitchFamily="34" charset="-122"/>
                 <a:cs typeface="Georgia" pitchFamily="34" charset="-120"/>
               </a:rPr>
-              <a:t>kleine lettertjes</a:t>
+              <a:t>twee keer zoveel</a:t>
             </a:r>
             <a:pPr algn="l" indent="0" marL="0">
               <a:lnSpc>
@@ -4016,54 +4828,30 @@
         </p:nvSpPr>
         <p:spPr>
           <a:xfrm>
-            <a:off x="609598" y="2819393"/>
-            <a:ext cx="253999" cy="253999"/>
+            <a:off x="609598" y="2489194"/>
+            <a:ext cx="3555991" cy="2768593"/>
           </a:xfrm>
           <a:prstGeom prst="roundRect">
             <a:avLst>
-              <a:gd name="adj" fmla="val 25000"/>
+              <a:gd name="adj" fmla="val 3670"/>
             </a:avLst>
           </a:prstGeom>
           <a:solidFill>
-            <a:srgbClr val="DDEBF3"/>
+            <a:srgbClr val="F8F4EB"/>
           </a:solidFill>
           <a:ln/>
         </p:spPr>
       </p:sp>
-      <p:pic>
-        <p:nvPicPr>
-          <p:cNvPr id="8" name="Image 0" descr="preencoded.png">    </p:cNvPr>
-          <p:cNvPicPr>
-            <a:picLocks noChangeAspect="1"/>
-          </p:cNvPicPr>
-          <p:nvPr/>
-        </p:nvPicPr>
-        <p:blipFill>
-          <a:blip r:embed="rId1"/>
-          <a:stretch>
-            <a:fillRect/>
-          </a:stretch>
-        </p:blipFill>
-        <p:spPr>
-          <a:xfrm>
-            <a:off x="666748" y="2876543"/>
-            <a:ext cx="139700" cy="139700"/>
-          </a:xfrm>
-          <a:prstGeom prst="rect">
-            <a:avLst/>
-          </a:prstGeom>
-        </p:spPr>
-      </p:pic>
-      <p:sp>
-        <p:nvSpPr>
-          <p:cNvPr id="9" name="Text 6"/>
-          <p:cNvSpPr txBox="1"/>
-          <p:nvPr/>
-        </p:nvSpPr>
-        <p:spPr>
-          <a:xfrm>
-            <a:off x="1015997" y="2793993"/>
-            <a:ext cx="4825988" cy="228599"/>
+      <p:sp>
+        <p:nvSpPr>
+          <p:cNvPr id="8" name="Text 6"/>
+          <p:cNvSpPr txBox="1"/>
+          <p:nvPr/>
+        </p:nvSpPr>
+        <p:spPr>
+          <a:xfrm>
+            <a:off x="825498" y="2743193"/>
+            <a:ext cx="3124192" cy="190500"/>
           </a:xfrm>
           <a:prstGeom prst="rect">
             <a:avLst/>
@@ -4079,48 +4867,87 @@
               <a:buNone/>
             </a:pPr>
             <a:r>
-              <a:rPr lang="en-US" sz="1200" b="1" dirty="0">
-                <a:solidFill>
-                  <a:srgbClr val="1C2230"/>
-                </a:solidFill>
-                <a:latin typeface="Arial" pitchFamily="34" charset="0"/>
-                <a:ea typeface="Arial" pitchFamily="34" charset="-122"/>
-                <a:cs typeface="Arial" pitchFamily="34" charset="-120"/>
-              </a:rPr>
-              <a:t>Werkperiodes van 4 weken</a:t>
-            </a:r>
-            <a:endParaRPr lang="en-US" sz="1200" dirty="0"/>
-          </a:p>
-        </p:txBody>
-      </p:sp>
-      <p:sp>
-        <p:nvSpPr>
-          <p:cNvPr id="10" name="Text 7"/>
-          <p:cNvSpPr txBox="1"/>
-          <p:nvPr/>
-        </p:nvSpPr>
-        <p:spPr>
-          <a:xfrm>
-            <a:off x="1015997" y="3035292"/>
-            <a:ext cx="4825988" cy="355599"/>
-          </a:xfrm>
-          <a:prstGeom prst="rect">
-            <a:avLst/>
-          </a:prstGeom>
-          <a:noFill/>
-          <a:ln/>
-        </p:spPr>
-        <p:txBody>
-          <a:bodyPr wrap="square" lIns="0" tIns="0" rIns="0" bIns="0" rtlCol="0" anchor="t"/>
+              <a:rPr lang="en-US" sz="800" b="1" spc="180" kern="0" dirty="0">
+                <a:solidFill>
+                  <a:srgbClr val="6F6A5C"/>
+                </a:solidFill>
+                <a:latin typeface="Arial" pitchFamily="34" charset="0"/>
+                <a:ea typeface="Arial" pitchFamily="34" charset="-122"/>
+                <a:cs typeface="Arial" pitchFamily="34" charset="-120"/>
+              </a:rPr>
+              <a:t>NU</a:t>
+            </a:r>
+            <a:endParaRPr lang="en-US" sz="800" dirty="0"/>
+          </a:p>
+        </p:txBody>
+      </p:sp>
+      <p:sp>
+        <p:nvSpPr>
+          <p:cNvPr id="9" name="Text 7"/>
+          <p:cNvSpPr txBox="1"/>
+          <p:nvPr/>
+        </p:nvSpPr>
+        <p:spPr>
+          <a:xfrm>
+            <a:off x="825498" y="2959093"/>
+            <a:ext cx="3124192" cy="355599"/>
+          </a:xfrm>
+          <a:prstGeom prst="rect">
+            <a:avLst/>
+          </a:prstGeom>
+          <a:noFill/>
+          <a:ln/>
+        </p:spPr>
+        <p:txBody>
+          <a:bodyPr wrap="square" lIns="0" tIns="0" rIns="0" bIns="0" rtlCol="0" anchor="ctr"/>
           <a:lstStyle/>
           <a:p>
             <a:pPr indent="0" marL="0">
               <a:lnSpc>
-                <a:spcPct val="130000"/>
+                <a:spcPct val="115000"/>
               </a:lnSpc>
               <a:buNone/>
             </a:pPr>
             <a:r>
+              <a:rPr lang="en-US" sz="1250" b="1" dirty="0">
+                <a:solidFill>
+                  <a:srgbClr val="1C2230"/>
+                </a:solidFill>
+                <a:latin typeface="Arial" pitchFamily="34" charset="0"/>
+                <a:ea typeface="Arial" pitchFamily="34" charset="-122"/>
+                <a:cs typeface="Arial" pitchFamily="34" charset="-120"/>
+              </a:rPr>
+              <a:t>€ 1.600 per werkperiode</a:t>
+            </a:r>
+            <a:endParaRPr lang="en-US" sz="1250" dirty="0"/>
+          </a:p>
+        </p:txBody>
+      </p:sp>
+      <p:sp>
+        <p:nvSpPr>
+          <p:cNvPr id="10" name="Text 8"/>
+          <p:cNvSpPr txBox="1"/>
+          <p:nvPr/>
+        </p:nvSpPr>
+        <p:spPr>
+          <a:xfrm>
+            <a:off x="825498" y="3378192"/>
+            <a:ext cx="2578094" cy="350519"/>
+          </a:xfrm>
+          <a:prstGeom prst="rect">
+            <a:avLst/>
+          </a:prstGeom>
+          <a:noFill/>
+          <a:ln/>
+        </p:spPr>
+        <p:txBody>
+          <a:bodyPr wrap="square" lIns="0" tIns="0" rIns="0" bIns="0" rtlCol="0" anchor="ctr"/>
+          <a:lstStyle/>
+          <a:p>
+            <a:pPr indent="0" marL="0">
+              <a:buNone/>
+            </a:pPr>
+            <a:r>
               <a:rPr lang="en-US" sz="950" dirty="0">
                 <a:solidFill>
                   <a:srgbClr val="6F6A5C"/>
@@ -4129,7 +4956,7 @@
                 <a:ea typeface="Arial" pitchFamily="34" charset="-122"/>
                 <a:cs typeface="Arial" pitchFamily="34" charset="-120"/>
               </a:rPr>
-              <a:t>Vooraf gefactureerd, per werkperiode.</a:t>
+              <a:t>Beldagen</a:t>
             </a:r>
             <a:endParaRPr lang="en-US" sz="950" dirty="0"/>
           </a:p>
@@ -4137,149 +4964,61 @@
       </p:sp>
       <p:sp>
         <p:nvSpPr>
-          <p:cNvPr id="11" name="Shape 8"/>
+          <p:cNvPr id="11" name="Text 9"/>
+          <p:cNvSpPr txBox="1"/>
+          <p:nvPr/>
+        </p:nvSpPr>
+        <p:spPr>
+          <a:xfrm>
+            <a:off x="3124192" y="3378192"/>
+            <a:ext cx="825498" cy="350519"/>
+          </a:xfrm>
+          <a:prstGeom prst="rect">
+            <a:avLst/>
+          </a:prstGeom>
+          <a:noFill/>
+          <a:ln/>
+        </p:spPr>
+        <p:txBody>
+          <a:bodyPr wrap="square" lIns="0" tIns="0" rIns="0" bIns="0" rtlCol="0" anchor="ctr"/>
+          <a:lstStyle/>
+          <a:p>
+            <a:pPr algn="r" indent="0" marL="0">
+              <a:buNone/>
+            </a:pPr>
+            <a:r>
+              <a:rPr lang="en-US" sz="1150" b="1" dirty="0">
+                <a:solidFill>
+                  <a:srgbClr val="1C2230"/>
+                </a:solidFill>
+                <a:latin typeface="Arial" pitchFamily="34" charset="0"/>
+                <a:ea typeface="Arial" pitchFamily="34" charset="-122"/>
+                <a:cs typeface="Arial" pitchFamily="34" charset="-120"/>
+              </a:rPr>
+              <a:t>± 4</a:t>
+            </a:r>
+            <a:endParaRPr lang="en-US" sz="1150" dirty="0"/>
+          </a:p>
+        </p:txBody>
+      </p:sp>
+      <p:sp>
+        <p:nvSpPr>
+          <p:cNvPr id="12" name="Shape 10"/>
           <p:cNvSpPr/>
           <p:nvPr/>
         </p:nvSpPr>
         <p:spPr>
           <a:xfrm>
-            <a:off x="6349984" y="2819393"/>
-            <a:ext cx="253999" cy="253999"/>
-          </a:xfrm>
-          <a:prstGeom prst="roundRect">
-            <a:avLst>
-              <a:gd name="adj" fmla="val 25000"/>
-            </a:avLst>
-          </a:prstGeom>
-          <a:solidFill>
-            <a:srgbClr val="DDEBF3"/>
-          </a:solidFill>
-          <a:ln/>
-        </p:spPr>
-      </p:sp>
-      <p:pic>
-        <p:nvPicPr>
-          <p:cNvPr id="12" name="Image 1" descr="preencoded.png">    </p:cNvPr>
-          <p:cNvPicPr>
-            <a:picLocks noChangeAspect="1"/>
-          </p:cNvPicPr>
-          <p:nvPr/>
-        </p:nvPicPr>
-        <p:blipFill>
-          <a:blip r:embed="rId2"/>
-          <a:stretch>
-            <a:fillRect/>
-          </a:stretch>
-        </p:blipFill>
-        <p:spPr>
-          <a:xfrm>
-            <a:off x="6407134" y="2876543"/>
-            <a:ext cx="139700" cy="139700"/>
-          </a:xfrm>
-          <a:prstGeom prst="rect">
-            <a:avLst/>
-          </a:prstGeom>
-        </p:spPr>
-      </p:pic>
-      <p:sp>
-        <p:nvSpPr>
-          <p:cNvPr id="13" name="Text 9"/>
-          <p:cNvSpPr txBox="1"/>
-          <p:nvPr/>
-        </p:nvSpPr>
-        <p:spPr>
-          <a:xfrm>
-            <a:off x="6756383" y="2793993"/>
-            <a:ext cx="4825988" cy="228599"/>
-          </a:xfrm>
-          <a:prstGeom prst="rect">
-            <a:avLst/>
-          </a:prstGeom>
-          <a:noFill/>
-          <a:ln/>
-        </p:spPr>
-        <p:txBody>
-          <a:bodyPr wrap="square" lIns="0" tIns="0" rIns="0" bIns="0" rtlCol="0" anchor="ctr"/>
-          <a:lstStyle/>
-          <a:p>
-            <a:pPr indent="0" marL="0">
-              <a:buNone/>
-            </a:pPr>
-            <a:r>
-              <a:rPr lang="en-US" sz="1200" b="1" dirty="0">
-                <a:solidFill>
-                  <a:srgbClr val="1C2230"/>
-                </a:solidFill>
-                <a:latin typeface="Arial" pitchFamily="34" charset="0"/>
-                <a:ea typeface="Arial" pitchFamily="34" charset="-122"/>
-                <a:cs typeface="Arial" pitchFamily="34" charset="-120"/>
-              </a:rPr>
-              <a:t>Maand opzegtermijn</a:t>
-            </a:r>
-            <a:endParaRPr lang="en-US" sz="1200" dirty="0"/>
-          </a:p>
-        </p:txBody>
-      </p:sp>
-      <p:sp>
-        <p:nvSpPr>
-          <p:cNvPr id="14" name="Text 10"/>
-          <p:cNvSpPr txBox="1"/>
-          <p:nvPr/>
-        </p:nvSpPr>
-        <p:spPr>
-          <a:xfrm>
-            <a:off x="6756383" y="3035292"/>
-            <a:ext cx="4825988" cy="355599"/>
-          </a:xfrm>
-          <a:prstGeom prst="rect">
-            <a:avLst/>
-          </a:prstGeom>
-          <a:noFill/>
-          <a:ln/>
-        </p:spPr>
-        <p:txBody>
-          <a:bodyPr wrap="square" lIns="0" tIns="0" rIns="0" bIns="0" rtlCol="0" anchor="t"/>
-          <a:lstStyle/>
-          <a:p>
-            <a:pPr indent="0" marL="0">
-              <a:lnSpc>
-                <a:spcPct val="130000"/>
-              </a:lnSpc>
-              <a:buNone/>
-            </a:pPr>
-            <a:r>
-              <a:rPr lang="en-US" sz="950" dirty="0">
-                <a:solidFill>
-                  <a:srgbClr val="6F6A5C"/>
-                </a:solidFill>
-                <a:latin typeface="Arial" pitchFamily="34" charset="0"/>
-                <a:ea typeface="Arial" pitchFamily="34" charset="-122"/>
-                <a:cs typeface="Arial" pitchFamily="34" charset="-120"/>
-              </a:rPr>
-              <a:t>Vastgelegd, met een maand opzegtermijn. Geen jaarcontract.</a:t>
-            </a:r>
-            <a:endParaRPr lang="en-US" sz="950" dirty="0"/>
-          </a:p>
-        </p:txBody>
-      </p:sp>
-      <p:sp>
-        <p:nvSpPr>
-          <p:cNvPr id="15" name="Shape 11"/>
-          <p:cNvSpPr/>
-          <p:nvPr/>
-        </p:nvSpPr>
-        <p:spPr>
-          <a:xfrm>
-            <a:off x="609598" y="3428991"/>
-            <a:ext cx="5232387" cy="0"/>
+            <a:off x="825498" y="3728711"/>
+            <a:ext cx="3124192" cy="0"/>
           </a:xfrm>
           <a:prstGeom prst="line">
             <a:avLst/>
           </a:prstGeom>
           <a:noFill/>
-          <a:ln w="6350">
+          <a:ln w="9525">
             <a:solidFill>
-              <a:srgbClr val="C9C2B2"/>
+              <a:srgbClr val="D8D2C4"/>
             </a:solidFill>
             <a:prstDash val="solid"/>
           </a:ln>
@@ -4287,149 +5026,100 @@
       </p:sp>
       <p:sp>
         <p:nvSpPr>
-          <p:cNvPr id="16" name="Shape 12"/>
+          <p:cNvPr id="13" name="Text 11"/>
+          <p:cNvSpPr txBox="1"/>
+          <p:nvPr/>
+        </p:nvSpPr>
+        <p:spPr>
+          <a:xfrm>
+            <a:off x="825498" y="3728711"/>
+            <a:ext cx="2578094" cy="350519"/>
+          </a:xfrm>
+          <a:prstGeom prst="rect">
+            <a:avLst/>
+          </a:prstGeom>
+          <a:noFill/>
+          <a:ln/>
+        </p:spPr>
+        <p:txBody>
+          <a:bodyPr wrap="square" lIns="0" tIns="0" rIns="0" bIns="0" rtlCol="0" anchor="ctr"/>
+          <a:lstStyle/>
+          <a:p>
+            <a:pPr indent="0" marL="0">
+              <a:buNone/>
+            </a:pPr>
+            <a:r>
+              <a:rPr lang="en-US" sz="950" dirty="0">
+                <a:solidFill>
+                  <a:srgbClr val="6F6A5C"/>
+                </a:solidFill>
+                <a:latin typeface="Arial" pitchFamily="34" charset="0"/>
+                <a:ea typeface="Arial" pitchFamily="34" charset="-122"/>
+                <a:cs typeface="Arial" pitchFamily="34" charset="-120"/>
+              </a:rPr>
+              <a:t>Uur bellen</a:t>
+            </a:r>
+            <a:endParaRPr lang="en-US" sz="950" dirty="0"/>
+          </a:p>
+        </p:txBody>
+      </p:sp>
+      <p:sp>
+        <p:nvSpPr>
+          <p:cNvPr id="14" name="Text 12"/>
+          <p:cNvSpPr txBox="1"/>
+          <p:nvPr/>
+        </p:nvSpPr>
+        <p:spPr>
+          <a:xfrm>
+            <a:off x="3124192" y="3728711"/>
+            <a:ext cx="825498" cy="350519"/>
+          </a:xfrm>
+          <a:prstGeom prst="rect">
+            <a:avLst/>
+          </a:prstGeom>
+          <a:noFill/>
+          <a:ln/>
+        </p:spPr>
+        <p:txBody>
+          <a:bodyPr wrap="square" lIns="0" tIns="0" rIns="0" bIns="0" rtlCol="0" anchor="ctr"/>
+          <a:lstStyle/>
+          <a:p>
+            <a:pPr algn="r" indent="0" marL="0">
+              <a:buNone/>
+            </a:pPr>
+            <a:r>
+              <a:rPr lang="en-US" sz="1150" b="1" dirty="0">
+                <a:solidFill>
+                  <a:srgbClr val="1C2230"/>
+                </a:solidFill>
+                <a:latin typeface="Arial" pitchFamily="34" charset="0"/>
+                <a:ea typeface="Arial" pitchFamily="34" charset="-122"/>
+                <a:cs typeface="Arial" pitchFamily="34" charset="-120"/>
+              </a:rPr>
+              <a:t>± 24</a:t>
+            </a:r>
+            <a:endParaRPr lang="en-US" sz="1150" dirty="0"/>
+          </a:p>
+        </p:txBody>
+      </p:sp>
+      <p:sp>
+        <p:nvSpPr>
+          <p:cNvPr id="15" name="Shape 13"/>
           <p:cNvSpPr/>
           <p:nvPr/>
         </p:nvSpPr>
         <p:spPr>
           <a:xfrm>
-            <a:off x="609598" y="3530591"/>
-            <a:ext cx="253999" cy="253999"/>
-          </a:xfrm>
-          <a:prstGeom prst="roundRect">
-            <a:avLst>
-              <a:gd name="adj" fmla="val 25000"/>
-            </a:avLst>
-          </a:prstGeom>
-          <a:solidFill>
-            <a:srgbClr val="DDEBF3"/>
-          </a:solidFill>
-          <a:ln/>
-        </p:spPr>
-      </p:sp>
-      <p:pic>
-        <p:nvPicPr>
-          <p:cNvPr id="17" name="Image 2" descr="preencoded.png">    </p:cNvPr>
-          <p:cNvPicPr>
-            <a:picLocks noChangeAspect="1"/>
-          </p:cNvPicPr>
-          <p:nvPr/>
-        </p:nvPicPr>
-        <p:blipFill>
-          <a:blip r:embed="rId3"/>
-          <a:stretch>
-            <a:fillRect/>
-          </a:stretch>
-        </p:blipFill>
-        <p:spPr>
-          <a:xfrm>
-            <a:off x="666748" y="3587741"/>
-            <a:ext cx="139700" cy="139700"/>
-          </a:xfrm>
-          <a:prstGeom prst="rect">
-            <a:avLst/>
-          </a:prstGeom>
-        </p:spPr>
-      </p:pic>
-      <p:sp>
-        <p:nvSpPr>
-          <p:cNvPr id="18" name="Text 13"/>
-          <p:cNvSpPr txBox="1"/>
-          <p:nvPr/>
-        </p:nvSpPr>
-        <p:spPr>
-          <a:xfrm>
-            <a:off x="1015997" y="3505191"/>
-            <a:ext cx="4825988" cy="228599"/>
-          </a:xfrm>
-          <a:prstGeom prst="rect">
-            <a:avLst/>
-          </a:prstGeom>
-          <a:noFill/>
-          <a:ln/>
-        </p:spPr>
-        <p:txBody>
-          <a:bodyPr wrap="square" lIns="0" tIns="0" rIns="0" bIns="0" rtlCol="0" anchor="ctr"/>
-          <a:lstStyle/>
-          <a:p>
-            <a:pPr indent="0" marL="0">
-              <a:buNone/>
-            </a:pPr>
-            <a:r>
-              <a:rPr lang="en-US" sz="1200" b="1" dirty="0">
-                <a:solidFill>
-                  <a:srgbClr val="1C2230"/>
-                </a:solidFill>
-                <a:latin typeface="Arial" pitchFamily="34" charset="0"/>
-                <a:ea typeface="Arial" pitchFamily="34" charset="-122"/>
-                <a:cs typeface="Arial" pitchFamily="34" charset="-120"/>
-              </a:rPr>
-              <a:t>Op- en afschalen</a:t>
-            </a:r>
-            <a:endParaRPr lang="en-US" sz="1200" dirty="0"/>
-          </a:p>
-        </p:txBody>
-      </p:sp>
-      <p:sp>
-        <p:nvSpPr>
-          <p:cNvPr id="19" name="Text 14"/>
-          <p:cNvSpPr txBox="1"/>
-          <p:nvPr/>
-        </p:nvSpPr>
-        <p:spPr>
-          <a:xfrm>
-            <a:off x="1015997" y="3746491"/>
-            <a:ext cx="4825988" cy="355599"/>
-          </a:xfrm>
-          <a:prstGeom prst="rect">
-            <a:avLst/>
-          </a:prstGeom>
-          <a:noFill/>
-          <a:ln/>
-        </p:spPr>
-        <p:txBody>
-          <a:bodyPr wrap="square" lIns="0" tIns="0" rIns="0" bIns="0" rtlCol="0" anchor="t"/>
-          <a:lstStyle/>
-          <a:p>
-            <a:pPr indent="0" marL="0">
-              <a:lnSpc>
-                <a:spcPct val="130000"/>
-              </a:lnSpc>
-              <a:buNone/>
-            </a:pPr>
-            <a:r>
-              <a:rPr lang="en-US" sz="950" dirty="0">
-                <a:solidFill>
-                  <a:srgbClr val="6F6A5C"/>
-                </a:solidFill>
-                <a:latin typeface="Arial" pitchFamily="34" charset="0"/>
-                <a:ea typeface="Arial" pitchFamily="34" charset="-122"/>
-                <a:cs typeface="Arial" pitchFamily="34" charset="-120"/>
-              </a:rPr>
-              <a:t>Per werkperiode bepalen jullie het aantal beldagen, vanaf vier.</a:t>
-            </a:r>
-            <a:endParaRPr lang="en-US" sz="950" dirty="0"/>
-          </a:p>
-        </p:txBody>
-      </p:sp>
-      <p:sp>
-        <p:nvSpPr>
-          <p:cNvPr id="20" name="Shape 15"/>
-          <p:cNvSpPr/>
-          <p:nvPr/>
-        </p:nvSpPr>
-        <p:spPr>
-          <a:xfrm>
-            <a:off x="6349984" y="3428991"/>
-            <a:ext cx="5232387" cy="0"/>
+            <a:off x="825498" y="4079230"/>
+            <a:ext cx="3124192" cy="0"/>
           </a:xfrm>
           <a:prstGeom prst="line">
             <a:avLst/>
           </a:prstGeom>
           <a:noFill/>
-          <a:ln w="6350">
+          <a:ln w="9525">
             <a:solidFill>
-              <a:srgbClr val="C9C2B2"/>
+              <a:srgbClr val="D8D2C4"/>
             </a:solidFill>
             <a:prstDash val="solid"/>
           </a:ln>
@@ -4437,149 +5127,100 @@
       </p:sp>
       <p:sp>
         <p:nvSpPr>
-          <p:cNvPr id="21" name="Shape 16"/>
+          <p:cNvPr id="16" name="Text 14"/>
+          <p:cNvSpPr txBox="1"/>
+          <p:nvPr/>
+        </p:nvSpPr>
+        <p:spPr>
+          <a:xfrm>
+            <a:off x="825498" y="4079230"/>
+            <a:ext cx="2578094" cy="350519"/>
+          </a:xfrm>
+          <a:prstGeom prst="rect">
+            <a:avLst/>
+          </a:prstGeom>
+          <a:noFill/>
+          <a:ln/>
+        </p:spPr>
+        <p:txBody>
+          <a:bodyPr wrap="square" lIns="0" tIns="0" rIns="0" bIns="0" rtlCol="0" anchor="ctr"/>
+          <a:lstStyle/>
+          <a:p>
+            <a:pPr indent="0" marL="0">
+              <a:buNone/>
+            </a:pPr>
+            <a:r>
+              <a:rPr lang="en-US" sz="950" dirty="0">
+                <a:solidFill>
+                  <a:srgbClr val="6F6A5C"/>
+                </a:solidFill>
+                <a:latin typeface="Arial" pitchFamily="34" charset="0"/>
+                <a:ea typeface="Arial" pitchFamily="34" charset="-122"/>
+                <a:cs typeface="Arial" pitchFamily="34" charset="-120"/>
+              </a:rPr>
+              <a:t>Contactpogingen</a:t>
+            </a:r>
+            <a:endParaRPr lang="en-US" sz="950" dirty="0"/>
+          </a:p>
+        </p:txBody>
+      </p:sp>
+      <p:sp>
+        <p:nvSpPr>
+          <p:cNvPr id="17" name="Text 15"/>
+          <p:cNvSpPr txBox="1"/>
+          <p:nvPr/>
+        </p:nvSpPr>
+        <p:spPr>
+          <a:xfrm>
+            <a:off x="3124192" y="4079230"/>
+            <a:ext cx="825498" cy="350519"/>
+          </a:xfrm>
+          <a:prstGeom prst="rect">
+            <a:avLst/>
+          </a:prstGeom>
+          <a:noFill/>
+          <a:ln/>
+        </p:spPr>
+        <p:txBody>
+          <a:bodyPr wrap="square" lIns="0" tIns="0" rIns="0" bIns="0" rtlCol="0" anchor="ctr"/>
+          <a:lstStyle/>
+          <a:p>
+            <a:pPr algn="r" indent="0" marL="0">
+              <a:buNone/>
+            </a:pPr>
+            <a:r>
+              <a:rPr lang="en-US" sz="1150" b="1" dirty="0">
+                <a:solidFill>
+                  <a:srgbClr val="1C2230"/>
+                </a:solidFill>
+                <a:latin typeface="Arial" pitchFamily="34" charset="0"/>
+                <a:ea typeface="Arial" pitchFamily="34" charset="-122"/>
+                <a:cs typeface="Arial" pitchFamily="34" charset="-120"/>
+              </a:rPr>
+              <a:t>± 400</a:t>
+            </a:r>
+            <a:endParaRPr lang="en-US" sz="1150" dirty="0"/>
+          </a:p>
+        </p:txBody>
+      </p:sp>
+      <p:sp>
+        <p:nvSpPr>
+          <p:cNvPr id="18" name="Shape 16"/>
           <p:cNvSpPr/>
           <p:nvPr/>
         </p:nvSpPr>
         <p:spPr>
           <a:xfrm>
-            <a:off x="6349984" y="3530591"/>
-            <a:ext cx="253999" cy="253999"/>
-          </a:xfrm>
-          <a:prstGeom prst="roundRect">
-            <a:avLst>
-              <a:gd name="adj" fmla="val 25000"/>
-            </a:avLst>
-          </a:prstGeom>
-          <a:solidFill>
-            <a:srgbClr val="DDEBF3"/>
-          </a:solidFill>
-          <a:ln/>
-        </p:spPr>
-      </p:sp>
-      <p:pic>
-        <p:nvPicPr>
-          <p:cNvPr id="22" name="Image 3" descr="preencoded.png">    </p:cNvPr>
-          <p:cNvPicPr>
-            <a:picLocks noChangeAspect="1"/>
-          </p:cNvPicPr>
-          <p:nvPr/>
-        </p:nvPicPr>
-        <p:blipFill>
-          <a:blip r:embed="rId4"/>
-          <a:stretch>
-            <a:fillRect/>
-          </a:stretch>
-        </p:blipFill>
-        <p:spPr>
-          <a:xfrm>
-            <a:off x="6407134" y="3587741"/>
-            <a:ext cx="139700" cy="139700"/>
-          </a:xfrm>
-          <a:prstGeom prst="rect">
-            <a:avLst/>
-          </a:prstGeom>
-        </p:spPr>
-      </p:pic>
-      <p:sp>
-        <p:nvSpPr>
-          <p:cNvPr id="23" name="Text 17"/>
-          <p:cNvSpPr txBox="1"/>
-          <p:nvPr/>
-        </p:nvSpPr>
-        <p:spPr>
-          <a:xfrm>
-            <a:off x="6756383" y="3505191"/>
-            <a:ext cx="4825988" cy="228599"/>
-          </a:xfrm>
-          <a:prstGeom prst="rect">
-            <a:avLst/>
-          </a:prstGeom>
-          <a:noFill/>
-          <a:ln/>
-        </p:spPr>
-        <p:txBody>
-          <a:bodyPr wrap="square" lIns="0" tIns="0" rIns="0" bIns="0" rtlCol="0" anchor="ctr"/>
-          <a:lstStyle/>
-          <a:p>
-            <a:pPr indent="0" marL="0">
-              <a:buNone/>
-            </a:pPr>
-            <a:r>
-              <a:rPr lang="en-US" sz="1200" b="1" dirty="0">
-                <a:solidFill>
-                  <a:srgbClr val="1C2230"/>
-                </a:solidFill>
-                <a:latin typeface="Arial" pitchFamily="34" charset="0"/>
-                <a:ea typeface="Arial" pitchFamily="34" charset="-122"/>
-                <a:cs typeface="Arial" pitchFamily="34" charset="-120"/>
-              </a:rPr>
-              <a:t>Geen opstartkosten meer</a:t>
-            </a:r>
-            <a:endParaRPr lang="en-US" sz="1200" dirty="0"/>
-          </a:p>
-        </p:txBody>
-      </p:sp>
-      <p:sp>
-        <p:nvSpPr>
-          <p:cNvPr id="24" name="Text 18"/>
-          <p:cNvSpPr txBox="1"/>
-          <p:nvPr/>
-        </p:nvSpPr>
-        <p:spPr>
-          <a:xfrm>
-            <a:off x="6756383" y="3746491"/>
-            <a:ext cx="4825988" cy="355599"/>
-          </a:xfrm>
-          <a:prstGeom prst="rect">
-            <a:avLst/>
-          </a:prstGeom>
-          <a:noFill/>
-          <a:ln/>
-        </p:spPr>
-        <p:txBody>
-          <a:bodyPr wrap="square" lIns="0" tIns="0" rIns="0" bIns="0" rtlCol="0" anchor="t"/>
-          <a:lstStyle/>
-          <a:p>
-            <a:pPr indent="0" marL="0">
-              <a:lnSpc>
-                <a:spcPct val="130000"/>
-              </a:lnSpc>
-              <a:buNone/>
-            </a:pPr>
-            <a:r>
-              <a:rPr lang="en-US" sz="950" dirty="0">
-                <a:solidFill>
-                  <a:srgbClr val="6F6A5C"/>
-                </a:solidFill>
-                <a:latin typeface="Arial" pitchFamily="34" charset="0"/>
-                <a:ea typeface="Arial" pitchFamily="34" charset="-122"/>
-                <a:cs typeface="Arial" pitchFamily="34" charset="-120"/>
-              </a:rPr>
-              <a:t>De inrichting staat. Die fee is eenmalig geweest.</a:t>
-            </a:r>
-            <a:endParaRPr lang="en-US" sz="950" dirty="0"/>
-          </a:p>
-        </p:txBody>
-      </p:sp>
-      <p:sp>
-        <p:nvSpPr>
-          <p:cNvPr id="25" name="Shape 19"/>
-          <p:cNvSpPr/>
-          <p:nvPr/>
-        </p:nvSpPr>
-        <p:spPr>
-          <a:xfrm>
-            <a:off x="609598" y="4140190"/>
-            <a:ext cx="5232387" cy="0"/>
+            <a:off x="825498" y="4429749"/>
+            <a:ext cx="3124192" cy="0"/>
           </a:xfrm>
           <a:prstGeom prst="line">
             <a:avLst/>
           </a:prstGeom>
           <a:noFill/>
-          <a:ln w="6350">
+          <a:ln w="9525">
             <a:solidFill>
-              <a:srgbClr val="C9C2B2"/>
+              <a:srgbClr val="D8D2C4"/>
             </a:solidFill>
             <a:prstDash val="solid"/>
           </a:ln>
@@ -4587,149 +5228,100 @@
       </p:sp>
       <p:sp>
         <p:nvSpPr>
-          <p:cNvPr id="26" name="Shape 20"/>
+          <p:cNvPr id="19" name="Text 17"/>
+          <p:cNvSpPr txBox="1"/>
+          <p:nvPr/>
+        </p:nvSpPr>
+        <p:spPr>
+          <a:xfrm>
+            <a:off x="825498" y="4429749"/>
+            <a:ext cx="2578094" cy="350519"/>
+          </a:xfrm>
+          <a:prstGeom prst="rect">
+            <a:avLst/>
+          </a:prstGeom>
+          <a:noFill/>
+          <a:ln/>
+        </p:spPr>
+        <p:txBody>
+          <a:bodyPr wrap="square" lIns="0" tIns="0" rIns="0" bIns="0" rtlCol="0" anchor="ctr"/>
+          <a:lstStyle/>
+          <a:p>
+            <a:pPr indent="0" marL="0">
+              <a:buNone/>
+            </a:pPr>
+            <a:r>
+              <a:rPr lang="en-US" sz="950" dirty="0">
+                <a:solidFill>
+                  <a:srgbClr val="6F6A5C"/>
+                </a:solidFill>
+                <a:latin typeface="Arial" pitchFamily="34" charset="0"/>
+                <a:ea typeface="Arial" pitchFamily="34" charset="-122"/>
+                <a:cs typeface="Arial" pitchFamily="34" charset="-120"/>
+              </a:rPr>
+              <a:t>Afspraken</a:t>
+            </a:r>
+            <a:endParaRPr lang="en-US" sz="950" dirty="0"/>
+          </a:p>
+        </p:txBody>
+      </p:sp>
+      <p:sp>
+        <p:nvSpPr>
+          <p:cNvPr id="20" name="Text 18"/>
+          <p:cNvSpPr txBox="1"/>
+          <p:nvPr/>
+        </p:nvSpPr>
+        <p:spPr>
+          <a:xfrm>
+            <a:off x="3124192" y="4429749"/>
+            <a:ext cx="825498" cy="350519"/>
+          </a:xfrm>
+          <a:prstGeom prst="rect">
+            <a:avLst/>
+          </a:prstGeom>
+          <a:noFill/>
+          <a:ln/>
+        </p:spPr>
+        <p:txBody>
+          <a:bodyPr wrap="square" lIns="0" tIns="0" rIns="0" bIns="0" rtlCol="0" anchor="ctr"/>
+          <a:lstStyle/>
+          <a:p>
+            <a:pPr algn="r" indent="0" marL="0">
+              <a:buNone/>
+            </a:pPr>
+            <a:r>
+              <a:rPr lang="en-US" sz="1150" b="1" dirty="0">
+                <a:solidFill>
+                  <a:srgbClr val="1C2230"/>
+                </a:solidFill>
+                <a:latin typeface="Arial" pitchFamily="34" charset="0"/>
+                <a:ea typeface="Arial" pitchFamily="34" charset="-122"/>
+                <a:cs typeface="Arial" pitchFamily="34" charset="-120"/>
+              </a:rPr>
+              <a:t>± 8</a:t>
+            </a:r>
+            <a:endParaRPr lang="en-US" sz="1150" dirty="0"/>
+          </a:p>
+        </p:txBody>
+      </p:sp>
+      <p:sp>
+        <p:nvSpPr>
+          <p:cNvPr id="21" name="Shape 19"/>
           <p:cNvSpPr/>
           <p:nvPr/>
         </p:nvSpPr>
         <p:spPr>
           <a:xfrm>
-            <a:off x="609598" y="4241789"/>
-            <a:ext cx="253999" cy="253999"/>
-          </a:xfrm>
-          <a:prstGeom prst="roundRect">
-            <a:avLst>
-              <a:gd name="adj" fmla="val 25000"/>
-            </a:avLst>
-          </a:prstGeom>
-          <a:solidFill>
-            <a:srgbClr val="DDEBF3"/>
-          </a:solidFill>
-          <a:ln/>
-        </p:spPr>
-      </p:sp>
-      <p:pic>
-        <p:nvPicPr>
-          <p:cNvPr id="27" name="Image 4" descr="preencoded.png">    </p:cNvPr>
-          <p:cNvPicPr>
-            <a:picLocks noChangeAspect="1"/>
-          </p:cNvPicPr>
-          <p:nvPr/>
-        </p:nvPicPr>
-        <p:blipFill>
-          <a:blip r:embed="rId5"/>
-          <a:stretch>
-            <a:fillRect/>
-          </a:stretch>
-        </p:blipFill>
-        <p:spPr>
-          <a:xfrm>
-            <a:off x="666748" y="4298939"/>
-            <a:ext cx="139700" cy="139700"/>
-          </a:xfrm>
-          <a:prstGeom prst="rect">
-            <a:avLst/>
-          </a:prstGeom>
-        </p:spPr>
-      </p:pic>
-      <p:sp>
-        <p:nvSpPr>
-          <p:cNvPr id="28" name="Text 21"/>
-          <p:cNvSpPr txBox="1"/>
-          <p:nvPr/>
-        </p:nvSpPr>
-        <p:spPr>
-          <a:xfrm>
-            <a:off x="1015997" y="4216389"/>
-            <a:ext cx="4825988" cy="228599"/>
-          </a:xfrm>
-          <a:prstGeom prst="rect">
-            <a:avLst/>
-          </a:prstGeom>
-          <a:noFill/>
-          <a:ln/>
-        </p:spPr>
-        <p:txBody>
-          <a:bodyPr wrap="square" lIns="0" tIns="0" rIns="0" bIns="0" rtlCol="0" anchor="ctr"/>
-          <a:lstStyle/>
-          <a:p>
-            <a:pPr indent="0" marL="0">
-              <a:buNone/>
-            </a:pPr>
-            <a:r>
-              <a:rPr lang="en-US" sz="1200" b="1" dirty="0">
-                <a:solidFill>
-                  <a:srgbClr val="1C2230"/>
-                </a:solidFill>
-                <a:latin typeface="Arial" pitchFamily="34" charset="0"/>
-                <a:ea typeface="Arial" pitchFamily="34" charset="-122"/>
-                <a:cs typeface="Arial" pitchFamily="34" charset="-120"/>
-              </a:rPr>
-              <a:t>Bestaande relaties blijven van jullie</a:t>
-            </a:r>
-            <a:endParaRPr lang="en-US" sz="1200" dirty="0"/>
-          </a:p>
-        </p:txBody>
-      </p:sp>
-      <p:sp>
-        <p:nvSpPr>
-          <p:cNvPr id="29" name="Text 22"/>
-          <p:cNvSpPr txBox="1"/>
-          <p:nvPr/>
-        </p:nvSpPr>
-        <p:spPr>
-          <a:xfrm>
-            <a:off x="1015997" y="4457689"/>
-            <a:ext cx="4825988" cy="355599"/>
-          </a:xfrm>
-          <a:prstGeom prst="rect">
-            <a:avLst/>
-          </a:prstGeom>
-          <a:noFill/>
-          <a:ln/>
-        </p:spPr>
-        <p:txBody>
-          <a:bodyPr wrap="square" lIns="0" tIns="0" rIns="0" bIns="0" rtlCol="0" anchor="t"/>
-          <a:lstStyle/>
-          <a:p>
-            <a:pPr indent="0" marL="0">
-              <a:lnSpc>
-                <a:spcPct val="130000"/>
-              </a:lnSpc>
-              <a:buNone/>
-            </a:pPr>
-            <a:r>
-              <a:rPr lang="en-US" sz="950" dirty="0">
-                <a:solidFill>
-                  <a:srgbClr val="6F6A5C"/>
-                </a:solidFill>
-                <a:latin typeface="Arial" pitchFamily="34" charset="0"/>
-                <a:ea typeface="Arial" pitchFamily="34" charset="-122"/>
-                <a:cs typeface="Arial" pitchFamily="34" charset="-120"/>
-              </a:rPr>
-              <a:t>Uitsluitlijst vooraf, die bedrijven benaderen wij niet.</a:t>
-            </a:r>
-            <a:endParaRPr lang="en-US" sz="950" dirty="0"/>
-          </a:p>
-        </p:txBody>
-      </p:sp>
-      <p:sp>
-        <p:nvSpPr>
-          <p:cNvPr id="30" name="Shape 23"/>
-          <p:cNvSpPr/>
-          <p:nvPr/>
-        </p:nvSpPr>
-        <p:spPr>
-          <a:xfrm>
-            <a:off x="6349984" y="4140190"/>
-            <a:ext cx="5232387" cy="0"/>
+            <a:off x="825498" y="4780268"/>
+            <a:ext cx="3124192" cy="0"/>
           </a:xfrm>
           <a:prstGeom prst="line">
             <a:avLst/>
           </a:prstGeom>
           <a:noFill/>
-          <a:ln w="6350">
+          <a:ln w="9525">
             <a:solidFill>
-              <a:srgbClr val="C9C2B2"/>
+              <a:srgbClr val="D8D2C4"/>
             </a:solidFill>
             <a:prstDash val="solid"/>
           </a:ln>
@@ -4737,60 +5329,114 @@
       </p:sp>
       <p:sp>
         <p:nvSpPr>
-          <p:cNvPr id="31" name="Shape 24"/>
+          <p:cNvPr id="22" name="Text 20"/>
+          <p:cNvSpPr txBox="1"/>
+          <p:nvPr/>
+        </p:nvSpPr>
+        <p:spPr>
+          <a:xfrm>
+            <a:off x="825498" y="4780268"/>
+            <a:ext cx="2578094" cy="350519"/>
+          </a:xfrm>
+          <a:prstGeom prst="rect">
+            <a:avLst/>
+          </a:prstGeom>
+          <a:noFill/>
+          <a:ln/>
+        </p:spPr>
+        <p:txBody>
+          <a:bodyPr wrap="square" lIns="0" tIns="0" rIns="0" bIns="0" rtlCol="0" anchor="ctr"/>
+          <a:lstStyle/>
+          <a:p>
+            <a:pPr indent="0" marL="0">
+              <a:buNone/>
+            </a:pPr>
+            <a:r>
+              <a:rPr lang="en-US" sz="950" dirty="0">
+                <a:solidFill>
+                  <a:srgbClr val="6F6A5C"/>
+                </a:solidFill>
+                <a:latin typeface="Arial" pitchFamily="34" charset="0"/>
+                <a:ea typeface="Arial" pitchFamily="34" charset="-122"/>
+                <a:cs typeface="Arial" pitchFamily="34" charset="-120"/>
+              </a:rPr>
+              <a:t>Prijs per afspraak</a:t>
+            </a:r>
+            <a:endParaRPr lang="en-US" sz="950" dirty="0"/>
+          </a:p>
+        </p:txBody>
+      </p:sp>
+      <p:sp>
+        <p:nvSpPr>
+          <p:cNvPr id="23" name="Text 21"/>
+          <p:cNvSpPr txBox="1"/>
+          <p:nvPr/>
+        </p:nvSpPr>
+        <p:spPr>
+          <a:xfrm>
+            <a:off x="3124192" y="4780268"/>
+            <a:ext cx="825498" cy="350519"/>
+          </a:xfrm>
+          <a:prstGeom prst="rect">
+            <a:avLst/>
+          </a:prstGeom>
+          <a:noFill/>
+          <a:ln/>
+        </p:spPr>
+        <p:txBody>
+          <a:bodyPr wrap="square" lIns="0" tIns="0" rIns="0" bIns="0" rtlCol="0" anchor="ctr"/>
+          <a:lstStyle/>
+          <a:p>
+            <a:pPr algn="r" indent="0" marL="0">
+              <a:buNone/>
+            </a:pPr>
+            <a:r>
+              <a:rPr lang="en-US" sz="1150" b="1" dirty="0">
+                <a:solidFill>
+                  <a:srgbClr val="1C2230"/>
+                </a:solidFill>
+                <a:latin typeface="Arial" pitchFamily="34" charset="0"/>
+                <a:ea typeface="Arial" pitchFamily="34" charset="-122"/>
+                <a:cs typeface="Arial" pitchFamily="34" charset="-120"/>
+              </a:rPr>
+              <a:t>± € 200</a:t>
+            </a:r>
+            <a:endParaRPr lang="en-US" sz="1150" dirty="0"/>
+          </a:p>
+        </p:txBody>
+      </p:sp>
+      <p:sp>
+        <p:nvSpPr>
+          <p:cNvPr id="24" name="Shape 22"/>
           <p:cNvSpPr/>
           <p:nvPr/>
         </p:nvSpPr>
         <p:spPr>
           <a:xfrm>
-            <a:off x="6349984" y="4241789"/>
-            <a:ext cx="253999" cy="253999"/>
+            <a:off x="4317989" y="2489194"/>
+            <a:ext cx="3555991" cy="2768593"/>
           </a:xfrm>
           <a:prstGeom prst="roundRect">
             <a:avLst>
-              <a:gd name="adj" fmla="val 25000"/>
+              <a:gd name="adj" fmla="val 3670"/>
             </a:avLst>
           </a:prstGeom>
           <a:solidFill>
-            <a:srgbClr val="DDEBF3"/>
+            <a:srgbClr val="F8F4EB"/>
           </a:solidFill>
           <a:ln/>
         </p:spPr>
       </p:sp>
-      <p:pic>
-        <p:nvPicPr>
-          <p:cNvPr id="32" name="Image 5" descr="preencoded.png">    </p:cNvPr>
-          <p:cNvPicPr>
-            <a:picLocks noChangeAspect="1"/>
-          </p:cNvPicPr>
-          <p:nvPr/>
-        </p:nvPicPr>
-        <p:blipFill>
-          <a:blip r:embed="rId6"/>
-          <a:stretch>
-            <a:fillRect/>
-          </a:stretch>
-        </p:blipFill>
-        <p:spPr>
-          <a:xfrm>
-            <a:off x="6407134" y="4298939"/>
-            <a:ext cx="139700" cy="139700"/>
-          </a:xfrm>
-          <a:prstGeom prst="rect">
-            <a:avLst/>
-          </a:prstGeom>
-        </p:spPr>
-      </p:pic>
-      <p:sp>
-        <p:nvSpPr>
-          <p:cNvPr id="33" name="Text 25"/>
-          <p:cNvSpPr txBox="1"/>
-          <p:nvPr/>
-        </p:nvSpPr>
-        <p:spPr>
-          <a:xfrm>
-            <a:off x="6756383" y="4216389"/>
-            <a:ext cx="4825988" cy="228599"/>
+      <p:sp>
+        <p:nvSpPr>
+          <p:cNvPr id="25" name="Text 23"/>
+          <p:cNvSpPr txBox="1"/>
+          <p:nvPr/>
+        </p:nvSpPr>
+        <p:spPr>
+          <a:xfrm>
+            <a:off x="4533889" y="2743193"/>
+            <a:ext cx="3124192" cy="190500"/>
           </a:xfrm>
           <a:prstGeom prst="rect">
             <a:avLst/>
@@ -4806,48 +5452,87 @@
               <a:buNone/>
             </a:pPr>
             <a:r>
-              <a:rPr lang="en-US" sz="1200" b="1" dirty="0">
-                <a:solidFill>
-                  <a:srgbClr val="1C2230"/>
-                </a:solidFill>
-                <a:latin typeface="Arial" pitchFamily="34" charset="0"/>
-                <a:ea typeface="Arial" pitchFamily="34" charset="-122"/>
-                <a:cs typeface="Arial" pitchFamily="34" charset="-120"/>
-              </a:rPr>
-              <a:t>Wekelijkse rapportage</a:t>
-            </a:r>
-            <a:endParaRPr lang="en-US" sz="1200" dirty="0"/>
-          </a:p>
-        </p:txBody>
-      </p:sp>
-      <p:sp>
-        <p:nvSpPr>
-          <p:cNvPr id="34" name="Text 26"/>
-          <p:cNvSpPr txBox="1"/>
-          <p:nvPr/>
-        </p:nvSpPr>
-        <p:spPr>
-          <a:xfrm>
-            <a:off x="6756383" y="4457689"/>
-            <a:ext cx="4825988" cy="355599"/>
-          </a:xfrm>
-          <a:prstGeom prst="rect">
-            <a:avLst/>
-          </a:prstGeom>
-          <a:noFill/>
-          <a:ln/>
-        </p:spPr>
-        <p:txBody>
-          <a:bodyPr wrap="square" lIns="0" tIns="0" rIns="0" bIns="0" rtlCol="0" anchor="t"/>
+              <a:rPr lang="en-US" sz="800" b="1" spc="180" kern="0" dirty="0">
+                <a:solidFill>
+                  <a:srgbClr val="6F6A5C"/>
+                </a:solidFill>
+                <a:latin typeface="Arial" pitchFamily="34" charset="0"/>
+                <a:ea typeface="Arial" pitchFamily="34" charset="-122"/>
+                <a:cs typeface="Arial" pitchFamily="34" charset="-120"/>
+              </a:rPr>
+              <a:t>VOORSTEL</a:t>
+            </a:r>
+            <a:endParaRPr lang="en-US" sz="800" dirty="0"/>
+          </a:p>
+        </p:txBody>
+      </p:sp>
+      <p:sp>
+        <p:nvSpPr>
+          <p:cNvPr id="26" name="Text 24"/>
+          <p:cNvSpPr txBox="1"/>
+          <p:nvPr/>
+        </p:nvSpPr>
+        <p:spPr>
+          <a:xfrm>
+            <a:off x="4533889" y="2959093"/>
+            <a:ext cx="3124192" cy="355599"/>
+          </a:xfrm>
+          <a:prstGeom prst="rect">
+            <a:avLst/>
+          </a:prstGeom>
+          <a:noFill/>
+          <a:ln/>
+        </p:spPr>
+        <p:txBody>
+          <a:bodyPr wrap="square" lIns="0" tIns="0" rIns="0" bIns="0" rtlCol="0" anchor="ctr"/>
           <a:lstStyle/>
           <a:p>
             <a:pPr indent="0" marL="0">
               <a:lnSpc>
-                <a:spcPct val="130000"/>
+                <a:spcPct val="115000"/>
               </a:lnSpc>
               <a:buNone/>
             </a:pPr>
             <a:r>
+              <a:rPr lang="en-US" sz="1250" b="1" dirty="0">
+                <a:solidFill>
+                  <a:srgbClr val="1C2230"/>
+                </a:solidFill>
+                <a:latin typeface="Arial" pitchFamily="34" charset="0"/>
+                <a:ea typeface="Arial" pitchFamily="34" charset="-122"/>
+                <a:cs typeface="Arial" pitchFamily="34" charset="-120"/>
+              </a:rPr>
+              <a:t>4 beldagen per werkperiode</a:t>
+            </a:r>
+            <a:endParaRPr lang="en-US" sz="1250" dirty="0"/>
+          </a:p>
+        </p:txBody>
+      </p:sp>
+      <p:sp>
+        <p:nvSpPr>
+          <p:cNvPr id="27" name="Text 25"/>
+          <p:cNvSpPr txBox="1"/>
+          <p:nvPr/>
+        </p:nvSpPr>
+        <p:spPr>
+          <a:xfrm>
+            <a:off x="4533889" y="3378192"/>
+            <a:ext cx="2578094" cy="350519"/>
+          </a:xfrm>
+          <a:prstGeom prst="rect">
+            <a:avLst/>
+          </a:prstGeom>
+          <a:noFill/>
+          <a:ln/>
+        </p:spPr>
+        <p:txBody>
+          <a:bodyPr wrap="square" lIns="0" tIns="0" rIns="0" bIns="0" rtlCol="0" anchor="ctr"/>
+          <a:lstStyle/>
+          <a:p>
+            <a:pPr indent="0" marL="0">
+              <a:buNone/>
+            </a:pPr>
+            <a:r>
               <a:rPr lang="en-US" sz="950" dirty="0">
                 <a:solidFill>
                   <a:srgbClr val="6F6A5C"/>
@@ -4856,7 +5541,7 @@
                 <a:ea typeface="Arial" pitchFamily="34" charset="-122"/>
                 <a:cs typeface="Arial" pitchFamily="34" charset="-120"/>
               </a:rPr>
-              <a:t>Zoals je die nu ook elke week ontvangt.</a:t>
+              <a:t>Beldagen</a:t>
             </a:r>
             <a:endParaRPr lang="en-US" sz="950" dirty="0"/>
           </a:p>
@@ -4864,22 +5549,61 @@
       </p:sp>
       <p:sp>
         <p:nvSpPr>
-          <p:cNvPr id="35" name="Shape 27"/>
+          <p:cNvPr id="28" name="Text 26"/>
+          <p:cNvSpPr txBox="1"/>
+          <p:nvPr/>
+        </p:nvSpPr>
+        <p:spPr>
+          <a:xfrm>
+            <a:off x="6832583" y="3378192"/>
+            <a:ext cx="825498" cy="350519"/>
+          </a:xfrm>
+          <a:prstGeom prst="rect">
+            <a:avLst/>
+          </a:prstGeom>
+          <a:noFill/>
+          <a:ln/>
+        </p:spPr>
+        <p:txBody>
+          <a:bodyPr wrap="square" lIns="0" tIns="0" rIns="0" bIns="0" rtlCol="0" anchor="ctr"/>
+          <a:lstStyle/>
+          <a:p>
+            <a:pPr algn="r" indent="0" marL="0">
+              <a:buNone/>
+            </a:pPr>
+            <a:r>
+              <a:rPr lang="en-US" sz="1150" b="1" dirty="0">
+                <a:solidFill>
+                  <a:srgbClr val="1C2230"/>
+                </a:solidFill>
+                <a:latin typeface="Arial" pitchFamily="34" charset="0"/>
+                <a:ea typeface="Arial" pitchFamily="34" charset="-122"/>
+                <a:cs typeface="Arial" pitchFamily="34" charset="-120"/>
+              </a:rPr>
+              <a:t>4</a:t>
+            </a:r>
+            <a:endParaRPr lang="en-US" sz="1150" dirty="0"/>
+          </a:p>
+        </p:txBody>
+      </p:sp>
+      <p:sp>
+        <p:nvSpPr>
+          <p:cNvPr id="29" name="Shape 27"/>
           <p:cNvSpPr/>
           <p:nvPr/>
         </p:nvSpPr>
         <p:spPr>
           <a:xfrm>
-            <a:off x="609598" y="4851388"/>
-            <a:ext cx="5232387" cy="0"/>
+            <a:off x="4533889" y="3728711"/>
+            <a:ext cx="3124192" cy="0"/>
           </a:xfrm>
           <a:prstGeom prst="line">
             <a:avLst/>
           </a:prstGeom>
           <a:noFill/>
-          <a:ln w="6350">
+          <a:ln w="9525">
             <a:solidFill>
-              <a:srgbClr val="C9C2B2"/>
+              <a:srgbClr val="D8D2C4"/>
             </a:solidFill>
             <a:prstDash val="solid"/>
           </a:ln>
@@ -4887,149 +5611,100 @@
       </p:sp>
       <p:sp>
         <p:nvSpPr>
-          <p:cNvPr id="36" name="Shape 28"/>
+          <p:cNvPr id="30" name="Text 28"/>
+          <p:cNvSpPr txBox="1"/>
+          <p:nvPr/>
+        </p:nvSpPr>
+        <p:spPr>
+          <a:xfrm>
+            <a:off x="4533889" y="3728711"/>
+            <a:ext cx="2578094" cy="350519"/>
+          </a:xfrm>
+          <a:prstGeom prst="rect">
+            <a:avLst/>
+          </a:prstGeom>
+          <a:noFill/>
+          <a:ln/>
+        </p:spPr>
+        <p:txBody>
+          <a:bodyPr wrap="square" lIns="0" tIns="0" rIns="0" bIns="0" rtlCol="0" anchor="ctr"/>
+          <a:lstStyle/>
+          <a:p>
+            <a:pPr indent="0" marL="0">
+              <a:buNone/>
+            </a:pPr>
+            <a:r>
+              <a:rPr lang="en-US" sz="950" dirty="0">
+                <a:solidFill>
+                  <a:srgbClr val="6F6A5C"/>
+                </a:solidFill>
+                <a:latin typeface="Arial" pitchFamily="34" charset="0"/>
+                <a:ea typeface="Arial" pitchFamily="34" charset="-122"/>
+                <a:cs typeface="Arial" pitchFamily="34" charset="-120"/>
+              </a:rPr>
+              <a:t>Uur bellen</a:t>
+            </a:r>
+            <a:endParaRPr lang="en-US" sz="950" dirty="0"/>
+          </a:p>
+        </p:txBody>
+      </p:sp>
+      <p:sp>
+        <p:nvSpPr>
+          <p:cNvPr id="31" name="Text 29"/>
+          <p:cNvSpPr txBox="1"/>
+          <p:nvPr/>
+        </p:nvSpPr>
+        <p:spPr>
+          <a:xfrm>
+            <a:off x="6832583" y="3728711"/>
+            <a:ext cx="825498" cy="350519"/>
+          </a:xfrm>
+          <a:prstGeom prst="rect">
+            <a:avLst/>
+          </a:prstGeom>
+          <a:noFill/>
+          <a:ln/>
+        </p:spPr>
+        <p:txBody>
+          <a:bodyPr wrap="square" lIns="0" tIns="0" rIns="0" bIns="0" rtlCol="0" anchor="ctr"/>
+          <a:lstStyle/>
+          <a:p>
+            <a:pPr algn="r" indent="0" marL="0">
+              <a:buNone/>
+            </a:pPr>
+            <a:r>
+              <a:rPr lang="en-US" sz="1150" b="1" dirty="0">
+                <a:solidFill>
+                  <a:srgbClr val="1C2230"/>
+                </a:solidFill>
+                <a:latin typeface="Arial" pitchFamily="34" charset="0"/>
+                <a:ea typeface="Arial" pitchFamily="34" charset="-122"/>
+                <a:cs typeface="Arial" pitchFamily="34" charset="-120"/>
+              </a:rPr>
+              <a:t>24</a:t>
+            </a:r>
+            <a:endParaRPr lang="en-US" sz="1150" dirty="0"/>
+          </a:p>
+        </p:txBody>
+      </p:sp>
+      <p:sp>
+        <p:nvSpPr>
+          <p:cNvPr id="32" name="Shape 30"/>
           <p:cNvSpPr/>
           <p:nvPr/>
         </p:nvSpPr>
         <p:spPr>
           <a:xfrm>
-            <a:off x="609598" y="4952988"/>
-            <a:ext cx="253999" cy="253999"/>
-          </a:xfrm>
-          <a:prstGeom prst="roundRect">
-            <a:avLst>
-              <a:gd name="adj" fmla="val 25000"/>
-            </a:avLst>
-          </a:prstGeom>
-          <a:solidFill>
-            <a:srgbClr val="DDEBF3"/>
-          </a:solidFill>
-          <a:ln/>
-        </p:spPr>
-      </p:sp>
-      <p:pic>
-        <p:nvPicPr>
-          <p:cNvPr id="37" name="Image 6" descr="preencoded.png">    </p:cNvPr>
-          <p:cNvPicPr>
-            <a:picLocks noChangeAspect="1"/>
-          </p:cNvPicPr>
-          <p:nvPr/>
-        </p:nvPicPr>
-        <p:blipFill>
-          <a:blip r:embed="rId7"/>
-          <a:stretch>
-            <a:fillRect/>
-          </a:stretch>
-        </p:blipFill>
-        <p:spPr>
-          <a:xfrm>
-            <a:off x="666748" y="5010137"/>
-            <a:ext cx="139700" cy="139700"/>
-          </a:xfrm>
-          <a:prstGeom prst="rect">
-            <a:avLst/>
-          </a:prstGeom>
-        </p:spPr>
-      </p:pic>
-      <p:sp>
-        <p:nvSpPr>
-          <p:cNvPr id="38" name="Text 29"/>
-          <p:cNvSpPr txBox="1"/>
-          <p:nvPr/>
-        </p:nvSpPr>
-        <p:spPr>
-          <a:xfrm>
-            <a:off x="1015997" y="4927588"/>
-            <a:ext cx="4825988" cy="228599"/>
-          </a:xfrm>
-          <a:prstGeom prst="rect">
-            <a:avLst/>
-          </a:prstGeom>
-          <a:noFill/>
-          <a:ln/>
-        </p:spPr>
-        <p:txBody>
-          <a:bodyPr wrap="square" lIns="0" tIns="0" rIns="0" bIns="0" rtlCol="0" anchor="ctr"/>
-          <a:lstStyle/>
-          <a:p>
-            <a:pPr indent="0" marL="0">
-              <a:buNone/>
-            </a:pPr>
-            <a:r>
-              <a:rPr lang="en-US" sz="1200" b="1" dirty="0">
-                <a:solidFill>
-                  <a:srgbClr val="1C2230"/>
-                </a:solidFill>
-                <a:latin typeface="Arial" pitchFamily="34" charset="0"/>
-                <a:ea typeface="Arial" pitchFamily="34" charset="-122"/>
-                <a:cs typeface="Arial" pitchFamily="34" charset="-120"/>
-              </a:rPr>
-              <a:t>Gegevens veilig</a:t>
-            </a:r>
-            <a:endParaRPr lang="en-US" sz="1200" dirty="0"/>
-          </a:p>
-        </p:txBody>
-      </p:sp>
-      <p:sp>
-        <p:nvSpPr>
-          <p:cNvPr id="39" name="Text 30"/>
-          <p:cNvSpPr txBox="1"/>
-          <p:nvPr/>
-        </p:nvSpPr>
-        <p:spPr>
-          <a:xfrm>
-            <a:off x="1015997" y="5168887"/>
-            <a:ext cx="4825988" cy="355599"/>
-          </a:xfrm>
-          <a:prstGeom prst="rect">
-            <a:avLst/>
-          </a:prstGeom>
-          <a:noFill/>
-          <a:ln/>
-        </p:spPr>
-        <p:txBody>
-          <a:bodyPr wrap="square" lIns="0" tIns="0" rIns="0" bIns="0" rtlCol="0" anchor="t"/>
-          <a:lstStyle/>
-          <a:p>
-            <a:pPr indent="0" marL="0">
-              <a:lnSpc>
-                <a:spcPct val="130000"/>
-              </a:lnSpc>
-              <a:buNone/>
-            </a:pPr>
-            <a:r>
-              <a:rPr lang="en-US" sz="950" dirty="0">
-                <a:solidFill>
-                  <a:srgbClr val="6F6A5C"/>
-                </a:solidFill>
-                <a:latin typeface="Arial" pitchFamily="34" charset="0"/>
-                <a:ea typeface="Arial" pitchFamily="34" charset="-122"/>
-                <a:cs typeface="Arial" pitchFamily="34" charset="-120"/>
-              </a:rPr>
-              <a:t>Vastgelegd in de verwerkersovereenkomst.</a:t>
-            </a:r>
-            <a:endParaRPr lang="en-US" sz="950" dirty="0"/>
-          </a:p>
-        </p:txBody>
-      </p:sp>
-      <p:sp>
-        <p:nvSpPr>
-          <p:cNvPr id="40" name="Shape 31"/>
-          <p:cNvSpPr/>
-          <p:nvPr/>
-        </p:nvSpPr>
-        <p:spPr>
-          <a:xfrm>
-            <a:off x="6349984" y="4851388"/>
-            <a:ext cx="5232387" cy="0"/>
+            <a:off x="4533889" y="4079230"/>
+            <a:ext cx="3124192" cy="0"/>
           </a:xfrm>
           <a:prstGeom prst="line">
             <a:avLst/>
           </a:prstGeom>
           <a:noFill/>
-          <a:ln w="6350">
+          <a:ln w="9525">
             <a:solidFill>
-              <a:srgbClr val="C9C2B2"/>
+              <a:srgbClr val="D8D2C4"/>
             </a:solidFill>
             <a:prstDash val="solid"/>
           </a:ln>
@@ -5037,60 +5712,316 @@
       </p:sp>
       <p:sp>
         <p:nvSpPr>
-          <p:cNvPr id="41" name="Shape 32"/>
+          <p:cNvPr id="33" name="Text 31"/>
+          <p:cNvSpPr txBox="1"/>
+          <p:nvPr/>
+        </p:nvSpPr>
+        <p:spPr>
+          <a:xfrm>
+            <a:off x="4533889" y="4079230"/>
+            <a:ext cx="2578094" cy="350519"/>
+          </a:xfrm>
+          <a:prstGeom prst="rect">
+            <a:avLst/>
+          </a:prstGeom>
+          <a:noFill/>
+          <a:ln/>
+        </p:spPr>
+        <p:txBody>
+          <a:bodyPr wrap="square" lIns="0" tIns="0" rIns="0" bIns="0" rtlCol="0" anchor="ctr"/>
+          <a:lstStyle/>
+          <a:p>
+            <a:pPr indent="0" marL="0">
+              <a:buNone/>
+            </a:pPr>
+            <a:r>
+              <a:rPr lang="en-US" sz="950" dirty="0">
+                <a:solidFill>
+                  <a:srgbClr val="6F6A5C"/>
+                </a:solidFill>
+                <a:latin typeface="Arial" pitchFamily="34" charset="0"/>
+                <a:ea typeface="Arial" pitchFamily="34" charset="-122"/>
+                <a:cs typeface="Arial" pitchFamily="34" charset="-120"/>
+              </a:rPr>
+              <a:t>Contactpogingen</a:t>
+            </a:r>
+            <a:endParaRPr lang="en-US" sz="950" dirty="0"/>
+          </a:p>
+        </p:txBody>
+      </p:sp>
+      <p:sp>
+        <p:nvSpPr>
+          <p:cNvPr id="34" name="Text 32"/>
+          <p:cNvSpPr txBox="1"/>
+          <p:nvPr/>
+        </p:nvSpPr>
+        <p:spPr>
+          <a:xfrm>
+            <a:off x="6832583" y="4079230"/>
+            <a:ext cx="825498" cy="350519"/>
+          </a:xfrm>
+          <a:prstGeom prst="rect">
+            <a:avLst/>
+          </a:prstGeom>
+          <a:noFill/>
+          <a:ln/>
+        </p:spPr>
+        <p:txBody>
+          <a:bodyPr wrap="square" lIns="0" tIns="0" rIns="0" bIns="0" rtlCol="0" anchor="ctr"/>
+          <a:lstStyle/>
+          <a:p>
+            <a:pPr algn="r" indent="0" marL="0">
+              <a:buNone/>
+            </a:pPr>
+            <a:r>
+              <a:rPr lang="en-US" sz="1150" b="1" dirty="0">
+                <a:solidFill>
+                  <a:srgbClr val="1C2230"/>
+                </a:solidFill>
+                <a:latin typeface="Arial" pitchFamily="34" charset="0"/>
+                <a:ea typeface="Arial" pitchFamily="34" charset="-122"/>
+                <a:cs typeface="Arial" pitchFamily="34" charset="-120"/>
+              </a:rPr>
+              <a:t>± 400</a:t>
+            </a:r>
+            <a:endParaRPr lang="en-US" sz="1150" dirty="0"/>
+          </a:p>
+        </p:txBody>
+      </p:sp>
+      <p:sp>
+        <p:nvSpPr>
+          <p:cNvPr id="35" name="Shape 33"/>
           <p:cNvSpPr/>
           <p:nvPr/>
         </p:nvSpPr>
         <p:spPr>
           <a:xfrm>
-            <a:off x="6349984" y="4952988"/>
-            <a:ext cx="253999" cy="253999"/>
+            <a:off x="4533889" y="4429749"/>
+            <a:ext cx="3124192" cy="0"/>
+          </a:xfrm>
+          <a:prstGeom prst="line">
+            <a:avLst/>
+          </a:prstGeom>
+          <a:noFill/>
+          <a:ln w="9525">
+            <a:solidFill>
+              <a:srgbClr val="D8D2C4"/>
+            </a:solidFill>
+            <a:prstDash val="solid"/>
+          </a:ln>
+        </p:spPr>
+      </p:sp>
+      <p:sp>
+        <p:nvSpPr>
+          <p:cNvPr id="36" name="Text 34"/>
+          <p:cNvSpPr txBox="1"/>
+          <p:nvPr/>
+        </p:nvSpPr>
+        <p:spPr>
+          <a:xfrm>
+            <a:off x="4533889" y="4429749"/>
+            <a:ext cx="2578094" cy="350519"/>
+          </a:xfrm>
+          <a:prstGeom prst="rect">
+            <a:avLst/>
+          </a:prstGeom>
+          <a:noFill/>
+          <a:ln/>
+        </p:spPr>
+        <p:txBody>
+          <a:bodyPr wrap="square" lIns="0" tIns="0" rIns="0" bIns="0" rtlCol="0" anchor="ctr"/>
+          <a:lstStyle/>
+          <a:p>
+            <a:pPr indent="0" marL="0">
+              <a:buNone/>
+            </a:pPr>
+            <a:r>
+              <a:rPr lang="en-US" sz="950" dirty="0">
+                <a:solidFill>
+                  <a:srgbClr val="6F6A5C"/>
+                </a:solidFill>
+                <a:latin typeface="Arial" pitchFamily="34" charset="0"/>
+                <a:ea typeface="Arial" pitchFamily="34" charset="-122"/>
+                <a:cs typeface="Arial" pitchFamily="34" charset="-120"/>
+              </a:rPr>
+              <a:t>Afspraken</a:t>
+            </a:r>
+            <a:endParaRPr lang="en-US" sz="950" dirty="0"/>
+          </a:p>
+        </p:txBody>
+      </p:sp>
+      <p:sp>
+        <p:nvSpPr>
+          <p:cNvPr id="37" name="Text 35"/>
+          <p:cNvSpPr txBox="1"/>
+          <p:nvPr/>
+        </p:nvSpPr>
+        <p:spPr>
+          <a:xfrm>
+            <a:off x="6832583" y="4429749"/>
+            <a:ext cx="825498" cy="350519"/>
+          </a:xfrm>
+          <a:prstGeom prst="rect">
+            <a:avLst/>
+          </a:prstGeom>
+          <a:noFill/>
+          <a:ln/>
+        </p:spPr>
+        <p:txBody>
+          <a:bodyPr wrap="square" lIns="0" tIns="0" rIns="0" bIns="0" rtlCol="0" anchor="ctr"/>
+          <a:lstStyle/>
+          <a:p>
+            <a:pPr algn="r" indent="0" marL="0">
+              <a:buNone/>
+            </a:pPr>
+            <a:r>
+              <a:rPr lang="en-US" sz="1150" b="1" dirty="0">
+                <a:solidFill>
+                  <a:srgbClr val="1C2230"/>
+                </a:solidFill>
+                <a:latin typeface="Arial" pitchFamily="34" charset="0"/>
+                <a:ea typeface="Arial" pitchFamily="34" charset="-122"/>
+                <a:cs typeface="Arial" pitchFamily="34" charset="-120"/>
+              </a:rPr>
+              <a:t>± 8</a:t>
+            </a:r>
+            <a:endParaRPr lang="en-US" sz="1150" dirty="0"/>
+          </a:p>
+        </p:txBody>
+      </p:sp>
+      <p:sp>
+        <p:nvSpPr>
+          <p:cNvPr id="38" name="Shape 36"/>
+          <p:cNvSpPr/>
+          <p:nvPr/>
+        </p:nvSpPr>
+        <p:spPr>
+          <a:xfrm>
+            <a:off x="4533889" y="4780268"/>
+            <a:ext cx="3124192" cy="0"/>
+          </a:xfrm>
+          <a:prstGeom prst="line">
+            <a:avLst/>
+          </a:prstGeom>
+          <a:noFill/>
+          <a:ln w="9525">
+            <a:solidFill>
+              <a:srgbClr val="D8D2C4"/>
+            </a:solidFill>
+            <a:prstDash val="solid"/>
+          </a:ln>
+        </p:spPr>
+      </p:sp>
+      <p:sp>
+        <p:nvSpPr>
+          <p:cNvPr id="39" name="Text 37"/>
+          <p:cNvSpPr txBox="1"/>
+          <p:nvPr/>
+        </p:nvSpPr>
+        <p:spPr>
+          <a:xfrm>
+            <a:off x="4533889" y="4780268"/>
+            <a:ext cx="2578094" cy="350519"/>
+          </a:xfrm>
+          <a:prstGeom prst="rect">
+            <a:avLst/>
+          </a:prstGeom>
+          <a:noFill/>
+          <a:ln/>
+        </p:spPr>
+        <p:txBody>
+          <a:bodyPr wrap="square" lIns="0" tIns="0" rIns="0" bIns="0" rtlCol="0" anchor="ctr"/>
+          <a:lstStyle/>
+          <a:p>
+            <a:pPr indent="0" marL="0">
+              <a:buNone/>
+            </a:pPr>
+            <a:r>
+              <a:rPr lang="en-US" sz="950" dirty="0">
+                <a:solidFill>
+                  <a:srgbClr val="6F6A5C"/>
+                </a:solidFill>
+                <a:latin typeface="Arial" pitchFamily="34" charset="0"/>
+                <a:ea typeface="Arial" pitchFamily="34" charset="-122"/>
+                <a:cs typeface="Arial" pitchFamily="34" charset="-120"/>
+              </a:rPr>
+              <a:t>Prijs per afspraak</a:t>
+            </a:r>
+            <a:endParaRPr lang="en-US" sz="950" dirty="0"/>
+          </a:p>
+        </p:txBody>
+      </p:sp>
+      <p:sp>
+        <p:nvSpPr>
+          <p:cNvPr id="40" name="Text 38"/>
+          <p:cNvSpPr txBox="1"/>
+          <p:nvPr/>
+        </p:nvSpPr>
+        <p:spPr>
+          <a:xfrm>
+            <a:off x="6832583" y="4780268"/>
+            <a:ext cx="825498" cy="350519"/>
+          </a:xfrm>
+          <a:prstGeom prst="rect">
+            <a:avLst/>
+          </a:prstGeom>
+          <a:noFill/>
+          <a:ln/>
+        </p:spPr>
+        <p:txBody>
+          <a:bodyPr wrap="square" lIns="0" tIns="0" rIns="0" bIns="0" rtlCol="0" anchor="ctr"/>
+          <a:lstStyle/>
+          <a:p>
+            <a:pPr algn="r" indent="0" marL="0">
+              <a:buNone/>
+            </a:pPr>
+            <a:r>
+              <a:rPr lang="en-US" sz="1150" b="1" dirty="0">
+                <a:solidFill>
+                  <a:srgbClr val="1C2230"/>
+                </a:solidFill>
+                <a:latin typeface="Arial" pitchFamily="34" charset="0"/>
+                <a:ea typeface="Arial" pitchFamily="34" charset="-122"/>
+                <a:cs typeface="Arial" pitchFamily="34" charset="-120"/>
+              </a:rPr>
+              <a:t>± € 300</a:t>
+            </a:r>
+            <a:endParaRPr lang="en-US" sz="1150" dirty="0"/>
+          </a:p>
+        </p:txBody>
+      </p:sp>
+      <p:sp>
+        <p:nvSpPr>
+          <p:cNvPr id="41" name="Shape 39"/>
+          <p:cNvSpPr/>
+          <p:nvPr/>
+        </p:nvSpPr>
+        <p:spPr>
+          <a:xfrm>
+            <a:off x="8026380" y="2489194"/>
+            <a:ext cx="3555991" cy="2768593"/>
           </a:xfrm>
           <a:prstGeom prst="roundRect">
             <a:avLst>
-              <a:gd name="adj" fmla="val 25000"/>
+              <a:gd name="adj" fmla="val 3670"/>
             </a:avLst>
           </a:prstGeom>
           <a:solidFill>
-            <a:srgbClr val="DDEBF3"/>
+            <a:srgbClr val="000000"/>
           </a:solidFill>
           <a:ln/>
         </p:spPr>
       </p:sp>
-      <p:pic>
-        <p:nvPicPr>
-          <p:cNvPr id="42" name="Image 7" descr="preencoded.png">    </p:cNvPr>
-          <p:cNvPicPr>
-            <a:picLocks noChangeAspect="1"/>
-          </p:cNvPicPr>
-          <p:nvPr/>
-        </p:nvPicPr>
-        <p:blipFill>
-          <a:blip r:embed="rId8"/>
-          <a:stretch>
-            <a:fillRect/>
-          </a:stretch>
-        </p:blipFill>
-        <p:spPr>
-          <a:xfrm>
-            <a:off x="6407134" y="5010137"/>
-            <a:ext cx="139700" cy="139700"/>
-          </a:xfrm>
-          <a:prstGeom prst="rect">
-            <a:avLst/>
-          </a:prstGeom>
-        </p:spPr>
-      </p:pic>
-      <p:sp>
-        <p:nvSpPr>
-          <p:cNvPr id="43" name="Text 33"/>
-          <p:cNvSpPr txBox="1"/>
-          <p:nvPr/>
-        </p:nvSpPr>
-        <p:spPr>
-          <a:xfrm>
-            <a:off x="6756383" y="4927588"/>
-            <a:ext cx="4825988" cy="228599"/>
+      <p:sp>
+        <p:nvSpPr>
+          <p:cNvPr id="42" name="Text 40"/>
+          <p:cNvSpPr txBox="1"/>
+          <p:nvPr/>
+        </p:nvSpPr>
+        <p:spPr>
+          <a:xfrm>
+            <a:off x="8242279" y="2743193"/>
+            <a:ext cx="3124192" cy="190500"/>
           </a:xfrm>
           <a:prstGeom prst="rect">
             <a:avLst/>
@@ -5106,59 +6037,600 @@
               <a:buNone/>
             </a:pPr>
             <a:r>
-              <a:rPr lang="en-US" sz="1200" b="1" dirty="0">
-                <a:solidFill>
-                  <a:srgbClr val="1C2230"/>
-                </a:solidFill>
-                <a:latin typeface="Arial" pitchFamily="34" charset="0"/>
-                <a:ea typeface="Arial" pitchFamily="34" charset="-122"/>
-                <a:cs typeface="Arial" pitchFamily="34" charset="-120"/>
-              </a:rPr>
-              <a:t>Alles op papier</a:t>
-            </a:r>
-            <a:endParaRPr lang="en-US" sz="1200" dirty="0"/>
-          </a:p>
-        </p:txBody>
-      </p:sp>
-      <p:sp>
-        <p:nvSpPr>
-          <p:cNvPr id="44" name="Text 34"/>
-          <p:cNvSpPr txBox="1"/>
-          <p:nvPr/>
-        </p:nvSpPr>
-        <p:spPr>
-          <a:xfrm>
-            <a:off x="6756383" y="5168887"/>
-            <a:ext cx="4825988" cy="355599"/>
-          </a:xfrm>
-          <a:prstGeom prst="rect">
-            <a:avLst/>
-          </a:prstGeom>
-          <a:noFill/>
-          <a:ln/>
-        </p:spPr>
-        <p:txBody>
-          <a:bodyPr wrap="square" lIns="0" tIns="0" rIns="0" bIns="0" rtlCol="0" anchor="t"/>
+              <a:rPr lang="en-US" sz="800" b="1" spc="180" kern="0" dirty="0">
+                <a:solidFill>
+                  <a:srgbClr val="38B6FF"/>
+                </a:solidFill>
+                <a:latin typeface="Arial" pitchFamily="34" charset="0"/>
+                <a:ea typeface="Arial" pitchFamily="34" charset="-122"/>
+                <a:cs typeface="Arial" pitchFamily="34" charset="-120"/>
+              </a:rPr>
+              <a:t>OPSCHALEN</a:t>
+            </a:r>
+            <a:endParaRPr lang="en-US" sz="800" dirty="0"/>
+          </a:p>
+        </p:txBody>
+      </p:sp>
+      <p:sp>
+        <p:nvSpPr>
+          <p:cNvPr id="43" name="Text 41"/>
+          <p:cNvSpPr txBox="1"/>
+          <p:nvPr/>
+        </p:nvSpPr>
+        <p:spPr>
+          <a:xfrm>
+            <a:off x="8242279" y="2959093"/>
+            <a:ext cx="3124192" cy="355599"/>
+          </a:xfrm>
+          <a:prstGeom prst="rect">
+            <a:avLst/>
+          </a:prstGeom>
+          <a:noFill/>
+          <a:ln/>
+        </p:spPr>
+        <p:txBody>
+          <a:bodyPr wrap="square" lIns="0" tIns="0" rIns="0" bIns="0" rtlCol="0" anchor="ctr"/>
           <a:lstStyle/>
           <a:p>
             <a:pPr indent="0" marL="0">
               <a:lnSpc>
-                <a:spcPct val="130000"/>
+                <a:spcPct val="115000"/>
               </a:lnSpc>
               <a:buNone/>
             </a:pPr>
             <a:r>
+              <a:rPr lang="en-US" sz="1250" b="1" dirty="0">
+                <a:solidFill>
+                  <a:srgbClr val="F2EFE6"/>
+                </a:solidFill>
+                <a:latin typeface="Arial" pitchFamily="34" charset="0"/>
+                <a:ea typeface="Arial" pitchFamily="34" charset="-122"/>
+                <a:cs typeface="Arial" pitchFamily="34" charset="-120"/>
+              </a:rPr>
+              <a:t>8 beldagen per werkperiode</a:t>
+            </a:r>
+            <a:endParaRPr lang="en-US" sz="1250" dirty="0"/>
+          </a:p>
+        </p:txBody>
+      </p:sp>
+      <p:sp>
+        <p:nvSpPr>
+          <p:cNvPr id="44" name="Text 42"/>
+          <p:cNvSpPr txBox="1"/>
+          <p:nvPr/>
+        </p:nvSpPr>
+        <p:spPr>
+          <a:xfrm>
+            <a:off x="8242279" y="3378192"/>
+            <a:ext cx="2578094" cy="350519"/>
+          </a:xfrm>
+          <a:prstGeom prst="rect">
+            <a:avLst/>
+          </a:prstGeom>
+          <a:noFill/>
+          <a:ln/>
+        </p:spPr>
+        <p:txBody>
+          <a:bodyPr wrap="square" lIns="0" tIns="0" rIns="0" bIns="0" rtlCol="0" anchor="ctr"/>
+          <a:lstStyle/>
+          <a:p>
+            <a:pPr indent="0" marL="0">
+              <a:buNone/>
+            </a:pPr>
+            <a:r>
               <a:rPr lang="en-US" sz="950" dirty="0">
                 <a:solidFill>
-                  <a:srgbClr val="6F6A5C"/>
-                </a:solidFill>
-                <a:latin typeface="Arial" pitchFamily="34" charset="0"/>
-                <a:ea typeface="Arial" pitchFamily="34" charset="-122"/>
-                <a:cs typeface="Arial" pitchFamily="34" charset="-120"/>
-              </a:rPr>
-              <a:t>Vastgelegd in een korte aanvulling op de samenwerkingsovereenkomst.</a:t>
+                  <a:srgbClr val="C2C8D2"/>
+                </a:solidFill>
+                <a:latin typeface="Arial" pitchFamily="34" charset="0"/>
+                <a:ea typeface="Arial" pitchFamily="34" charset="-122"/>
+                <a:cs typeface="Arial" pitchFamily="34" charset="-120"/>
+              </a:rPr>
+              <a:t>Beldagen</a:t>
             </a:r>
             <a:endParaRPr lang="en-US" sz="950" dirty="0"/>
+          </a:p>
+        </p:txBody>
+      </p:sp>
+      <p:sp>
+        <p:nvSpPr>
+          <p:cNvPr id="45" name="Text 43"/>
+          <p:cNvSpPr txBox="1"/>
+          <p:nvPr/>
+        </p:nvSpPr>
+        <p:spPr>
+          <a:xfrm>
+            <a:off x="10540974" y="3378192"/>
+            <a:ext cx="825498" cy="350519"/>
+          </a:xfrm>
+          <a:prstGeom prst="rect">
+            <a:avLst/>
+          </a:prstGeom>
+          <a:noFill/>
+          <a:ln/>
+        </p:spPr>
+        <p:txBody>
+          <a:bodyPr wrap="square" lIns="0" tIns="0" rIns="0" bIns="0" rtlCol="0" anchor="ctr"/>
+          <a:lstStyle/>
+          <a:p>
+            <a:pPr algn="r" indent="0" marL="0">
+              <a:buNone/>
+            </a:pPr>
+            <a:r>
+              <a:rPr lang="en-US" sz="1150" b="1" dirty="0">
+                <a:solidFill>
+                  <a:srgbClr val="38B6FF"/>
+                </a:solidFill>
+                <a:latin typeface="Arial" pitchFamily="34" charset="0"/>
+                <a:ea typeface="Arial" pitchFamily="34" charset="-122"/>
+                <a:cs typeface="Arial" pitchFamily="34" charset="-120"/>
+              </a:rPr>
+              <a:t>8</a:t>
+            </a:r>
+            <a:endParaRPr lang="en-US" sz="1150" dirty="0"/>
+          </a:p>
+        </p:txBody>
+      </p:sp>
+      <p:sp>
+        <p:nvSpPr>
+          <p:cNvPr id="46" name="Shape 44"/>
+          <p:cNvSpPr/>
+          <p:nvPr/>
+        </p:nvSpPr>
+        <p:spPr>
+          <a:xfrm>
+            <a:off x="8242279" y="3728711"/>
+            <a:ext cx="3124192" cy="0"/>
+          </a:xfrm>
+          <a:prstGeom prst="line">
+            <a:avLst/>
+          </a:prstGeom>
+          <a:noFill/>
+          <a:ln w="9525">
+            <a:solidFill>
+              <a:srgbClr val="3A4152"/>
+            </a:solidFill>
+            <a:prstDash val="solid"/>
+          </a:ln>
+        </p:spPr>
+      </p:sp>
+      <p:sp>
+        <p:nvSpPr>
+          <p:cNvPr id="47" name="Text 45"/>
+          <p:cNvSpPr txBox="1"/>
+          <p:nvPr/>
+        </p:nvSpPr>
+        <p:spPr>
+          <a:xfrm>
+            <a:off x="8242279" y="3728711"/>
+            <a:ext cx="2578094" cy="350519"/>
+          </a:xfrm>
+          <a:prstGeom prst="rect">
+            <a:avLst/>
+          </a:prstGeom>
+          <a:noFill/>
+          <a:ln/>
+        </p:spPr>
+        <p:txBody>
+          <a:bodyPr wrap="square" lIns="0" tIns="0" rIns="0" bIns="0" rtlCol="0" anchor="ctr"/>
+          <a:lstStyle/>
+          <a:p>
+            <a:pPr indent="0" marL="0">
+              <a:buNone/>
+            </a:pPr>
+            <a:r>
+              <a:rPr lang="en-US" sz="950" dirty="0">
+                <a:solidFill>
+                  <a:srgbClr val="C2C8D2"/>
+                </a:solidFill>
+                <a:latin typeface="Arial" pitchFamily="34" charset="0"/>
+                <a:ea typeface="Arial" pitchFamily="34" charset="-122"/>
+                <a:cs typeface="Arial" pitchFamily="34" charset="-120"/>
+              </a:rPr>
+              <a:t>Uur bellen</a:t>
+            </a:r>
+            <a:endParaRPr lang="en-US" sz="950" dirty="0"/>
+          </a:p>
+        </p:txBody>
+      </p:sp>
+      <p:sp>
+        <p:nvSpPr>
+          <p:cNvPr id="48" name="Text 46"/>
+          <p:cNvSpPr txBox="1"/>
+          <p:nvPr/>
+        </p:nvSpPr>
+        <p:spPr>
+          <a:xfrm>
+            <a:off x="10540974" y="3728711"/>
+            <a:ext cx="825498" cy="350519"/>
+          </a:xfrm>
+          <a:prstGeom prst="rect">
+            <a:avLst/>
+          </a:prstGeom>
+          <a:noFill/>
+          <a:ln/>
+        </p:spPr>
+        <p:txBody>
+          <a:bodyPr wrap="square" lIns="0" tIns="0" rIns="0" bIns="0" rtlCol="0" anchor="ctr"/>
+          <a:lstStyle/>
+          <a:p>
+            <a:pPr algn="r" indent="0" marL="0">
+              <a:buNone/>
+            </a:pPr>
+            <a:r>
+              <a:rPr lang="en-US" sz="1150" b="1" dirty="0">
+                <a:solidFill>
+                  <a:srgbClr val="38B6FF"/>
+                </a:solidFill>
+                <a:latin typeface="Arial" pitchFamily="34" charset="0"/>
+                <a:ea typeface="Arial" pitchFamily="34" charset="-122"/>
+                <a:cs typeface="Arial" pitchFamily="34" charset="-120"/>
+              </a:rPr>
+              <a:t>48</a:t>
+            </a:r>
+            <a:endParaRPr lang="en-US" sz="1150" dirty="0"/>
+          </a:p>
+        </p:txBody>
+      </p:sp>
+      <p:sp>
+        <p:nvSpPr>
+          <p:cNvPr id="49" name="Shape 47"/>
+          <p:cNvSpPr/>
+          <p:nvPr/>
+        </p:nvSpPr>
+        <p:spPr>
+          <a:xfrm>
+            <a:off x="8242279" y="4079230"/>
+            <a:ext cx="3124192" cy="0"/>
+          </a:xfrm>
+          <a:prstGeom prst="line">
+            <a:avLst/>
+          </a:prstGeom>
+          <a:noFill/>
+          <a:ln w="9525">
+            <a:solidFill>
+              <a:srgbClr val="3A4152"/>
+            </a:solidFill>
+            <a:prstDash val="solid"/>
+          </a:ln>
+        </p:spPr>
+      </p:sp>
+      <p:sp>
+        <p:nvSpPr>
+          <p:cNvPr id="50" name="Text 48"/>
+          <p:cNvSpPr txBox="1"/>
+          <p:nvPr/>
+        </p:nvSpPr>
+        <p:spPr>
+          <a:xfrm>
+            <a:off x="8242279" y="4079230"/>
+            <a:ext cx="2578094" cy="350519"/>
+          </a:xfrm>
+          <a:prstGeom prst="rect">
+            <a:avLst/>
+          </a:prstGeom>
+          <a:noFill/>
+          <a:ln/>
+        </p:spPr>
+        <p:txBody>
+          <a:bodyPr wrap="square" lIns="0" tIns="0" rIns="0" bIns="0" rtlCol="0" anchor="ctr"/>
+          <a:lstStyle/>
+          <a:p>
+            <a:pPr indent="0" marL="0">
+              <a:buNone/>
+            </a:pPr>
+            <a:r>
+              <a:rPr lang="en-US" sz="950" dirty="0">
+                <a:solidFill>
+                  <a:srgbClr val="C2C8D2"/>
+                </a:solidFill>
+                <a:latin typeface="Arial" pitchFamily="34" charset="0"/>
+                <a:ea typeface="Arial" pitchFamily="34" charset="-122"/>
+                <a:cs typeface="Arial" pitchFamily="34" charset="-120"/>
+              </a:rPr>
+              <a:t>Contactpogingen</a:t>
+            </a:r>
+            <a:endParaRPr lang="en-US" sz="950" dirty="0"/>
+          </a:p>
+        </p:txBody>
+      </p:sp>
+      <p:sp>
+        <p:nvSpPr>
+          <p:cNvPr id="51" name="Text 49"/>
+          <p:cNvSpPr txBox="1"/>
+          <p:nvPr/>
+        </p:nvSpPr>
+        <p:spPr>
+          <a:xfrm>
+            <a:off x="10540974" y="4079230"/>
+            <a:ext cx="825498" cy="350519"/>
+          </a:xfrm>
+          <a:prstGeom prst="rect">
+            <a:avLst/>
+          </a:prstGeom>
+          <a:noFill/>
+          <a:ln/>
+        </p:spPr>
+        <p:txBody>
+          <a:bodyPr wrap="square" lIns="0" tIns="0" rIns="0" bIns="0" rtlCol="0" anchor="ctr"/>
+          <a:lstStyle/>
+          <a:p>
+            <a:pPr algn="r" indent="0" marL="0">
+              <a:buNone/>
+            </a:pPr>
+            <a:r>
+              <a:rPr lang="en-US" sz="1150" b="1" dirty="0">
+                <a:solidFill>
+                  <a:srgbClr val="38B6FF"/>
+                </a:solidFill>
+                <a:latin typeface="Arial" pitchFamily="34" charset="0"/>
+                <a:ea typeface="Arial" pitchFamily="34" charset="-122"/>
+                <a:cs typeface="Arial" pitchFamily="34" charset="-120"/>
+              </a:rPr>
+              <a:t>± 800</a:t>
+            </a:r>
+            <a:endParaRPr lang="en-US" sz="1150" dirty="0"/>
+          </a:p>
+        </p:txBody>
+      </p:sp>
+      <p:sp>
+        <p:nvSpPr>
+          <p:cNvPr id="52" name="Shape 50"/>
+          <p:cNvSpPr/>
+          <p:nvPr/>
+        </p:nvSpPr>
+        <p:spPr>
+          <a:xfrm>
+            <a:off x="8242279" y="4429749"/>
+            <a:ext cx="3124192" cy="0"/>
+          </a:xfrm>
+          <a:prstGeom prst="line">
+            <a:avLst/>
+          </a:prstGeom>
+          <a:noFill/>
+          <a:ln w="9525">
+            <a:solidFill>
+              <a:srgbClr val="3A4152"/>
+            </a:solidFill>
+            <a:prstDash val="solid"/>
+          </a:ln>
+        </p:spPr>
+      </p:sp>
+      <p:sp>
+        <p:nvSpPr>
+          <p:cNvPr id="53" name="Text 51"/>
+          <p:cNvSpPr txBox="1"/>
+          <p:nvPr/>
+        </p:nvSpPr>
+        <p:spPr>
+          <a:xfrm>
+            <a:off x="8242279" y="4429749"/>
+            <a:ext cx="2578094" cy="350519"/>
+          </a:xfrm>
+          <a:prstGeom prst="rect">
+            <a:avLst/>
+          </a:prstGeom>
+          <a:noFill/>
+          <a:ln/>
+        </p:spPr>
+        <p:txBody>
+          <a:bodyPr wrap="square" lIns="0" tIns="0" rIns="0" bIns="0" rtlCol="0" anchor="ctr"/>
+          <a:lstStyle/>
+          <a:p>
+            <a:pPr indent="0" marL="0">
+              <a:buNone/>
+            </a:pPr>
+            <a:r>
+              <a:rPr lang="en-US" sz="950" dirty="0">
+                <a:solidFill>
+                  <a:srgbClr val="C2C8D2"/>
+                </a:solidFill>
+                <a:latin typeface="Arial" pitchFamily="34" charset="0"/>
+                <a:ea typeface="Arial" pitchFamily="34" charset="-122"/>
+                <a:cs typeface="Arial" pitchFamily="34" charset="-120"/>
+              </a:rPr>
+              <a:t>Afspraken</a:t>
+            </a:r>
+            <a:endParaRPr lang="en-US" sz="950" dirty="0"/>
+          </a:p>
+        </p:txBody>
+      </p:sp>
+      <p:sp>
+        <p:nvSpPr>
+          <p:cNvPr id="54" name="Text 52"/>
+          <p:cNvSpPr txBox="1"/>
+          <p:nvPr/>
+        </p:nvSpPr>
+        <p:spPr>
+          <a:xfrm>
+            <a:off x="10540974" y="4429749"/>
+            <a:ext cx="825498" cy="350519"/>
+          </a:xfrm>
+          <a:prstGeom prst="rect">
+            <a:avLst/>
+          </a:prstGeom>
+          <a:noFill/>
+          <a:ln/>
+        </p:spPr>
+        <p:txBody>
+          <a:bodyPr wrap="square" lIns="0" tIns="0" rIns="0" bIns="0" rtlCol="0" anchor="ctr"/>
+          <a:lstStyle/>
+          <a:p>
+            <a:pPr algn="r" indent="0" marL="0">
+              <a:buNone/>
+            </a:pPr>
+            <a:r>
+              <a:rPr lang="en-US" sz="1150" b="1" dirty="0">
+                <a:solidFill>
+                  <a:srgbClr val="38B6FF"/>
+                </a:solidFill>
+                <a:latin typeface="Arial" pitchFamily="34" charset="0"/>
+                <a:ea typeface="Arial" pitchFamily="34" charset="-122"/>
+                <a:cs typeface="Arial" pitchFamily="34" charset="-120"/>
+              </a:rPr>
+              <a:t>± 16</a:t>
+            </a:r>
+            <a:endParaRPr lang="en-US" sz="1150" dirty="0"/>
+          </a:p>
+        </p:txBody>
+      </p:sp>
+      <p:sp>
+        <p:nvSpPr>
+          <p:cNvPr id="55" name="Shape 53"/>
+          <p:cNvSpPr/>
+          <p:nvPr/>
+        </p:nvSpPr>
+        <p:spPr>
+          <a:xfrm>
+            <a:off x="8242279" y="4780268"/>
+            <a:ext cx="3124192" cy="0"/>
+          </a:xfrm>
+          <a:prstGeom prst="line">
+            <a:avLst/>
+          </a:prstGeom>
+          <a:noFill/>
+          <a:ln w="9525">
+            <a:solidFill>
+              <a:srgbClr val="3A4152"/>
+            </a:solidFill>
+            <a:prstDash val="solid"/>
+          </a:ln>
+        </p:spPr>
+      </p:sp>
+      <p:sp>
+        <p:nvSpPr>
+          <p:cNvPr id="56" name="Text 54"/>
+          <p:cNvSpPr txBox="1"/>
+          <p:nvPr/>
+        </p:nvSpPr>
+        <p:spPr>
+          <a:xfrm>
+            <a:off x="8242279" y="4780268"/>
+            <a:ext cx="2578094" cy="350519"/>
+          </a:xfrm>
+          <a:prstGeom prst="rect">
+            <a:avLst/>
+          </a:prstGeom>
+          <a:noFill/>
+          <a:ln/>
+        </p:spPr>
+        <p:txBody>
+          <a:bodyPr wrap="square" lIns="0" tIns="0" rIns="0" bIns="0" rtlCol="0" anchor="ctr"/>
+          <a:lstStyle/>
+          <a:p>
+            <a:pPr indent="0" marL="0">
+              <a:buNone/>
+            </a:pPr>
+            <a:r>
+              <a:rPr lang="en-US" sz="950" dirty="0">
+                <a:solidFill>
+                  <a:srgbClr val="C2C8D2"/>
+                </a:solidFill>
+                <a:latin typeface="Arial" pitchFamily="34" charset="0"/>
+                <a:ea typeface="Arial" pitchFamily="34" charset="-122"/>
+                <a:cs typeface="Arial" pitchFamily="34" charset="-120"/>
+              </a:rPr>
+              <a:t>Prijs per afspraak</a:t>
+            </a:r>
+            <a:endParaRPr lang="en-US" sz="950" dirty="0"/>
+          </a:p>
+        </p:txBody>
+      </p:sp>
+      <p:sp>
+        <p:nvSpPr>
+          <p:cNvPr id="57" name="Text 55"/>
+          <p:cNvSpPr txBox="1"/>
+          <p:nvPr/>
+        </p:nvSpPr>
+        <p:spPr>
+          <a:xfrm>
+            <a:off x="10540974" y="4780268"/>
+            <a:ext cx="825498" cy="350519"/>
+          </a:xfrm>
+          <a:prstGeom prst="rect">
+            <a:avLst/>
+          </a:prstGeom>
+          <a:noFill/>
+          <a:ln/>
+        </p:spPr>
+        <p:txBody>
+          <a:bodyPr wrap="square" lIns="0" tIns="0" rIns="0" bIns="0" rtlCol="0" anchor="ctr"/>
+          <a:lstStyle/>
+          <a:p>
+            <a:pPr algn="r" indent="0" marL="0">
+              <a:buNone/>
+            </a:pPr>
+            <a:r>
+              <a:rPr lang="en-US" sz="1150" b="1" dirty="0">
+                <a:solidFill>
+                  <a:srgbClr val="38B6FF"/>
+                </a:solidFill>
+                <a:latin typeface="Arial" pitchFamily="34" charset="0"/>
+                <a:ea typeface="Arial" pitchFamily="34" charset="-122"/>
+                <a:cs typeface="Arial" pitchFamily="34" charset="-120"/>
+              </a:rPr>
+              <a:t>± € 250</a:t>
+            </a:r>
+            <a:endParaRPr lang="en-US" sz="1150" dirty="0"/>
+          </a:p>
+        </p:txBody>
+      </p:sp>
+      <p:sp>
+        <p:nvSpPr>
+          <p:cNvPr id="58" name="Shape 56"/>
+          <p:cNvSpPr/>
+          <p:nvPr/>
+        </p:nvSpPr>
+        <p:spPr>
+          <a:xfrm>
+            <a:off x="609598" y="5854685"/>
+            <a:ext cx="76200" cy="76200"/>
+          </a:xfrm>
+          <a:prstGeom prst="ellipse">
+            <a:avLst/>
+          </a:prstGeom>
+          <a:solidFill>
+            <a:srgbClr val="38B6FF"/>
+          </a:solidFill>
+          <a:ln/>
+        </p:spPr>
+      </p:sp>
+      <p:sp>
+        <p:nvSpPr>
+          <p:cNvPr id="59" name="Text 57"/>
+          <p:cNvSpPr txBox="1"/>
+          <p:nvPr/>
+        </p:nvSpPr>
+        <p:spPr>
+          <a:xfrm>
+            <a:off x="800098" y="5714986"/>
+            <a:ext cx="9905975" cy="355599"/>
+          </a:xfrm>
+          <a:prstGeom prst="rect">
+            <a:avLst/>
+          </a:prstGeom>
+          <a:noFill/>
+          <a:ln/>
+        </p:spPr>
+        <p:txBody>
+          <a:bodyPr wrap="square" lIns="0" tIns="0" rIns="0" bIns="0" rtlCol="0" anchor="ctr"/>
+          <a:lstStyle/>
+          <a:p>
+            <a:pPr indent="0" marL="0">
+              <a:buNone/>
+            </a:pPr>
+            <a:r>
+              <a:rPr lang="en-US" sz="1200" b="1" dirty="0">
+                <a:solidFill>
+                  <a:srgbClr val="1C2230"/>
+                </a:solidFill>
+                <a:latin typeface="Arial" pitchFamily="34" charset="0"/>
+                <a:ea typeface="Arial" pitchFamily="34" charset="-122"/>
+                <a:cs typeface="Arial" pitchFamily="34" charset="-120"/>
+              </a:rPr>
+              <a:t>In de pilot betaalde je het minst per afspraak, omdat de pilotprijs onder onze dagprijs lag. Bij acht beldagen zakt de prijs per afspraak terug naar ongeveer tweehonderdvijftig euro.</a:t>
+            </a:r>
+            <a:endParaRPr lang="en-US" sz="1200" dirty="0"/>
           </a:p>
         </p:txBody>
       </p:sp>
@@ -5173,6 +6645,2312 @@
 <file path=ppt/slides/slide12.xml><?xml version="1.0" encoding="utf-8"?>
 <p:sld xmlns:a="http://schemas.openxmlformats.org/drawingml/2006/main" xmlns:r="http://schemas.openxmlformats.org/officeDocument/2006/relationships" xmlns:p="http://schemas.openxmlformats.org/presentationml/2006/main">
   <p:cSld name="Slide 12">
+    <p:bg>
+      <p:bgPr>
+        <a:solidFill>
+          <a:srgbClr val="E9E0CD"/>
+        </a:solidFill>
+      </p:bgPr>
+    </p:bg>
+    <p:spTree>
+      <p:nvGrpSpPr>
+        <p:cNvPr id="1" name=""/>
+        <p:cNvGrpSpPr/>
+        <p:nvPr/>
+      </p:nvGrpSpPr>
+      <p:grpSpPr>
+        <a:xfrm>
+          <a:off x="0" y="0"/>
+          <a:ext cx="0" cy="0"/>
+          <a:chOff x="0" y="0"/>
+          <a:chExt cx="0" cy="0"/>
+        </a:xfrm>
+      </p:grpSpPr>
+      <p:sp>
+        <p:nvSpPr>
+          <p:cNvPr id="2" name="Text 0"/>
+          <p:cNvSpPr txBox="1"/>
+          <p:nvPr/>
+        </p:nvSpPr>
+        <p:spPr>
+          <a:xfrm>
+            <a:off x="596899" y="368299"/>
+            <a:ext cx="1904995" cy="330199"/>
+          </a:xfrm>
+          <a:prstGeom prst="rect">
+            <a:avLst/>
+          </a:prstGeom>
+          <a:noFill/>
+          <a:ln/>
+        </p:spPr>
+        <p:txBody>
+          <a:bodyPr wrap="square" lIns="0" tIns="0" rIns="0" bIns="0" rtlCol="0" anchor="ctr"/>
+          <a:lstStyle/>
+          <a:p>
+            <a:pPr algn="l" indent="0" marL="0">
+              <a:buNone/>
+            </a:pPr>
+            <a:r>
+              <a:rPr lang="en-US" sz="1800" b="1" dirty="0">
+                <a:solidFill>
+                  <a:srgbClr val="1C2230"/>
+                </a:solidFill>
+                <a:latin typeface="Arial" pitchFamily="34" charset="0"/>
+                <a:ea typeface="Arial" pitchFamily="34" charset="-122"/>
+                <a:cs typeface="Arial" pitchFamily="34" charset="-120"/>
+              </a:rPr>
+              <a:t>LINK</a:t>
+            </a:r>
+            <a:pPr algn="l" indent="0" marL="0">
+              <a:buNone/>
+            </a:pPr>
+            <a:r>
+              <a:rPr lang="en-US" sz="1800" b="1" dirty="0">
+                <a:solidFill>
+                  <a:srgbClr val="38B6FF"/>
+                </a:solidFill>
+                <a:latin typeface="Arial" pitchFamily="34" charset="0"/>
+                <a:ea typeface="Arial" pitchFamily="34" charset="-122"/>
+                <a:cs typeface="Arial" pitchFamily="34" charset="-120"/>
+              </a:rPr>
+              <a:t>.</a:t>
+            </a:r>
+            <a:endParaRPr lang="en-US" sz="1800" dirty="0"/>
+          </a:p>
+        </p:txBody>
+      </p:sp>
+      <p:sp>
+        <p:nvSpPr>
+          <p:cNvPr id="3" name="Text 1"/>
+          <p:cNvSpPr txBox="1"/>
+          <p:nvPr/>
+        </p:nvSpPr>
+        <p:spPr>
+          <a:xfrm>
+            <a:off x="609598" y="6381734"/>
+            <a:ext cx="5714986" cy="228599"/>
+          </a:xfrm>
+          <a:prstGeom prst="rect">
+            <a:avLst/>
+          </a:prstGeom>
+          <a:noFill/>
+          <a:ln/>
+        </p:spPr>
+        <p:txBody>
+          <a:bodyPr wrap="square" lIns="0" tIns="0" rIns="0" bIns="0" rtlCol="0" anchor="ctr"/>
+          <a:lstStyle/>
+          <a:p>
+            <a:pPr algn="l" indent="0" marL="0">
+              <a:buNone/>
+            </a:pPr>
+            <a:r>
+              <a:rPr lang="en-US" sz="750" b="1" spc="100" kern="0" dirty="0">
+                <a:solidFill>
+                  <a:srgbClr val="6F6A5C"/>
+                </a:solidFill>
+                <a:latin typeface="Arial" pitchFamily="34" charset="0"/>
+                <a:ea typeface="Arial" pitchFamily="34" charset="-122"/>
+                <a:cs typeface="Arial" pitchFamily="34" charset="-120"/>
+              </a:rPr>
+              <a:t>LINK. · Voorstel GrowOn Agency</a:t>
+            </a:r>
+            <a:endParaRPr lang="en-US" sz="750" dirty="0"/>
+          </a:p>
+        </p:txBody>
+      </p:sp>
+      <p:sp>
+        <p:nvSpPr>
+          <p:cNvPr id="4" name="Text 2"/>
+          <p:cNvSpPr txBox="1"/>
+          <p:nvPr/>
+        </p:nvSpPr>
+        <p:spPr>
+          <a:xfrm>
+            <a:off x="9677376" y="6381734"/>
+            <a:ext cx="1904995" cy="228599"/>
+          </a:xfrm>
+          <a:prstGeom prst="rect">
+            <a:avLst/>
+          </a:prstGeom>
+          <a:noFill/>
+          <a:ln/>
+        </p:spPr>
+        <p:txBody>
+          <a:bodyPr wrap="square" lIns="0" tIns="0" rIns="0" bIns="0" rtlCol="0" anchor="ctr"/>
+          <a:lstStyle/>
+          <a:p>
+            <a:pPr algn="r" indent="0" marL="0">
+              <a:buNone/>
+            </a:pPr>
+            <a:r>
+              <a:rPr lang="en-US" sz="750" b="1" spc="100" kern="0" dirty="0">
+                <a:solidFill>
+                  <a:srgbClr val="6F6A5C"/>
+                </a:solidFill>
+                <a:latin typeface="Arial" pitchFamily="34" charset="0"/>
+                <a:ea typeface="Arial" pitchFamily="34" charset="-122"/>
+                <a:cs typeface="Arial" pitchFamily="34" charset="-120"/>
+              </a:rPr>
+              <a:t>12 / 14</a:t>
+            </a:r>
+            <a:endParaRPr lang="en-US" sz="750" dirty="0"/>
+          </a:p>
+        </p:txBody>
+      </p:sp>
+      <p:sp>
+        <p:nvSpPr>
+          <p:cNvPr id="5" name="Text 3"/>
+          <p:cNvSpPr txBox="1"/>
+          <p:nvPr/>
+        </p:nvSpPr>
+        <p:spPr>
+          <a:xfrm>
+            <a:off x="609598" y="1206497"/>
+            <a:ext cx="10159975" cy="215899"/>
+          </a:xfrm>
+          <a:prstGeom prst="rect">
+            <a:avLst/>
+          </a:prstGeom>
+          <a:noFill/>
+          <a:ln/>
+        </p:spPr>
+        <p:txBody>
+          <a:bodyPr wrap="square" lIns="0" tIns="0" rIns="0" bIns="0" rtlCol="0" anchor="ctr"/>
+          <a:lstStyle/>
+          <a:p>
+            <a:pPr algn="l" indent="0" marL="0">
+              <a:buNone/>
+            </a:pPr>
+            <a:r>
+              <a:rPr lang="en-US" sz="950" b="1" spc="400" kern="0" dirty="0">
+                <a:solidFill>
+                  <a:srgbClr val="38B6FF"/>
+                </a:solidFill>
+                <a:latin typeface="Arial" pitchFamily="34" charset="0"/>
+                <a:ea typeface="Arial" pitchFamily="34" charset="-122"/>
+                <a:cs typeface="Arial" pitchFamily="34" charset="-120"/>
+              </a:rPr>
+              <a:t>WAT WE VAN GROWON NODIG HEBBEN</a:t>
+            </a:r>
+            <a:endParaRPr lang="en-US" sz="950" dirty="0"/>
+          </a:p>
+        </p:txBody>
+      </p:sp>
+      <p:sp>
+        <p:nvSpPr>
+          <p:cNvPr id="6" name="Text 4"/>
+          <p:cNvSpPr txBox="1"/>
+          <p:nvPr/>
+        </p:nvSpPr>
+        <p:spPr>
+          <a:xfrm>
+            <a:off x="609598" y="1511296"/>
+            <a:ext cx="10972773" cy="1142997"/>
+          </a:xfrm>
+          <a:prstGeom prst="rect">
+            <a:avLst/>
+          </a:prstGeom>
+          <a:noFill/>
+          <a:ln/>
+        </p:spPr>
+        <p:txBody>
+          <a:bodyPr wrap="square" lIns="0" tIns="0" rIns="0" bIns="0" rtlCol="0" anchor="t"/>
+          <a:lstStyle/>
+          <a:p>
+            <a:pPr algn="l" indent="0" marL="0">
+              <a:lnSpc>
+                <a:spcPct val="108000"/>
+              </a:lnSpc>
+              <a:buNone/>
+            </a:pPr>
+            <a:r>
+              <a:rPr lang="en-US" sz="3200" b="1" dirty="0">
+                <a:solidFill>
+                  <a:srgbClr val="1C2230"/>
+                </a:solidFill>
+                <a:latin typeface="Arial" pitchFamily="34" charset="0"/>
+                <a:ea typeface="Arial" pitchFamily="34" charset="-122"/>
+                <a:cs typeface="Arial" pitchFamily="34" charset="-120"/>
+              </a:rPr>
+              <a:t>Weinig, want het </a:t>
+            </a:r>
+            <a:pPr algn="l" indent="0" marL="0">
+              <a:lnSpc>
+                <a:spcPct val="108000"/>
+              </a:lnSpc>
+              <a:buNone/>
+            </a:pPr>
+            <a:r>
+              <a:rPr lang="en-US" sz="3000" i="1" dirty="0">
+                <a:solidFill>
+                  <a:srgbClr val="1C2230"/>
+                </a:solidFill>
+                <a:latin typeface="Georgia" pitchFamily="34" charset="0"/>
+                <a:ea typeface="Georgia" pitchFamily="34" charset="-122"/>
+                <a:cs typeface="Georgia" pitchFamily="34" charset="-120"/>
+              </a:rPr>
+              <a:t>draait al</a:t>
+            </a:r>
+            <a:pPr algn="l" indent="0" marL="0">
+              <a:lnSpc>
+                <a:spcPct val="108000"/>
+              </a:lnSpc>
+              <a:buNone/>
+            </a:pPr>
+            <a:r>
+              <a:rPr lang="en-US" sz="3200" b="1" dirty="0">
+                <a:solidFill>
+                  <a:srgbClr val="1C2230"/>
+                </a:solidFill>
+                <a:latin typeface="Arial" pitchFamily="34" charset="0"/>
+                <a:ea typeface="Arial" pitchFamily="34" charset="-122"/>
+                <a:cs typeface="Arial" pitchFamily="34" charset="-120"/>
+              </a:rPr>
+              <a:t>.</a:t>
+            </a:r>
+            <a:endParaRPr lang="en-US" sz="3200" dirty="0"/>
+          </a:p>
+        </p:txBody>
+      </p:sp>
+      <p:sp>
+        <p:nvSpPr>
+          <p:cNvPr id="7" name="Shape 5"/>
+          <p:cNvSpPr/>
+          <p:nvPr/>
+        </p:nvSpPr>
+        <p:spPr>
+          <a:xfrm>
+            <a:off x="609598" y="2793993"/>
+            <a:ext cx="5397487" cy="1530346"/>
+          </a:xfrm>
+          <a:prstGeom prst="roundRect">
+            <a:avLst>
+              <a:gd name="adj" fmla="val 6639"/>
+            </a:avLst>
+          </a:prstGeom>
+          <a:solidFill>
+            <a:srgbClr val="F8F4EB"/>
+          </a:solidFill>
+          <a:ln/>
+        </p:spPr>
+      </p:sp>
+      <p:sp>
+        <p:nvSpPr>
+          <p:cNvPr id="8" name="Shape 6"/>
+          <p:cNvSpPr/>
+          <p:nvPr/>
+        </p:nvSpPr>
+        <p:spPr>
+          <a:xfrm>
+            <a:off x="939798" y="3098792"/>
+            <a:ext cx="380999" cy="380999"/>
+          </a:xfrm>
+          <a:prstGeom prst="roundRect">
+            <a:avLst>
+              <a:gd name="adj" fmla="val 23333"/>
+            </a:avLst>
+          </a:prstGeom>
+          <a:solidFill>
+            <a:srgbClr val="DDEBF3"/>
+          </a:solidFill>
+          <a:ln/>
+        </p:spPr>
+      </p:sp>
+      <p:pic>
+        <p:nvPicPr>
+          <p:cNvPr id="9" name="Image 0" descr="preencoded.png">    </p:cNvPr>
+          <p:cNvPicPr>
+            <a:picLocks noChangeAspect="1"/>
+          </p:cNvPicPr>
+          <p:nvPr/>
+        </p:nvPicPr>
+        <p:blipFill>
+          <a:blip r:embed="rId1"/>
+          <a:stretch>
+            <a:fillRect/>
+          </a:stretch>
+        </p:blipFill>
+        <p:spPr>
+          <a:xfrm>
+            <a:off x="1035047" y="3194042"/>
+            <a:ext cx="190500" cy="190500"/>
+          </a:xfrm>
+          <a:prstGeom prst="rect">
+            <a:avLst/>
+          </a:prstGeom>
+        </p:spPr>
+      </p:pic>
+      <p:sp>
+        <p:nvSpPr>
+          <p:cNvPr id="10" name="Text 7"/>
+          <p:cNvSpPr txBox="1"/>
+          <p:nvPr/>
+        </p:nvSpPr>
+        <p:spPr>
+          <a:xfrm>
+            <a:off x="1549396" y="3073392"/>
+            <a:ext cx="4127490" cy="279399"/>
+          </a:xfrm>
+          <a:prstGeom prst="rect">
+            <a:avLst/>
+          </a:prstGeom>
+          <a:noFill/>
+          <a:ln/>
+        </p:spPr>
+        <p:txBody>
+          <a:bodyPr wrap="square" lIns="0" tIns="0" rIns="0" bIns="0" rtlCol="0" anchor="ctr"/>
+          <a:lstStyle/>
+          <a:p>
+            <a:pPr indent="0" marL="0">
+              <a:buNone/>
+            </a:pPr>
+            <a:r>
+              <a:rPr lang="en-US" sz="1450" b="1" dirty="0">
+                <a:solidFill>
+                  <a:srgbClr val="1C2230"/>
+                </a:solidFill>
+                <a:latin typeface="Arial" pitchFamily="34" charset="0"/>
+                <a:ea typeface="Arial" pitchFamily="34" charset="-122"/>
+                <a:cs typeface="Arial" pitchFamily="34" charset="-120"/>
+              </a:rPr>
+              <a:t>Scherper profiel</a:t>
+            </a:r>
+            <a:endParaRPr lang="en-US" sz="1450" dirty="0"/>
+          </a:p>
+        </p:txBody>
+      </p:sp>
+      <p:sp>
+        <p:nvSpPr>
+          <p:cNvPr id="11" name="Text 8"/>
+          <p:cNvSpPr txBox="1"/>
+          <p:nvPr/>
+        </p:nvSpPr>
+        <p:spPr>
+          <a:xfrm>
+            <a:off x="1549396" y="3403591"/>
+            <a:ext cx="4063990" cy="698498"/>
+          </a:xfrm>
+          <a:prstGeom prst="rect">
+            <a:avLst/>
+          </a:prstGeom>
+          <a:noFill/>
+          <a:ln/>
+        </p:spPr>
+        <p:txBody>
+          <a:bodyPr wrap="square" lIns="0" tIns="0" rIns="0" bIns="0" rtlCol="0" anchor="t"/>
+          <a:lstStyle/>
+          <a:p>
+            <a:pPr indent="0" marL="0">
+              <a:lnSpc>
+                <a:spcPct val="135000"/>
+              </a:lnSpc>
+              <a:buNone/>
+            </a:pPr>
+            <a:r>
+              <a:rPr lang="en-US" sz="1050" dirty="0">
+                <a:solidFill>
+                  <a:srgbClr val="6F6A5C"/>
+                </a:solidFill>
+                <a:latin typeface="Arial" pitchFamily="34" charset="0"/>
+                <a:ea typeface="Arial" pitchFamily="34" charset="-122"/>
+                <a:cs typeface="Arial" pitchFamily="34" charset="-120"/>
+              </a:rPr>
+              <a:t>Een halfuur om de doelgroep verder aan te scherpen op wat in de pilot het beste werkte: draaiende webshop, lopende advertenties en budget.</a:t>
+            </a:r>
+            <a:endParaRPr lang="en-US" sz="1050" dirty="0"/>
+          </a:p>
+        </p:txBody>
+      </p:sp>
+      <p:sp>
+        <p:nvSpPr>
+          <p:cNvPr id="12" name="Shape 9"/>
+          <p:cNvSpPr/>
+          <p:nvPr/>
+        </p:nvSpPr>
+        <p:spPr>
+          <a:xfrm>
+            <a:off x="6184885" y="2793993"/>
+            <a:ext cx="5397487" cy="1530346"/>
+          </a:xfrm>
+          <a:prstGeom prst="roundRect">
+            <a:avLst>
+              <a:gd name="adj" fmla="val 6639"/>
+            </a:avLst>
+          </a:prstGeom>
+          <a:solidFill>
+            <a:srgbClr val="F8F4EB"/>
+          </a:solidFill>
+          <a:ln/>
+        </p:spPr>
+      </p:sp>
+      <p:sp>
+        <p:nvSpPr>
+          <p:cNvPr id="13" name="Shape 10"/>
+          <p:cNvSpPr/>
+          <p:nvPr/>
+        </p:nvSpPr>
+        <p:spPr>
+          <a:xfrm>
+            <a:off x="6515084" y="3098792"/>
+            <a:ext cx="380999" cy="380999"/>
+          </a:xfrm>
+          <a:prstGeom prst="roundRect">
+            <a:avLst>
+              <a:gd name="adj" fmla="val 23333"/>
+            </a:avLst>
+          </a:prstGeom>
+          <a:solidFill>
+            <a:srgbClr val="DDEBF3"/>
+          </a:solidFill>
+          <a:ln/>
+        </p:spPr>
+      </p:sp>
+      <p:pic>
+        <p:nvPicPr>
+          <p:cNvPr id="14" name="Image 1" descr="preencoded.png">    </p:cNvPr>
+          <p:cNvPicPr>
+            <a:picLocks noChangeAspect="1"/>
+          </p:cNvPicPr>
+          <p:nvPr/>
+        </p:nvPicPr>
+        <p:blipFill>
+          <a:blip r:embed="rId2"/>
+          <a:stretch>
+            <a:fillRect/>
+          </a:stretch>
+        </p:blipFill>
+        <p:spPr>
+          <a:xfrm>
+            <a:off x="6610333" y="3194042"/>
+            <a:ext cx="190500" cy="190500"/>
+          </a:xfrm>
+          <a:prstGeom prst="rect">
+            <a:avLst/>
+          </a:prstGeom>
+        </p:spPr>
+      </p:pic>
+      <p:sp>
+        <p:nvSpPr>
+          <p:cNvPr id="15" name="Text 11"/>
+          <p:cNvSpPr txBox="1"/>
+          <p:nvPr/>
+        </p:nvSpPr>
+        <p:spPr>
+          <a:xfrm>
+            <a:off x="7124682" y="3073392"/>
+            <a:ext cx="4127490" cy="279399"/>
+          </a:xfrm>
+          <a:prstGeom prst="rect">
+            <a:avLst/>
+          </a:prstGeom>
+          <a:noFill/>
+          <a:ln/>
+        </p:spPr>
+        <p:txBody>
+          <a:bodyPr wrap="square" lIns="0" tIns="0" rIns="0" bIns="0" rtlCol="0" anchor="ctr"/>
+          <a:lstStyle/>
+          <a:p>
+            <a:pPr indent="0" marL="0">
+              <a:buNone/>
+            </a:pPr>
+            <a:r>
+              <a:rPr lang="en-US" sz="1450" b="1" dirty="0">
+                <a:solidFill>
+                  <a:srgbClr val="1C2230"/>
+                </a:solidFill>
+                <a:latin typeface="Arial" pitchFamily="34" charset="0"/>
+                <a:ea typeface="Arial" pitchFamily="34" charset="-122"/>
+                <a:cs typeface="Arial" pitchFamily="34" charset="-120"/>
+              </a:rPr>
+              <a:t>Uitsluitlijst</a:t>
+            </a:r>
+            <a:endParaRPr lang="en-US" sz="1450" dirty="0"/>
+          </a:p>
+        </p:txBody>
+      </p:sp>
+      <p:sp>
+        <p:nvSpPr>
+          <p:cNvPr id="16" name="Text 12"/>
+          <p:cNvSpPr txBox="1"/>
+          <p:nvPr/>
+        </p:nvSpPr>
+        <p:spPr>
+          <a:xfrm>
+            <a:off x="7124682" y="3403591"/>
+            <a:ext cx="4063990" cy="698498"/>
+          </a:xfrm>
+          <a:prstGeom prst="rect">
+            <a:avLst/>
+          </a:prstGeom>
+          <a:noFill/>
+          <a:ln/>
+        </p:spPr>
+        <p:txBody>
+          <a:bodyPr wrap="square" lIns="0" tIns="0" rIns="0" bIns="0" rtlCol="0" anchor="t"/>
+          <a:lstStyle/>
+          <a:p>
+            <a:pPr indent="0" marL="0">
+              <a:lnSpc>
+                <a:spcPct val="135000"/>
+              </a:lnSpc>
+              <a:buNone/>
+            </a:pPr>
+            <a:r>
+              <a:rPr lang="en-US" sz="1050" dirty="0">
+                <a:solidFill>
+                  <a:srgbClr val="6F6A5C"/>
+                </a:solidFill>
+                <a:latin typeface="Arial" pitchFamily="34" charset="0"/>
+                <a:ea typeface="Arial" pitchFamily="34" charset="-122"/>
+                <a:cs typeface="Arial" pitchFamily="34" charset="-120"/>
+              </a:rPr>
+              <a:t>Bedrijven die al klant zijn of waar Jaap zelf al in gesprek is.</a:t>
+            </a:r>
+            <a:endParaRPr lang="en-US" sz="1050" dirty="0"/>
+          </a:p>
+        </p:txBody>
+      </p:sp>
+      <p:sp>
+        <p:nvSpPr>
+          <p:cNvPr id="17" name="Shape 13"/>
+          <p:cNvSpPr/>
+          <p:nvPr/>
+        </p:nvSpPr>
+        <p:spPr>
+          <a:xfrm>
+            <a:off x="609598" y="4502139"/>
+            <a:ext cx="5397487" cy="1530346"/>
+          </a:xfrm>
+          <a:prstGeom prst="roundRect">
+            <a:avLst>
+              <a:gd name="adj" fmla="val 6639"/>
+            </a:avLst>
+          </a:prstGeom>
+          <a:solidFill>
+            <a:srgbClr val="F8F4EB"/>
+          </a:solidFill>
+          <a:ln/>
+        </p:spPr>
+      </p:sp>
+      <p:sp>
+        <p:nvSpPr>
+          <p:cNvPr id="18" name="Shape 14"/>
+          <p:cNvSpPr/>
+          <p:nvPr/>
+        </p:nvSpPr>
+        <p:spPr>
+          <a:xfrm>
+            <a:off x="939798" y="4806938"/>
+            <a:ext cx="380999" cy="380999"/>
+          </a:xfrm>
+          <a:prstGeom prst="roundRect">
+            <a:avLst>
+              <a:gd name="adj" fmla="val 23333"/>
+            </a:avLst>
+          </a:prstGeom>
+          <a:solidFill>
+            <a:srgbClr val="DDEBF3"/>
+          </a:solidFill>
+          <a:ln/>
+        </p:spPr>
+      </p:sp>
+      <p:pic>
+        <p:nvPicPr>
+          <p:cNvPr id="19" name="Image 2" descr="preencoded.png">    </p:cNvPr>
+          <p:cNvPicPr>
+            <a:picLocks noChangeAspect="1"/>
+          </p:cNvPicPr>
+          <p:nvPr/>
+        </p:nvPicPr>
+        <p:blipFill>
+          <a:blip r:embed="rId3"/>
+          <a:stretch>
+            <a:fillRect/>
+          </a:stretch>
+        </p:blipFill>
+        <p:spPr>
+          <a:xfrm>
+            <a:off x="1035047" y="4902188"/>
+            <a:ext cx="190500" cy="190500"/>
+          </a:xfrm>
+          <a:prstGeom prst="rect">
+            <a:avLst/>
+          </a:prstGeom>
+        </p:spPr>
+      </p:pic>
+      <p:sp>
+        <p:nvSpPr>
+          <p:cNvPr id="20" name="Text 15"/>
+          <p:cNvSpPr txBox="1"/>
+          <p:nvPr/>
+        </p:nvSpPr>
+        <p:spPr>
+          <a:xfrm>
+            <a:off x="1549396" y="4781538"/>
+            <a:ext cx="4127490" cy="279399"/>
+          </a:xfrm>
+          <a:prstGeom prst="rect">
+            <a:avLst/>
+          </a:prstGeom>
+          <a:noFill/>
+          <a:ln/>
+        </p:spPr>
+        <p:txBody>
+          <a:bodyPr wrap="square" lIns="0" tIns="0" rIns="0" bIns="0" rtlCol="0" anchor="ctr"/>
+          <a:lstStyle/>
+          <a:p>
+            <a:pPr indent="0" marL="0">
+              <a:buNone/>
+            </a:pPr>
+            <a:r>
+              <a:rPr lang="en-US" sz="1450" b="1" dirty="0">
+                <a:solidFill>
+                  <a:srgbClr val="1C2230"/>
+                </a:solidFill>
+                <a:latin typeface="Arial" pitchFamily="34" charset="0"/>
+                <a:ea typeface="Arial" pitchFamily="34" charset="-122"/>
+                <a:cs typeface="Arial" pitchFamily="34" charset="-120"/>
+              </a:rPr>
+              <a:t>Terugkoppeling op afspraken</a:t>
+            </a:r>
+            <a:endParaRPr lang="en-US" sz="1450" dirty="0"/>
+          </a:p>
+        </p:txBody>
+      </p:sp>
+      <p:sp>
+        <p:nvSpPr>
+          <p:cNvPr id="21" name="Text 16"/>
+          <p:cNvSpPr txBox="1"/>
+          <p:nvPr/>
+        </p:nvSpPr>
+        <p:spPr>
+          <a:xfrm>
+            <a:off x="1549396" y="5111737"/>
+            <a:ext cx="4063990" cy="698498"/>
+          </a:xfrm>
+          <a:prstGeom prst="rect">
+            <a:avLst/>
+          </a:prstGeom>
+          <a:noFill/>
+          <a:ln/>
+        </p:spPr>
+        <p:txBody>
+          <a:bodyPr wrap="square" lIns="0" tIns="0" rIns="0" bIns="0" rtlCol="0" anchor="t"/>
+          <a:lstStyle/>
+          <a:p>
+            <a:pPr indent="0" marL="0">
+              <a:lnSpc>
+                <a:spcPct val="135000"/>
+              </a:lnSpc>
+              <a:buNone/>
+            </a:pPr>
+            <a:r>
+              <a:rPr lang="en-US" sz="1050" dirty="0">
+                <a:solidFill>
+                  <a:srgbClr val="6F6A5C"/>
+                </a:solidFill>
+                <a:latin typeface="Arial" pitchFamily="34" charset="0"/>
+                <a:ea typeface="Arial" pitchFamily="34" charset="-122"/>
+                <a:cs typeface="Arial" pitchFamily="34" charset="-120"/>
+              </a:rPr>
+              <a:t>Kort laten weten hoe een afspraak verliep, zodat we de kwalificatie blijven bijstellen.</a:t>
+            </a:r>
+            <a:endParaRPr lang="en-US" sz="1050" dirty="0"/>
+          </a:p>
+        </p:txBody>
+      </p:sp>
+      <p:sp>
+        <p:nvSpPr>
+          <p:cNvPr id="22" name="Shape 17"/>
+          <p:cNvSpPr/>
+          <p:nvPr/>
+        </p:nvSpPr>
+        <p:spPr>
+          <a:xfrm>
+            <a:off x="6184885" y="4502139"/>
+            <a:ext cx="5397487" cy="1530346"/>
+          </a:xfrm>
+          <a:prstGeom prst="roundRect">
+            <a:avLst>
+              <a:gd name="adj" fmla="val 6639"/>
+            </a:avLst>
+          </a:prstGeom>
+          <a:solidFill>
+            <a:srgbClr val="F8F4EB"/>
+          </a:solidFill>
+          <a:ln/>
+        </p:spPr>
+      </p:sp>
+      <p:sp>
+        <p:nvSpPr>
+          <p:cNvPr id="23" name="Shape 18"/>
+          <p:cNvSpPr/>
+          <p:nvPr/>
+        </p:nvSpPr>
+        <p:spPr>
+          <a:xfrm>
+            <a:off x="6515084" y="4806938"/>
+            <a:ext cx="380999" cy="380999"/>
+          </a:xfrm>
+          <a:prstGeom prst="roundRect">
+            <a:avLst>
+              <a:gd name="adj" fmla="val 23333"/>
+            </a:avLst>
+          </a:prstGeom>
+          <a:solidFill>
+            <a:srgbClr val="DDEBF3"/>
+          </a:solidFill>
+          <a:ln/>
+        </p:spPr>
+      </p:sp>
+      <p:pic>
+        <p:nvPicPr>
+          <p:cNvPr id="24" name="Image 3" descr="preencoded.png">    </p:cNvPr>
+          <p:cNvPicPr>
+            <a:picLocks noChangeAspect="1"/>
+          </p:cNvPicPr>
+          <p:nvPr/>
+        </p:nvPicPr>
+        <p:blipFill>
+          <a:blip r:embed="rId4"/>
+          <a:stretch>
+            <a:fillRect/>
+          </a:stretch>
+        </p:blipFill>
+        <p:spPr>
+          <a:xfrm>
+            <a:off x="6610333" y="4902188"/>
+            <a:ext cx="190500" cy="190500"/>
+          </a:xfrm>
+          <a:prstGeom prst="rect">
+            <a:avLst/>
+          </a:prstGeom>
+        </p:spPr>
+      </p:pic>
+      <p:sp>
+        <p:nvSpPr>
+          <p:cNvPr id="25" name="Text 19"/>
+          <p:cNvSpPr txBox="1"/>
+          <p:nvPr/>
+        </p:nvSpPr>
+        <p:spPr>
+          <a:xfrm>
+            <a:off x="7124682" y="4781538"/>
+            <a:ext cx="4127490" cy="279399"/>
+          </a:xfrm>
+          <a:prstGeom prst="rect">
+            <a:avLst/>
+          </a:prstGeom>
+          <a:noFill/>
+          <a:ln/>
+        </p:spPr>
+        <p:txBody>
+          <a:bodyPr wrap="square" lIns="0" tIns="0" rIns="0" bIns="0" rtlCol="0" anchor="ctr"/>
+          <a:lstStyle/>
+          <a:p>
+            <a:pPr indent="0" marL="0">
+              <a:buNone/>
+            </a:pPr>
+            <a:r>
+              <a:rPr lang="en-US" sz="1450" b="1" dirty="0">
+                <a:solidFill>
+                  <a:srgbClr val="1C2230"/>
+                </a:solidFill>
+                <a:latin typeface="Arial" pitchFamily="34" charset="0"/>
+                <a:ea typeface="Arial" pitchFamily="34" charset="-122"/>
+                <a:cs typeface="Arial" pitchFamily="34" charset="-120"/>
+              </a:rPr>
+              <a:t>Opvolging van afspraken</a:t>
+            </a:r>
+            <a:endParaRPr lang="en-US" sz="1450" dirty="0"/>
+          </a:p>
+        </p:txBody>
+      </p:sp>
+      <p:sp>
+        <p:nvSpPr>
+          <p:cNvPr id="26" name="Text 20"/>
+          <p:cNvSpPr txBox="1"/>
+          <p:nvPr/>
+        </p:nvSpPr>
+        <p:spPr>
+          <a:xfrm>
+            <a:off x="7124682" y="5111737"/>
+            <a:ext cx="4063990" cy="698498"/>
+          </a:xfrm>
+          <a:prstGeom prst="rect">
+            <a:avLst/>
+          </a:prstGeom>
+          <a:noFill/>
+          <a:ln/>
+        </p:spPr>
+        <p:txBody>
+          <a:bodyPr wrap="square" lIns="0" tIns="0" rIns="0" bIns="0" rtlCol="0" anchor="t"/>
+          <a:lstStyle/>
+          <a:p>
+            <a:pPr indent="0" marL="0">
+              <a:lnSpc>
+                <a:spcPct val="135000"/>
+              </a:lnSpc>
+              <a:buNone/>
+            </a:pPr>
+            <a:r>
+              <a:rPr lang="en-US" sz="1050" dirty="0">
+                <a:solidFill>
+                  <a:srgbClr val="6F6A5C"/>
+                </a:solidFill>
+                <a:latin typeface="Arial" pitchFamily="34" charset="0"/>
+                <a:ea typeface="Arial" pitchFamily="34" charset="-122"/>
+                <a:cs typeface="Arial" pitchFamily="34" charset="-120"/>
+              </a:rPr>
+              <a:t>Eén vaste persoon bij GrowOn die de afspraken voert. Tot nu toe is dat Jaap zelf.</a:t>
+            </a:r>
+            <a:endParaRPr lang="en-US" sz="1050" dirty="0"/>
+          </a:p>
+        </p:txBody>
+      </p:sp>
+    </p:spTree>
+  </p:cSld>
+  <p:clrMapOvr>
+    <a:masterClrMapping/>
+  </p:clrMapOvr>
+</p:sld>
+</file>
+
+<file path=ppt/slides/slide13.xml><?xml version="1.0" encoding="utf-8"?>
+<p:sld xmlns:a="http://schemas.openxmlformats.org/drawingml/2006/main" xmlns:r="http://schemas.openxmlformats.org/officeDocument/2006/relationships" xmlns:p="http://schemas.openxmlformats.org/presentationml/2006/main">
+  <p:cSld name="Slide 13">
+    <p:bg>
+      <p:bgPr>
+        <a:solidFill>
+          <a:srgbClr val="E9E0CD"/>
+        </a:solidFill>
+      </p:bgPr>
+    </p:bg>
+    <p:spTree>
+      <p:nvGrpSpPr>
+        <p:cNvPr id="1" name=""/>
+        <p:cNvGrpSpPr/>
+        <p:nvPr/>
+      </p:nvGrpSpPr>
+      <p:grpSpPr>
+        <a:xfrm>
+          <a:off x="0" y="0"/>
+          <a:ext cx="0" cy="0"/>
+          <a:chOff x="0" y="0"/>
+          <a:chExt cx="0" cy="0"/>
+        </a:xfrm>
+      </p:grpSpPr>
+      <p:sp>
+        <p:nvSpPr>
+          <p:cNvPr id="2" name="Text 0"/>
+          <p:cNvSpPr txBox="1"/>
+          <p:nvPr/>
+        </p:nvSpPr>
+        <p:spPr>
+          <a:xfrm>
+            <a:off x="596899" y="368299"/>
+            <a:ext cx="1904995" cy="330199"/>
+          </a:xfrm>
+          <a:prstGeom prst="rect">
+            <a:avLst/>
+          </a:prstGeom>
+          <a:noFill/>
+          <a:ln/>
+        </p:spPr>
+        <p:txBody>
+          <a:bodyPr wrap="square" lIns="0" tIns="0" rIns="0" bIns="0" rtlCol="0" anchor="ctr"/>
+          <a:lstStyle/>
+          <a:p>
+            <a:pPr algn="l" indent="0" marL="0">
+              <a:buNone/>
+            </a:pPr>
+            <a:r>
+              <a:rPr lang="en-US" sz="1800" b="1" dirty="0">
+                <a:solidFill>
+                  <a:srgbClr val="1C2230"/>
+                </a:solidFill>
+                <a:latin typeface="Arial" pitchFamily="34" charset="0"/>
+                <a:ea typeface="Arial" pitchFamily="34" charset="-122"/>
+                <a:cs typeface="Arial" pitchFamily="34" charset="-120"/>
+              </a:rPr>
+              <a:t>LINK</a:t>
+            </a:r>
+            <a:pPr algn="l" indent="0" marL="0">
+              <a:buNone/>
+            </a:pPr>
+            <a:r>
+              <a:rPr lang="en-US" sz="1800" b="1" dirty="0">
+                <a:solidFill>
+                  <a:srgbClr val="38B6FF"/>
+                </a:solidFill>
+                <a:latin typeface="Arial" pitchFamily="34" charset="0"/>
+                <a:ea typeface="Arial" pitchFamily="34" charset="-122"/>
+                <a:cs typeface="Arial" pitchFamily="34" charset="-120"/>
+              </a:rPr>
+              <a:t>.</a:t>
+            </a:r>
+            <a:endParaRPr lang="en-US" sz="1800" dirty="0"/>
+          </a:p>
+        </p:txBody>
+      </p:sp>
+      <p:sp>
+        <p:nvSpPr>
+          <p:cNvPr id="3" name="Text 1"/>
+          <p:cNvSpPr txBox="1"/>
+          <p:nvPr/>
+        </p:nvSpPr>
+        <p:spPr>
+          <a:xfrm>
+            <a:off x="609598" y="6381734"/>
+            <a:ext cx="5714986" cy="228599"/>
+          </a:xfrm>
+          <a:prstGeom prst="rect">
+            <a:avLst/>
+          </a:prstGeom>
+          <a:noFill/>
+          <a:ln/>
+        </p:spPr>
+        <p:txBody>
+          <a:bodyPr wrap="square" lIns="0" tIns="0" rIns="0" bIns="0" rtlCol="0" anchor="ctr"/>
+          <a:lstStyle/>
+          <a:p>
+            <a:pPr algn="l" indent="0" marL="0">
+              <a:buNone/>
+            </a:pPr>
+            <a:r>
+              <a:rPr lang="en-US" sz="750" b="1" spc="100" kern="0" dirty="0">
+                <a:solidFill>
+                  <a:srgbClr val="6F6A5C"/>
+                </a:solidFill>
+                <a:latin typeface="Arial" pitchFamily="34" charset="0"/>
+                <a:ea typeface="Arial" pitchFamily="34" charset="-122"/>
+                <a:cs typeface="Arial" pitchFamily="34" charset="-120"/>
+              </a:rPr>
+              <a:t>LINK. · Voorstel GrowOn Agency</a:t>
+            </a:r>
+            <a:endParaRPr lang="en-US" sz="750" dirty="0"/>
+          </a:p>
+        </p:txBody>
+      </p:sp>
+      <p:sp>
+        <p:nvSpPr>
+          <p:cNvPr id="4" name="Text 2"/>
+          <p:cNvSpPr txBox="1"/>
+          <p:nvPr/>
+        </p:nvSpPr>
+        <p:spPr>
+          <a:xfrm>
+            <a:off x="9677376" y="6381734"/>
+            <a:ext cx="1904995" cy="228599"/>
+          </a:xfrm>
+          <a:prstGeom prst="rect">
+            <a:avLst/>
+          </a:prstGeom>
+          <a:noFill/>
+          <a:ln/>
+        </p:spPr>
+        <p:txBody>
+          <a:bodyPr wrap="square" lIns="0" tIns="0" rIns="0" bIns="0" rtlCol="0" anchor="ctr"/>
+          <a:lstStyle/>
+          <a:p>
+            <a:pPr algn="r" indent="0" marL="0">
+              <a:buNone/>
+            </a:pPr>
+            <a:r>
+              <a:rPr lang="en-US" sz="750" b="1" spc="100" kern="0" dirty="0">
+                <a:solidFill>
+                  <a:srgbClr val="6F6A5C"/>
+                </a:solidFill>
+                <a:latin typeface="Arial" pitchFamily="34" charset="0"/>
+                <a:ea typeface="Arial" pitchFamily="34" charset="-122"/>
+                <a:cs typeface="Arial" pitchFamily="34" charset="-120"/>
+              </a:rPr>
+              <a:t>13 / 14</a:t>
+            </a:r>
+            <a:endParaRPr lang="en-US" sz="750" dirty="0"/>
+          </a:p>
+        </p:txBody>
+      </p:sp>
+      <p:sp>
+        <p:nvSpPr>
+          <p:cNvPr id="5" name="Text 3"/>
+          <p:cNvSpPr txBox="1"/>
+          <p:nvPr/>
+        </p:nvSpPr>
+        <p:spPr>
+          <a:xfrm>
+            <a:off x="609598" y="1206497"/>
+            <a:ext cx="10159975" cy="215899"/>
+          </a:xfrm>
+          <a:prstGeom prst="rect">
+            <a:avLst/>
+          </a:prstGeom>
+          <a:noFill/>
+          <a:ln/>
+        </p:spPr>
+        <p:txBody>
+          <a:bodyPr wrap="square" lIns="0" tIns="0" rIns="0" bIns="0" rtlCol="0" anchor="ctr"/>
+          <a:lstStyle/>
+          <a:p>
+            <a:pPr algn="l" indent="0" marL="0">
+              <a:buNone/>
+            </a:pPr>
+            <a:r>
+              <a:rPr lang="en-US" sz="950" b="1" spc="400" kern="0" dirty="0">
+                <a:solidFill>
+                  <a:srgbClr val="38B6FF"/>
+                </a:solidFill>
+                <a:latin typeface="Arial" pitchFamily="34" charset="0"/>
+                <a:ea typeface="Arial" pitchFamily="34" charset="-122"/>
+                <a:cs typeface="Arial" pitchFamily="34" charset="-120"/>
+              </a:rPr>
+              <a:t>SPELREGELS</a:t>
+            </a:r>
+            <a:endParaRPr lang="en-US" sz="950" dirty="0"/>
+          </a:p>
+        </p:txBody>
+      </p:sp>
+      <p:sp>
+        <p:nvSpPr>
+          <p:cNvPr id="6" name="Text 4"/>
+          <p:cNvSpPr txBox="1"/>
+          <p:nvPr/>
+        </p:nvSpPr>
+        <p:spPr>
+          <a:xfrm>
+            <a:off x="609598" y="1511296"/>
+            <a:ext cx="10972773" cy="1142997"/>
+          </a:xfrm>
+          <a:prstGeom prst="rect">
+            <a:avLst/>
+          </a:prstGeom>
+          <a:noFill/>
+          <a:ln/>
+        </p:spPr>
+        <p:txBody>
+          <a:bodyPr wrap="square" lIns="0" tIns="0" rIns="0" bIns="0" rtlCol="0" anchor="t"/>
+          <a:lstStyle/>
+          <a:p>
+            <a:pPr algn="l" indent="0" marL="0">
+              <a:lnSpc>
+                <a:spcPct val="108000"/>
+              </a:lnSpc>
+              <a:buNone/>
+            </a:pPr>
+            <a:r>
+              <a:rPr lang="en-US" sz="3200" b="1" dirty="0">
+                <a:solidFill>
+                  <a:srgbClr val="1C2230"/>
+                </a:solidFill>
+                <a:latin typeface="Arial" pitchFamily="34" charset="0"/>
+                <a:ea typeface="Arial" pitchFamily="34" charset="-122"/>
+                <a:cs typeface="Arial" pitchFamily="34" charset="-120"/>
+              </a:rPr>
+              <a:t>Transparant en zonder </a:t>
+            </a:r>
+            <a:pPr algn="l" indent="0" marL="0">
+              <a:lnSpc>
+                <a:spcPct val="108000"/>
+              </a:lnSpc>
+              <a:buNone/>
+            </a:pPr>
+            <a:r>
+              <a:rPr lang="en-US" sz="3000" i="1" dirty="0">
+                <a:solidFill>
+                  <a:srgbClr val="1C2230"/>
+                </a:solidFill>
+                <a:latin typeface="Georgia" pitchFamily="34" charset="0"/>
+                <a:ea typeface="Georgia" pitchFamily="34" charset="-122"/>
+                <a:cs typeface="Georgia" pitchFamily="34" charset="-120"/>
+              </a:rPr>
+              <a:t>kleine lettertjes</a:t>
+            </a:r>
+            <a:pPr algn="l" indent="0" marL="0">
+              <a:lnSpc>
+                <a:spcPct val="108000"/>
+              </a:lnSpc>
+              <a:buNone/>
+            </a:pPr>
+            <a:r>
+              <a:rPr lang="en-US" sz="3200" b="1" dirty="0">
+                <a:solidFill>
+                  <a:srgbClr val="1C2230"/>
+                </a:solidFill>
+                <a:latin typeface="Arial" pitchFamily="34" charset="0"/>
+                <a:ea typeface="Arial" pitchFamily="34" charset="-122"/>
+                <a:cs typeface="Arial" pitchFamily="34" charset="-120"/>
+              </a:rPr>
+              <a:t>.</a:t>
+            </a:r>
+            <a:endParaRPr lang="en-US" sz="3200" dirty="0"/>
+          </a:p>
+        </p:txBody>
+      </p:sp>
+      <p:sp>
+        <p:nvSpPr>
+          <p:cNvPr id="7" name="Shape 5"/>
+          <p:cNvSpPr/>
+          <p:nvPr/>
+        </p:nvSpPr>
+        <p:spPr>
+          <a:xfrm>
+            <a:off x="609598" y="2819393"/>
+            <a:ext cx="253999" cy="253999"/>
+          </a:xfrm>
+          <a:prstGeom prst="roundRect">
+            <a:avLst>
+              <a:gd name="adj" fmla="val 25000"/>
+            </a:avLst>
+          </a:prstGeom>
+          <a:solidFill>
+            <a:srgbClr val="DDEBF3"/>
+          </a:solidFill>
+          <a:ln/>
+        </p:spPr>
+      </p:sp>
+      <p:pic>
+        <p:nvPicPr>
+          <p:cNvPr id="8" name="Image 0" descr="preencoded.png">    </p:cNvPr>
+          <p:cNvPicPr>
+            <a:picLocks noChangeAspect="1"/>
+          </p:cNvPicPr>
+          <p:nvPr/>
+        </p:nvPicPr>
+        <p:blipFill>
+          <a:blip r:embed="rId1"/>
+          <a:stretch>
+            <a:fillRect/>
+          </a:stretch>
+        </p:blipFill>
+        <p:spPr>
+          <a:xfrm>
+            <a:off x="666748" y="2876543"/>
+            <a:ext cx="139700" cy="139700"/>
+          </a:xfrm>
+          <a:prstGeom prst="rect">
+            <a:avLst/>
+          </a:prstGeom>
+        </p:spPr>
+      </p:pic>
+      <p:sp>
+        <p:nvSpPr>
+          <p:cNvPr id="9" name="Text 6"/>
+          <p:cNvSpPr txBox="1"/>
+          <p:nvPr/>
+        </p:nvSpPr>
+        <p:spPr>
+          <a:xfrm>
+            <a:off x="1015997" y="2793993"/>
+            <a:ext cx="4825988" cy="228599"/>
+          </a:xfrm>
+          <a:prstGeom prst="rect">
+            <a:avLst/>
+          </a:prstGeom>
+          <a:noFill/>
+          <a:ln/>
+        </p:spPr>
+        <p:txBody>
+          <a:bodyPr wrap="square" lIns="0" tIns="0" rIns="0" bIns="0" rtlCol="0" anchor="ctr"/>
+          <a:lstStyle/>
+          <a:p>
+            <a:pPr indent="0" marL="0">
+              <a:buNone/>
+            </a:pPr>
+            <a:r>
+              <a:rPr lang="en-US" sz="1200" b="1" dirty="0">
+                <a:solidFill>
+                  <a:srgbClr val="1C2230"/>
+                </a:solidFill>
+                <a:latin typeface="Arial" pitchFamily="34" charset="0"/>
+                <a:ea typeface="Arial" pitchFamily="34" charset="-122"/>
+                <a:cs typeface="Arial" pitchFamily="34" charset="-120"/>
+              </a:rPr>
+              <a:t>Werkperiodes van 4 weken</a:t>
+            </a:r>
+            <a:endParaRPr lang="en-US" sz="1200" dirty="0"/>
+          </a:p>
+        </p:txBody>
+      </p:sp>
+      <p:sp>
+        <p:nvSpPr>
+          <p:cNvPr id="10" name="Text 7"/>
+          <p:cNvSpPr txBox="1"/>
+          <p:nvPr/>
+        </p:nvSpPr>
+        <p:spPr>
+          <a:xfrm>
+            <a:off x="1015997" y="3035292"/>
+            <a:ext cx="4825988" cy="355599"/>
+          </a:xfrm>
+          <a:prstGeom prst="rect">
+            <a:avLst/>
+          </a:prstGeom>
+          <a:noFill/>
+          <a:ln/>
+        </p:spPr>
+        <p:txBody>
+          <a:bodyPr wrap="square" lIns="0" tIns="0" rIns="0" bIns="0" rtlCol="0" anchor="t"/>
+          <a:lstStyle/>
+          <a:p>
+            <a:pPr indent="0" marL="0">
+              <a:lnSpc>
+                <a:spcPct val="130000"/>
+              </a:lnSpc>
+              <a:buNone/>
+            </a:pPr>
+            <a:r>
+              <a:rPr lang="en-US" sz="950" dirty="0">
+                <a:solidFill>
+                  <a:srgbClr val="6F6A5C"/>
+                </a:solidFill>
+                <a:latin typeface="Arial" pitchFamily="34" charset="0"/>
+                <a:ea typeface="Arial" pitchFamily="34" charset="-122"/>
+                <a:cs typeface="Arial" pitchFamily="34" charset="-120"/>
+              </a:rPr>
+              <a:t>Vooraf gefactureerd, per werkperiode. Geen nacalculatie achteraf.</a:t>
+            </a:r>
+            <a:endParaRPr lang="en-US" sz="950" dirty="0"/>
+          </a:p>
+        </p:txBody>
+      </p:sp>
+      <p:sp>
+        <p:nvSpPr>
+          <p:cNvPr id="11" name="Shape 8"/>
+          <p:cNvSpPr/>
+          <p:nvPr/>
+        </p:nvSpPr>
+        <p:spPr>
+          <a:xfrm>
+            <a:off x="6349984" y="2819393"/>
+            <a:ext cx="253999" cy="253999"/>
+          </a:xfrm>
+          <a:prstGeom prst="roundRect">
+            <a:avLst>
+              <a:gd name="adj" fmla="val 25000"/>
+            </a:avLst>
+          </a:prstGeom>
+          <a:solidFill>
+            <a:srgbClr val="DDEBF3"/>
+          </a:solidFill>
+          <a:ln/>
+        </p:spPr>
+      </p:sp>
+      <p:pic>
+        <p:nvPicPr>
+          <p:cNvPr id="12" name="Image 1" descr="preencoded.png">    </p:cNvPr>
+          <p:cNvPicPr>
+            <a:picLocks noChangeAspect="1"/>
+          </p:cNvPicPr>
+          <p:nvPr/>
+        </p:nvPicPr>
+        <p:blipFill>
+          <a:blip r:embed="rId2"/>
+          <a:stretch>
+            <a:fillRect/>
+          </a:stretch>
+        </p:blipFill>
+        <p:spPr>
+          <a:xfrm>
+            <a:off x="6407134" y="2876543"/>
+            <a:ext cx="139700" cy="139700"/>
+          </a:xfrm>
+          <a:prstGeom prst="rect">
+            <a:avLst/>
+          </a:prstGeom>
+        </p:spPr>
+      </p:pic>
+      <p:sp>
+        <p:nvSpPr>
+          <p:cNvPr id="13" name="Text 9"/>
+          <p:cNvSpPr txBox="1"/>
+          <p:nvPr/>
+        </p:nvSpPr>
+        <p:spPr>
+          <a:xfrm>
+            <a:off x="6756383" y="2793993"/>
+            <a:ext cx="4825988" cy="228599"/>
+          </a:xfrm>
+          <a:prstGeom prst="rect">
+            <a:avLst/>
+          </a:prstGeom>
+          <a:noFill/>
+          <a:ln/>
+        </p:spPr>
+        <p:txBody>
+          <a:bodyPr wrap="square" lIns="0" tIns="0" rIns="0" bIns="0" rtlCol="0" anchor="ctr"/>
+          <a:lstStyle/>
+          <a:p>
+            <a:pPr indent="0" marL="0">
+              <a:buNone/>
+            </a:pPr>
+            <a:r>
+              <a:rPr lang="en-US" sz="1200" b="1" dirty="0">
+                <a:solidFill>
+                  <a:srgbClr val="1C2230"/>
+                </a:solidFill>
+                <a:latin typeface="Arial" pitchFamily="34" charset="0"/>
+                <a:ea typeface="Arial" pitchFamily="34" charset="-122"/>
+                <a:cs typeface="Arial" pitchFamily="34" charset="-120"/>
+              </a:rPr>
+              <a:t>Target van 2 afspraken per beldag</a:t>
+            </a:r>
+            <a:endParaRPr lang="en-US" sz="1200" dirty="0"/>
+          </a:p>
+        </p:txBody>
+      </p:sp>
+      <p:sp>
+        <p:nvSpPr>
+          <p:cNvPr id="14" name="Text 10"/>
+          <p:cNvSpPr txBox="1"/>
+          <p:nvPr/>
+        </p:nvSpPr>
+        <p:spPr>
+          <a:xfrm>
+            <a:off x="6756383" y="3035292"/>
+            <a:ext cx="4825988" cy="355599"/>
+          </a:xfrm>
+          <a:prstGeom prst="rect">
+            <a:avLst/>
+          </a:prstGeom>
+          <a:noFill/>
+          <a:ln/>
+        </p:spPr>
+        <p:txBody>
+          <a:bodyPr wrap="square" lIns="0" tIns="0" rIns="0" bIns="0" rtlCol="0" anchor="t"/>
+          <a:lstStyle/>
+          <a:p>
+            <a:pPr indent="0" marL="0">
+              <a:lnSpc>
+                <a:spcPct val="130000"/>
+              </a:lnSpc>
+              <a:buNone/>
+            </a:pPr>
+            <a:r>
+              <a:rPr lang="en-US" sz="950" dirty="0">
+                <a:solidFill>
+                  <a:srgbClr val="6F6A5C"/>
+                </a:solidFill>
+                <a:latin typeface="Arial" pitchFamily="34" charset="0"/>
+                <a:ea typeface="Arial" pitchFamily="34" charset="-122"/>
+                <a:cs typeface="Arial" pitchFamily="34" charset="-120"/>
+              </a:rPr>
+              <a:t>Het getal uit jullie eigen pilot. Daar sturen wij op en daar belonen wij onze bellers op.</a:t>
+            </a:r>
+            <a:endParaRPr lang="en-US" sz="950" dirty="0"/>
+          </a:p>
+        </p:txBody>
+      </p:sp>
+      <p:sp>
+        <p:nvSpPr>
+          <p:cNvPr id="15" name="Shape 11"/>
+          <p:cNvSpPr/>
+          <p:nvPr/>
+        </p:nvSpPr>
+        <p:spPr>
+          <a:xfrm>
+            <a:off x="609598" y="3428991"/>
+            <a:ext cx="5232387" cy="0"/>
+          </a:xfrm>
+          <a:prstGeom prst="line">
+            <a:avLst/>
+          </a:prstGeom>
+          <a:noFill/>
+          <a:ln w="6350">
+            <a:solidFill>
+              <a:srgbClr val="C9C2B2"/>
+            </a:solidFill>
+            <a:prstDash val="solid"/>
+          </a:ln>
+        </p:spPr>
+      </p:sp>
+      <p:sp>
+        <p:nvSpPr>
+          <p:cNvPr id="16" name="Shape 12"/>
+          <p:cNvSpPr/>
+          <p:nvPr/>
+        </p:nvSpPr>
+        <p:spPr>
+          <a:xfrm>
+            <a:off x="609598" y="3530591"/>
+            <a:ext cx="253999" cy="253999"/>
+          </a:xfrm>
+          <a:prstGeom prst="roundRect">
+            <a:avLst>
+              <a:gd name="adj" fmla="val 25000"/>
+            </a:avLst>
+          </a:prstGeom>
+          <a:solidFill>
+            <a:srgbClr val="DDEBF3"/>
+          </a:solidFill>
+          <a:ln/>
+        </p:spPr>
+      </p:sp>
+      <p:pic>
+        <p:nvPicPr>
+          <p:cNvPr id="17" name="Image 2" descr="preencoded.png">    </p:cNvPr>
+          <p:cNvPicPr>
+            <a:picLocks noChangeAspect="1"/>
+          </p:cNvPicPr>
+          <p:nvPr/>
+        </p:nvPicPr>
+        <p:blipFill>
+          <a:blip r:embed="rId3"/>
+          <a:stretch>
+            <a:fillRect/>
+          </a:stretch>
+        </p:blipFill>
+        <p:spPr>
+          <a:xfrm>
+            <a:off x="666748" y="3587741"/>
+            <a:ext cx="139700" cy="139700"/>
+          </a:xfrm>
+          <a:prstGeom prst="rect">
+            <a:avLst/>
+          </a:prstGeom>
+        </p:spPr>
+      </p:pic>
+      <p:sp>
+        <p:nvSpPr>
+          <p:cNvPr id="18" name="Text 13"/>
+          <p:cNvSpPr txBox="1"/>
+          <p:nvPr/>
+        </p:nvSpPr>
+        <p:spPr>
+          <a:xfrm>
+            <a:off x="1015997" y="3505191"/>
+            <a:ext cx="4825988" cy="228599"/>
+          </a:xfrm>
+          <a:prstGeom prst="rect">
+            <a:avLst/>
+          </a:prstGeom>
+          <a:noFill/>
+          <a:ln/>
+        </p:spPr>
+        <p:txBody>
+          <a:bodyPr wrap="square" lIns="0" tIns="0" rIns="0" bIns="0" rtlCol="0" anchor="ctr"/>
+          <a:lstStyle/>
+          <a:p>
+            <a:pPr indent="0" marL="0">
+              <a:buNone/>
+            </a:pPr>
+            <a:r>
+              <a:rPr lang="en-US" sz="1200" b="1" dirty="0">
+                <a:solidFill>
+                  <a:srgbClr val="1C2230"/>
+                </a:solidFill>
+                <a:latin typeface="Arial" pitchFamily="34" charset="0"/>
+                <a:ea typeface="Arial" pitchFamily="34" charset="-122"/>
+                <a:cs typeface="Arial" pitchFamily="34" charset="-120"/>
+              </a:rPr>
+              <a:t>Inhaaldag als we eronder blijven</a:t>
+            </a:r>
+            <a:endParaRPr lang="en-US" sz="1200" dirty="0"/>
+          </a:p>
+        </p:txBody>
+      </p:sp>
+      <p:sp>
+        <p:nvSpPr>
+          <p:cNvPr id="19" name="Text 14"/>
+          <p:cNvSpPr txBox="1"/>
+          <p:nvPr/>
+        </p:nvSpPr>
+        <p:spPr>
+          <a:xfrm>
+            <a:off x="1015997" y="3746491"/>
+            <a:ext cx="4825988" cy="355599"/>
+          </a:xfrm>
+          <a:prstGeom prst="rect">
+            <a:avLst/>
+          </a:prstGeom>
+          <a:noFill/>
+          <a:ln/>
+        </p:spPr>
+        <p:txBody>
+          <a:bodyPr wrap="square" lIns="0" tIns="0" rIns="0" bIns="0" rtlCol="0" anchor="t"/>
+          <a:lstStyle/>
+          <a:p>
+            <a:pPr indent="0" marL="0">
+              <a:lnSpc>
+                <a:spcPct val="130000"/>
+              </a:lnSpc>
+              <a:buNone/>
+            </a:pPr>
+            <a:r>
+              <a:rPr lang="en-US" sz="950" dirty="0">
+                <a:solidFill>
+                  <a:srgbClr val="6F6A5C"/>
+                </a:solidFill>
+                <a:latin typeface="Arial" pitchFamily="34" charset="0"/>
+                <a:ea typeface="Arial" pitchFamily="34" charset="-122"/>
+                <a:cs typeface="Arial" pitchFamily="34" charset="-120"/>
+              </a:rPr>
+              <a:t>Maximaal een extra beldag per werkperiode, zonder dat die op de rekening komt.</a:t>
+            </a:r>
+            <a:endParaRPr lang="en-US" sz="950" dirty="0"/>
+          </a:p>
+        </p:txBody>
+      </p:sp>
+      <p:sp>
+        <p:nvSpPr>
+          <p:cNvPr id="20" name="Shape 15"/>
+          <p:cNvSpPr/>
+          <p:nvPr/>
+        </p:nvSpPr>
+        <p:spPr>
+          <a:xfrm>
+            <a:off x="6349984" y="3428991"/>
+            <a:ext cx="5232387" cy="0"/>
+          </a:xfrm>
+          <a:prstGeom prst="line">
+            <a:avLst/>
+          </a:prstGeom>
+          <a:noFill/>
+          <a:ln w="6350">
+            <a:solidFill>
+              <a:srgbClr val="C9C2B2"/>
+            </a:solidFill>
+            <a:prstDash val="solid"/>
+          </a:ln>
+        </p:spPr>
+      </p:sp>
+      <p:sp>
+        <p:nvSpPr>
+          <p:cNvPr id="21" name="Shape 16"/>
+          <p:cNvSpPr/>
+          <p:nvPr/>
+        </p:nvSpPr>
+        <p:spPr>
+          <a:xfrm>
+            <a:off x="6349984" y="3530591"/>
+            <a:ext cx="253999" cy="253999"/>
+          </a:xfrm>
+          <a:prstGeom prst="roundRect">
+            <a:avLst>
+              <a:gd name="adj" fmla="val 25000"/>
+            </a:avLst>
+          </a:prstGeom>
+          <a:solidFill>
+            <a:srgbClr val="DDEBF3"/>
+          </a:solidFill>
+          <a:ln/>
+        </p:spPr>
+      </p:sp>
+      <p:pic>
+        <p:nvPicPr>
+          <p:cNvPr id="22" name="Image 3" descr="preencoded.png">    </p:cNvPr>
+          <p:cNvPicPr>
+            <a:picLocks noChangeAspect="1"/>
+          </p:cNvPicPr>
+          <p:nvPr/>
+        </p:nvPicPr>
+        <p:blipFill>
+          <a:blip r:embed="rId4"/>
+          <a:stretch>
+            <a:fillRect/>
+          </a:stretch>
+        </p:blipFill>
+        <p:spPr>
+          <a:xfrm>
+            <a:off x="6407134" y="3587741"/>
+            <a:ext cx="139700" cy="139700"/>
+          </a:xfrm>
+          <a:prstGeom prst="rect">
+            <a:avLst/>
+          </a:prstGeom>
+        </p:spPr>
+      </p:pic>
+      <p:sp>
+        <p:nvSpPr>
+          <p:cNvPr id="23" name="Text 17"/>
+          <p:cNvSpPr txBox="1"/>
+          <p:nvPr/>
+        </p:nvSpPr>
+        <p:spPr>
+          <a:xfrm>
+            <a:off x="6756383" y="3505191"/>
+            <a:ext cx="4825988" cy="228599"/>
+          </a:xfrm>
+          <a:prstGeom prst="rect">
+            <a:avLst/>
+          </a:prstGeom>
+          <a:noFill/>
+          <a:ln/>
+        </p:spPr>
+        <p:txBody>
+          <a:bodyPr wrap="square" lIns="0" tIns="0" rIns="0" bIns="0" rtlCol="0" anchor="ctr"/>
+          <a:lstStyle/>
+          <a:p>
+            <a:pPr indent="0" marL="0">
+              <a:buNone/>
+            </a:pPr>
+            <a:r>
+              <a:rPr lang="en-US" sz="1200" b="1" dirty="0">
+                <a:solidFill>
+                  <a:srgbClr val="1C2230"/>
+                </a:solidFill>
+                <a:latin typeface="Arial" pitchFamily="34" charset="0"/>
+                <a:ea typeface="Arial" pitchFamily="34" charset="-122"/>
+                <a:cs typeface="Arial" pitchFamily="34" charset="-120"/>
+              </a:rPr>
+              <a:t>Op- en afschalen</a:t>
+            </a:r>
+            <a:endParaRPr lang="en-US" sz="1200" dirty="0"/>
+          </a:p>
+        </p:txBody>
+      </p:sp>
+      <p:sp>
+        <p:nvSpPr>
+          <p:cNvPr id="24" name="Text 18"/>
+          <p:cNvSpPr txBox="1"/>
+          <p:nvPr/>
+        </p:nvSpPr>
+        <p:spPr>
+          <a:xfrm>
+            <a:off x="6756383" y="3746491"/>
+            <a:ext cx="4825988" cy="355599"/>
+          </a:xfrm>
+          <a:prstGeom prst="rect">
+            <a:avLst/>
+          </a:prstGeom>
+          <a:noFill/>
+          <a:ln/>
+        </p:spPr>
+        <p:txBody>
+          <a:bodyPr wrap="square" lIns="0" tIns="0" rIns="0" bIns="0" rtlCol="0" anchor="t"/>
+          <a:lstStyle/>
+          <a:p>
+            <a:pPr indent="0" marL="0">
+              <a:lnSpc>
+                <a:spcPct val="130000"/>
+              </a:lnSpc>
+              <a:buNone/>
+            </a:pPr>
+            <a:r>
+              <a:rPr lang="en-US" sz="950" dirty="0">
+                <a:solidFill>
+                  <a:srgbClr val="6F6A5C"/>
+                </a:solidFill>
+                <a:latin typeface="Arial" pitchFamily="34" charset="0"/>
+                <a:ea typeface="Arial" pitchFamily="34" charset="-122"/>
+                <a:cs typeface="Arial" pitchFamily="34" charset="-120"/>
+              </a:rPr>
+              <a:t>Per werkperiode bepalen jullie het aantal beldagen, vanaf vier.</a:t>
+            </a:r>
+            <a:endParaRPr lang="en-US" sz="950" dirty="0"/>
+          </a:p>
+        </p:txBody>
+      </p:sp>
+      <p:sp>
+        <p:nvSpPr>
+          <p:cNvPr id="25" name="Shape 19"/>
+          <p:cNvSpPr/>
+          <p:nvPr/>
+        </p:nvSpPr>
+        <p:spPr>
+          <a:xfrm>
+            <a:off x="609598" y="4140190"/>
+            <a:ext cx="5232387" cy="0"/>
+          </a:xfrm>
+          <a:prstGeom prst="line">
+            <a:avLst/>
+          </a:prstGeom>
+          <a:noFill/>
+          <a:ln w="6350">
+            <a:solidFill>
+              <a:srgbClr val="C9C2B2"/>
+            </a:solidFill>
+            <a:prstDash val="solid"/>
+          </a:ln>
+        </p:spPr>
+      </p:sp>
+      <p:sp>
+        <p:nvSpPr>
+          <p:cNvPr id="26" name="Shape 20"/>
+          <p:cNvSpPr/>
+          <p:nvPr/>
+        </p:nvSpPr>
+        <p:spPr>
+          <a:xfrm>
+            <a:off x="609598" y="4241789"/>
+            <a:ext cx="253999" cy="253999"/>
+          </a:xfrm>
+          <a:prstGeom prst="roundRect">
+            <a:avLst>
+              <a:gd name="adj" fmla="val 25000"/>
+            </a:avLst>
+          </a:prstGeom>
+          <a:solidFill>
+            <a:srgbClr val="DDEBF3"/>
+          </a:solidFill>
+          <a:ln/>
+        </p:spPr>
+      </p:sp>
+      <p:pic>
+        <p:nvPicPr>
+          <p:cNvPr id="27" name="Image 4" descr="preencoded.png">    </p:cNvPr>
+          <p:cNvPicPr>
+            <a:picLocks noChangeAspect="1"/>
+          </p:cNvPicPr>
+          <p:nvPr/>
+        </p:nvPicPr>
+        <p:blipFill>
+          <a:blip r:embed="rId5"/>
+          <a:stretch>
+            <a:fillRect/>
+          </a:stretch>
+        </p:blipFill>
+        <p:spPr>
+          <a:xfrm>
+            <a:off x="666748" y="4298939"/>
+            <a:ext cx="139700" cy="139700"/>
+          </a:xfrm>
+          <a:prstGeom prst="rect">
+            <a:avLst/>
+          </a:prstGeom>
+        </p:spPr>
+      </p:pic>
+      <p:sp>
+        <p:nvSpPr>
+          <p:cNvPr id="28" name="Text 21"/>
+          <p:cNvSpPr txBox="1"/>
+          <p:nvPr/>
+        </p:nvSpPr>
+        <p:spPr>
+          <a:xfrm>
+            <a:off x="1015997" y="4216389"/>
+            <a:ext cx="4825988" cy="228599"/>
+          </a:xfrm>
+          <a:prstGeom prst="rect">
+            <a:avLst/>
+          </a:prstGeom>
+          <a:noFill/>
+          <a:ln/>
+        </p:spPr>
+        <p:txBody>
+          <a:bodyPr wrap="square" lIns="0" tIns="0" rIns="0" bIns="0" rtlCol="0" anchor="ctr"/>
+          <a:lstStyle/>
+          <a:p>
+            <a:pPr indent="0" marL="0">
+              <a:buNone/>
+            </a:pPr>
+            <a:r>
+              <a:rPr lang="en-US" sz="1200" b="1" dirty="0">
+                <a:solidFill>
+                  <a:srgbClr val="1C2230"/>
+                </a:solidFill>
+                <a:latin typeface="Arial" pitchFamily="34" charset="0"/>
+                <a:ea typeface="Arial" pitchFamily="34" charset="-122"/>
+                <a:cs typeface="Arial" pitchFamily="34" charset="-120"/>
+              </a:rPr>
+              <a:t>Maand opzegtermijn</a:t>
+            </a:r>
+            <a:endParaRPr lang="en-US" sz="1200" dirty="0"/>
+          </a:p>
+        </p:txBody>
+      </p:sp>
+      <p:sp>
+        <p:nvSpPr>
+          <p:cNvPr id="29" name="Text 22"/>
+          <p:cNvSpPr txBox="1"/>
+          <p:nvPr/>
+        </p:nvSpPr>
+        <p:spPr>
+          <a:xfrm>
+            <a:off x="1015997" y="4457689"/>
+            <a:ext cx="4825988" cy="355599"/>
+          </a:xfrm>
+          <a:prstGeom prst="rect">
+            <a:avLst/>
+          </a:prstGeom>
+          <a:noFill/>
+          <a:ln/>
+        </p:spPr>
+        <p:txBody>
+          <a:bodyPr wrap="square" lIns="0" tIns="0" rIns="0" bIns="0" rtlCol="0" anchor="t"/>
+          <a:lstStyle/>
+          <a:p>
+            <a:pPr indent="0" marL="0">
+              <a:lnSpc>
+                <a:spcPct val="130000"/>
+              </a:lnSpc>
+              <a:buNone/>
+            </a:pPr>
+            <a:r>
+              <a:rPr lang="en-US" sz="950" dirty="0">
+                <a:solidFill>
+                  <a:srgbClr val="6F6A5C"/>
+                </a:solidFill>
+                <a:latin typeface="Arial" pitchFamily="34" charset="0"/>
+                <a:ea typeface="Arial" pitchFamily="34" charset="-122"/>
+                <a:cs typeface="Arial" pitchFamily="34" charset="-120"/>
+              </a:rPr>
+              <a:t>Vastgelegd, met een maand opzegtermijn. Geen jaarcontract.</a:t>
+            </a:r>
+            <a:endParaRPr lang="en-US" sz="950" dirty="0"/>
+          </a:p>
+        </p:txBody>
+      </p:sp>
+      <p:sp>
+        <p:nvSpPr>
+          <p:cNvPr id="30" name="Shape 23"/>
+          <p:cNvSpPr/>
+          <p:nvPr/>
+        </p:nvSpPr>
+        <p:spPr>
+          <a:xfrm>
+            <a:off x="6349984" y="4140190"/>
+            <a:ext cx="5232387" cy="0"/>
+          </a:xfrm>
+          <a:prstGeom prst="line">
+            <a:avLst/>
+          </a:prstGeom>
+          <a:noFill/>
+          <a:ln w="6350">
+            <a:solidFill>
+              <a:srgbClr val="C9C2B2"/>
+            </a:solidFill>
+            <a:prstDash val="solid"/>
+          </a:ln>
+        </p:spPr>
+      </p:sp>
+      <p:sp>
+        <p:nvSpPr>
+          <p:cNvPr id="31" name="Shape 24"/>
+          <p:cNvSpPr/>
+          <p:nvPr/>
+        </p:nvSpPr>
+        <p:spPr>
+          <a:xfrm>
+            <a:off x="6349984" y="4241789"/>
+            <a:ext cx="253999" cy="253999"/>
+          </a:xfrm>
+          <a:prstGeom prst="roundRect">
+            <a:avLst>
+              <a:gd name="adj" fmla="val 25000"/>
+            </a:avLst>
+          </a:prstGeom>
+          <a:solidFill>
+            <a:srgbClr val="DDEBF3"/>
+          </a:solidFill>
+          <a:ln/>
+        </p:spPr>
+      </p:sp>
+      <p:pic>
+        <p:nvPicPr>
+          <p:cNvPr id="32" name="Image 5" descr="preencoded.png">    </p:cNvPr>
+          <p:cNvPicPr>
+            <a:picLocks noChangeAspect="1"/>
+          </p:cNvPicPr>
+          <p:nvPr/>
+        </p:nvPicPr>
+        <p:blipFill>
+          <a:blip r:embed="rId6"/>
+          <a:stretch>
+            <a:fillRect/>
+          </a:stretch>
+        </p:blipFill>
+        <p:spPr>
+          <a:xfrm>
+            <a:off x="6407134" y="4298939"/>
+            <a:ext cx="139700" cy="139700"/>
+          </a:xfrm>
+          <a:prstGeom prst="rect">
+            <a:avLst/>
+          </a:prstGeom>
+        </p:spPr>
+      </p:pic>
+      <p:sp>
+        <p:nvSpPr>
+          <p:cNvPr id="33" name="Text 25"/>
+          <p:cNvSpPr txBox="1"/>
+          <p:nvPr/>
+        </p:nvSpPr>
+        <p:spPr>
+          <a:xfrm>
+            <a:off x="6756383" y="4216389"/>
+            <a:ext cx="4825988" cy="228599"/>
+          </a:xfrm>
+          <a:prstGeom prst="rect">
+            <a:avLst/>
+          </a:prstGeom>
+          <a:noFill/>
+          <a:ln/>
+        </p:spPr>
+        <p:txBody>
+          <a:bodyPr wrap="square" lIns="0" tIns="0" rIns="0" bIns="0" rtlCol="0" anchor="ctr"/>
+          <a:lstStyle/>
+          <a:p>
+            <a:pPr indent="0" marL="0">
+              <a:buNone/>
+            </a:pPr>
+            <a:r>
+              <a:rPr lang="en-US" sz="1200" b="1" dirty="0">
+                <a:solidFill>
+                  <a:srgbClr val="1C2230"/>
+                </a:solidFill>
+                <a:latin typeface="Arial" pitchFamily="34" charset="0"/>
+                <a:ea typeface="Arial" pitchFamily="34" charset="-122"/>
+                <a:cs typeface="Arial" pitchFamily="34" charset="-120"/>
+              </a:rPr>
+              <a:t>Geen opstartkosten meer</a:t>
+            </a:r>
+            <a:endParaRPr lang="en-US" sz="1200" dirty="0"/>
+          </a:p>
+        </p:txBody>
+      </p:sp>
+      <p:sp>
+        <p:nvSpPr>
+          <p:cNvPr id="34" name="Text 26"/>
+          <p:cNvSpPr txBox="1"/>
+          <p:nvPr/>
+        </p:nvSpPr>
+        <p:spPr>
+          <a:xfrm>
+            <a:off x="6756383" y="4457689"/>
+            <a:ext cx="4825988" cy="355599"/>
+          </a:xfrm>
+          <a:prstGeom prst="rect">
+            <a:avLst/>
+          </a:prstGeom>
+          <a:noFill/>
+          <a:ln/>
+        </p:spPr>
+        <p:txBody>
+          <a:bodyPr wrap="square" lIns="0" tIns="0" rIns="0" bIns="0" rtlCol="0" anchor="t"/>
+          <a:lstStyle/>
+          <a:p>
+            <a:pPr indent="0" marL="0">
+              <a:lnSpc>
+                <a:spcPct val="130000"/>
+              </a:lnSpc>
+              <a:buNone/>
+            </a:pPr>
+            <a:r>
+              <a:rPr lang="en-US" sz="950" dirty="0">
+                <a:solidFill>
+                  <a:srgbClr val="6F6A5C"/>
+                </a:solidFill>
+                <a:latin typeface="Arial" pitchFamily="34" charset="0"/>
+                <a:ea typeface="Arial" pitchFamily="34" charset="-122"/>
+                <a:cs typeface="Arial" pitchFamily="34" charset="-120"/>
+              </a:rPr>
+              <a:t>De inrichting staat. Die fee is eenmalig geweest.</a:t>
+            </a:r>
+            <a:endParaRPr lang="en-US" sz="950" dirty="0"/>
+          </a:p>
+        </p:txBody>
+      </p:sp>
+      <p:sp>
+        <p:nvSpPr>
+          <p:cNvPr id="35" name="Shape 27"/>
+          <p:cNvSpPr/>
+          <p:nvPr/>
+        </p:nvSpPr>
+        <p:spPr>
+          <a:xfrm>
+            <a:off x="609598" y="4851388"/>
+            <a:ext cx="5232387" cy="0"/>
+          </a:xfrm>
+          <a:prstGeom prst="line">
+            <a:avLst/>
+          </a:prstGeom>
+          <a:noFill/>
+          <a:ln w="6350">
+            <a:solidFill>
+              <a:srgbClr val="C9C2B2"/>
+            </a:solidFill>
+            <a:prstDash val="solid"/>
+          </a:ln>
+        </p:spPr>
+      </p:sp>
+      <p:sp>
+        <p:nvSpPr>
+          <p:cNvPr id="36" name="Shape 28"/>
+          <p:cNvSpPr/>
+          <p:nvPr/>
+        </p:nvSpPr>
+        <p:spPr>
+          <a:xfrm>
+            <a:off x="609598" y="4952988"/>
+            <a:ext cx="253999" cy="253999"/>
+          </a:xfrm>
+          <a:prstGeom prst="roundRect">
+            <a:avLst>
+              <a:gd name="adj" fmla="val 25000"/>
+            </a:avLst>
+          </a:prstGeom>
+          <a:solidFill>
+            <a:srgbClr val="DDEBF3"/>
+          </a:solidFill>
+          <a:ln/>
+        </p:spPr>
+      </p:sp>
+      <p:pic>
+        <p:nvPicPr>
+          <p:cNvPr id="37" name="Image 6" descr="preencoded.png">    </p:cNvPr>
+          <p:cNvPicPr>
+            <a:picLocks noChangeAspect="1"/>
+          </p:cNvPicPr>
+          <p:nvPr/>
+        </p:nvPicPr>
+        <p:blipFill>
+          <a:blip r:embed="rId7"/>
+          <a:stretch>
+            <a:fillRect/>
+          </a:stretch>
+        </p:blipFill>
+        <p:spPr>
+          <a:xfrm>
+            <a:off x="666748" y="5010137"/>
+            <a:ext cx="139700" cy="139700"/>
+          </a:xfrm>
+          <a:prstGeom prst="rect">
+            <a:avLst/>
+          </a:prstGeom>
+        </p:spPr>
+      </p:pic>
+      <p:sp>
+        <p:nvSpPr>
+          <p:cNvPr id="38" name="Text 29"/>
+          <p:cNvSpPr txBox="1"/>
+          <p:nvPr/>
+        </p:nvSpPr>
+        <p:spPr>
+          <a:xfrm>
+            <a:off x="1015997" y="4927588"/>
+            <a:ext cx="4825988" cy="228599"/>
+          </a:xfrm>
+          <a:prstGeom prst="rect">
+            <a:avLst/>
+          </a:prstGeom>
+          <a:noFill/>
+          <a:ln/>
+        </p:spPr>
+        <p:txBody>
+          <a:bodyPr wrap="square" lIns="0" tIns="0" rIns="0" bIns="0" rtlCol="0" anchor="ctr"/>
+          <a:lstStyle/>
+          <a:p>
+            <a:pPr indent="0" marL="0">
+              <a:buNone/>
+            </a:pPr>
+            <a:r>
+              <a:rPr lang="en-US" sz="1200" b="1" dirty="0">
+                <a:solidFill>
+                  <a:srgbClr val="1C2230"/>
+                </a:solidFill>
+                <a:latin typeface="Arial" pitchFamily="34" charset="0"/>
+                <a:ea typeface="Arial" pitchFamily="34" charset="-122"/>
+                <a:cs typeface="Arial" pitchFamily="34" charset="-120"/>
+              </a:rPr>
+              <a:t>Bestaande relaties blijven van jullie</a:t>
+            </a:r>
+            <a:endParaRPr lang="en-US" sz="1200" dirty="0"/>
+          </a:p>
+        </p:txBody>
+      </p:sp>
+      <p:sp>
+        <p:nvSpPr>
+          <p:cNvPr id="39" name="Text 30"/>
+          <p:cNvSpPr txBox="1"/>
+          <p:nvPr/>
+        </p:nvSpPr>
+        <p:spPr>
+          <a:xfrm>
+            <a:off x="1015997" y="5168887"/>
+            <a:ext cx="4825988" cy="355599"/>
+          </a:xfrm>
+          <a:prstGeom prst="rect">
+            <a:avLst/>
+          </a:prstGeom>
+          <a:noFill/>
+          <a:ln/>
+        </p:spPr>
+        <p:txBody>
+          <a:bodyPr wrap="square" lIns="0" tIns="0" rIns="0" bIns="0" rtlCol="0" anchor="t"/>
+          <a:lstStyle/>
+          <a:p>
+            <a:pPr indent="0" marL="0">
+              <a:lnSpc>
+                <a:spcPct val="130000"/>
+              </a:lnSpc>
+              <a:buNone/>
+            </a:pPr>
+            <a:r>
+              <a:rPr lang="en-US" sz="950" dirty="0">
+                <a:solidFill>
+                  <a:srgbClr val="6F6A5C"/>
+                </a:solidFill>
+                <a:latin typeface="Arial" pitchFamily="34" charset="0"/>
+                <a:ea typeface="Arial" pitchFamily="34" charset="-122"/>
+                <a:cs typeface="Arial" pitchFamily="34" charset="-120"/>
+              </a:rPr>
+              <a:t>Uitsluitlijst vooraf, die bedrijven benaderen wij niet.</a:t>
+            </a:r>
+            <a:endParaRPr lang="en-US" sz="950" dirty="0"/>
+          </a:p>
+        </p:txBody>
+      </p:sp>
+      <p:sp>
+        <p:nvSpPr>
+          <p:cNvPr id="40" name="Shape 31"/>
+          <p:cNvSpPr/>
+          <p:nvPr/>
+        </p:nvSpPr>
+        <p:spPr>
+          <a:xfrm>
+            <a:off x="6349984" y="4851388"/>
+            <a:ext cx="5232387" cy="0"/>
+          </a:xfrm>
+          <a:prstGeom prst="line">
+            <a:avLst/>
+          </a:prstGeom>
+          <a:noFill/>
+          <a:ln w="6350">
+            <a:solidFill>
+              <a:srgbClr val="C9C2B2"/>
+            </a:solidFill>
+            <a:prstDash val="solid"/>
+          </a:ln>
+        </p:spPr>
+      </p:sp>
+      <p:sp>
+        <p:nvSpPr>
+          <p:cNvPr id="41" name="Shape 32"/>
+          <p:cNvSpPr/>
+          <p:nvPr/>
+        </p:nvSpPr>
+        <p:spPr>
+          <a:xfrm>
+            <a:off x="6349984" y="4952988"/>
+            <a:ext cx="253999" cy="253999"/>
+          </a:xfrm>
+          <a:prstGeom prst="roundRect">
+            <a:avLst>
+              <a:gd name="adj" fmla="val 25000"/>
+            </a:avLst>
+          </a:prstGeom>
+          <a:solidFill>
+            <a:srgbClr val="DDEBF3"/>
+          </a:solidFill>
+          <a:ln/>
+        </p:spPr>
+      </p:sp>
+      <p:pic>
+        <p:nvPicPr>
+          <p:cNvPr id="42" name="Image 7" descr="preencoded.png">    </p:cNvPr>
+          <p:cNvPicPr>
+            <a:picLocks noChangeAspect="1"/>
+          </p:cNvPicPr>
+          <p:nvPr/>
+        </p:nvPicPr>
+        <p:blipFill>
+          <a:blip r:embed="rId8"/>
+          <a:stretch>
+            <a:fillRect/>
+          </a:stretch>
+        </p:blipFill>
+        <p:spPr>
+          <a:xfrm>
+            <a:off x="6407134" y="5010137"/>
+            <a:ext cx="139700" cy="139700"/>
+          </a:xfrm>
+          <a:prstGeom prst="rect">
+            <a:avLst/>
+          </a:prstGeom>
+        </p:spPr>
+      </p:pic>
+      <p:sp>
+        <p:nvSpPr>
+          <p:cNvPr id="43" name="Text 33"/>
+          <p:cNvSpPr txBox="1"/>
+          <p:nvPr/>
+        </p:nvSpPr>
+        <p:spPr>
+          <a:xfrm>
+            <a:off x="6756383" y="4927588"/>
+            <a:ext cx="4825988" cy="228599"/>
+          </a:xfrm>
+          <a:prstGeom prst="rect">
+            <a:avLst/>
+          </a:prstGeom>
+          <a:noFill/>
+          <a:ln/>
+        </p:spPr>
+        <p:txBody>
+          <a:bodyPr wrap="square" lIns="0" tIns="0" rIns="0" bIns="0" rtlCol="0" anchor="ctr"/>
+          <a:lstStyle/>
+          <a:p>
+            <a:pPr indent="0" marL="0">
+              <a:buNone/>
+            </a:pPr>
+            <a:r>
+              <a:rPr lang="en-US" sz="1200" b="1" dirty="0">
+                <a:solidFill>
+                  <a:srgbClr val="1C2230"/>
+                </a:solidFill>
+                <a:latin typeface="Arial" pitchFamily="34" charset="0"/>
+                <a:ea typeface="Arial" pitchFamily="34" charset="-122"/>
+                <a:cs typeface="Arial" pitchFamily="34" charset="-120"/>
+              </a:rPr>
+              <a:t>Gegevens veilig</a:t>
+            </a:r>
+            <a:endParaRPr lang="en-US" sz="1200" dirty="0"/>
+          </a:p>
+        </p:txBody>
+      </p:sp>
+      <p:sp>
+        <p:nvSpPr>
+          <p:cNvPr id="44" name="Text 34"/>
+          <p:cNvSpPr txBox="1"/>
+          <p:nvPr/>
+        </p:nvSpPr>
+        <p:spPr>
+          <a:xfrm>
+            <a:off x="6756383" y="5168887"/>
+            <a:ext cx="4825988" cy="355599"/>
+          </a:xfrm>
+          <a:prstGeom prst="rect">
+            <a:avLst/>
+          </a:prstGeom>
+          <a:noFill/>
+          <a:ln/>
+        </p:spPr>
+        <p:txBody>
+          <a:bodyPr wrap="square" lIns="0" tIns="0" rIns="0" bIns="0" rtlCol="0" anchor="t"/>
+          <a:lstStyle/>
+          <a:p>
+            <a:pPr indent="0" marL="0">
+              <a:lnSpc>
+                <a:spcPct val="130000"/>
+              </a:lnSpc>
+              <a:buNone/>
+            </a:pPr>
+            <a:r>
+              <a:rPr lang="en-US" sz="950" dirty="0">
+                <a:solidFill>
+                  <a:srgbClr val="6F6A5C"/>
+                </a:solidFill>
+                <a:latin typeface="Arial" pitchFamily="34" charset="0"/>
+                <a:ea typeface="Arial" pitchFamily="34" charset="-122"/>
+                <a:cs typeface="Arial" pitchFamily="34" charset="-120"/>
+              </a:rPr>
+              <a:t>Vastgelegd in de verwerkersovereenkomst, met een korte aanvulling op de samenwerkingsovereenkomst.</a:t>
+            </a:r>
+            <a:endParaRPr lang="en-US" sz="950" dirty="0"/>
+          </a:p>
+        </p:txBody>
+      </p:sp>
+    </p:spTree>
+  </p:cSld>
+  <p:clrMapOvr>
+    <a:masterClrMapping/>
+  </p:clrMapOvr>
+</p:sld>
+</file>
+
+<file path=ppt/slides/slide14.xml><?xml version="1.0" encoding="utf-8"?>
+<p:sld xmlns:a="http://schemas.openxmlformats.org/drawingml/2006/main" xmlns:r="http://schemas.openxmlformats.org/officeDocument/2006/relationships" xmlns:p="http://schemas.openxmlformats.org/presentationml/2006/main">
+  <p:cSld name="Slide 14">
     <p:bg>
       <p:bgPr>
         <a:solidFill>
@@ -5319,7 +9097,7 @@
                 <a:ea typeface="Arial" pitchFamily="34" charset="-122"/>
                 <a:cs typeface="Arial" pitchFamily="34" charset="-120"/>
               </a:rPr>
-              <a:t>12 / 12</a:t>
+              <a:t>14 / 14</a:t>
             </a:r>
             <a:endParaRPr lang="en-US" sz="750" dirty="0"/>
           </a:p>
@@ -6245,7 +10023,7 @@
                 <a:ea typeface="Arial" pitchFamily="34" charset="-122"/>
                 <a:cs typeface="Arial" pitchFamily="34" charset="-120"/>
               </a:rPr>
-              <a:t>2 / 12</a:t>
+              <a:t>2 / 14</a:t>
             </a:r>
             <a:endParaRPr lang="en-US" sz="750" dirty="0"/>
           </a:p>
@@ -6872,7 +10650,7 @@
                 <a:ea typeface="Arial" pitchFamily="34" charset="-122"/>
                 <a:cs typeface="Arial" pitchFamily="34" charset="-120"/>
               </a:rPr>
-              <a:t>3 / 12</a:t>
+              <a:t>3 / 14</a:t>
             </a:r>
             <a:endParaRPr lang="en-US" sz="750" dirty="0"/>
           </a:p>
@@ -7758,7 +11536,7 @@
                 <a:ea typeface="Arial" pitchFamily="34" charset="-122"/>
                 <a:cs typeface="Arial" pitchFamily="34" charset="-120"/>
               </a:rPr>
-              <a:t>4 / 12</a:t>
+              <a:t>4 / 14</a:t>
             </a:r>
             <a:endParaRPr lang="en-US" sz="750" dirty="0"/>
           </a:p>
@@ -8997,7 +12775,7 @@
                 <a:ea typeface="Arial" pitchFamily="34" charset="-122"/>
                 <a:cs typeface="Arial" pitchFamily="34" charset="-120"/>
               </a:rPr>
-              <a:t>5 / 12</a:t>
+              <a:t>5 / 14</a:t>
             </a:r>
             <a:endParaRPr lang="en-US" sz="750" dirty="0"/>
           </a:p>
@@ -9781,7 +13559,7 @@
                 <a:ea typeface="Arial" pitchFamily="34" charset="-122"/>
                 <a:cs typeface="Arial" pitchFamily="34" charset="-120"/>
               </a:rPr>
-              <a:t>6 / 12</a:t>
+              <a:t>6 / 14</a:t>
             </a:r>
             <a:endParaRPr lang="en-US" sz="750" dirty="0"/>
           </a:p>
@@ -10383,7 +14161,7 @@
                 <a:ea typeface="Arial" pitchFamily="34" charset="-122"/>
                 <a:cs typeface="Arial" pitchFamily="34" charset="-120"/>
               </a:rPr>
-              <a:t>21</a:t>
+              <a:t>24</a:t>
             </a:r>
             <a:endParaRPr lang="en-US" sz="3600" dirty="0"/>
           </a:p>
@@ -10464,7 +14242,7 @@
                 <a:ea typeface="Arial" pitchFamily="34" charset="-122"/>
                 <a:cs typeface="Arial" pitchFamily="34" charset="-120"/>
               </a:rPr>
-              <a:t>Gemiddeld één op de 58 pogingen. Werkperiode 3 loopt nog door tot 25 oktober.</a:t>
+              <a:t>Eenentwintig staan er, drie komen er nog bij voor 25 oktober. Gemiddeld een op de 51 pogingen.</a:t>
             </a:r>
             <a:endParaRPr lang="en-US" sz="950" dirty="0"/>
           </a:p>
@@ -10686,7 +14464,7 @@
                 <a:ea typeface="Arial" pitchFamily="34" charset="-122"/>
                 <a:cs typeface="Arial" pitchFamily="34" charset="-120"/>
               </a:rPr>
-              <a:t>7 / 12</a:t>
+              <a:t>7 / 14</a:t>
             </a:r>
             <a:endParaRPr lang="en-US" sz="750" dirty="0"/>
           </a:p>
@@ -10767,7 +14545,7 @@
                 <a:ea typeface="Arial" pitchFamily="34" charset="-122"/>
                 <a:cs typeface="Arial" pitchFamily="34" charset="-120"/>
               </a:rPr>
-              <a:t>Sterke start, dip in de zomer, </a:t>
+              <a:t>Hoe langer we bellen, </a:t>
             </a:r>
             <a:pPr algn="l" indent="0" marL="0">
               <a:lnSpc>
@@ -10784,7 +14562,7 @@
                 <a:ea typeface="Georgia" pitchFamily="34" charset="-122"/>
                 <a:cs typeface="Georgia" pitchFamily="34" charset="-120"/>
               </a:rPr>
-              <a:t>nu weer omhoog</a:t>
+              <a:t>hoe meer er uit komt</a:t>
             </a:r>
             <a:pPr algn="l" indent="0" marL="0">
               <a:lnSpc>
@@ -10942,7 +14720,7 @@
                 <a:ea typeface="Arial" pitchFamily="34" charset="-122"/>
                 <a:cs typeface="Arial" pitchFamily="34" charset="-120"/>
               </a:rPr>
-              <a:t>GESPROKEN</a:t>
+              <a:t>AFSPRAKEN</a:t>
             </a:r>
             <a:endParaRPr lang="en-US" sz="800" dirty="0"/>
           </a:p>
@@ -10981,7 +14759,7 @@
                 <a:ea typeface="Arial" pitchFamily="34" charset="-122"/>
                 <a:cs typeface="Arial" pitchFamily="34" charset="-120"/>
               </a:rPr>
-              <a:t>AFSPRAKEN</a:t>
+              <a:t>PER 1.000 POGINGEN</a:t>
             </a:r>
             <a:endParaRPr lang="en-US" sz="800" dirty="0"/>
           </a:p>
@@ -11121,7 +14899,7 @@
                 <a:ea typeface="Arial" pitchFamily="34" charset="-122"/>
                 <a:cs typeface="Arial" pitchFamily="34" charset="-120"/>
               </a:rPr>
-              <a:t>443</a:t>
+              <a:t>10</a:t>
             </a:r>
             <a:endParaRPr lang="en-US" sz="1250" dirty="0"/>
           </a:p>
@@ -11160,7 +14938,7 @@
                 <a:ea typeface="Arial" pitchFamily="34" charset="-122"/>
                 <a:cs typeface="Arial" pitchFamily="34" charset="-120"/>
               </a:rPr>
-              <a:t>10</a:t>
+              <a:t>17</a:t>
             </a:r>
             <a:endParaRPr lang="en-US" sz="1250" dirty="0"/>
           </a:p>
@@ -11314,7 +15092,7 @@
                 <a:ea typeface="Arial" pitchFamily="34" charset="-122"/>
                 <a:cs typeface="Arial" pitchFamily="34" charset="-120"/>
               </a:rPr>
-              <a:t>164</a:t>
+              <a:t>6</a:t>
             </a:r>
             <a:endParaRPr lang="en-US" sz="1250" dirty="0"/>
           </a:p>
@@ -11353,7 +15131,7 @@
                 <a:ea typeface="Arial" pitchFamily="34" charset="-122"/>
                 <a:cs typeface="Arial" pitchFamily="34" charset="-120"/>
               </a:rPr>
-              <a:t>6</a:t>
+              <a:t>16</a:t>
             </a:r>
             <a:endParaRPr lang="en-US" sz="1250" dirty="0"/>
           </a:p>
@@ -11529,7 +15307,7 @@
                 <a:ea typeface="Arial" pitchFamily="34" charset="-122"/>
                 <a:cs typeface="Arial" pitchFamily="34" charset="-120"/>
               </a:rPr>
-              <a:t>115</a:t>
+              <a:t>8</a:t>
             </a:r>
             <a:endParaRPr lang="en-US" sz="1250" dirty="0"/>
           </a:p>
@@ -11568,7 +15346,7 @@
                 <a:ea typeface="Arial" pitchFamily="34" charset="-122"/>
                 <a:cs typeface="Arial" pitchFamily="34" charset="-120"/>
               </a:rPr>
-              <a:t>5</a:t>
+              <a:t>35</a:t>
             </a:r>
             <a:endParaRPr lang="en-US" sz="1250" dirty="0"/>
           </a:p>
@@ -11627,7 +15405,7 @@
                 <a:ea typeface="Arial" pitchFamily="34" charset="-122"/>
                 <a:cs typeface="Arial" pitchFamily="34" charset="-120"/>
               </a:rPr>
-              <a:t>De dip in werkperiode 2 was vakantie: minder bereikbaarheid en in week 39 is er niet gebeld. Werkperiode 3 staat na twee weken al op vijf, met nog twee weken te gaan.</a:t>
+              <a:t>Werkperiode 3 levert per duizend pogingen twee keer zoveel op als de eerste. Dat komt door de lijst met 290 terugbelafspraken die we onderweg hebben opgebouwd. Die lijst is nu het meest waardevolle dat er ligt.</a:t>
             </a:r>
             <a:endParaRPr lang="en-US" sz="1200" dirty="0"/>
           </a:p>
@@ -11644,6 +15422,911 @@
 <file path=ppt/slides/slide8.xml><?xml version="1.0" encoding="utf-8"?>
 <p:sld xmlns:a="http://schemas.openxmlformats.org/drawingml/2006/main" xmlns:r="http://schemas.openxmlformats.org/officeDocument/2006/relationships" xmlns:p="http://schemas.openxmlformats.org/presentationml/2006/main">
   <p:cSld name="Slide 8">
+    <p:bg>
+      <p:bgPr>
+        <a:solidFill>
+          <a:srgbClr val="E9E0CD"/>
+        </a:solidFill>
+      </p:bgPr>
+    </p:bg>
+    <p:spTree>
+      <p:nvGrpSpPr>
+        <p:cNvPr id="1" name=""/>
+        <p:cNvGrpSpPr/>
+        <p:nvPr/>
+      </p:nvGrpSpPr>
+      <p:grpSpPr>
+        <a:xfrm>
+          <a:off x="0" y="0"/>
+          <a:ext cx="0" cy="0"/>
+          <a:chOff x="0" y="0"/>
+          <a:chExt cx="0" cy="0"/>
+        </a:xfrm>
+      </p:grpSpPr>
+      <p:sp>
+        <p:nvSpPr>
+          <p:cNvPr id="2" name="Text 0"/>
+          <p:cNvSpPr txBox="1"/>
+          <p:nvPr/>
+        </p:nvSpPr>
+        <p:spPr>
+          <a:xfrm>
+            <a:off x="596899" y="368299"/>
+            <a:ext cx="1904995" cy="330199"/>
+          </a:xfrm>
+          <a:prstGeom prst="rect">
+            <a:avLst/>
+          </a:prstGeom>
+          <a:noFill/>
+          <a:ln/>
+        </p:spPr>
+        <p:txBody>
+          <a:bodyPr wrap="square" lIns="0" tIns="0" rIns="0" bIns="0" rtlCol="0" anchor="ctr"/>
+          <a:lstStyle/>
+          <a:p>
+            <a:pPr algn="l" indent="0" marL="0">
+              <a:buNone/>
+            </a:pPr>
+            <a:r>
+              <a:rPr lang="en-US" sz="1800" b="1" dirty="0">
+                <a:solidFill>
+                  <a:srgbClr val="1C2230"/>
+                </a:solidFill>
+                <a:latin typeface="Arial" pitchFamily="34" charset="0"/>
+                <a:ea typeface="Arial" pitchFamily="34" charset="-122"/>
+                <a:cs typeface="Arial" pitchFamily="34" charset="-120"/>
+              </a:rPr>
+              <a:t>LINK</a:t>
+            </a:r>
+            <a:pPr algn="l" indent="0" marL="0">
+              <a:buNone/>
+            </a:pPr>
+            <a:r>
+              <a:rPr lang="en-US" sz="1800" b="1" dirty="0">
+                <a:solidFill>
+                  <a:srgbClr val="38B6FF"/>
+                </a:solidFill>
+                <a:latin typeface="Arial" pitchFamily="34" charset="0"/>
+                <a:ea typeface="Arial" pitchFamily="34" charset="-122"/>
+                <a:cs typeface="Arial" pitchFamily="34" charset="-120"/>
+              </a:rPr>
+              <a:t>.</a:t>
+            </a:r>
+            <a:endParaRPr lang="en-US" sz="1800" dirty="0"/>
+          </a:p>
+        </p:txBody>
+      </p:sp>
+      <p:sp>
+        <p:nvSpPr>
+          <p:cNvPr id="3" name="Text 1"/>
+          <p:cNvSpPr txBox="1"/>
+          <p:nvPr/>
+        </p:nvSpPr>
+        <p:spPr>
+          <a:xfrm>
+            <a:off x="609598" y="6381734"/>
+            <a:ext cx="5714986" cy="228599"/>
+          </a:xfrm>
+          <a:prstGeom prst="rect">
+            <a:avLst/>
+          </a:prstGeom>
+          <a:noFill/>
+          <a:ln/>
+        </p:spPr>
+        <p:txBody>
+          <a:bodyPr wrap="square" lIns="0" tIns="0" rIns="0" bIns="0" rtlCol="0" anchor="ctr"/>
+          <a:lstStyle/>
+          <a:p>
+            <a:pPr algn="l" indent="0" marL="0">
+              <a:buNone/>
+            </a:pPr>
+            <a:r>
+              <a:rPr lang="en-US" sz="750" b="1" spc="100" kern="0" dirty="0">
+                <a:solidFill>
+                  <a:srgbClr val="6F6A5C"/>
+                </a:solidFill>
+                <a:latin typeface="Arial" pitchFamily="34" charset="0"/>
+                <a:ea typeface="Arial" pitchFamily="34" charset="-122"/>
+                <a:cs typeface="Arial" pitchFamily="34" charset="-120"/>
+              </a:rPr>
+              <a:t>LINK. · Voorstel GrowOn Agency</a:t>
+            </a:r>
+            <a:endParaRPr lang="en-US" sz="750" dirty="0"/>
+          </a:p>
+        </p:txBody>
+      </p:sp>
+      <p:sp>
+        <p:nvSpPr>
+          <p:cNvPr id="4" name="Text 2"/>
+          <p:cNvSpPr txBox="1"/>
+          <p:nvPr/>
+        </p:nvSpPr>
+        <p:spPr>
+          <a:xfrm>
+            <a:off x="9677376" y="6381734"/>
+            <a:ext cx="1904995" cy="228599"/>
+          </a:xfrm>
+          <a:prstGeom prst="rect">
+            <a:avLst/>
+          </a:prstGeom>
+          <a:noFill/>
+          <a:ln/>
+        </p:spPr>
+        <p:txBody>
+          <a:bodyPr wrap="square" lIns="0" tIns="0" rIns="0" bIns="0" rtlCol="0" anchor="ctr"/>
+          <a:lstStyle/>
+          <a:p>
+            <a:pPr algn="r" indent="0" marL="0">
+              <a:buNone/>
+            </a:pPr>
+            <a:r>
+              <a:rPr lang="en-US" sz="750" b="1" spc="100" kern="0" dirty="0">
+                <a:solidFill>
+                  <a:srgbClr val="6F6A5C"/>
+                </a:solidFill>
+                <a:latin typeface="Arial" pitchFamily="34" charset="0"/>
+                <a:ea typeface="Arial" pitchFamily="34" charset="-122"/>
+                <a:cs typeface="Arial" pitchFamily="34" charset="-120"/>
+              </a:rPr>
+              <a:t>8 / 14</a:t>
+            </a:r>
+            <a:endParaRPr lang="en-US" sz="750" dirty="0"/>
+          </a:p>
+        </p:txBody>
+      </p:sp>
+      <p:sp>
+        <p:nvSpPr>
+          <p:cNvPr id="5" name="Text 3"/>
+          <p:cNvSpPr txBox="1"/>
+          <p:nvPr/>
+        </p:nvSpPr>
+        <p:spPr>
+          <a:xfrm>
+            <a:off x="609598" y="1206497"/>
+            <a:ext cx="10159975" cy="215899"/>
+          </a:xfrm>
+          <a:prstGeom prst="rect">
+            <a:avLst/>
+          </a:prstGeom>
+          <a:noFill/>
+          <a:ln/>
+        </p:spPr>
+        <p:txBody>
+          <a:bodyPr wrap="square" lIns="0" tIns="0" rIns="0" bIns="0" rtlCol="0" anchor="ctr"/>
+          <a:lstStyle/>
+          <a:p>
+            <a:pPr algn="l" indent="0" marL="0">
+              <a:buNone/>
+            </a:pPr>
+            <a:r>
+              <a:rPr lang="en-US" sz="950" b="1" spc="400" kern="0" dirty="0">
+                <a:solidFill>
+                  <a:srgbClr val="38B6FF"/>
+                </a:solidFill>
+                <a:latin typeface="Arial" pitchFamily="34" charset="0"/>
+                <a:ea typeface="Arial" pitchFamily="34" charset="-122"/>
+                <a:cs typeface="Arial" pitchFamily="34" charset="-120"/>
+              </a:rPr>
+              <a:t>DE EENHEID WAARIN WE REKENEN</a:t>
+            </a:r>
+            <a:endParaRPr lang="en-US" sz="950" dirty="0"/>
+          </a:p>
+        </p:txBody>
+      </p:sp>
+      <p:sp>
+        <p:nvSpPr>
+          <p:cNvPr id="6" name="Text 4"/>
+          <p:cNvSpPr txBox="1"/>
+          <p:nvPr/>
+        </p:nvSpPr>
+        <p:spPr>
+          <a:xfrm>
+            <a:off x="609598" y="1511296"/>
+            <a:ext cx="10972773" cy="1142997"/>
+          </a:xfrm>
+          <a:prstGeom prst="rect">
+            <a:avLst/>
+          </a:prstGeom>
+          <a:noFill/>
+          <a:ln/>
+        </p:spPr>
+        <p:txBody>
+          <a:bodyPr wrap="square" lIns="0" tIns="0" rIns="0" bIns="0" rtlCol="0" anchor="t"/>
+          <a:lstStyle/>
+          <a:p>
+            <a:pPr algn="l" indent="0" marL="0">
+              <a:lnSpc>
+                <a:spcPct val="108000"/>
+              </a:lnSpc>
+              <a:buNone/>
+            </a:pPr>
+            <a:r>
+              <a:rPr lang="en-US" sz="3200" b="1" dirty="0">
+                <a:solidFill>
+                  <a:srgbClr val="1C2230"/>
+                </a:solidFill>
+                <a:latin typeface="Arial" pitchFamily="34" charset="0"/>
+                <a:ea typeface="Arial" pitchFamily="34" charset="-122"/>
+                <a:cs typeface="Arial" pitchFamily="34" charset="-120"/>
+              </a:rPr>
+              <a:t>Een beldag is geen dag, maar een </a:t>
+            </a:r>
+            <a:pPr algn="l" indent="0" marL="0">
+              <a:lnSpc>
+                <a:spcPct val="108000"/>
+              </a:lnSpc>
+              <a:buNone/>
+            </a:pPr>
+            <a:r>
+              <a:rPr lang="en-US" sz="3000" i="1" dirty="0">
+                <a:solidFill>
+                  <a:srgbClr val="1C2230"/>
+                </a:solidFill>
+                <a:latin typeface="Georgia" pitchFamily="34" charset="0"/>
+                <a:ea typeface="Georgia" pitchFamily="34" charset="-122"/>
+                <a:cs typeface="Georgia" pitchFamily="34" charset="-120"/>
+              </a:rPr>
+              <a:t>vaste hoeveelheid werk</a:t>
+            </a:r>
+            <a:pPr algn="l" indent="0" marL="0">
+              <a:lnSpc>
+                <a:spcPct val="108000"/>
+              </a:lnSpc>
+              <a:buNone/>
+            </a:pPr>
+            <a:r>
+              <a:rPr lang="en-US" sz="3200" b="1" dirty="0">
+                <a:solidFill>
+                  <a:srgbClr val="1C2230"/>
+                </a:solidFill>
+                <a:latin typeface="Arial" pitchFamily="34" charset="0"/>
+                <a:ea typeface="Arial" pitchFamily="34" charset="-122"/>
+                <a:cs typeface="Arial" pitchFamily="34" charset="-120"/>
+              </a:rPr>
+              <a:t>.</a:t>
+            </a:r>
+            <a:endParaRPr lang="en-US" sz="3200" dirty="0"/>
+          </a:p>
+        </p:txBody>
+      </p:sp>
+      <p:sp>
+        <p:nvSpPr>
+          <p:cNvPr id="7" name="Shape 5"/>
+          <p:cNvSpPr/>
+          <p:nvPr/>
+        </p:nvSpPr>
+        <p:spPr>
+          <a:xfrm>
+            <a:off x="609598" y="2730493"/>
+            <a:ext cx="2628893" cy="2222494"/>
+          </a:xfrm>
+          <a:prstGeom prst="roundRect">
+            <a:avLst>
+              <a:gd name="adj" fmla="val 4571"/>
+            </a:avLst>
+          </a:prstGeom>
+          <a:solidFill>
+            <a:srgbClr val="F8F4EB"/>
+          </a:solidFill>
+          <a:ln/>
+        </p:spPr>
+      </p:sp>
+      <p:sp>
+        <p:nvSpPr>
+          <p:cNvPr id="8" name="Text 6"/>
+          <p:cNvSpPr txBox="1"/>
+          <p:nvPr/>
+        </p:nvSpPr>
+        <p:spPr>
+          <a:xfrm>
+            <a:off x="850898" y="2997193"/>
+            <a:ext cx="2146295" cy="507999"/>
+          </a:xfrm>
+          <a:prstGeom prst="rect">
+            <a:avLst/>
+          </a:prstGeom>
+          <a:noFill/>
+          <a:ln/>
+        </p:spPr>
+        <p:txBody>
+          <a:bodyPr wrap="square" lIns="0" tIns="0" rIns="0" bIns="0" rtlCol="0" anchor="ctr"/>
+          <a:lstStyle/>
+          <a:p>
+            <a:pPr indent="0" marL="0">
+              <a:buNone/>
+            </a:pPr>
+            <a:r>
+              <a:rPr lang="en-US" sz="3600" b="1" dirty="0">
+                <a:solidFill>
+                  <a:srgbClr val="1C2230"/>
+                </a:solidFill>
+                <a:latin typeface="Arial" pitchFamily="34" charset="0"/>
+                <a:ea typeface="Arial" pitchFamily="34" charset="-122"/>
+                <a:cs typeface="Arial" pitchFamily="34" charset="-120"/>
+              </a:rPr>
+              <a:t>6</a:t>
+            </a:r>
+            <a:endParaRPr lang="en-US" sz="3600" dirty="0"/>
+          </a:p>
+        </p:txBody>
+      </p:sp>
+      <p:sp>
+        <p:nvSpPr>
+          <p:cNvPr id="9" name="Text 7"/>
+          <p:cNvSpPr txBox="1"/>
+          <p:nvPr/>
+        </p:nvSpPr>
+        <p:spPr>
+          <a:xfrm>
+            <a:off x="850898" y="3555991"/>
+            <a:ext cx="2146295" cy="215899"/>
+          </a:xfrm>
+          <a:prstGeom prst="rect">
+            <a:avLst/>
+          </a:prstGeom>
+          <a:noFill/>
+          <a:ln/>
+        </p:spPr>
+        <p:txBody>
+          <a:bodyPr wrap="square" lIns="0" tIns="0" rIns="0" bIns="0" rtlCol="0" anchor="ctr"/>
+          <a:lstStyle/>
+          <a:p>
+            <a:pPr indent="0" marL="0">
+              <a:buNone/>
+            </a:pPr>
+            <a:r>
+              <a:rPr lang="en-US" sz="900" b="1" spc="120" kern="0" dirty="0">
+                <a:solidFill>
+                  <a:srgbClr val="38B6FF"/>
+                </a:solidFill>
+                <a:latin typeface="Arial" pitchFamily="34" charset="0"/>
+                <a:ea typeface="Arial" pitchFamily="34" charset="-122"/>
+                <a:cs typeface="Arial" pitchFamily="34" charset="-120"/>
+              </a:rPr>
+              <a:t>UUR BELLEN</a:t>
+            </a:r>
+            <a:endParaRPr lang="en-US" sz="900" dirty="0"/>
+          </a:p>
+        </p:txBody>
+      </p:sp>
+      <p:sp>
+        <p:nvSpPr>
+          <p:cNvPr id="10" name="Text 8"/>
+          <p:cNvSpPr txBox="1"/>
+          <p:nvPr/>
+        </p:nvSpPr>
+        <p:spPr>
+          <a:xfrm>
+            <a:off x="850898" y="3975090"/>
+            <a:ext cx="2146295" cy="888998"/>
+          </a:xfrm>
+          <a:prstGeom prst="rect">
+            <a:avLst/>
+          </a:prstGeom>
+          <a:noFill/>
+          <a:ln/>
+        </p:spPr>
+        <p:txBody>
+          <a:bodyPr wrap="square" lIns="0" tIns="0" rIns="0" bIns="0" rtlCol="0" anchor="t"/>
+          <a:lstStyle/>
+          <a:p>
+            <a:pPr indent="0" marL="0">
+              <a:lnSpc>
+                <a:spcPct val="135000"/>
+              </a:lnSpc>
+              <a:buNone/>
+            </a:pPr>
+            <a:r>
+              <a:rPr lang="en-US" sz="950" dirty="0">
+                <a:solidFill>
+                  <a:srgbClr val="6F6A5C"/>
+                </a:solidFill>
+                <a:latin typeface="Arial" pitchFamily="34" charset="0"/>
+                <a:ea typeface="Arial" pitchFamily="34" charset="-122"/>
+                <a:cs typeface="Arial" pitchFamily="34" charset="-120"/>
+              </a:rPr>
+              <a:t>Netto aan de telefoon. Voorbereiding, notities en rapportage zitten daarbuiten en zijn inbegrepen.</a:t>
+            </a:r>
+            <a:endParaRPr lang="en-US" sz="950" dirty="0"/>
+          </a:p>
+        </p:txBody>
+      </p:sp>
+      <p:sp>
+        <p:nvSpPr>
+          <p:cNvPr id="11" name="Shape 9"/>
+          <p:cNvSpPr/>
+          <p:nvPr/>
+        </p:nvSpPr>
+        <p:spPr>
+          <a:xfrm>
+            <a:off x="3390892" y="2730493"/>
+            <a:ext cx="2628893" cy="2222494"/>
+          </a:xfrm>
+          <a:prstGeom prst="roundRect">
+            <a:avLst>
+              <a:gd name="adj" fmla="val 4571"/>
+            </a:avLst>
+          </a:prstGeom>
+          <a:solidFill>
+            <a:srgbClr val="F8F4EB"/>
+          </a:solidFill>
+          <a:ln/>
+        </p:spPr>
+      </p:sp>
+      <p:sp>
+        <p:nvSpPr>
+          <p:cNvPr id="12" name="Text 10"/>
+          <p:cNvSpPr txBox="1"/>
+          <p:nvPr/>
+        </p:nvSpPr>
+        <p:spPr>
+          <a:xfrm>
+            <a:off x="3632191" y="2997193"/>
+            <a:ext cx="2146295" cy="507999"/>
+          </a:xfrm>
+          <a:prstGeom prst="rect">
+            <a:avLst/>
+          </a:prstGeom>
+          <a:noFill/>
+          <a:ln/>
+        </p:spPr>
+        <p:txBody>
+          <a:bodyPr wrap="square" lIns="0" tIns="0" rIns="0" bIns="0" rtlCol="0" anchor="ctr"/>
+          <a:lstStyle/>
+          <a:p>
+            <a:pPr indent="0" marL="0">
+              <a:buNone/>
+            </a:pPr>
+            <a:r>
+              <a:rPr lang="en-US" sz="3600" b="1" dirty="0">
+                <a:solidFill>
+                  <a:srgbClr val="1C2230"/>
+                </a:solidFill>
+                <a:latin typeface="Arial" pitchFamily="34" charset="0"/>
+                <a:ea typeface="Arial" pitchFamily="34" charset="-122"/>
+                <a:cs typeface="Arial" pitchFamily="34" charset="-120"/>
+              </a:rPr>
+              <a:t>± 100</a:t>
+            </a:r>
+            <a:endParaRPr lang="en-US" sz="3600" dirty="0"/>
+          </a:p>
+        </p:txBody>
+      </p:sp>
+      <p:sp>
+        <p:nvSpPr>
+          <p:cNvPr id="13" name="Text 11"/>
+          <p:cNvSpPr txBox="1"/>
+          <p:nvPr/>
+        </p:nvSpPr>
+        <p:spPr>
+          <a:xfrm>
+            <a:off x="3632191" y="3555991"/>
+            <a:ext cx="2146295" cy="215899"/>
+          </a:xfrm>
+          <a:prstGeom prst="rect">
+            <a:avLst/>
+          </a:prstGeom>
+          <a:noFill/>
+          <a:ln/>
+        </p:spPr>
+        <p:txBody>
+          <a:bodyPr wrap="square" lIns="0" tIns="0" rIns="0" bIns="0" rtlCol="0" anchor="ctr"/>
+          <a:lstStyle/>
+          <a:p>
+            <a:pPr indent="0" marL="0">
+              <a:buNone/>
+            </a:pPr>
+            <a:r>
+              <a:rPr lang="en-US" sz="900" b="1" spc="120" kern="0" dirty="0">
+                <a:solidFill>
+                  <a:srgbClr val="38B6FF"/>
+                </a:solidFill>
+                <a:latin typeface="Arial" pitchFamily="34" charset="0"/>
+                <a:ea typeface="Arial" pitchFamily="34" charset="-122"/>
+                <a:cs typeface="Arial" pitchFamily="34" charset="-120"/>
+              </a:rPr>
+              <a:t>CONTACTPOGINGEN</a:t>
+            </a:r>
+            <a:endParaRPr lang="en-US" sz="900" dirty="0"/>
+          </a:p>
+        </p:txBody>
+      </p:sp>
+      <p:sp>
+        <p:nvSpPr>
+          <p:cNvPr id="14" name="Text 12"/>
+          <p:cNvSpPr txBox="1"/>
+          <p:nvPr/>
+        </p:nvSpPr>
+        <p:spPr>
+          <a:xfrm>
+            <a:off x="3632191" y="3975090"/>
+            <a:ext cx="2146295" cy="888998"/>
+          </a:xfrm>
+          <a:prstGeom prst="rect">
+            <a:avLst/>
+          </a:prstGeom>
+          <a:noFill/>
+          <a:ln/>
+        </p:spPr>
+        <p:txBody>
+          <a:bodyPr wrap="square" lIns="0" tIns="0" rIns="0" bIns="0" rtlCol="0" anchor="t"/>
+          <a:lstStyle/>
+          <a:p>
+            <a:pPr indent="0" marL="0">
+              <a:lnSpc>
+                <a:spcPct val="135000"/>
+              </a:lnSpc>
+              <a:buNone/>
+            </a:pPr>
+            <a:r>
+              <a:rPr lang="en-US" sz="950" dirty="0">
+                <a:solidFill>
+                  <a:srgbClr val="6F6A5C"/>
+                </a:solidFill>
+                <a:latin typeface="Arial" pitchFamily="34" charset="0"/>
+                <a:ea typeface="Arial" pitchFamily="34" charset="-122"/>
+                <a:cs typeface="Arial" pitchFamily="34" charset="-120"/>
+              </a:rPr>
+              <a:t>Ongeveer zeventien pogingen per uur bellen, gemeten over jullie hele pilot.</a:t>
+            </a:r>
+            <a:endParaRPr lang="en-US" sz="950" dirty="0"/>
+          </a:p>
+        </p:txBody>
+      </p:sp>
+      <p:sp>
+        <p:nvSpPr>
+          <p:cNvPr id="15" name="Shape 13"/>
+          <p:cNvSpPr/>
+          <p:nvPr/>
+        </p:nvSpPr>
+        <p:spPr>
+          <a:xfrm>
+            <a:off x="6172185" y="2730493"/>
+            <a:ext cx="2628893" cy="2222494"/>
+          </a:xfrm>
+          <a:prstGeom prst="roundRect">
+            <a:avLst>
+              <a:gd name="adj" fmla="val 4571"/>
+            </a:avLst>
+          </a:prstGeom>
+          <a:solidFill>
+            <a:srgbClr val="F8F4EB"/>
+          </a:solidFill>
+          <a:ln/>
+        </p:spPr>
+      </p:sp>
+      <p:sp>
+        <p:nvSpPr>
+          <p:cNvPr id="16" name="Text 14"/>
+          <p:cNvSpPr txBox="1"/>
+          <p:nvPr/>
+        </p:nvSpPr>
+        <p:spPr>
+          <a:xfrm>
+            <a:off x="6413484" y="2997193"/>
+            <a:ext cx="2146295" cy="507999"/>
+          </a:xfrm>
+          <a:prstGeom prst="rect">
+            <a:avLst/>
+          </a:prstGeom>
+          <a:noFill/>
+          <a:ln/>
+        </p:spPr>
+        <p:txBody>
+          <a:bodyPr wrap="square" lIns="0" tIns="0" rIns="0" bIns="0" rtlCol="0" anchor="ctr"/>
+          <a:lstStyle/>
+          <a:p>
+            <a:pPr indent="0" marL="0">
+              <a:buNone/>
+            </a:pPr>
+            <a:r>
+              <a:rPr lang="en-US" sz="3600" b="1" dirty="0">
+                <a:solidFill>
+                  <a:srgbClr val="1C2230"/>
+                </a:solidFill>
+                <a:latin typeface="Arial" pitchFamily="34" charset="0"/>
+                <a:ea typeface="Arial" pitchFamily="34" charset="-122"/>
+                <a:cs typeface="Arial" pitchFamily="34" charset="-120"/>
+              </a:rPr>
+              <a:t>± 60</a:t>
+            </a:r>
+            <a:endParaRPr lang="en-US" sz="3600" dirty="0"/>
+          </a:p>
+        </p:txBody>
+      </p:sp>
+      <p:sp>
+        <p:nvSpPr>
+          <p:cNvPr id="17" name="Text 15"/>
+          <p:cNvSpPr txBox="1"/>
+          <p:nvPr/>
+        </p:nvSpPr>
+        <p:spPr>
+          <a:xfrm>
+            <a:off x="6413484" y="3555991"/>
+            <a:ext cx="2146295" cy="215899"/>
+          </a:xfrm>
+          <a:prstGeom prst="rect">
+            <a:avLst/>
+          </a:prstGeom>
+          <a:noFill/>
+          <a:ln/>
+        </p:spPr>
+        <p:txBody>
+          <a:bodyPr wrap="square" lIns="0" tIns="0" rIns="0" bIns="0" rtlCol="0" anchor="ctr"/>
+          <a:lstStyle/>
+          <a:p>
+            <a:pPr indent="0" marL="0">
+              <a:buNone/>
+            </a:pPr>
+            <a:r>
+              <a:rPr lang="en-US" sz="900" b="1" spc="120" kern="0" dirty="0">
+                <a:solidFill>
+                  <a:srgbClr val="38B6FF"/>
+                </a:solidFill>
+                <a:latin typeface="Arial" pitchFamily="34" charset="0"/>
+                <a:ea typeface="Arial" pitchFamily="34" charset="-122"/>
+                <a:cs typeface="Arial" pitchFamily="34" charset="-120"/>
+              </a:rPr>
+              <a:t>BEDRIJVEN GESPROKEN</a:t>
+            </a:r>
+            <a:endParaRPr lang="en-US" sz="900" dirty="0"/>
+          </a:p>
+        </p:txBody>
+      </p:sp>
+      <p:sp>
+        <p:nvSpPr>
+          <p:cNvPr id="18" name="Text 16"/>
+          <p:cNvSpPr txBox="1"/>
+          <p:nvPr/>
+        </p:nvSpPr>
+        <p:spPr>
+          <a:xfrm>
+            <a:off x="6413484" y="3975090"/>
+            <a:ext cx="2146295" cy="888998"/>
+          </a:xfrm>
+          <a:prstGeom prst="rect">
+            <a:avLst/>
+          </a:prstGeom>
+          <a:noFill/>
+          <a:ln/>
+        </p:spPr>
+        <p:txBody>
+          <a:bodyPr wrap="square" lIns="0" tIns="0" rIns="0" bIns="0" rtlCol="0" anchor="t"/>
+          <a:lstStyle/>
+          <a:p>
+            <a:pPr indent="0" marL="0">
+              <a:lnSpc>
+                <a:spcPct val="135000"/>
+              </a:lnSpc>
+              <a:buNone/>
+            </a:pPr>
+            <a:r>
+              <a:rPr lang="en-US" sz="950" dirty="0">
+                <a:solidFill>
+                  <a:srgbClr val="6F6A5C"/>
+                </a:solidFill>
+                <a:latin typeface="Arial" pitchFamily="34" charset="0"/>
+                <a:ea typeface="Arial" pitchFamily="34" charset="-122"/>
+                <a:cs typeface="Arial" pitchFamily="34" charset="-120"/>
+              </a:rPr>
+              <a:t>Zes van de tien pogingen leveren de juiste persoon aan de lijn op.</a:t>
+            </a:r>
+            <a:endParaRPr lang="en-US" sz="950" dirty="0"/>
+          </a:p>
+        </p:txBody>
+      </p:sp>
+      <p:sp>
+        <p:nvSpPr>
+          <p:cNvPr id="19" name="Shape 17"/>
+          <p:cNvSpPr/>
+          <p:nvPr/>
+        </p:nvSpPr>
+        <p:spPr>
+          <a:xfrm>
+            <a:off x="8953478" y="2730493"/>
+            <a:ext cx="2628893" cy="2222494"/>
+          </a:xfrm>
+          <a:prstGeom prst="roundRect">
+            <a:avLst>
+              <a:gd name="adj" fmla="val 4571"/>
+            </a:avLst>
+          </a:prstGeom>
+          <a:solidFill>
+            <a:srgbClr val="000000"/>
+          </a:solidFill>
+          <a:ln/>
+        </p:spPr>
+      </p:sp>
+      <p:sp>
+        <p:nvSpPr>
+          <p:cNvPr id="20" name="Text 18"/>
+          <p:cNvSpPr txBox="1"/>
+          <p:nvPr/>
+        </p:nvSpPr>
+        <p:spPr>
+          <a:xfrm>
+            <a:off x="9194777" y="2997193"/>
+            <a:ext cx="2146295" cy="507999"/>
+          </a:xfrm>
+          <a:prstGeom prst="rect">
+            <a:avLst/>
+          </a:prstGeom>
+          <a:noFill/>
+          <a:ln/>
+        </p:spPr>
+        <p:txBody>
+          <a:bodyPr wrap="square" lIns="0" tIns="0" rIns="0" bIns="0" rtlCol="0" anchor="ctr"/>
+          <a:lstStyle/>
+          <a:p>
+            <a:pPr indent="0" marL="0">
+              <a:buNone/>
+            </a:pPr>
+            <a:r>
+              <a:rPr lang="en-US" sz="3600" b="1" dirty="0">
+                <a:solidFill>
+                  <a:srgbClr val="38B6FF"/>
+                </a:solidFill>
+                <a:latin typeface="Arial" pitchFamily="34" charset="0"/>
+                <a:ea typeface="Arial" pitchFamily="34" charset="-122"/>
+                <a:cs typeface="Arial" pitchFamily="34" charset="-120"/>
+              </a:rPr>
+              <a:t>± 2</a:t>
+            </a:r>
+            <a:endParaRPr lang="en-US" sz="3600" dirty="0"/>
+          </a:p>
+        </p:txBody>
+      </p:sp>
+      <p:sp>
+        <p:nvSpPr>
+          <p:cNvPr id="21" name="Text 19"/>
+          <p:cNvSpPr txBox="1"/>
+          <p:nvPr/>
+        </p:nvSpPr>
+        <p:spPr>
+          <a:xfrm>
+            <a:off x="9194777" y="3555991"/>
+            <a:ext cx="2146295" cy="215899"/>
+          </a:xfrm>
+          <a:prstGeom prst="rect">
+            <a:avLst/>
+          </a:prstGeom>
+          <a:noFill/>
+          <a:ln/>
+        </p:spPr>
+        <p:txBody>
+          <a:bodyPr wrap="square" lIns="0" tIns="0" rIns="0" bIns="0" rtlCol="0" anchor="ctr"/>
+          <a:lstStyle/>
+          <a:p>
+            <a:pPr indent="0" marL="0">
+              <a:buNone/>
+            </a:pPr>
+            <a:r>
+              <a:rPr lang="en-US" sz="900" b="1" spc="120" kern="0" dirty="0">
+                <a:solidFill>
+                  <a:srgbClr val="38B6FF"/>
+                </a:solidFill>
+                <a:latin typeface="Arial" pitchFamily="34" charset="0"/>
+                <a:ea typeface="Arial" pitchFamily="34" charset="-122"/>
+                <a:cs typeface="Arial" pitchFamily="34" charset="-120"/>
+              </a:rPr>
+              <a:t>GEKWALIFICEERDE AFSPRAKEN</a:t>
+            </a:r>
+            <a:endParaRPr lang="en-US" sz="900" dirty="0"/>
+          </a:p>
+        </p:txBody>
+      </p:sp>
+      <p:sp>
+        <p:nvSpPr>
+          <p:cNvPr id="22" name="Text 20"/>
+          <p:cNvSpPr txBox="1"/>
+          <p:nvPr/>
+        </p:nvSpPr>
+        <p:spPr>
+          <a:xfrm>
+            <a:off x="9194777" y="3975090"/>
+            <a:ext cx="2146295" cy="888998"/>
+          </a:xfrm>
+          <a:prstGeom prst="rect">
+            <a:avLst/>
+          </a:prstGeom>
+          <a:noFill/>
+          <a:ln/>
+        </p:spPr>
+        <p:txBody>
+          <a:bodyPr wrap="square" lIns="0" tIns="0" rIns="0" bIns="0" rtlCol="0" anchor="t"/>
+          <a:lstStyle/>
+          <a:p>
+            <a:pPr indent="0" marL="0">
+              <a:lnSpc>
+                <a:spcPct val="135000"/>
+              </a:lnSpc>
+              <a:buNone/>
+            </a:pPr>
+            <a:r>
+              <a:rPr lang="en-US" sz="950" dirty="0">
+                <a:solidFill>
+                  <a:srgbClr val="C2C8D2"/>
+                </a:solidFill>
+                <a:latin typeface="Arial" pitchFamily="34" charset="0"/>
+                <a:ea typeface="Arial" pitchFamily="34" charset="-122"/>
+                <a:cs typeface="Arial" pitchFamily="34" charset="-120"/>
+              </a:rPr>
+              <a:t>Vierentwintig afspraken over ruim twaalf beldagen. Dit is het getal waar we op sturen.</a:t>
+            </a:r>
+            <a:endParaRPr lang="en-US" sz="950" dirty="0"/>
+          </a:p>
+        </p:txBody>
+      </p:sp>
+      <p:sp>
+        <p:nvSpPr>
+          <p:cNvPr id="23" name="Shape 21"/>
+          <p:cNvSpPr/>
+          <p:nvPr/>
+        </p:nvSpPr>
+        <p:spPr>
+          <a:xfrm>
+            <a:off x="609598" y="5854685"/>
+            <a:ext cx="76200" cy="76200"/>
+          </a:xfrm>
+          <a:prstGeom prst="ellipse">
+            <a:avLst/>
+          </a:prstGeom>
+          <a:solidFill>
+            <a:srgbClr val="38B6FF"/>
+          </a:solidFill>
+          <a:ln/>
+        </p:spPr>
+      </p:sp>
+      <p:sp>
+        <p:nvSpPr>
+          <p:cNvPr id="24" name="Text 22"/>
+          <p:cNvSpPr txBox="1"/>
+          <p:nvPr/>
+        </p:nvSpPr>
+        <p:spPr>
+          <a:xfrm>
+            <a:off x="800098" y="5714986"/>
+            <a:ext cx="9905975" cy="355599"/>
+          </a:xfrm>
+          <a:prstGeom prst="rect">
+            <a:avLst/>
+          </a:prstGeom>
+          <a:noFill/>
+          <a:ln/>
+        </p:spPr>
+        <p:txBody>
+          <a:bodyPr wrap="square" lIns="0" tIns="0" rIns="0" bIns="0" rtlCol="0" anchor="ctr"/>
+          <a:lstStyle/>
+          <a:p>
+            <a:pPr indent="0" marL="0">
+              <a:buNone/>
+            </a:pPr>
+            <a:r>
+              <a:rPr lang="en-US" sz="1200" b="1" dirty="0">
+                <a:solidFill>
+                  <a:srgbClr val="1C2230"/>
+                </a:solidFill>
+                <a:latin typeface="Arial" pitchFamily="34" charset="0"/>
+                <a:ea typeface="Arial" pitchFamily="34" charset="-122"/>
+                <a:cs typeface="Arial" pitchFamily="34" charset="-120"/>
+              </a:rPr>
+              <a:t>Wij rekenen in beldagen en niet in uren, omdat een uur niets zegt over wat eruit komt. Een beldag is dit rijtje, elke periode opnieuw.</a:t>
+            </a:r>
+            <a:endParaRPr lang="en-US" sz="1200" dirty="0"/>
+          </a:p>
+        </p:txBody>
+      </p:sp>
+    </p:spTree>
+  </p:cSld>
+  <p:clrMapOvr>
+    <a:masterClrMapping/>
+  </p:clrMapOvr>
+</p:sld>
+</file>
+
+<file path=ppt/slides/slide9.xml><?xml version="1.0" encoding="utf-8"?>
+<p:sld xmlns:a="http://schemas.openxmlformats.org/drawingml/2006/main" xmlns:r="http://schemas.openxmlformats.org/officeDocument/2006/relationships" xmlns:p="http://schemas.openxmlformats.org/presentationml/2006/main">
+  <p:cSld name="Slide 9">
     <p:bg>
       <p:bgPr>
         <a:solidFill>
@@ -11790,7 +16473,7 @@
                 <a:ea typeface="Arial" pitchFamily="34" charset="-122"/>
                 <a:cs typeface="Arial" pitchFamily="34" charset="-120"/>
               </a:rPr>
-              <a:t>8 / 12</a:t>
+              <a:t>9 / 14</a:t>
             </a:r>
             <a:endParaRPr lang="en-US" sz="750" dirty="0"/>
           </a:p>
@@ -12264,7 +16947,7 @@
                 <a:ea typeface="Arial" pitchFamily="34" charset="-122"/>
                 <a:cs typeface="Arial" pitchFamily="34" charset="-120"/>
               </a:rPr>
-              <a:t>± 7</a:t>
+              <a:t>± 8</a:t>
             </a:r>
             <a:endParaRPr lang="en-US" sz="1250" dirty="0"/>
           </a:p>
@@ -12443,7 +17126,7 @@
                 <a:ea typeface="Arial" pitchFamily="34" charset="-122"/>
                 <a:cs typeface="Arial" pitchFamily="34" charset="-120"/>
               </a:rPr>
-              <a:t>± 9 tot 12</a:t>
+              <a:t>± 10 tot 14</a:t>
             </a:r>
             <a:endParaRPr lang="en-US" sz="1250" dirty="0"/>
           </a:p>
@@ -12644,7 +17327,7 @@
                 <a:ea typeface="Arial" pitchFamily="34" charset="-122"/>
                 <a:cs typeface="Arial" pitchFamily="34" charset="-120"/>
               </a:rPr>
-              <a:t>± 14</a:t>
+              <a:t>± 16</a:t>
             </a:r>
             <a:endParaRPr lang="en-US" sz="1250" dirty="0"/>
           </a:p>
@@ -12703,1796 +17386,7 @@
                 <a:ea typeface="Arial" pitchFamily="34" charset="-122"/>
                 <a:cs typeface="Arial" pitchFamily="34" charset="-120"/>
               </a:rPr>
-              <a:t>De verwachte aantallen zijn een indicatie, gebaseerd op 17,3 afspraken per duizend contactpogingen uit jullie eigen pilot, bij ongeveer honderd pogingen per beldag. Minimaal vier beldagen per periode, prijzen excl. btw.</a:t>
-            </a:r>
-            <a:endParaRPr lang="en-US" sz="1200" dirty="0"/>
-          </a:p>
-        </p:txBody>
-      </p:sp>
-    </p:spTree>
-  </p:cSld>
-  <p:clrMapOvr>
-    <a:masterClrMapping/>
-  </p:clrMapOvr>
-</p:sld>
-</file>
-
-<file path=ppt/slides/slide9.xml><?xml version="1.0" encoding="utf-8"?>
-<p:sld xmlns:a="http://schemas.openxmlformats.org/drawingml/2006/main" xmlns:r="http://schemas.openxmlformats.org/officeDocument/2006/relationships" xmlns:p="http://schemas.openxmlformats.org/presentationml/2006/main">
-  <p:cSld name="Slide 9">
-    <p:bg>
-      <p:bgPr>
-        <a:solidFill>
-          <a:srgbClr val="E9E0CD"/>
-        </a:solidFill>
-      </p:bgPr>
-    </p:bg>
-    <p:spTree>
-      <p:nvGrpSpPr>
-        <p:cNvPr id="1" name=""/>
-        <p:cNvGrpSpPr/>
-        <p:nvPr/>
-      </p:nvGrpSpPr>
-      <p:grpSpPr>
-        <a:xfrm>
-          <a:off x="0" y="0"/>
-          <a:ext cx="0" cy="0"/>
-          <a:chOff x="0" y="0"/>
-          <a:chExt cx="0" cy="0"/>
-        </a:xfrm>
-      </p:grpSpPr>
-      <p:sp>
-        <p:nvSpPr>
-          <p:cNvPr id="2" name="Text 0"/>
-          <p:cNvSpPr txBox="1"/>
-          <p:nvPr/>
-        </p:nvSpPr>
-        <p:spPr>
-          <a:xfrm>
-            <a:off x="596899" y="368299"/>
-            <a:ext cx="1904995" cy="330199"/>
-          </a:xfrm>
-          <a:prstGeom prst="rect">
-            <a:avLst/>
-          </a:prstGeom>
-          <a:noFill/>
-          <a:ln/>
-        </p:spPr>
-        <p:txBody>
-          <a:bodyPr wrap="square" lIns="0" tIns="0" rIns="0" bIns="0" rtlCol="0" anchor="ctr"/>
-          <a:lstStyle/>
-          <a:p>
-            <a:pPr algn="l" indent="0" marL="0">
-              <a:buNone/>
-            </a:pPr>
-            <a:r>
-              <a:rPr lang="en-US" sz="1800" b="1" dirty="0">
-                <a:solidFill>
-                  <a:srgbClr val="1C2230"/>
-                </a:solidFill>
-                <a:latin typeface="Arial" pitchFamily="34" charset="0"/>
-                <a:ea typeface="Arial" pitchFamily="34" charset="-122"/>
-                <a:cs typeface="Arial" pitchFamily="34" charset="-120"/>
-              </a:rPr>
-              <a:t>LINK</a:t>
-            </a:r>
-            <a:pPr algn="l" indent="0" marL="0">
-              <a:buNone/>
-            </a:pPr>
-            <a:r>
-              <a:rPr lang="en-US" sz="1800" b="1" dirty="0">
-                <a:solidFill>
-                  <a:srgbClr val="38B6FF"/>
-                </a:solidFill>
-                <a:latin typeface="Arial" pitchFamily="34" charset="0"/>
-                <a:ea typeface="Arial" pitchFamily="34" charset="-122"/>
-                <a:cs typeface="Arial" pitchFamily="34" charset="-120"/>
-              </a:rPr>
-              <a:t>.</a:t>
-            </a:r>
-            <a:endParaRPr lang="en-US" sz="1800" dirty="0"/>
-          </a:p>
-        </p:txBody>
-      </p:sp>
-      <p:sp>
-        <p:nvSpPr>
-          <p:cNvPr id="3" name="Text 1"/>
-          <p:cNvSpPr txBox="1"/>
-          <p:nvPr/>
-        </p:nvSpPr>
-        <p:spPr>
-          <a:xfrm>
-            <a:off x="609598" y="6381734"/>
-            <a:ext cx="5714986" cy="228599"/>
-          </a:xfrm>
-          <a:prstGeom prst="rect">
-            <a:avLst/>
-          </a:prstGeom>
-          <a:noFill/>
-          <a:ln/>
-        </p:spPr>
-        <p:txBody>
-          <a:bodyPr wrap="square" lIns="0" tIns="0" rIns="0" bIns="0" rtlCol="0" anchor="ctr"/>
-          <a:lstStyle/>
-          <a:p>
-            <a:pPr algn="l" indent="0" marL="0">
-              <a:buNone/>
-            </a:pPr>
-            <a:r>
-              <a:rPr lang="en-US" sz="750" b="1" spc="100" kern="0" dirty="0">
-                <a:solidFill>
-                  <a:srgbClr val="6F6A5C"/>
-                </a:solidFill>
-                <a:latin typeface="Arial" pitchFamily="34" charset="0"/>
-                <a:ea typeface="Arial" pitchFamily="34" charset="-122"/>
-                <a:cs typeface="Arial" pitchFamily="34" charset="-120"/>
-              </a:rPr>
-              <a:t>LINK. · Voorstel GrowOn Agency</a:t>
-            </a:r>
-            <a:endParaRPr lang="en-US" sz="750" dirty="0"/>
-          </a:p>
-        </p:txBody>
-      </p:sp>
-      <p:sp>
-        <p:nvSpPr>
-          <p:cNvPr id="4" name="Text 2"/>
-          <p:cNvSpPr txBox="1"/>
-          <p:nvPr/>
-        </p:nvSpPr>
-        <p:spPr>
-          <a:xfrm>
-            <a:off x="9677376" y="6381734"/>
-            <a:ext cx="1904995" cy="228599"/>
-          </a:xfrm>
-          <a:prstGeom prst="rect">
-            <a:avLst/>
-          </a:prstGeom>
-          <a:noFill/>
-          <a:ln/>
-        </p:spPr>
-        <p:txBody>
-          <a:bodyPr wrap="square" lIns="0" tIns="0" rIns="0" bIns="0" rtlCol="0" anchor="ctr"/>
-          <a:lstStyle/>
-          <a:p>
-            <a:pPr algn="r" indent="0" marL="0">
-              <a:buNone/>
-            </a:pPr>
-            <a:r>
-              <a:rPr lang="en-US" sz="750" b="1" spc="100" kern="0" dirty="0">
-                <a:solidFill>
-                  <a:srgbClr val="6F6A5C"/>
-                </a:solidFill>
-                <a:latin typeface="Arial" pitchFamily="34" charset="0"/>
-                <a:ea typeface="Arial" pitchFamily="34" charset="-122"/>
-                <a:cs typeface="Arial" pitchFamily="34" charset="-120"/>
-              </a:rPr>
-              <a:t>9 / 12</a:t>
-            </a:r>
-            <a:endParaRPr lang="en-US" sz="750" dirty="0"/>
-          </a:p>
-        </p:txBody>
-      </p:sp>
-      <p:sp>
-        <p:nvSpPr>
-          <p:cNvPr id="5" name="Text 3"/>
-          <p:cNvSpPr txBox="1"/>
-          <p:nvPr/>
-        </p:nvSpPr>
-        <p:spPr>
-          <a:xfrm>
-            <a:off x="609598" y="1206497"/>
-            <a:ext cx="10159975" cy="215899"/>
-          </a:xfrm>
-          <a:prstGeom prst="rect">
-            <a:avLst/>
-          </a:prstGeom>
-          <a:noFill/>
-          <a:ln/>
-        </p:spPr>
-        <p:txBody>
-          <a:bodyPr wrap="square" lIns="0" tIns="0" rIns="0" bIns="0" rtlCol="0" anchor="ctr"/>
-          <a:lstStyle/>
-          <a:p>
-            <a:pPr algn="l" indent="0" marL="0">
-              <a:buNone/>
-            </a:pPr>
-            <a:r>
-              <a:rPr lang="en-US" sz="950" b="1" spc="400" kern="0" dirty="0">
-                <a:solidFill>
-                  <a:srgbClr val="38B6FF"/>
-                </a:solidFill>
-                <a:latin typeface="Arial" pitchFamily="34" charset="0"/>
-                <a:ea typeface="Arial" pitchFamily="34" charset="-122"/>
-                <a:cs typeface="Arial" pitchFamily="34" charset="-120"/>
-              </a:rPr>
-              <a:t>OPSCHALEN</a:t>
-            </a:r>
-            <a:endParaRPr lang="en-US" sz="950" dirty="0"/>
-          </a:p>
-        </p:txBody>
-      </p:sp>
-      <p:sp>
-        <p:nvSpPr>
-          <p:cNvPr id="6" name="Text 4"/>
-          <p:cNvSpPr txBox="1"/>
-          <p:nvPr/>
-        </p:nvSpPr>
-        <p:spPr>
-          <a:xfrm>
-            <a:off x="609598" y="1511296"/>
-            <a:ext cx="10972773" cy="1142997"/>
-          </a:xfrm>
-          <a:prstGeom prst="rect">
-            <a:avLst/>
-          </a:prstGeom>
-          <a:noFill/>
-          <a:ln/>
-        </p:spPr>
-        <p:txBody>
-          <a:bodyPr wrap="square" lIns="0" tIns="0" rIns="0" bIns="0" rtlCol="0" anchor="t"/>
-          <a:lstStyle/>
-          <a:p>
-            <a:pPr algn="l" indent="0" marL="0">
-              <a:lnSpc>
-                <a:spcPct val="108000"/>
-              </a:lnSpc>
-              <a:buNone/>
-            </a:pPr>
-            <a:r>
-              <a:rPr lang="en-US" sz="3200" b="1" dirty="0">
-                <a:solidFill>
-                  <a:srgbClr val="1C2230"/>
-                </a:solidFill>
-                <a:latin typeface="Arial" pitchFamily="34" charset="0"/>
-                <a:ea typeface="Arial" pitchFamily="34" charset="-122"/>
-                <a:cs typeface="Arial" pitchFamily="34" charset="-120"/>
-              </a:rPr>
-              <a:t>Hetzelfde ritme, of </a:t>
-            </a:r>
-            <a:pPr algn="l" indent="0" marL="0">
-              <a:lnSpc>
-                <a:spcPct val="108000"/>
-              </a:lnSpc>
-              <a:buNone/>
-            </a:pPr>
-            <a:r>
-              <a:rPr lang="en-US" sz="3000" i="1" dirty="0">
-                <a:solidFill>
-                  <a:srgbClr val="1C2230"/>
-                </a:solidFill>
-                <a:latin typeface="Georgia" pitchFamily="34" charset="0"/>
-                <a:ea typeface="Georgia" pitchFamily="34" charset="-122"/>
-                <a:cs typeface="Georgia" pitchFamily="34" charset="-120"/>
-              </a:rPr>
-              <a:t>twee keer zoveel</a:t>
-            </a:r>
-            <a:pPr algn="l" indent="0" marL="0">
-              <a:lnSpc>
-                <a:spcPct val="108000"/>
-              </a:lnSpc>
-              <a:buNone/>
-            </a:pPr>
-            <a:r>
-              <a:rPr lang="en-US" sz="3200" b="1" dirty="0">
-                <a:solidFill>
-                  <a:srgbClr val="1C2230"/>
-                </a:solidFill>
-                <a:latin typeface="Arial" pitchFamily="34" charset="0"/>
-                <a:ea typeface="Arial" pitchFamily="34" charset="-122"/>
-                <a:cs typeface="Arial" pitchFamily="34" charset="-120"/>
-              </a:rPr>
-              <a:t>.</a:t>
-            </a:r>
-            <a:endParaRPr lang="en-US" sz="3200" dirty="0"/>
-          </a:p>
-        </p:txBody>
-      </p:sp>
-      <p:sp>
-        <p:nvSpPr>
-          <p:cNvPr id="7" name="Shape 5"/>
-          <p:cNvSpPr/>
-          <p:nvPr/>
-        </p:nvSpPr>
-        <p:spPr>
-          <a:xfrm>
-            <a:off x="609598" y="2489194"/>
-            <a:ext cx="3555991" cy="2768593"/>
-          </a:xfrm>
-          <a:prstGeom prst="roundRect">
-            <a:avLst>
-              <a:gd name="adj" fmla="val 3670"/>
-            </a:avLst>
-          </a:prstGeom>
-          <a:solidFill>
-            <a:srgbClr val="F8F4EB"/>
-          </a:solidFill>
-          <a:ln/>
-        </p:spPr>
-      </p:sp>
-      <p:sp>
-        <p:nvSpPr>
-          <p:cNvPr id="8" name="Text 6"/>
-          <p:cNvSpPr txBox="1"/>
-          <p:nvPr/>
-        </p:nvSpPr>
-        <p:spPr>
-          <a:xfrm>
-            <a:off x="825498" y="2743193"/>
-            <a:ext cx="3124192" cy="190500"/>
-          </a:xfrm>
-          <a:prstGeom prst="rect">
-            <a:avLst/>
-          </a:prstGeom>
-          <a:noFill/>
-          <a:ln/>
-        </p:spPr>
-        <p:txBody>
-          <a:bodyPr wrap="square" lIns="0" tIns="0" rIns="0" bIns="0" rtlCol="0" anchor="ctr"/>
-          <a:lstStyle/>
-          <a:p>
-            <a:pPr indent="0" marL="0">
-              <a:buNone/>
-            </a:pPr>
-            <a:r>
-              <a:rPr lang="en-US" sz="800" b="1" spc="180" kern="0" dirty="0">
-                <a:solidFill>
-                  <a:srgbClr val="6F6A5C"/>
-                </a:solidFill>
-                <a:latin typeface="Arial" pitchFamily="34" charset="0"/>
-                <a:ea typeface="Arial" pitchFamily="34" charset="-122"/>
-                <a:cs typeface="Arial" pitchFamily="34" charset="-120"/>
-              </a:rPr>
-              <a:t>NU</a:t>
-            </a:r>
-            <a:endParaRPr lang="en-US" sz="800" dirty="0"/>
-          </a:p>
-        </p:txBody>
-      </p:sp>
-      <p:sp>
-        <p:nvSpPr>
-          <p:cNvPr id="9" name="Text 7"/>
-          <p:cNvSpPr txBox="1"/>
-          <p:nvPr/>
-        </p:nvSpPr>
-        <p:spPr>
-          <a:xfrm>
-            <a:off x="825498" y="2959093"/>
-            <a:ext cx="3124192" cy="355599"/>
-          </a:xfrm>
-          <a:prstGeom prst="rect">
-            <a:avLst/>
-          </a:prstGeom>
-          <a:noFill/>
-          <a:ln/>
-        </p:spPr>
-        <p:txBody>
-          <a:bodyPr wrap="square" lIns="0" tIns="0" rIns="0" bIns="0" rtlCol="0" anchor="ctr"/>
-          <a:lstStyle/>
-          <a:p>
-            <a:pPr indent="0" marL="0">
-              <a:lnSpc>
-                <a:spcPct val="115000"/>
-              </a:lnSpc>
-              <a:buNone/>
-            </a:pPr>
-            <a:r>
-              <a:rPr lang="en-US" sz="1250" b="1" dirty="0">
-                <a:solidFill>
-                  <a:srgbClr val="1C2230"/>
-                </a:solidFill>
-                <a:latin typeface="Arial" pitchFamily="34" charset="0"/>
-                <a:ea typeface="Arial" pitchFamily="34" charset="-122"/>
-                <a:cs typeface="Arial" pitchFamily="34" charset="-120"/>
-              </a:rPr>
-              <a:t>€ 1.600 per werkperiode</a:t>
-            </a:r>
-            <a:endParaRPr lang="en-US" sz="1250" dirty="0"/>
-          </a:p>
-        </p:txBody>
-      </p:sp>
-      <p:sp>
-        <p:nvSpPr>
-          <p:cNvPr id="10" name="Text 8"/>
-          <p:cNvSpPr txBox="1"/>
-          <p:nvPr/>
-        </p:nvSpPr>
-        <p:spPr>
-          <a:xfrm>
-            <a:off x="825498" y="3378192"/>
-            <a:ext cx="2578094" cy="406399"/>
-          </a:xfrm>
-          <a:prstGeom prst="rect">
-            <a:avLst/>
-          </a:prstGeom>
-          <a:noFill/>
-          <a:ln/>
-        </p:spPr>
-        <p:txBody>
-          <a:bodyPr wrap="square" lIns="0" tIns="0" rIns="0" bIns="0" rtlCol="0" anchor="ctr"/>
-          <a:lstStyle/>
-          <a:p>
-            <a:pPr indent="0" marL="0">
-              <a:buNone/>
-            </a:pPr>
-            <a:r>
-              <a:rPr lang="en-US" sz="950" dirty="0">
-                <a:solidFill>
-                  <a:srgbClr val="6F6A5C"/>
-                </a:solidFill>
-                <a:latin typeface="Arial" pitchFamily="34" charset="0"/>
-                <a:ea typeface="Arial" pitchFamily="34" charset="-122"/>
-                <a:cs typeface="Arial" pitchFamily="34" charset="-120"/>
-              </a:rPr>
-              <a:t>Beldagen</a:t>
-            </a:r>
-            <a:endParaRPr lang="en-US" sz="950" dirty="0"/>
-          </a:p>
-        </p:txBody>
-      </p:sp>
-      <p:sp>
-        <p:nvSpPr>
-          <p:cNvPr id="11" name="Text 9"/>
-          <p:cNvSpPr txBox="1"/>
-          <p:nvPr/>
-        </p:nvSpPr>
-        <p:spPr>
-          <a:xfrm>
-            <a:off x="3124192" y="3378192"/>
-            <a:ext cx="825498" cy="406399"/>
-          </a:xfrm>
-          <a:prstGeom prst="rect">
-            <a:avLst/>
-          </a:prstGeom>
-          <a:noFill/>
-          <a:ln/>
-        </p:spPr>
-        <p:txBody>
-          <a:bodyPr wrap="square" lIns="0" tIns="0" rIns="0" bIns="0" rtlCol="0" anchor="ctr"/>
-          <a:lstStyle/>
-          <a:p>
-            <a:pPr algn="r" indent="0" marL="0">
-              <a:buNone/>
-            </a:pPr>
-            <a:r>
-              <a:rPr lang="en-US" sz="1150" b="1" dirty="0">
-                <a:solidFill>
-                  <a:srgbClr val="1C2230"/>
-                </a:solidFill>
-                <a:latin typeface="Arial" pitchFamily="34" charset="0"/>
-                <a:ea typeface="Arial" pitchFamily="34" charset="-122"/>
-                <a:cs typeface="Arial" pitchFamily="34" charset="-120"/>
-              </a:rPr>
-              <a:t>± 4</a:t>
-            </a:r>
-            <a:endParaRPr lang="en-US" sz="1150" dirty="0"/>
-          </a:p>
-        </p:txBody>
-      </p:sp>
-      <p:sp>
-        <p:nvSpPr>
-          <p:cNvPr id="12" name="Shape 10"/>
-          <p:cNvSpPr/>
-          <p:nvPr/>
-        </p:nvSpPr>
-        <p:spPr>
-          <a:xfrm>
-            <a:off x="825498" y="3784591"/>
-            <a:ext cx="3124192" cy="0"/>
-          </a:xfrm>
-          <a:prstGeom prst="line">
-            <a:avLst/>
-          </a:prstGeom>
-          <a:noFill/>
-          <a:ln w="9525">
-            <a:solidFill>
-              <a:srgbClr val="D8D2C4"/>
-            </a:solidFill>
-            <a:prstDash val="solid"/>
-          </a:ln>
-        </p:spPr>
-      </p:sp>
-      <p:sp>
-        <p:nvSpPr>
-          <p:cNvPr id="13" name="Text 11"/>
-          <p:cNvSpPr txBox="1"/>
-          <p:nvPr/>
-        </p:nvSpPr>
-        <p:spPr>
-          <a:xfrm>
-            <a:off x="825498" y="3784591"/>
-            <a:ext cx="2578094" cy="406399"/>
-          </a:xfrm>
-          <a:prstGeom prst="rect">
-            <a:avLst/>
-          </a:prstGeom>
-          <a:noFill/>
-          <a:ln/>
-        </p:spPr>
-        <p:txBody>
-          <a:bodyPr wrap="square" lIns="0" tIns="0" rIns="0" bIns="0" rtlCol="0" anchor="ctr"/>
-          <a:lstStyle/>
-          <a:p>
-            <a:pPr indent="0" marL="0">
-              <a:buNone/>
-            </a:pPr>
-            <a:r>
-              <a:rPr lang="en-US" sz="950" dirty="0">
-                <a:solidFill>
-                  <a:srgbClr val="6F6A5C"/>
-                </a:solidFill>
-                <a:latin typeface="Arial" pitchFamily="34" charset="0"/>
-                <a:ea typeface="Arial" pitchFamily="34" charset="-122"/>
-                <a:cs typeface="Arial" pitchFamily="34" charset="-120"/>
-              </a:rPr>
-              <a:t>Contactpogingen</a:t>
-            </a:r>
-            <a:endParaRPr lang="en-US" sz="950" dirty="0"/>
-          </a:p>
-        </p:txBody>
-      </p:sp>
-      <p:sp>
-        <p:nvSpPr>
-          <p:cNvPr id="14" name="Text 12"/>
-          <p:cNvSpPr txBox="1"/>
-          <p:nvPr/>
-        </p:nvSpPr>
-        <p:spPr>
-          <a:xfrm>
-            <a:off x="3124192" y="3784591"/>
-            <a:ext cx="825498" cy="406399"/>
-          </a:xfrm>
-          <a:prstGeom prst="rect">
-            <a:avLst/>
-          </a:prstGeom>
-          <a:noFill/>
-          <a:ln/>
-        </p:spPr>
-        <p:txBody>
-          <a:bodyPr wrap="square" lIns="0" tIns="0" rIns="0" bIns="0" rtlCol="0" anchor="ctr"/>
-          <a:lstStyle/>
-          <a:p>
-            <a:pPr algn="r" indent="0" marL="0">
-              <a:buNone/>
-            </a:pPr>
-            <a:r>
-              <a:rPr lang="en-US" sz="1150" b="1" dirty="0">
-                <a:solidFill>
-                  <a:srgbClr val="1C2230"/>
-                </a:solidFill>
-                <a:latin typeface="Arial" pitchFamily="34" charset="0"/>
-                <a:ea typeface="Arial" pitchFamily="34" charset="-122"/>
-                <a:cs typeface="Arial" pitchFamily="34" charset="-120"/>
-              </a:rPr>
-              <a:t>± 400</a:t>
-            </a:r>
-            <a:endParaRPr lang="en-US" sz="1150" dirty="0"/>
-          </a:p>
-        </p:txBody>
-      </p:sp>
-      <p:sp>
-        <p:nvSpPr>
-          <p:cNvPr id="15" name="Shape 13"/>
-          <p:cNvSpPr/>
-          <p:nvPr/>
-        </p:nvSpPr>
-        <p:spPr>
-          <a:xfrm>
-            <a:off x="825498" y="4190990"/>
-            <a:ext cx="3124192" cy="0"/>
-          </a:xfrm>
-          <a:prstGeom prst="line">
-            <a:avLst/>
-          </a:prstGeom>
-          <a:noFill/>
-          <a:ln w="9525">
-            <a:solidFill>
-              <a:srgbClr val="D8D2C4"/>
-            </a:solidFill>
-            <a:prstDash val="solid"/>
-          </a:ln>
-        </p:spPr>
-      </p:sp>
-      <p:sp>
-        <p:nvSpPr>
-          <p:cNvPr id="16" name="Text 14"/>
-          <p:cNvSpPr txBox="1"/>
-          <p:nvPr/>
-        </p:nvSpPr>
-        <p:spPr>
-          <a:xfrm>
-            <a:off x="825498" y="4190990"/>
-            <a:ext cx="2578094" cy="406399"/>
-          </a:xfrm>
-          <a:prstGeom prst="rect">
-            <a:avLst/>
-          </a:prstGeom>
-          <a:noFill/>
-          <a:ln/>
-        </p:spPr>
-        <p:txBody>
-          <a:bodyPr wrap="square" lIns="0" tIns="0" rIns="0" bIns="0" rtlCol="0" anchor="ctr"/>
-          <a:lstStyle/>
-          <a:p>
-            <a:pPr indent="0" marL="0">
-              <a:buNone/>
-            </a:pPr>
-            <a:r>
-              <a:rPr lang="en-US" sz="950" dirty="0">
-                <a:solidFill>
-                  <a:srgbClr val="6F6A5C"/>
-                </a:solidFill>
-                <a:latin typeface="Arial" pitchFamily="34" charset="0"/>
-                <a:ea typeface="Arial" pitchFamily="34" charset="-122"/>
-                <a:cs typeface="Arial" pitchFamily="34" charset="-120"/>
-              </a:rPr>
-              <a:t>Bedrijven gesproken</a:t>
-            </a:r>
-            <a:endParaRPr lang="en-US" sz="950" dirty="0"/>
-          </a:p>
-        </p:txBody>
-      </p:sp>
-      <p:sp>
-        <p:nvSpPr>
-          <p:cNvPr id="17" name="Text 15"/>
-          <p:cNvSpPr txBox="1"/>
-          <p:nvPr/>
-        </p:nvSpPr>
-        <p:spPr>
-          <a:xfrm>
-            <a:off x="3124192" y="4190990"/>
-            <a:ext cx="825498" cy="406399"/>
-          </a:xfrm>
-          <a:prstGeom prst="rect">
-            <a:avLst/>
-          </a:prstGeom>
-          <a:noFill/>
-          <a:ln/>
-        </p:spPr>
-        <p:txBody>
-          <a:bodyPr wrap="square" lIns="0" tIns="0" rIns="0" bIns="0" rtlCol="0" anchor="ctr"/>
-          <a:lstStyle/>
-          <a:p>
-            <a:pPr algn="r" indent="0" marL="0">
-              <a:buNone/>
-            </a:pPr>
-            <a:r>
-              <a:rPr lang="en-US" sz="1150" b="1" dirty="0">
-                <a:solidFill>
-                  <a:srgbClr val="1C2230"/>
-                </a:solidFill>
-                <a:latin typeface="Arial" pitchFamily="34" charset="0"/>
-                <a:ea typeface="Arial" pitchFamily="34" charset="-122"/>
-                <a:cs typeface="Arial" pitchFamily="34" charset="-120"/>
-              </a:rPr>
-              <a:t>± 240</a:t>
-            </a:r>
-            <a:endParaRPr lang="en-US" sz="1150" dirty="0"/>
-          </a:p>
-        </p:txBody>
-      </p:sp>
-      <p:sp>
-        <p:nvSpPr>
-          <p:cNvPr id="18" name="Shape 16"/>
-          <p:cNvSpPr/>
-          <p:nvPr/>
-        </p:nvSpPr>
-        <p:spPr>
-          <a:xfrm>
-            <a:off x="825498" y="4597389"/>
-            <a:ext cx="3124192" cy="0"/>
-          </a:xfrm>
-          <a:prstGeom prst="line">
-            <a:avLst/>
-          </a:prstGeom>
-          <a:noFill/>
-          <a:ln w="9525">
-            <a:solidFill>
-              <a:srgbClr val="D8D2C4"/>
-            </a:solidFill>
-            <a:prstDash val="solid"/>
-          </a:ln>
-        </p:spPr>
-      </p:sp>
-      <p:sp>
-        <p:nvSpPr>
-          <p:cNvPr id="19" name="Text 17"/>
-          <p:cNvSpPr txBox="1"/>
-          <p:nvPr/>
-        </p:nvSpPr>
-        <p:spPr>
-          <a:xfrm>
-            <a:off x="825498" y="4597389"/>
-            <a:ext cx="2578094" cy="406399"/>
-          </a:xfrm>
-          <a:prstGeom prst="rect">
-            <a:avLst/>
-          </a:prstGeom>
-          <a:noFill/>
-          <a:ln/>
-        </p:spPr>
-        <p:txBody>
-          <a:bodyPr wrap="square" lIns="0" tIns="0" rIns="0" bIns="0" rtlCol="0" anchor="ctr"/>
-          <a:lstStyle/>
-          <a:p>
-            <a:pPr indent="0" marL="0">
-              <a:buNone/>
-            </a:pPr>
-            <a:r>
-              <a:rPr lang="en-US" sz="950" dirty="0">
-                <a:solidFill>
-                  <a:srgbClr val="6F6A5C"/>
-                </a:solidFill>
-                <a:latin typeface="Arial" pitchFamily="34" charset="0"/>
-                <a:ea typeface="Arial" pitchFamily="34" charset="-122"/>
-                <a:cs typeface="Arial" pitchFamily="34" charset="-120"/>
-              </a:rPr>
-              <a:t>Afspraken</a:t>
-            </a:r>
-            <a:endParaRPr lang="en-US" sz="950" dirty="0"/>
-          </a:p>
-        </p:txBody>
-      </p:sp>
-      <p:sp>
-        <p:nvSpPr>
-          <p:cNvPr id="20" name="Text 18"/>
-          <p:cNvSpPr txBox="1"/>
-          <p:nvPr/>
-        </p:nvSpPr>
-        <p:spPr>
-          <a:xfrm>
-            <a:off x="3124192" y="4597389"/>
-            <a:ext cx="825498" cy="406399"/>
-          </a:xfrm>
-          <a:prstGeom prst="rect">
-            <a:avLst/>
-          </a:prstGeom>
-          <a:noFill/>
-          <a:ln/>
-        </p:spPr>
-        <p:txBody>
-          <a:bodyPr wrap="square" lIns="0" tIns="0" rIns="0" bIns="0" rtlCol="0" anchor="ctr"/>
-          <a:lstStyle/>
-          <a:p>
-            <a:pPr algn="r" indent="0" marL="0">
-              <a:buNone/>
-            </a:pPr>
-            <a:r>
-              <a:rPr lang="en-US" sz="1150" b="1" dirty="0">
-                <a:solidFill>
-                  <a:srgbClr val="1C2230"/>
-                </a:solidFill>
-                <a:latin typeface="Arial" pitchFamily="34" charset="0"/>
-                <a:ea typeface="Arial" pitchFamily="34" charset="-122"/>
-                <a:cs typeface="Arial" pitchFamily="34" charset="-120"/>
-              </a:rPr>
-              <a:t>± 7</a:t>
-            </a:r>
-            <a:endParaRPr lang="en-US" sz="1150" dirty="0"/>
-          </a:p>
-        </p:txBody>
-      </p:sp>
-      <p:sp>
-        <p:nvSpPr>
-          <p:cNvPr id="21" name="Shape 19"/>
-          <p:cNvSpPr/>
-          <p:nvPr/>
-        </p:nvSpPr>
-        <p:spPr>
-          <a:xfrm>
-            <a:off x="4317989" y="2489194"/>
-            <a:ext cx="3555991" cy="2768593"/>
-          </a:xfrm>
-          <a:prstGeom prst="roundRect">
-            <a:avLst>
-              <a:gd name="adj" fmla="val 3670"/>
-            </a:avLst>
-          </a:prstGeom>
-          <a:solidFill>
-            <a:srgbClr val="F8F4EB"/>
-          </a:solidFill>
-          <a:ln/>
-        </p:spPr>
-      </p:sp>
-      <p:sp>
-        <p:nvSpPr>
-          <p:cNvPr id="22" name="Text 20"/>
-          <p:cNvSpPr txBox="1"/>
-          <p:nvPr/>
-        </p:nvSpPr>
-        <p:spPr>
-          <a:xfrm>
-            <a:off x="4533889" y="2743193"/>
-            <a:ext cx="3124192" cy="190500"/>
-          </a:xfrm>
-          <a:prstGeom prst="rect">
-            <a:avLst/>
-          </a:prstGeom>
-          <a:noFill/>
-          <a:ln/>
-        </p:spPr>
-        <p:txBody>
-          <a:bodyPr wrap="square" lIns="0" tIns="0" rIns="0" bIns="0" rtlCol="0" anchor="ctr"/>
-          <a:lstStyle/>
-          <a:p>
-            <a:pPr indent="0" marL="0">
-              <a:buNone/>
-            </a:pPr>
-            <a:r>
-              <a:rPr lang="en-US" sz="800" b="1" spc="180" kern="0" dirty="0">
-                <a:solidFill>
-                  <a:srgbClr val="6F6A5C"/>
-                </a:solidFill>
-                <a:latin typeface="Arial" pitchFamily="34" charset="0"/>
-                <a:ea typeface="Arial" pitchFamily="34" charset="-122"/>
-                <a:cs typeface="Arial" pitchFamily="34" charset="-120"/>
-              </a:rPr>
-              <a:t>VOORSTEL</a:t>
-            </a:r>
-            <a:endParaRPr lang="en-US" sz="800" dirty="0"/>
-          </a:p>
-        </p:txBody>
-      </p:sp>
-      <p:sp>
-        <p:nvSpPr>
-          <p:cNvPr id="23" name="Text 21"/>
-          <p:cNvSpPr txBox="1"/>
-          <p:nvPr/>
-        </p:nvSpPr>
-        <p:spPr>
-          <a:xfrm>
-            <a:off x="4533889" y="2959093"/>
-            <a:ext cx="3124192" cy="355599"/>
-          </a:xfrm>
-          <a:prstGeom prst="rect">
-            <a:avLst/>
-          </a:prstGeom>
-          <a:noFill/>
-          <a:ln/>
-        </p:spPr>
-        <p:txBody>
-          <a:bodyPr wrap="square" lIns="0" tIns="0" rIns="0" bIns="0" rtlCol="0" anchor="ctr"/>
-          <a:lstStyle/>
-          <a:p>
-            <a:pPr indent="0" marL="0">
-              <a:lnSpc>
-                <a:spcPct val="115000"/>
-              </a:lnSpc>
-              <a:buNone/>
-            </a:pPr>
-            <a:r>
-              <a:rPr lang="en-US" sz="1250" b="1" dirty="0">
-                <a:solidFill>
-                  <a:srgbClr val="1C2230"/>
-                </a:solidFill>
-                <a:latin typeface="Arial" pitchFamily="34" charset="0"/>
-                <a:ea typeface="Arial" pitchFamily="34" charset="-122"/>
-                <a:cs typeface="Arial" pitchFamily="34" charset="-120"/>
-              </a:rPr>
-              <a:t>4 beldagen per werkperiode</a:t>
-            </a:r>
-            <a:endParaRPr lang="en-US" sz="1250" dirty="0"/>
-          </a:p>
-        </p:txBody>
-      </p:sp>
-      <p:sp>
-        <p:nvSpPr>
-          <p:cNvPr id="24" name="Text 22"/>
-          <p:cNvSpPr txBox="1"/>
-          <p:nvPr/>
-        </p:nvSpPr>
-        <p:spPr>
-          <a:xfrm>
-            <a:off x="4533889" y="3378192"/>
-            <a:ext cx="2578094" cy="406399"/>
-          </a:xfrm>
-          <a:prstGeom prst="rect">
-            <a:avLst/>
-          </a:prstGeom>
-          <a:noFill/>
-          <a:ln/>
-        </p:spPr>
-        <p:txBody>
-          <a:bodyPr wrap="square" lIns="0" tIns="0" rIns="0" bIns="0" rtlCol="0" anchor="ctr"/>
-          <a:lstStyle/>
-          <a:p>
-            <a:pPr indent="0" marL="0">
-              <a:buNone/>
-            </a:pPr>
-            <a:r>
-              <a:rPr lang="en-US" sz="950" dirty="0">
-                <a:solidFill>
-                  <a:srgbClr val="6F6A5C"/>
-                </a:solidFill>
-                <a:latin typeface="Arial" pitchFamily="34" charset="0"/>
-                <a:ea typeface="Arial" pitchFamily="34" charset="-122"/>
-                <a:cs typeface="Arial" pitchFamily="34" charset="-120"/>
-              </a:rPr>
-              <a:t>Beldagen</a:t>
-            </a:r>
-            <a:endParaRPr lang="en-US" sz="950" dirty="0"/>
-          </a:p>
-        </p:txBody>
-      </p:sp>
-      <p:sp>
-        <p:nvSpPr>
-          <p:cNvPr id="25" name="Text 23"/>
-          <p:cNvSpPr txBox="1"/>
-          <p:nvPr/>
-        </p:nvSpPr>
-        <p:spPr>
-          <a:xfrm>
-            <a:off x="6832583" y="3378192"/>
-            <a:ext cx="825498" cy="406399"/>
-          </a:xfrm>
-          <a:prstGeom prst="rect">
-            <a:avLst/>
-          </a:prstGeom>
-          <a:noFill/>
-          <a:ln/>
-        </p:spPr>
-        <p:txBody>
-          <a:bodyPr wrap="square" lIns="0" tIns="0" rIns="0" bIns="0" rtlCol="0" anchor="ctr"/>
-          <a:lstStyle/>
-          <a:p>
-            <a:pPr algn="r" indent="0" marL="0">
-              <a:buNone/>
-            </a:pPr>
-            <a:r>
-              <a:rPr lang="en-US" sz="1150" b="1" dirty="0">
-                <a:solidFill>
-                  <a:srgbClr val="1C2230"/>
-                </a:solidFill>
-                <a:latin typeface="Arial" pitchFamily="34" charset="0"/>
-                <a:ea typeface="Arial" pitchFamily="34" charset="-122"/>
-                <a:cs typeface="Arial" pitchFamily="34" charset="-120"/>
-              </a:rPr>
-              <a:t>4</a:t>
-            </a:r>
-            <a:endParaRPr lang="en-US" sz="1150" dirty="0"/>
-          </a:p>
-        </p:txBody>
-      </p:sp>
-      <p:sp>
-        <p:nvSpPr>
-          <p:cNvPr id="26" name="Shape 24"/>
-          <p:cNvSpPr/>
-          <p:nvPr/>
-        </p:nvSpPr>
-        <p:spPr>
-          <a:xfrm>
-            <a:off x="4533889" y="3784591"/>
-            <a:ext cx="3124192" cy="0"/>
-          </a:xfrm>
-          <a:prstGeom prst="line">
-            <a:avLst/>
-          </a:prstGeom>
-          <a:noFill/>
-          <a:ln w="9525">
-            <a:solidFill>
-              <a:srgbClr val="D8D2C4"/>
-            </a:solidFill>
-            <a:prstDash val="solid"/>
-          </a:ln>
-        </p:spPr>
-      </p:sp>
-      <p:sp>
-        <p:nvSpPr>
-          <p:cNvPr id="27" name="Text 25"/>
-          <p:cNvSpPr txBox="1"/>
-          <p:nvPr/>
-        </p:nvSpPr>
-        <p:spPr>
-          <a:xfrm>
-            <a:off x="4533889" y="3784591"/>
-            <a:ext cx="2578094" cy="406399"/>
-          </a:xfrm>
-          <a:prstGeom prst="rect">
-            <a:avLst/>
-          </a:prstGeom>
-          <a:noFill/>
-          <a:ln/>
-        </p:spPr>
-        <p:txBody>
-          <a:bodyPr wrap="square" lIns="0" tIns="0" rIns="0" bIns="0" rtlCol="0" anchor="ctr"/>
-          <a:lstStyle/>
-          <a:p>
-            <a:pPr indent="0" marL="0">
-              <a:buNone/>
-            </a:pPr>
-            <a:r>
-              <a:rPr lang="en-US" sz="950" dirty="0">
-                <a:solidFill>
-                  <a:srgbClr val="6F6A5C"/>
-                </a:solidFill>
-                <a:latin typeface="Arial" pitchFamily="34" charset="0"/>
-                <a:ea typeface="Arial" pitchFamily="34" charset="-122"/>
-                <a:cs typeface="Arial" pitchFamily="34" charset="-120"/>
-              </a:rPr>
-              <a:t>Contactpogingen</a:t>
-            </a:r>
-            <a:endParaRPr lang="en-US" sz="950" dirty="0"/>
-          </a:p>
-        </p:txBody>
-      </p:sp>
-      <p:sp>
-        <p:nvSpPr>
-          <p:cNvPr id="28" name="Text 26"/>
-          <p:cNvSpPr txBox="1"/>
-          <p:nvPr/>
-        </p:nvSpPr>
-        <p:spPr>
-          <a:xfrm>
-            <a:off x="6832583" y="3784591"/>
-            <a:ext cx="825498" cy="406399"/>
-          </a:xfrm>
-          <a:prstGeom prst="rect">
-            <a:avLst/>
-          </a:prstGeom>
-          <a:noFill/>
-          <a:ln/>
-        </p:spPr>
-        <p:txBody>
-          <a:bodyPr wrap="square" lIns="0" tIns="0" rIns="0" bIns="0" rtlCol="0" anchor="ctr"/>
-          <a:lstStyle/>
-          <a:p>
-            <a:pPr algn="r" indent="0" marL="0">
-              <a:buNone/>
-            </a:pPr>
-            <a:r>
-              <a:rPr lang="en-US" sz="1150" b="1" dirty="0">
-                <a:solidFill>
-                  <a:srgbClr val="1C2230"/>
-                </a:solidFill>
-                <a:latin typeface="Arial" pitchFamily="34" charset="0"/>
-                <a:ea typeface="Arial" pitchFamily="34" charset="-122"/>
-                <a:cs typeface="Arial" pitchFamily="34" charset="-120"/>
-              </a:rPr>
-              <a:t>± 400</a:t>
-            </a:r>
-            <a:endParaRPr lang="en-US" sz="1150" dirty="0"/>
-          </a:p>
-        </p:txBody>
-      </p:sp>
-      <p:sp>
-        <p:nvSpPr>
-          <p:cNvPr id="29" name="Shape 27"/>
-          <p:cNvSpPr/>
-          <p:nvPr/>
-        </p:nvSpPr>
-        <p:spPr>
-          <a:xfrm>
-            <a:off x="4533889" y="4190990"/>
-            <a:ext cx="3124192" cy="0"/>
-          </a:xfrm>
-          <a:prstGeom prst="line">
-            <a:avLst/>
-          </a:prstGeom>
-          <a:noFill/>
-          <a:ln w="9525">
-            <a:solidFill>
-              <a:srgbClr val="D8D2C4"/>
-            </a:solidFill>
-            <a:prstDash val="solid"/>
-          </a:ln>
-        </p:spPr>
-      </p:sp>
-      <p:sp>
-        <p:nvSpPr>
-          <p:cNvPr id="30" name="Text 28"/>
-          <p:cNvSpPr txBox="1"/>
-          <p:nvPr/>
-        </p:nvSpPr>
-        <p:spPr>
-          <a:xfrm>
-            <a:off x="4533889" y="4190990"/>
-            <a:ext cx="2578094" cy="406399"/>
-          </a:xfrm>
-          <a:prstGeom prst="rect">
-            <a:avLst/>
-          </a:prstGeom>
-          <a:noFill/>
-          <a:ln/>
-        </p:spPr>
-        <p:txBody>
-          <a:bodyPr wrap="square" lIns="0" tIns="0" rIns="0" bIns="0" rtlCol="0" anchor="ctr"/>
-          <a:lstStyle/>
-          <a:p>
-            <a:pPr indent="0" marL="0">
-              <a:buNone/>
-            </a:pPr>
-            <a:r>
-              <a:rPr lang="en-US" sz="950" dirty="0">
-                <a:solidFill>
-                  <a:srgbClr val="6F6A5C"/>
-                </a:solidFill>
-                <a:latin typeface="Arial" pitchFamily="34" charset="0"/>
-                <a:ea typeface="Arial" pitchFamily="34" charset="-122"/>
-                <a:cs typeface="Arial" pitchFamily="34" charset="-120"/>
-              </a:rPr>
-              <a:t>Bedrijven gesproken</a:t>
-            </a:r>
-            <a:endParaRPr lang="en-US" sz="950" dirty="0"/>
-          </a:p>
-        </p:txBody>
-      </p:sp>
-      <p:sp>
-        <p:nvSpPr>
-          <p:cNvPr id="31" name="Text 29"/>
-          <p:cNvSpPr txBox="1"/>
-          <p:nvPr/>
-        </p:nvSpPr>
-        <p:spPr>
-          <a:xfrm>
-            <a:off x="6832583" y="4190990"/>
-            <a:ext cx="825498" cy="406399"/>
-          </a:xfrm>
-          <a:prstGeom prst="rect">
-            <a:avLst/>
-          </a:prstGeom>
-          <a:noFill/>
-          <a:ln/>
-        </p:spPr>
-        <p:txBody>
-          <a:bodyPr wrap="square" lIns="0" tIns="0" rIns="0" bIns="0" rtlCol="0" anchor="ctr"/>
-          <a:lstStyle/>
-          <a:p>
-            <a:pPr algn="r" indent="0" marL="0">
-              <a:buNone/>
-            </a:pPr>
-            <a:r>
-              <a:rPr lang="en-US" sz="1150" b="1" dirty="0">
-                <a:solidFill>
-                  <a:srgbClr val="1C2230"/>
-                </a:solidFill>
-                <a:latin typeface="Arial" pitchFamily="34" charset="0"/>
-                <a:ea typeface="Arial" pitchFamily="34" charset="-122"/>
-                <a:cs typeface="Arial" pitchFamily="34" charset="-120"/>
-              </a:rPr>
-              <a:t>± 240</a:t>
-            </a:r>
-            <a:endParaRPr lang="en-US" sz="1150" dirty="0"/>
-          </a:p>
-        </p:txBody>
-      </p:sp>
-      <p:sp>
-        <p:nvSpPr>
-          <p:cNvPr id="32" name="Shape 30"/>
-          <p:cNvSpPr/>
-          <p:nvPr/>
-        </p:nvSpPr>
-        <p:spPr>
-          <a:xfrm>
-            <a:off x="4533889" y="4597389"/>
-            <a:ext cx="3124192" cy="0"/>
-          </a:xfrm>
-          <a:prstGeom prst="line">
-            <a:avLst/>
-          </a:prstGeom>
-          <a:noFill/>
-          <a:ln w="9525">
-            <a:solidFill>
-              <a:srgbClr val="D8D2C4"/>
-            </a:solidFill>
-            <a:prstDash val="solid"/>
-          </a:ln>
-        </p:spPr>
-      </p:sp>
-      <p:sp>
-        <p:nvSpPr>
-          <p:cNvPr id="33" name="Text 31"/>
-          <p:cNvSpPr txBox="1"/>
-          <p:nvPr/>
-        </p:nvSpPr>
-        <p:spPr>
-          <a:xfrm>
-            <a:off x="4533889" y="4597389"/>
-            <a:ext cx="2578094" cy="406399"/>
-          </a:xfrm>
-          <a:prstGeom prst="rect">
-            <a:avLst/>
-          </a:prstGeom>
-          <a:noFill/>
-          <a:ln/>
-        </p:spPr>
-        <p:txBody>
-          <a:bodyPr wrap="square" lIns="0" tIns="0" rIns="0" bIns="0" rtlCol="0" anchor="ctr"/>
-          <a:lstStyle/>
-          <a:p>
-            <a:pPr indent="0" marL="0">
-              <a:buNone/>
-            </a:pPr>
-            <a:r>
-              <a:rPr lang="en-US" sz="950" dirty="0">
-                <a:solidFill>
-                  <a:srgbClr val="6F6A5C"/>
-                </a:solidFill>
-                <a:latin typeface="Arial" pitchFamily="34" charset="0"/>
-                <a:ea typeface="Arial" pitchFamily="34" charset="-122"/>
-                <a:cs typeface="Arial" pitchFamily="34" charset="-120"/>
-              </a:rPr>
-              <a:t>Afspraken</a:t>
-            </a:r>
-            <a:endParaRPr lang="en-US" sz="950" dirty="0"/>
-          </a:p>
-        </p:txBody>
-      </p:sp>
-      <p:sp>
-        <p:nvSpPr>
-          <p:cNvPr id="34" name="Text 32"/>
-          <p:cNvSpPr txBox="1"/>
-          <p:nvPr/>
-        </p:nvSpPr>
-        <p:spPr>
-          <a:xfrm>
-            <a:off x="6832583" y="4597389"/>
-            <a:ext cx="825498" cy="406399"/>
-          </a:xfrm>
-          <a:prstGeom prst="rect">
-            <a:avLst/>
-          </a:prstGeom>
-          <a:noFill/>
-          <a:ln/>
-        </p:spPr>
-        <p:txBody>
-          <a:bodyPr wrap="square" lIns="0" tIns="0" rIns="0" bIns="0" rtlCol="0" anchor="ctr"/>
-          <a:lstStyle/>
-          <a:p>
-            <a:pPr algn="r" indent="0" marL="0">
-              <a:buNone/>
-            </a:pPr>
-            <a:r>
-              <a:rPr lang="en-US" sz="1150" b="1" dirty="0">
-                <a:solidFill>
-                  <a:srgbClr val="1C2230"/>
-                </a:solidFill>
-                <a:latin typeface="Arial" pitchFamily="34" charset="0"/>
-                <a:ea typeface="Arial" pitchFamily="34" charset="-122"/>
-                <a:cs typeface="Arial" pitchFamily="34" charset="-120"/>
-              </a:rPr>
-              <a:t>± 7</a:t>
-            </a:r>
-            <a:endParaRPr lang="en-US" sz="1150" dirty="0"/>
-          </a:p>
-        </p:txBody>
-      </p:sp>
-      <p:sp>
-        <p:nvSpPr>
-          <p:cNvPr id="35" name="Shape 33"/>
-          <p:cNvSpPr/>
-          <p:nvPr/>
-        </p:nvSpPr>
-        <p:spPr>
-          <a:xfrm>
-            <a:off x="8026380" y="2489194"/>
-            <a:ext cx="3555991" cy="2768593"/>
-          </a:xfrm>
-          <a:prstGeom prst="roundRect">
-            <a:avLst>
-              <a:gd name="adj" fmla="val 3670"/>
-            </a:avLst>
-          </a:prstGeom>
-          <a:solidFill>
-            <a:srgbClr val="000000"/>
-          </a:solidFill>
-          <a:ln/>
-        </p:spPr>
-      </p:sp>
-      <p:sp>
-        <p:nvSpPr>
-          <p:cNvPr id="36" name="Text 34"/>
-          <p:cNvSpPr txBox="1"/>
-          <p:nvPr/>
-        </p:nvSpPr>
-        <p:spPr>
-          <a:xfrm>
-            <a:off x="8242279" y="2743193"/>
-            <a:ext cx="3124192" cy="190500"/>
-          </a:xfrm>
-          <a:prstGeom prst="rect">
-            <a:avLst/>
-          </a:prstGeom>
-          <a:noFill/>
-          <a:ln/>
-        </p:spPr>
-        <p:txBody>
-          <a:bodyPr wrap="square" lIns="0" tIns="0" rIns="0" bIns="0" rtlCol="0" anchor="ctr"/>
-          <a:lstStyle/>
-          <a:p>
-            <a:pPr indent="0" marL="0">
-              <a:buNone/>
-            </a:pPr>
-            <a:r>
-              <a:rPr lang="en-US" sz="800" b="1" spc="180" kern="0" dirty="0">
-                <a:solidFill>
-                  <a:srgbClr val="38B6FF"/>
-                </a:solidFill>
-                <a:latin typeface="Arial" pitchFamily="34" charset="0"/>
-                <a:ea typeface="Arial" pitchFamily="34" charset="-122"/>
-                <a:cs typeface="Arial" pitchFamily="34" charset="-120"/>
-              </a:rPr>
-              <a:t>OPSCHALEN</a:t>
-            </a:r>
-            <a:endParaRPr lang="en-US" sz="800" dirty="0"/>
-          </a:p>
-        </p:txBody>
-      </p:sp>
-      <p:sp>
-        <p:nvSpPr>
-          <p:cNvPr id="37" name="Text 35"/>
-          <p:cNvSpPr txBox="1"/>
-          <p:nvPr/>
-        </p:nvSpPr>
-        <p:spPr>
-          <a:xfrm>
-            <a:off x="8242279" y="2959093"/>
-            <a:ext cx="3124192" cy="355599"/>
-          </a:xfrm>
-          <a:prstGeom prst="rect">
-            <a:avLst/>
-          </a:prstGeom>
-          <a:noFill/>
-          <a:ln/>
-        </p:spPr>
-        <p:txBody>
-          <a:bodyPr wrap="square" lIns="0" tIns="0" rIns="0" bIns="0" rtlCol="0" anchor="ctr"/>
-          <a:lstStyle/>
-          <a:p>
-            <a:pPr indent="0" marL="0">
-              <a:lnSpc>
-                <a:spcPct val="115000"/>
-              </a:lnSpc>
-              <a:buNone/>
-            </a:pPr>
-            <a:r>
-              <a:rPr lang="en-US" sz="1250" b="1" dirty="0">
-                <a:solidFill>
-                  <a:srgbClr val="F2EFE6"/>
-                </a:solidFill>
-                <a:latin typeface="Arial" pitchFamily="34" charset="0"/>
-                <a:ea typeface="Arial" pitchFamily="34" charset="-122"/>
-                <a:cs typeface="Arial" pitchFamily="34" charset="-120"/>
-              </a:rPr>
-              <a:t>8 beldagen per werkperiode</a:t>
-            </a:r>
-            <a:endParaRPr lang="en-US" sz="1250" dirty="0"/>
-          </a:p>
-        </p:txBody>
-      </p:sp>
-      <p:sp>
-        <p:nvSpPr>
-          <p:cNvPr id="38" name="Text 36"/>
-          <p:cNvSpPr txBox="1"/>
-          <p:nvPr/>
-        </p:nvSpPr>
-        <p:spPr>
-          <a:xfrm>
-            <a:off x="8242279" y="3378192"/>
-            <a:ext cx="2578094" cy="406399"/>
-          </a:xfrm>
-          <a:prstGeom prst="rect">
-            <a:avLst/>
-          </a:prstGeom>
-          <a:noFill/>
-          <a:ln/>
-        </p:spPr>
-        <p:txBody>
-          <a:bodyPr wrap="square" lIns="0" tIns="0" rIns="0" bIns="0" rtlCol="0" anchor="ctr"/>
-          <a:lstStyle/>
-          <a:p>
-            <a:pPr indent="0" marL="0">
-              <a:buNone/>
-            </a:pPr>
-            <a:r>
-              <a:rPr lang="en-US" sz="950" dirty="0">
-                <a:solidFill>
-                  <a:srgbClr val="C2C8D2"/>
-                </a:solidFill>
-                <a:latin typeface="Arial" pitchFamily="34" charset="0"/>
-                <a:ea typeface="Arial" pitchFamily="34" charset="-122"/>
-                <a:cs typeface="Arial" pitchFamily="34" charset="-120"/>
-              </a:rPr>
-              <a:t>Beldagen</a:t>
-            </a:r>
-            <a:endParaRPr lang="en-US" sz="950" dirty="0"/>
-          </a:p>
-        </p:txBody>
-      </p:sp>
-      <p:sp>
-        <p:nvSpPr>
-          <p:cNvPr id="39" name="Text 37"/>
-          <p:cNvSpPr txBox="1"/>
-          <p:nvPr/>
-        </p:nvSpPr>
-        <p:spPr>
-          <a:xfrm>
-            <a:off x="10540974" y="3378192"/>
-            <a:ext cx="825498" cy="406399"/>
-          </a:xfrm>
-          <a:prstGeom prst="rect">
-            <a:avLst/>
-          </a:prstGeom>
-          <a:noFill/>
-          <a:ln/>
-        </p:spPr>
-        <p:txBody>
-          <a:bodyPr wrap="square" lIns="0" tIns="0" rIns="0" bIns="0" rtlCol="0" anchor="ctr"/>
-          <a:lstStyle/>
-          <a:p>
-            <a:pPr algn="r" indent="0" marL="0">
-              <a:buNone/>
-            </a:pPr>
-            <a:r>
-              <a:rPr lang="en-US" sz="1150" b="1" dirty="0">
-                <a:solidFill>
-                  <a:srgbClr val="38B6FF"/>
-                </a:solidFill>
-                <a:latin typeface="Arial" pitchFamily="34" charset="0"/>
-                <a:ea typeface="Arial" pitchFamily="34" charset="-122"/>
-                <a:cs typeface="Arial" pitchFamily="34" charset="-120"/>
-              </a:rPr>
-              <a:t>8</a:t>
-            </a:r>
-            <a:endParaRPr lang="en-US" sz="1150" dirty="0"/>
-          </a:p>
-        </p:txBody>
-      </p:sp>
-      <p:sp>
-        <p:nvSpPr>
-          <p:cNvPr id="40" name="Shape 38"/>
-          <p:cNvSpPr/>
-          <p:nvPr/>
-        </p:nvSpPr>
-        <p:spPr>
-          <a:xfrm>
-            <a:off x="8242279" y="3784591"/>
-            <a:ext cx="3124192" cy="0"/>
-          </a:xfrm>
-          <a:prstGeom prst="line">
-            <a:avLst/>
-          </a:prstGeom>
-          <a:noFill/>
-          <a:ln w="9525">
-            <a:solidFill>
-              <a:srgbClr val="3A4152"/>
-            </a:solidFill>
-            <a:prstDash val="solid"/>
-          </a:ln>
-        </p:spPr>
-      </p:sp>
-      <p:sp>
-        <p:nvSpPr>
-          <p:cNvPr id="41" name="Text 39"/>
-          <p:cNvSpPr txBox="1"/>
-          <p:nvPr/>
-        </p:nvSpPr>
-        <p:spPr>
-          <a:xfrm>
-            <a:off x="8242279" y="3784591"/>
-            <a:ext cx="2578094" cy="406399"/>
-          </a:xfrm>
-          <a:prstGeom prst="rect">
-            <a:avLst/>
-          </a:prstGeom>
-          <a:noFill/>
-          <a:ln/>
-        </p:spPr>
-        <p:txBody>
-          <a:bodyPr wrap="square" lIns="0" tIns="0" rIns="0" bIns="0" rtlCol="0" anchor="ctr"/>
-          <a:lstStyle/>
-          <a:p>
-            <a:pPr indent="0" marL="0">
-              <a:buNone/>
-            </a:pPr>
-            <a:r>
-              <a:rPr lang="en-US" sz="950" dirty="0">
-                <a:solidFill>
-                  <a:srgbClr val="C2C8D2"/>
-                </a:solidFill>
-                <a:latin typeface="Arial" pitchFamily="34" charset="0"/>
-                <a:ea typeface="Arial" pitchFamily="34" charset="-122"/>
-                <a:cs typeface="Arial" pitchFamily="34" charset="-120"/>
-              </a:rPr>
-              <a:t>Contactpogingen</a:t>
-            </a:r>
-            <a:endParaRPr lang="en-US" sz="950" dirty="0"/>
-          </a:p>
-        </p:txBody>
-      </p:sp>
-      <p:sp>
-        <p:nvSpPr>
-          <p:cNvPr id="42" name="Text 40"/>
-          <p:cNvSpPr txBox="1"/>
-          <p:nvPr/>
-        </p:nvSpPr>
-        <p:spPr>
-          <a:xfrm>
-            <a:off x="10540974" y="3784591"/>
-            <a:ext cx="825498" cy="406399"/>
-          </a:xfrm>
-          <a:prstGeom prst="rect">
-            <a:avLst/>
-          </a:prstGeom>
-          <a:noFill/>
-          <a:ln/>
-        </p:spPr>
-        <p:txBody>
-          <a:bodyPr wrap="square" lIns="0" tIns="0" rIns="0" bIns="0" rtlCol="0" anchor="ctr"/>
-          <a:lstStyle/>
-          <a:p>
-            <a:pPr algn="r" indent="0" marL="0">
-              <a:buNone/>
-            </a:pPr>
-            <a:r>
-              <a:rPr lang="en-US" sz="1150" b="1" dirty="0">
-                <a:solidFill>
-                  <a:srgbClr val="38B6FF"/>
-                </a:solidFill>
-                <a:latin typeface="Arial" pitchFamily="34" charset="0"/>
-                <a:ea typeface="Arial" pitchFamily="34" charset="-122"/>
-                <a:cs typeface="Arial" pitchFamily="34" charset="-120"/>
-              </a:rPr>
-              <a:t>± 800</a:t>
-            </a:r>
-            <a:endParaRPr lang="en-US" sz="1150" dirty="0"/>
-          </a:p>
-        </p:txBody>
-      </p:sp>
-      <p:sp>
-        <p:nvSpPr>
-          <p:cNvPr id="43" name="Shape 41"/>
-          <p:cNvSpPr/>
-          <p:nvPr/>
-        </p:nvSpPr>
-        <p:spPr>
-          <a:xfrm>
-            <a:off x="8242279" y="4190990"/>
-            <a:ext cx="3124192" cy="0"/>
-          </a:xfrm>
-          <a:prstGeom prst="line">
-            <a:avLst/>
-          </a:prstGeom>
-          <a:noFill/>
-          <a:ln w="9525">
-            <a:solidFill>
-              <a:srgbClr val="3A4152"/>
-            </a:solidFill>
-            <a:prstDash val="solid"/>
-          </a:ln>
-        </p:spPr>
-      </p:sp>
-      <p:sp>
-        <p:nvSpPr>
-          <p:cNvPr id="44" name="Text 42"/>
-          <p:cNvSpPr txBox="1"/>
-          <p:nvPr/>
-        </p:nvSpPr>
-        <p:spPr>
-          <a:xfrm>
-            <a:off x="8242279" y="4190990"/>
-            <a:ext cx="2578094" cy="406399"/>
-          </a:xfrm>
-          <a:prstGeom prst="rect">
-            <a:avLst/>
-          </a:prstGeom>
-          <a:noFill/>
-          <a:ln/>
-        </p:spPr>
-        <p:txBody>
-          <a:bodyPr wrap="square" lIns="0" tIns="0" rIns="0" bIns="0" rtlCol="0" anchor="ctr"/>
-          <a:lstStyle/>
-          <a:p>
-            <a:pPr indent="0" marL="0">
-              <a:buNone/>
-            </a:pPr>
-            <a:r>
-              <a:rPr lang="en-US" sz="950" dirty="0">
-                <a:solidFill>
-                  <a:srgbClr val="C2C8D2"/>
-                </a:solidFill>
-                <a:latin typeface="Arial" pitchFamily="34" charset="0"/>
-                <a:ea typeface="Arial" pitchFamily="34" charset="-122"/>
-                <a:cs typeface="Arial" pitchFamily="34" charset="-120"/>
-              </a:rPr>
-              <a:t>Bedrijven gesproken</a:t>
-            </a:r>
-            <a:endParaRPr lang="en-US" sz="950" dirty="0"/>
-          </a:p>
-        </p:txBody>
-      </p:sp>
-      <p:sp>
-        <p:nvSpPr>
-          <p:cNvPr id="45" name="Text 43"/>
-          <p:cNvSpPr txBox="1"/>
-          <p:nvPr/>
-        </p:nvSpPr>
-        <p:spPr>
-          <a:xfrm>
-            <a:off x="10540974" y="4190990"/>
-            <a:ext cx="825498" cy="406399"/>
-          </a:xfrm>
-          <a:prstGeom prst="rect">
-            <a:avLst/>
-          </a:prstGeom>
-          <a:noFill/>
-          <a:ln/>
-        </p:spPr>
-        <p:txBody>
-          <a:bodyPr wrap="square" lIns="0" tIns="0" rIns="0" bIns="0" rtlCol="0" anchor="ctr"/>
-          <a:lstStyle/>
-          <a:p>
-            <a:pPr algn="r" indent="0" marL="0">
-              <a:buNone/>
-            </a:pPr>
-            <a:r>
-              <a:rPr lang="en-US" sz="1150" b="1" dirty="0">
-                <a:solidFill>
-                  <a:srgbClr val="38B6FF"/>
-                </a:solidFill>
-                <a:latin typeface="Arial" pitchFamily="34" charset="0"/>
-                <a:ea typeface="Arial" pitchFamily="34" charset="-122"/>
-                <a:cs typeface="Arial" pitchFamily="34" charset="-120"/>
-              </a:rPr>
-              <a:t>± 480</a:t>
-            </a:r>
-            <a:endParaRPr lang="en-US" sz="1150" dirty="0"/>
-          </a:p>
-        </p:txBody>
-      </p:sp>
-      <p:sp>
-        <p:nvSpPr>
-          <p:cNvPr id="46" name="Shape 44"/>
-          <p:cNvSpPr/>
-          <p:nvPr/>
-        </p:nvSpPr>
-        <p:spPr>
-          <a:xfrm>
-            <a:off x="8242279" y="4597389"/>
-            <a:ext cx="3124192" cy="0"/>
-          </a:xfrm>
-          <a:prstGeom prst="line">
-            <a:avLst/>
-          </a:prstGeom>
-          <a:noFill/>
-          <a:ln w="9525">
-            <a:solidFill>
-              <a:srgbClr val="3A4152"/>
-            </a:solidFill>
-            <a:prstDash val="solid"/>
-          </a:ln>
-        </p:spPr>
-      </p:sp>
-      <p:sp>
-        <p:nvSpPr>
-          <p:cNvPr id="47" name="Text 45"/>
-          <p:cNvSpPr txBox="1"/>
-          <p:nvPr/>
-        </p:nvSpPr>
-        <p:spPr>
-          <a:xfrm>
-            <a:off x="8242279" y="4597389"/>
-            <a:ext cx="2578094" cy="406399"/>
-          </a:xfrm>
-          <a:prstGeom prst="rect">
-            <a:avLst/>
-          </a:prstGeom>
-          <a:noFill/>
-          <a:ln/>
-        </p:spPr>
-        <p:txBody>
-          <a:bodyPr wrap="square" lIns="0" tIns="0" rIns="0" bIns="0" rtlCol="0" anchor="ctr"/>
-          <a:lstStyle/>
-          <a:p>
-            <a:pPr indent="0" marL="0">
-              <a:buNone/>
-            </a:pPr>
-            <a:r>
-              <a:rPr lang="en-US" sz="950" dirty="0">
-                <a:solidFill>
-                  <a:srgbClr val="C2C8D2"/>
-                </a:solidFill>
-                <a:latin typeface="Arial" pitchFamily="34" charset="0"/>
-                <a:ea typeface="Arial" pitchFamily="34" charset="-122"/>
-                <a:cs typeface="Arial" pitchFamily="34" charset="-120"/>
-              </a:rPr>
-              <a:t>Afspraken</a:t>
-            </a:r>
-            <a:endParaRPr lang="en-US" sz="950" dirty="0"/>
-          </a:p>
-        </p:txBody>
-      </p:sp>
-      <p:sp>
-        <p:nvSpPr>
-          <p:cNvPr id="48" name="Text 46"/>
-          <p:cNvSpPr txBox="1"/>
-          <p:nvPr/>
-        </p:nvSpPr>
-        <p:spPr>
-          <a:xfrm>
-            <a:off x="10540974" y="4597389"/>
-            <a:ext cx="825498" cy="406399"/>
-          </a:xfrm>
-          <a:prstGeom prst="rect">
-            <a:avLst/>
-          </a:prstGeom>
-          <a:noFill/>
-          <a:ln/>
-        </p:spPr>
-        <p:txBody>
-          <a:bodyPr wrap="square" lIns="0" tIns="0" rIns="0" bIns="0" rtlCol="0" anchor="ctr"/>
-          <a:lstStyle/>
-          <a:p>
-            <a:pPr algn="r" indent="0" marL="0">
-              <a:buNone/>
-            </a:pPr>
-            <a:r>
-              <a:rPr lang="en-US" sz="1150" b="1" dirty="0">
-                <a:solidFill>
-                  <a:srgbClr val="38B6FF"/>
-                </a:solidFill>
-                <a:latin typeface="Arial" pitchFamily="34" charset="0"/>
-                <a:ea typeface="Arial" pitchFamily="34" charset="-122"/>
-                <a:cs typeface="Arial" pitchFamily="34" charset="-120"/>
-              </a:rPr>
-              <a:t>± 14</a:t>
-            </a:r>
-            <a:endParaRPr lang="en-US" sz="1150" dirty="0"/>
-          </a:p>
-        </p:txBody>
-      </p:sp>
-      <p:sp>
-        <p:nvSpPr>
-          <p:cNvPr id="49" name="Shape 47"/>
-          <p:cNvSpPr/>
-          <p:nvPr/>
-        </p:nvSpPr>
-        <p:spPr>
-          <a:xfrm>
-            <a:off x="609598" y="5854685"/>
-            <a:ext cx="76200" cy="76200"/>
-          </a:xfrm>
-          <a:prstGeom prst="ellipse">
-            <a:avLst/>
-          </a:prstGeom>
-          <a:solidFill>
-            <a:srgbClr val="38B6FF"/>
-          </a:solidFill>
-          <a:ln/>
-        </p:spPr>
-      </p:sp>
-      <p:sp>
-        <p:nvSpPr>
-          <p:cNvPr id="50" name="Text 48"/>
-          <p:cNvSpPr txBox="1"/>
-          <p:nvPr/>
-        </p:nvSpPr>
-        <p:spPr>
-          <a:xfrm>
-            <a:off x="800098" y="5714986"/>
-            <a:ext cx="9905975" cy="355599"/>
-          </a:xfrm>
-          <a:prstGeom prst="rect">
-            <a:avLst/>
-          </a:prstGeom>
-          <a:noFill/>
-          <a:ln/>
-        </p:spPr>
-        <p:txBody>
-          <a:bodyPr wrap="square" lIns="0" tIns="0" rIns="0" bIns="0" rtlCol="0" anchor="ctr"/>
-          <a:lstStyle/>
-          <a:p>
-            <a:pPr indent="0" marL="0">
-              <a:buNone/>
-            </a:pPr>
-            <a:r>
-              <a:rPr lang="en-US" sz="1200" b="1" dirty="0">
-                <a:solidFill>
-                  <a:srgbClr val="1C2230"/>
-                </a:solidFill>
-                <a:latin typeface="Arial" pitchFamily="34" charset="0"/>
-                <a:ea typeface="Arial" pitchFamily="34" charset="-122"/>
-                <a:cs typeface="Arial" pitchFamily="34" charset="-120"/>
-              </a:rPr>
-              <a:t>De bellijst, het script en de bezetting liggen er al. Verdubbelen kan vanaf de eerstvolgende werkperiode, zonder opstarttijd.</a:t>
+              <a:t>De verwachte aantallen zijn een indicatie, gebaseerd op twee gekwalificeerde afspraken per beldag uit jullie eigen pilot. Minimaal vier beldagen per periode, prijzen excl. btw.</a:t>
             </a:r>
             <a:endParaRPr lang="en-US" sz="1200" dirty="0"/>
           </a:p>

--- a/output/LINK. voorstel GrowOn Agency.pptx
+++ b/output/LINK. voorstel GrowOn Agency.pptx
@@ -4995,7 +4995,7 @@
                 <a:ea typeface="Arial" pitchFamily="34" charset="-122"/>
                 <a:cs typeface="Arial" pitchFamily="34" charset="-120"/>
               </a:rPr>
-              <a:t>± 4</a:t>
+              <a:t>± 3,5</a:t>
             </a:r>
             <a:endParaRPr lang="en-US" sz="1150" dirty="0"/>
           </a:p>
@@ -5057,7 +5057,7 @@
                 <a:ea typeface="Arial" pitchFamily="34" charset="-122"/>
                 <a:cs typeface="Arial" pitchFamily="34" charset="-120"/>
               </a:rPr>
-              <a:t>Uur bellen</a:t>
+              <a:t>Contactpogingen</a:t>
             </a:r>
             <a:endParaRPr lang="en-US" sz="950" dirty="0"/>
           </a:p>
@@ -5096,7 +5096,7 @@
                 <a:ea typeface="Arial" pitchFamily="34" charset="-122"/>
                 <a:cs typeface="Arial" pitchFamily="34" charset="-120"/>
               </a:rPr>
-              <a:t>± 24</a:t>
+              <a:t>± 400</a:t>
             </a:r>
             <a:endParaRPr lang="en-US" sz="1150" dirty="0"/>
           </a:p>
@@ -5158,7 +5158,7 @@
                 <a:ea typeface="Arial" pitchFamily="34" charset="-122"/>
                 <a:cs typeface="Arial" pitchFamily="34" charset="-120"/>
               </a:rPr>
-              <a:t>Contactpogingen</a:t>
+              <a:t>Afspraken</a:t>
             </a:r>
             <a:endParaRPr lang="en-US" sz="950" dirty="0"/>
           </a:p>
@@ -5197,7 +5197,7 @@
                 <a:ea typeface="Arial" pitchFamily="34" charset="-122"/>
                 <a:cs typeface="Arial" pitchFamily="34" charset="-120"/>
               </a:rPr>
-              <a:t>± 400</a:t>
+              <a:t>± 8</a:t>
             </a:r>
             <a:endParaRPr lang="en-US" sz="1150" dirty="0"/>
           </a:p>
@@ -5259,7 +5259,7 @@
                 <a:ea typeface="Arial" pitchFamily="34" charset="-122"/>
                 <a:cs typeface="Arial" pitchFamily="34" charset="-120"/>
               </a:rPr>
-              <a:t>Afspraken</a:t>
+              <a:t>Prijs per beldag</a:t>
             </a:r>
             <a:endParaRPr lang="en-US" sz="950" dirty="0"/>
           </a:p>
@@ -5298,7 +5298,7 @@
                 <a:ea typeface="Arial" pitchFamily="34" charset="-122"/>
                 <a:cs typeface="Arial" pitchFamily="34" charset="-120"/>
               </a:rPr>
-              <a:t>± 8</a:t>
+              <a:t>± € 460</a:t>
             </a:r>
             <a:endParaRPr lang="en-US" sz="1150" dirty="0"/>
           </a:p>
@@ -5642,7 +5642,7 @@
                 <a:ea typeface="Arial" pitchFamily="34" charset="-122"/>
                 <a:cs typeface="Arial" pitchFamily="34" charset="-120"/>
               </a:rPr>
-              <a:t>Uur bellen</a:t>
+              <a:t>Contactpogingen</a:t>
             </a:r>
             <a:endParaRPr lang="en-US" sz="950" dirty="0"/>
           </a:p>
@@ -5681,7 +5681,7 @@
                 <a:ea typeface="Arial" pitchFamily="34" charset="-122"/>
                 <a:cs typeface="Arial" pitchFamily="34" charset="-120"/>
               </a:rPr>
-              <a:t>24</a:t>
+              <a:t>± 480</a:t>
             </a:r>
             <a:endParaRPr lang="en-US" sz="1150" dirty="0"/>
           </a:p>
@@ -5743,7 +5743,7 @@
                 <a:ea typeface="Arial" pitchFamily="34" charset="-122"/>
                 <a:cs typeface="Arial" pitchFamily="34" charset="-120"/>
               </a:rPr>
-              <a:t>Contactpogingen</a:t>
+              <a:t>Afspraken</a:t>
             </a:r>
             <a:endParaRPr lang="en-US" sz="950" dirty="0"/>
           </a:p>
@@ -5782,7 +5782,7 @@
                 <a:ea typeface="Arial" pitchFamily="34" charset="-122"/>
                 <a:cs typeface="Arial" pitchFamily="34" charset="-120"/>
               </a:rPr>
-              <a:t>± 400</a:t>
+              <a:t>± 8</a:t>
             </a:r>
             <a:endParaRPr lang="en-US" sz="1150" dirty="0"/>
           </a:p>
@@ -5844,7 +5844,7 @@
                 <a:ea typeface="Arial" pitchFamily="34" charset="-122"/>
                 <a:cs typeface="Arial" pitchFamily="34" charset="-120"/>
               </a:rPr>
-              <a:t>Afspraken</a:t>
+              <a:t>Prijs per beldag</a:t>
             </a:r>
             <a:endParaRPr lang="en-US" sz="950" dirty="0"/>
           </a:p>
@@ -5883,7 +5883,7 @@
                 <a:ea typeface="Arial" pitchFamily="34" charset="-122"/>
                 <a:cs typeface="Arial" pitchFamily="34" charset="-120"/>
               </a:rPr>
-              <a:t>± 8</a:t>
+              <a:t>€ 600</a:t>
             </a:r>
             <a:endParaRPr lang="en-US" sz="1150" dirty="0"/>
           </a:p>
@@ -6227,7 +6227,7 @@
                 <a:ea typeface="Arial" pitchFamily="34" charset="-122"/>
                 <a:cs typeface="Arial" pitchFamily="34" charset="-120"/>
               </a:rPr>
-              <a:t>Uur bellen</a:t>
+              <a:t>Contactpogingen</a:t>
             </a:r>
             <a:endParaRPr lang="en-US" sz="950" dirty="0"/>
           </a:p>
@@ -6266,7 +6266,7 @@
                 <a:ea typeface="Arial" pitchFamily="34" charset="-122"/>
                 <a:cs typeface="Arial" pitchFamily="34" charset="-120"/>
               </a:rPr>
-              <a:t>48</a:t>
+              <a:t>± 960</a:t>
             </a:r>
             <a:endParaRPr lang="en-US" sz="1150" dirty="0"/>
           </a:p>
@@ -6328,7 +6328,7 @@
                 <a:ea typeface="Arial" pitchFamily="34" charset="-122"/>
                 <a:cs typeface="Arial" pitchFamily="34" charset="-120"/>
               </a:rPr>
-              <a:t>Contactpogingen</a:t>
+              <a:t>Afspraken</a:t>
             </a:r>
             <a:endParaRPr lang="en-US" sz="950" dirty="0"/>
           </a:p>
@@ -6367,7 +6367,7 @@
                 <a:ea typeface="Arial" pitchFamily="34" charset="-122"/>
                 <a:cs typeface="Arial" pitchFamily="34" charset="-120"/>
               </a:rPr>
-              <a:t>± 800</a:t>
+              <a:t>± 16</a:t>
             </a:r>
             <a:endParaRPr lang="en-US" sz="1150" dirty="0"/>
           </a:p>
@@ -6429,7 +6429,7 @@
                 <a:ea typeface="Arial" pitchFamily="34" charset="-122"/>
                 <a:cs typeface="Arial" pitchFamily="34" charset="-120"/>
               </a:rPr>
-              <a:t>Afspraken</a:t>
+              <a:t>Prijs per beldag</a:t>
             </a:r>
             <a:endParaRPr lang="en-US" sz="950" dirty="0"/>
           </a:p>
@@ -6468,7 +6468,7 @@
                 <a:ea typeface="Arial" pitchFamily="34" charset="-122"/>
                 <a:cs typeface="Arial" pitchFamily="34" charset="-120"/>
               </a:rPr>
-              <a:t>± 16</a:t>
+              <a:t>€ 500</a:t>
             </a:r>
             <a:endParaRPr lang="en-US" sz="1150" dirty="0"/>
           </a:p>
@@ -6628,7 +6628,7 @@
                 <a:ea typeface="Arial" pitchFamily="34" charset="-122"/>
                 <a:cs typeface="Arial" pitchFamily="34" charset="-120"/>
               </a:rPr>
-              <a:t>In de pilot betaalde je het minst per afspraak, omdat de pilotprijs onder onze dagprijs lag. Bij acht beldagen zakt de prijs per afspraak terug naar ongeveer tweehonderdvijftig euro.</a:t>
+              <a:t>Je koopt nu ongeveer drieënhalve beldag per werkperiode. Vanaf vier beldagen gaat het volume met twintig procent omhoog, bij acht beldagen verdubbelt het en zakt de dagprijs naar vijfhonderd euro.</a:t>
             </a:r>
             <a:endParaRPr lang="en-US" sz="1200" dirty="0"/>
           </a:p>
@@ -15886,7 +15886,7 @@
                 <a:ea typeface="Arial" pitchFamily="34" charset="-122"/>
                 <a:cs typeface="Arial" pitchFamily="34" charset="-120"/>
               </a:rPr>
-              <a:t>± 100</a:t>
+              <a:t>± 120</a:t>
             </a:r>
             <a:endParaRPr lang="en-US" sz="3600" dirty="0"/>
           </a:p>
@@ -15967,7 +15967,7 @@
                 <a:ea typeface="Arial" pitchFamily="34" charset="-122"/>
                 <a:cs typeface="Arial" pitchFamily="34" charset="-120"/>
               </a:rPr>
-              <a:t>Ongeveer zeventien pogingen per uur bellen, gemeten over jullie hele pilot.</a:t>
+              <a:t>Onze bellers draaien twintig tot zevenentwintig pogingen per uur. Gemeten in onze eigen urenregistratie.</a:t>
             </a:r>
             <a:endParaRPr lang="en-US" sz="950" dirty="0"/>
           </a:p>
@@ -16028,7 +16028,7 @@
                 <a:ea typeface="Arial" pitchFamily="34" charset="-122"/>
                 <a:cs typeface="Arial" pitchFamily="34" charset="-120"/>
               </a:rPr>
-              <a:t>± 60</a:t>
+              <a:t>± 70</a:t>
             </a:r>
             <a:endParaRPr lang="en-US" sz="3600" dirty="0"/>
           </a:p>
@@ -16251,7 +16251,7 @@
                 <a:ea typeface="Arial" pitchFamily="34" charset="-122"/>
                 <a:cs typeface="Arial" pitchFamily="34" charset="-120"/>
               </a:rPr>
-              <a:t>Vierentwintig afspraken over ruim twaalf beldagen. Dit is het getal waar we op sturen.</a:t>
+              <a:t>Met het rendement uit jullie pilot komt een beldag op 2,4 uit. Wij rekenen bewust met twee.</a:t>
             </a:r>
             <a:endParaRPr lang="en-US" sz="950" dirty="0"/>
           </a:p>
@@ -16310,7 +16310,7 @@
                 <a:ea typeface="Arial" pitchFamily="34" charset="-122"/>
                 <a:cs typeface="Arial" pitchFamily="34" charset="-120"/>
               </a:rPr>
-              <a:t>Wij rekenen in beldagen en niet in uren, omdat een uur niets zegt over wat eruit komt. Een beldag is dit rijtje, elke periode opnieuw.</a:t>
+              <a:t>Wij rekenen in beldagen en niet in uren, omdat een uur niets zegt over wat eruit komt. Deze aantallen komen uit onze eigen urenregistratie en uit jullie pilot.</a:t>
             </a:r>
             <a:endParaRPr lang="en-US" sz="1200" dirty="0"/>
           </a:p>
@@ -17386,7 +17386,7 @@
                 <a:ea typeface="Arial" pitchFamily="34" charset="-122"/>
                 <a:cs typeface="Arial" pitchFamily="34" charset="-120"/>
               </a:rPr>
-              <a:t>De verwachte aantallen zijn een indicatie, gebaseerd op twee gekwalificeerde afspraken per beldag uit jullie eigen pilot. Minimaal vier beldagen per periode, prijzen excl. btw.</a:t>
+              <a:t>De verwachte aantallen gaan uit van honderdtwintig contactpogingen en twee gekwalificeerde afspraken per beldag. In jullie pilot lag dat rendement op 2,4 per beldag, dus we rekenen met een marge. Minimaal vier beldagen per periode, prijzen excl. btw.</a:t>
             </a:r>
             <a:endParaRPr lang="en-US" sz="1200" dirty="0"/>
           </a:p>

--- a/output/LINK. voorstel GrowOn Agency.pptx
+++ b/output/LINK. voorstel GrowOn Agency.pptx
@@ -3855,7 +3855,7 @@
                 <a:ea typeface="Arial" pitchFamily="34" charset="-122"/>
                 <a:cs typeface="Arial" pitchFamily="34" charset="-120"/>
               </a:rPr>
-              <a:t>€ 550</a:t>
+              <a:t>€ 575</a:t>
             </a:r>
             <a:endParaRPr lang="en-US" sz="1250" dirty="0"/>
           </a:p>
@@ -3894,7 +3894,7 @@
                 <a:ea typeface="Arial" pitchFamily="34" charset="-122"/>
                 <a:cs typeface="Arial" pitchFamily="34" charset="-120"/>
               </a:rPr>
-              <a:t>€ 2.750 tot € 3.850</a:t>
+              <a:t>€ 2.875 tot € 4.025</a:t>
             </a:r>
             <a:endParaRPr lang="en-US" sz="1250" dirty="0"/>
           </a:p>
@@ -4056,7 +4056,7 @@
                 <a:ea typeface="Arial" pitchFamily="34" charset="-122"/>
                 <a:cs typeface="Arial" pitchFamily="34" charset="-120"/>
               </a:rPr>
-              <a:t>€ 500</a:t>
+              <a:t>€ 550</a:t>
             </a:r>
             <a:endParaRPr lang="en-US" sz="1250" dirty="0"/>
           </a:p>
@@ -4095,7 +4095,7 @@
                 <a:ea typeface="Arial" pitchFamily="34" charset="-122"/>
                 <a:cs typeface="Arial" pitchFamily="34" charset="-120"/>
               </a:rPr>
-              <a:t>vanaf € 4.000</a:t>
+              <a:t>vanaf € 4.400</a:t>
             </a:r>
             <a:endParaRPr lang="en-US" sz="1250" dirty="0"/>
           </a:p>
@@ -5159,7 +5159,7 @@
                 <a:ea typeface="Arial" pitchFamily="34" charset="-122"/>
                 <a:cs typeface="Arial" pitchFamily="34" charset="-120"/>
               </a:rPr>
-              <a:t>De dagprijs zakt van 600 naar 500 euro bij acht beldagen. Daarmee kom je op dezelfde prijs per afspraak als in de pilot, met tweeënhalf keer zoveel afspraken.</a:t>
+              <a:t>De dagprijs zakt van 600 naar 550 euro bij acht beldagen. Daarmee gaat de prijs per afspraak van 240 naar 220 euro, met twee keer zoveel afspraken.</a:t>
             </a:r>
             <a:endParaRPr lang="en-US" sz="875" dirty="0"/>
           </a:p>
@@ -5298,7 +5298,7 @@
                 <a:ea typeface="Arial" pitchFamily="34" charset="-122"/>
                 <a:cs typeface="Arial" pitchFamily="34" charset="-120"/>
               </a:rPr>
-              <a:t>vanaf 8 beldagen € 500, excl. btw</a:t>
+              <a:t>vanaf 8 beldagen € 550, excl. btw</a:t>
             </a:r>
             <a:endParaRPr lang="en-US" sz="800" dirty="0"/>
           </a:p>
@@ -7633,7 +7633,7 @@
                 <a:ea typeface="Arial" pitchFamily="34" charset="-122"/>
                 <a:cs typeface="Arial" pitchFamily="34" charset="-120"/>
               </a:rPr>
-              <a:t>€ 500</a:t>
+              <a:t>€ 550</a:t>
             </a:r>
             <a:endParaRPr lang="en-US" sz="1150" dirty="0"/>
           </a:p>
@@ -7734,7 +7734,7 @@
                 <a:ea typeface="Arial" pitchFamily="34" charset="-122"/>
                 <a:cs typeface="Arial" pitchFamily="34" charset="-120"/>
               </a:rPr>
-              <a:t>± € 200</a:t>
+              <a:t>± € 220</a:t>
             </a:r>
             <a:endParaRPr lang="en-US" sz="1150" dirty="0"/>
           </a:p>
@@ -7793,7 +7793,7 @@
                 <a:ea typeface="Arial" pitchFamily="34" charset="-122"/>
                 <a:cs typeface="Arial" pitchFamily="34" charset="-120"/>
               </a:rPr>
-              <a:t>Je betaalt nu al bijna zeshonderd euro per beldag, alleen koop je er maar bijna drie per periode. Bij acht beldagen betaal je dezelfde prijs per afspraak als nu, met tweeënhalf keer zoveel afspraken.</a:t>
+              <a:t>Je betaalt nu al bijna zeshonderd euro per beldag, alleen koop je er maar bijna drie per periode. Bij acht beldagen zakt de dagprijs naar 550 euro en de prijs per afspraak naar 220, met twee keer zoveel afspraken.</a:t>
             </a:r>
             <a:endParaRPr lang="en-US" sz="1200" dirty="0"/>
           </a:p>

--- a/output/LINK. voorstel GrowOn Agency.pptx
+++ b/output/LINK. voorstel GrowOn Agency.pptx
@@ -2964,7 +2964,7 @@
                 <a:ea typeface="Arial" pitchFamily="34" charset="-122"/>
                 <a:cs typeface="Arial" pitchFamily="34" charset="-120"/>
               </a:rPr>
-              <a:t>Twaalf weken bellen zit erop. In deze presentatie staat wat het heeft opgeleverd, wat we onderweg hebben geleerd en hoe we het vanaf november willen inrichten.</a:t>
+              <a:t>Er verandert weinig. Zelfde team, zelfde bellijst en dezelfde wekelijkse rapportage. Vanaf werkperiode 4 rekenen we in beldagen, met harde aantallen en een scherpere afspraak over wat een afspraak is.</a:t>
             </a:r>
             <a:endParaRPr lang="en-US" sz="1400" dirty="0"/>
           </a:p>
@@ -4945,7 +4945,7 @@
                 <a:ea typeface="Arial" pitchFamily="34" charset="-122"/>
                 <a:cs typeface="Arial" pitchFamily="34" charset="-120"/>
               </a:rPr>
-              <a:t>Niet gehaald, dan bellen we door</a:t>
+              <a:t>Niet gehaald is een gratis beldag</a:t>
             </a:r>
             <a:endParaRPr lang="en-US" sz="1150" dirty="0"/>
           </a:p>
@@ -4987,7 +4987,7 @@
                 <a:ea typeface="Arial" pitchFamily="34" charset="-122"/>
                 <a:cs typeface="Arial" pitchFamily="34" charset="-120"/>
               </a:rPr>
-              <a:t>Blijft een werkperiode onder de KPI's, dan bellen we in de volgende periode door tot het aantal er staat. Zonder extra factuur.</a:t>
+              <a:t>Komt een werkperiode onder de tien afspraken, dan bellen we de volgende periode een dag extra die niet op de rekening komt.</a:t>
             </a:r>
             <a:endParaRPr lang="en-US" sz="875" dirty="0"/>
           </a:p>
@@ -5117,7 +5117,7 @@
                 <a:ea typeface="Arial" pitchFamily="34" charset="-122"/>
                 <a:cs typeface="Arial" pitchFamily="34" charset="-120"/>
               </a:rPr>
-              <a:t>Goedkoper naarmate je langer blijft</a:t>
+              <a:t>Elke periode opnieuw kiezen</a:t>
             </a:r>
             <a:endParaRPr lang="en-US" sz="1150" dirty="0"/>
           </a:p>
@@ -5159,7 +5159,7 @@
                 <a:ea typeface="Arial" pitchFamily="34" charset="-122"/>
                 <a:cs typeface="Arial" pitchFamily="34" charset="-120"/>
               </a:rPr>
-              <a:t>De dagprijs zakt van 600 naar 550 euro bij acht beldagen. Daarmee gaat de prijs per afspraak van 240 naar 220 euro, met twee keer zoveel afspraken.</a:t>
+              <a:t>Jullie bepalen per werkperiode het aantal beldagen, vanaf vier. Een maand opzegtermijn, geen jaarcontract en geen opstartkosten meer.</a:t>
             </a:r>
             <a:endParaRPr lang="en-US" sz="875" dirty="0"/>
           </a:p>
@@ -5575,7 +5575,7 @@
                 <a:ea typeface="Arial" pitchFamily="34" charset="-122"/>
                 <a:cs typeface="Arial" pitchFamily="34" charset="-120"/>
               </a:rPr>
-              <a:t>2,5 gekwalificeerde afspraken per beldag</a:t>
+              <a:t>10 gekwalificeerde afspraken per periode</a:t>
             </a:r>
             <a:endParaRPr lang="en-US" sz="900" dirty="0"/>
           </a:p>
@@ -5638,7 +5638,7 @@
                 <a:ea typeface="Arial" pitchFamily="34" charset="-122"/>
                 <a:cs typeface="Arial" pitchFamily="34" charset="-120"/>
               </a:rPr>
-              <a:t>Niet gehaald is doorbellen zonder factuur</a:t>
+              <a:t>Niet gehaald is een gratis beldag</a:t>
             </a:r>
             <a:endParaRPr lang="en-US" sz="900" dirty="0"/>
           </a:p>
@@ -5903,7 +5903,7 @@
                 <a:ea typeface="Arial" pitchFamily="34" charset="-122"/>
                 <a:cs typeface="Arial" pitchFamily="34" charset="-120"/>
               </a:rPr>
-              <a:t>OPSCHALEN</a:t>
+              <a:t>WAT ER VERANDERT</a:t>
             </a:r>
             <a:endParaRPr lang="en-US" sz="950" dirty="0"/>
           </a:p>
@@ -5945,7 +5945,7 @@
                 <a:ea typeface="Arial" pitchFamily="34" charset="-122"/>
                 <a:cs typeface="Arial" pitchFamily="34" charset="-120"/>
               </a:rPr>
-              <a:t>Hetzelfde ritme, of </a:t>
+              <a:t>Hetzelfde werk, nu met </a:t>
             </a:r>
             <a:pPr algn="l" indent="0" marL="0">
               <a:lnSpc>
@@ -5962,7 +5962,7 @@
                 <a:ea typeface="Georgia" pitchFamily="34" charset="-122"/>
                 <a:cs typeface="Georgia" pitchFamily="34" charset="-120"/>
               </a:rPr>
-              <a:t>twee keer zoveel</a:t>
+              <a:t>harde aantallen</a:t>
             </a:r>
             <a:pPr algn="l" indent="0" marL="0">
               <a:lnSpc>
@@ -6082,7 +6082,7 @@
                 <a:ea typeface="Arial" pitchFamily="34" charset="-122"/>
                 <a:cs typeface="Arial" pitchFamily="34" charset="-120"/>
               </a:rPr>
-              <a:t>€ 1.600 per werkperiode</a:t>
+              <a:t>Zoals het de afgelopen twaalf weken liep</a:t>
             </a:r>
             <a:endParaRPr lang="en-US" sz="1250" dirty="0"/>
           </a:p>
@@ -6121,7 +6121,7 @@
                 <a:ea typeface="Arial" pitchFamily="34" charset="-122"/>
                 <a:cs typeface="Arial" pitchFamily="34" charset="-120"/>
               </a:rPr>
-              <a:t>Beldagen</a:t>
+              <a:t>Beldagen per periode</a:t>
             </a:r>
             <a:endParaRPr lang="en-US" sz="950" dirty="0"/>
           </a:p>
@@ -6323,7 +6323,7 @@
                 <a:ea typeface="Arial" pitchFamily="34" charset="-122"/>
                 <a:cs typeface="Arial" pitchFamily="34" charset="-120"/>
               </a:rPr>
-              <a:t>Afspraken</a:t>
+              <a:t>Gekwalificeerde afspraken</a:t>
             </a:r>
             <a:endParaRPr lang="en-US" sz="950" dirty="0"/>
           </a:p>
@@ -6463,7 +6463,7 @@
                 <a:ea typeface="Arial" pitchFamily="34" charset="-122"/>
                 <a:cs typeface="Arial" pitchFamily="34" charset="-120"/>
               </a:rPr>
-              <a:t>± € 590</a:t>
+              <a:t>± € 593</a:t>
             </a:r>
             <a:endParaRPr lang="en-US" sz="1150" dirty="0"/>
           </a:p>
@@ -6525,7 +6525,7 @@
                 <a:ea typeface="Arial" pitchFamily="34" charset="-122"/>
                 <a:cs typeface="Arial" pitchFamily="34" charset="-120"/>
               </a:rPr>
-              <a:t>Prijs per afspraak</a:t>
+              <a:t>Prijs per werkperiode</a:t>
             </a:r>
             <a:endParaRPr lang="en-US" sz="950" dirty="0"/>
           </a:p>
@@ -6564,7 +6564,7 @@
                 <a:ea typeface="Arial" pitchFamily="34" charset="-122"/>
                 <a:cs typeface="Arial" pitchFamily="34" charset="-120"/>
               </a:rPr>
-              <a:t>± € 200</a:t>
+              <a:t>€ 1.600</a:t>
             </a:r>
             <a:endParaRPr lang="en-US" sz="1150" dirty="0"/>
           </a:p>
@@ -6587,7 +6587,7 @@
             </a:avLst>
           </a:prstGeom>
           <a:solidFill>
-            <a:srgbClr val="F8F4EB"/>
+            <a:srgbClr val="000000"/>
           </a:solidFill>
           <a:ln/>
         </p:spPr>
@@ -6619,13 +6619,13 @@
             <a:r>
               <a:rPr lang="en-US" sz="800" b="1" spc="180" kern="0" dirty="0">
                 <a:solidFill>
-                  <a:srgbClr val="6F6A5C"/>
-                </a:solidFill>
-                <a:latin typeface="Arial" pitchFamily="34" charset="0"/>
-                <a:ea typeface="Arial" pitchFamily="34" charset="-122"/>
-                <a:cs typeface="Arial" pitchFamily="34" charset="-120"/>
-              </a:rPr>
-              <a:t>VOORSTEL</a:t>
+                  <a:srgbClr val="38B6FF"/>
+                </a:solidFill>
+                <a:latin typeface="Arial" pitchFamily="34" charset="0"/>
+                <a:ea typeface="Arial" pitchFamily="34" charset="-122"/>
+                <a:cs typeface="Arial" pitchFamily="34" charset="-120"/>
+              </a:rPr>
+              <a:t>VANAF WERKPERIODE 4</a:t>
             </a:r>
             <a:endParaRPr lang="en-US" sz="800" dirty="0"/>
           </a:p>
@@ -6661,13 +6661,13 @@
             <a:r>
               <a:rPr lang="en-US" sz="1250" b="1" dirty="0">
                 <a:solidFill>
-                  <a:srgbClr val="1C2230"/>
-                </a:solidFill>
-                <a:latin typeface="Arial" pitchFamily="34" charset="0"/>
-                <a:ea typeface="Arial" pitchFamily="34" charset="-122"/>
-                <a:cs typeface="Arial" pitchFamily="34" charset="-120"/>
-              </a:rPr>
-              <a:t>4 beldagen per werkperiode</a:t>
+                  <a:srgbClr val="F2EFE6"/>
+                </a:solidFill>
+                <a:latin typeface="Arial" pitchFamily="34" charset="0"/>
+                <a:ea typeface="Arial" pitchFamily="34" charset="-122"/>
+                <a:cs typeface="Arial" pitchFamily="34" charset="-120"/>
+              </a:rPr>
+              <a:t>Vier beldagen per vier weken</a:t>
             </a:r>
             <a:endParaRPr lang="en-US" sz="1250" dirty="0"/>
           </a:p>
@@ -6700,13 +6700,13 @@
             <a:r>
               <a:rPr lang="en-US" sz="950" dirty="0">
                 <a:solidFill>
-                  <a:srgbClr val="6F6A5C"/>
-                </a:solidFill>
-                <a:latin typeface="Arial" pitchFamily="34" charset="0"/>
-                <a:ea typeface="Arial" pitchFamily="34" charset="-122"/>
-                <a:cs typeface="Arial" pitchFamily="34" charset="-120"/>
-              </a:rPr>
-              <a:t>Beldagen</a:t>
+                  <a:srgbClr val="C2C8D2"/>
+                </a:solidFill>
+                <a:latin typeface="Arial" pitchFamily="34" charset="0"/>
+                <a:ea typeface="Arial" pitchFamily="34" charset="-122"/>
+                <a:cs typeface="Arial" pitchFamily="34" charset="-120"/>
+              </a:rPr>
+              <a:t>Beldagen per periode</a:t>
             </a:r>
             <a:endParaRPr lang="en-US" sz="950" dirty="0"/>
           </a:p>
@@ -6739,7 +6739,7 @@
             <a:r>
               <a:rPr lang="en-US" sz="1150" b="1" dirty="0">
                 <a:solidFill>
-                  <a:srgbClr val="1C2230"/>
+                  <a:srgbClr val="38B6FF"/>
                 </a:solidFill>
                 <a:latin typeface="Arial" pitchFamily="34" charset="0"/>
                 <a:ea typeface="Arial" pitchFamily="34" charset="-122"/>
@@ -6760,6 +6760,591 @@
         <p:spPr>
           <a:xfrm>
             <a:off x="4533889" y="3728711"/>
+            <a:ext cx="3124192" cy="0"/>
+          </a:xfrm>
+          <a:prstGeom prst="line">
+            <a:avLst/>
+          </a:prstGeom>
+          <a:noFill/>
+          <a:ln w="9525">
+            <a:solidFill>
+              <a:srgbClr val="3A4152"/>
+            </a:solidFill>
+            <a:prstDash val="solid"/>
+          </a:ln>
+        </p:spPr>
+      </p:sp>
+      <p:sp>
+        <p:nvSpPr>
+          <p:cNvPr id="30" name="Text 28"/>
+          <p:cNvSpPr txBox="1"/>
+          <p:nvPr/>
+        </p:nvSpPr>
+        <p:spPr>
+          <a:xfrm>
+            <a:off x="4533889" y="3728711"/>
+            <a:ext cx="2578094" cy="350519"/>
+          </a:xfrm>
+          <a:prstGeom prst="rect">
+            <a:avLst/>
+          </a:prstGeom>
+          <a:noFill/>
+          <a:ln/>
+        </p:spPr>
+        <p:txBody>
+          <a:bodyPr wrap="square" lIns="0" tIns="0" rIns="0" bIns="0" rtlCol="0" anchor="ctr"/>
+          <a:lstStyle/>
+          <a:p>
+            <a:pPr indent="0" marL="0">
+              <a:buNone/>
+            </a:pPr>
+            <a:r>
+              <a:rPr lang="en-US" sz="950" dirty="0">
+                <a:solidFill>
+                  <a:srgbClr val="C2C8D2"/>
+                </a:solidFill>
+                <a:latin typeface="Arial" pitchFamily="34" charset="0"/>
+                <a:ea typeface="Arial" pitchFamily="34" charset="-122"/>
+                <a:cs typeface="Arial" pitchFamily="34" charset="-120"/>
+              </a:rPr>
+              <a:t>Contactpogingen</a:t>
+            </a:r>
+            <a:endParaRPr lang="en-US" sz="950" dirty="0"/>
+          </a:p>
+        </p:txBody>
+      </p:sp>
+      <p:sp>
+        <p:nvSpPr>
+          <p:cNvPr id="31" name="Text 29"/>
+          <p:cNvSpPr txBox="1"/>
+          <p:nvPr/>
+        </p:nvSpPr>
+        <p:spPr>
+          <a:xfrm>
+            <a:off x="6832583" y="3728711"/>
+            <a:ext cx="825498" cy="350519"/>
+          </a:xfrm>
+          <a:prstGeom prst="rect">
+            <a:avLst/>
+          </a:prstGeom>
+          <a:noFill/>
+          <a:ln/>
+        </p:spPr>
+        <p:txBody>
+          <a:bodyPr wrap="square" lIns="0" tIns="0" rIns="0" bIns="0" rtlCol="0" anchor="ctr"/>
+          <a:lstStyle/>
+          <a:p>
+            <a:pPr algn="r" indent="0" marL="0">
+              <a:buNone/>
+            </a:pPr>
+            <a:r>
+              <a:rPr lang="en-US" sz="1150" b="1" dirty="0">
+                <a:solidFill>
+                  <a:srgbClr val="38B6FF"/>
+                </a:solidFill>
+                <a:latin typeface="Arial" pitchFamily="34" charset="0"/>
+                <a:ea typeface="Arial" pitchFamily="34" charset="-122"/>
+                <a:cs typeface="Arial" pitchFamily="34" charset="-120"/>
+              </a:rPr>
+              <a:t>600</a:t>
+            </a:r>
+            <a:endParaRPr lang="en-US" sz="1150" dirty="0"/>
+          </a:p>
+        </p:txBody>
+      </p:sp>
+      <p:sp>
+        <p:nvSpPr>
+          <p:cNvPr id="32" name="Shape 30"/>
+          <p:cNvSpPr/>
+          <p:nvPr/>
+        </p:nvSpPr>
+        <p:spPr>
+          <a:xfrm>
+            <a:off x="4533889" y="4079230"/>
+            <a:ext cx="3124192" cy="0"/>
+          </a:xfrm>
+          <a:prstGeom prst="line">
+            <a:avLst/>
+          </a:prstGeom>
+          <a:noFill/>
+          <a:ln w="9525">
+            <a:solidFill>
+              <a:srgbClr val="3A4152"/>
+            </a:solidFill>
+            <a:prstDash val="solid"/>
+          </a:ln>
+        </p:spPr>
+      </p:sp>
+      <p:sp>
+        <p:nvSpPr>
+          <p:cNvPr id="33" name="Text 31"/>
+          <p:cNvSpPr txBox="1"/>
+          <p:nvPr/>
+        </p:nvSpPr>
+        <p:spPr>
+          <a:xfrm>
+            <a:off x="4533889" y="4079230"/>
+            <a:ext cx="2578094" cy="350519"/>
+          </a:xfrm>
+          <a:prstGeom prst="rect">
+            <a:avLst/>
+          </a:prstGeom>
+          <a:noFill/>
+          <a:ln/>
+        </p:spPr>
+        <p:txBody>
+          <a:bodyPr wrap="square" lIns="0" tIns="0" rIns="0" bIns="0" rtlCol="0" anchor="ctr"/>
+          <a:lstStyle/>
+          <a:p>
+            <a:pPr indent="0" marL="0">
+              <a:buNone/>
+            </a:pPr>
+            <a:r>
+              <a:rPr lang="en-US" sz="950" dirty="0">
+                <a:solidFill>
+                  <a:srgbClr val="C2C8D2"/>
+                </a:solidFill>
+                <a:latin typeface="Arial" pitchFamily="34" charset="0"/>
+                <a:ea typeface="Arial" pitchFamily="34" charset="-122"/>
+                <a:cs typeface="Arial" pitchFamily="34" charset="-120"/>
+              </a:rPr>
+              <a:t>Gekwalificeerde afspraken</a:t>
+            </a:r>
+            <a:endParaRPr lang="en-US" sz="950" dirty="0"/>
+          </a:p>
+        </p:txBody>
+      </p:sp>
+      <p:sp>
+        <p:nvSpPr>
+          <p:cNvPr id="34" name="Text 32"/>
+          <p:cNvSpPr txBox="1"/>
+          <p:nvPr/>
+        </p:nvSpPr>
+        <p:spPr>
+          <a:xfrm>
+            <a:off x="6832583" y="4079230"/>
+            <a:ext cx="825498" cy="350519"/>
+          </a:xfrm>
+          <a:prstGeom prst="rect">
+            <a:avLst/>
+          </a:prstGeom>
+          <a:noFill/>
+          <a:ln/>
+        </p:spPr>
+        <p:txBody>
+          <a:bodyPr wrap="square" lIns="0" tIns="0" rIns="0" bIns="0" rtlCol="0" anchor="ctr"/>
+          <a:lstStyle/>
+          <a:p>
+            <a:pPr algn="r" indent="0" marL="0">
+              <a:buNone/>
+            </a:pPr>
+            <a:r>
+              <a:rPr lang="en-US" sz="1150" b="1" dirty="0">
+                <a:solidFill>
+                  <a:srgbClr val="38B6FF"/>
+                </a:solidFill>
+                <a:latin typeface="Arial" pitchFamily="34" charset="0"/>
+                <a:ea typeface="Arial" pitchFamily="34" charset="-122"/>
+                <a:cs typeface="Arial" pitchFamily="34" charset="-120"/>
+              </a:rPr>
+              <a:t>10</a:t>
+            </a:r>
+            <a:endParaRPr lang="en-US" sz="1150" dirty="0"/>
+          </a:p>
+        </p:txBody>
+      </p:sp>
+      <p:sp>
+        <p:nvSpPr>
+          <p:cNvPr id="35" name="Shape 33"/>
+          <p:cNvSpPr/>
+          <p:nvPr/>
+        </p:nvSpPr>
+        <p:spPr>
+          <a:xfrm>
+            <a:off x="4533889" y="4429749"/>
+            <a:ext cx="3124192" cy="0"/>
+          </a:xfrm>
+          <a:prstGeom prst="line">
+            <a:avLst/>
+          </a:prstGeom>
+          <a:noFill/>
+          <a:ln w="9525">
+            <a:solidFill>
+              <a:srgbClr val="3A4152"/>
+            </a:solidFill>
+            <a:prstDash val="solid"/>
+          </a:ln>
+        </p:spPr>
+      </p:sp>
+      <p:sp>
+        <p:nvSpPr>
+          <p:cNvPr id="36" name="Text 34"/>
+          <p:cNvSpPr txBox="1"/>
+          <p:nvPr/>
+        </p:nvSpPr>
+        <p:spPr>
+          <a:xfrm>
+            <a:off x="4533889" y="4429749"/>
+            <a:ext cx="2578094" cy="350519"/>
+          </a:xfrm>
+          <a:prstGeom prst="rect">
+            <a:avLst/>
+          </a:prstGeom>
+          <a:noFill/>
+          <a:ln/>
+        </p:spPr>
+        <p:txBody>
+          <a:bodyPr wrap="square" lIns="0" tIns="0" rIns="0" bIns="0" rtlCol="0" anchor="ctr"/>
+          <a:lstStyle/>
+          <a:p>
+            <a:pPr indent="0" marL="0">
+              <a:buNone/>
+            </a:pPr>
+            <a:r>
+              <a:rPr lang="en-US" sz="950" dirty="0">
+                <a:solidFill>
+                  <a:srgbClr val="C2C8D2"/>
+                </a:solidFill>
+                <a:latin typeface="Arial" pitchFamily="34" charset="0"/>
+                <a:ea typeface="Arial" pitchFamily="34" charset="-122"/>
+                <a:cs typeface="Arial" pitchFamily="34" charset="-120"/>
+              </a:rPr>
+              <a:t>Prijs per beldag</a:t>
+            </a:r>
+            <a:endParaRPr lang="en-US" sz="950" dirty="0"/>
+          </a:p>
+        </p:txBody>
+      </p:sp>
+      <p:sp>
+        <p:nvSpPr>
+          <p:cNvPr id="37" name="Text 35"/>
+          <p:cNvSpPr txBox="1"/>
+          <p:nvPr/>
+        </p:nvSpPr>
+        <p:spPr>
+          <a:xfrm>
+            <a:off x="6832583" y="4429749"/>
+            <a:ext cx="825498" cy="350519"/>
+          </a:xfrm>
+          <a:prstGeom prst="rect">
+            <a:avLst/>
+          </a:prstGeom>
+          <a:noFill/>
+          <a:ln/>
+        </p:spPr>
+        <p:txBody>
+          <a:bodyPr wrap="square" lIns="0" tIns="0" rIns="0" bIns="0" rtlCol="0" anchor="ctr"/>
+          <a:lstStyle/>
+          <a:p>
+            <a:pPr algn="r" indent="0" marL="0">
+              <a:buNone/>
+            </a:pPr>
+            <a:r>
+              <a:rPr lang="en-US" sz="1150" b="1" dirty="0">
+                <a:solidFill>
+                  <a:srgbClr val="38B6FF"/>
+                </a:solidFill>
+                <a:latin typeface="Arial" pitchFamily="34" charset="0"/>
+                <a:ea typeface="Arial" pitchFamily="34" charset="-122"/>
+                <a:cs typeface="Arial" pitchFamily="34" charset="-120"/>
+              </a:rPr>
+              <a:t>€ 600</a:t>
+            </a:r>
+            <a:endParaRPr lang="en-US" sz="1150" dirty="0"/>
+          </a:p>
+        </p:txBody>
+      </p:sp>
+      <p:sp>
+        <p:nvSpPr>
+          <p:cNvPr id="38" name="Shape 36"/>
+          <p:cNvSpPr/>
+          <p:nvPr/>
+        </p:nvSpPr>
+        <p:spPr>
+          <a:xfrm>
+            <a:off x="4533889" y="4780268"/>
+            <a:ext cx="3124192" cy="0"/>
+          </a:xfrm>
+          <a:prstGeom prst="line">
+            <a:avLst/>
+          </a:prstGeom>
+          <a:noFill/>
+          <a:ln w="9525">
+            <a:solidFill>
+              <a:srgbClr val="3A4152"/>
+            </a:solidFill>
+            <a:prstDash val="solid"/>
+          </a:ln>
+        </p:spPr>
+      </p:sp>
+      <p:sp>
+        <p:nvSpPr>
+          <p:cNvPr id="39" name="Text 37"/>
+          <p:cNvSpPr txBox="1"/>
+          <p:nvPr/>
+        </p:nvSpPr>
+        <p:spPr>
+          <a:xfrm>
+            <a:off x="4533889" y="4780268"/>
+            <a:ext cx="2578094" cy="350519"/>
+          </a:xfrm>
+          <a:prstGeom prst="rect">
+            <a:avLst/>
+          </a:prstGeom>
+          <a:noFill/>
+          <a:ln/>
+        </p:spPr>
+        <p:txBody>
+          <a:bodyPr wrap="square" lIns="0" tIns="0" rIns="0" bIns="0" rtlCol="0" anchor="ctr"/>
+          <a:lstStyle/>
+          <a:p>
+            <a:pPr indent="0" marL="0">
+              <a:buNone/>
+            </a:pPr>
+            <a:r>
+              <a:rPr lang="en-US" sz="950" dirty="0">
+                <a:solidFill>
+                  <a:srgbClr val="C2C8D2"/>
+                </a:solidFill>
+                <a:latin typeface="Arial" pitchFamily="34" charset="0"/>
+                <a:ea typeface="Arial" pitchFamily="34" charset="-122"/>
+                <a:cs typeface="Arial" pitchFamily="34" charset="-120"/>
+              </a:rPr>
+              <a:t>Prijs per werkperiode</a:t>
+            </a:r>
+            <a:endParaRPr lang="en-US" sz="950" dirty="0"/>
+          </a:p>
+        </p:txBody>
+      </p:sp>
+      <p:sp>
+        <p:nvSpPr>
+          <p:cNvPr id="40" name="Text 38"/>
+          <p:cNvSpPr txBox="1"/>
+          <p:nvPr/>
+        </p:nvSpPr>
+        <p:spPr>
+          <a:xfrm>
+            <a:off x="6832583" y="4780268"/>
+            <a:ext cx="825498" cy="350519"/>
+          </a:xfrm>
+          <a:prstGeom prst="rect">
+            <a:avLst/>
+          </a:prstGeom>
+          <a:noFill/>
+          <a:ln/>
+        </p:spPr>
+        <p:txBody>
+          <a:bodyPr wrap="square" lIns="0" tIns="0" rIns="0" bIns="0" rtlCol="0" anchor="ctr"/>
+          <a:lstStyle/>
+          <a:p>
+            <a:pPr algn="r" indent="0" marL="0">
+              <a:buNone/>
+            </a:pPr>
+            <a:r>
+              <a:rPr lang="en-US" sz="1150" b="1" dirty="0">
+                <a:solidFill>
+                  <a:srgbClr val="38B6FF"/>
+                </a:solidFill>
+                <a:latin typeface="Arial" pitchFamily="34" charset="0"/>
+                <a:ea typeface="Arial" pitchFamily="34" charset="-122"/>
+                <a:cs typeface="Arial" pitchFamily="34" charset="-120"/>
+              </a:rPr>
+              <a:t>€ 2.400</a:t>
+            </a:r>
+            <a:endParaRPr lang="en-US" sz="1150" dirty="0"/>
+          </a:p>
+        </p:txBody>
+      </p:sp>
+      <p:sp>
+        <p:nvSpPr>
+          <p:cNvPr id="41" name="Shape 39"/>
+          <p:cNvSpPr/>
+          <p:nvPr/>
+        </p:nvSpPr>
+        <p:spPr>
+          <a:xfrm>
+            <a:off x="8026380" y="2489194"/>
+            <a:ext cx="3555991" cy="2768593"/>
+          </a:xfrm>
+          <a:prstGeom prst="roundRect">
+            <a:avLst>
+              <a:gd name="adj" fmla="val 3670"/>
+            </a:avLst>
+          </a:prstGeom>
+          <a:solidFill>
+            <a:srgbClr val="F8F4EB"/>
+          </a:solidFill>
+          <a:ln/>
+        </p:spPr>
+      </p:sp>
+      <p:sp>
+        <p:nvSpPr>
+          <p:cNvPr id="42" name="Text 40"/>
+          <p:cNvSpPr txBox="1"/>
+          <p:nvPr/>
+        </p:nvSpPr>
+        <p:spPr>
+          <a:xfrm>
+            <a:off x="8242279" y="2743193"/>
+            <a:ext cx="3124192" cy="190500"/>
+          </a:xfrm>
+          <a:prstGeom prst="rect">
+            <a:avLst/>
+          </a:prstGeom>
+          <a:noFill/>
+          <a:ln/>
+        </p:spPr>
+        <p:txBody>
+          <a:bodyPr wrap="square" lIns="0" tIns="0" rIns="0" bIns="0" rtlCol="0" anchor="ctr"/>
+          <a:lstStyle/>
+          <a:p>
+            <a:pPr indent="0" marL="0">
+              <a:buNone/>
+            </a:pPr>
+            <a:r>
+              <a:rPr lang="en-US" sz="800" b="1" spc="180" kern="0" dirty="0">
+                <a:solidFill>
+                  <a:srgbClr val="6F6A5C"/>
+                </a:solidFill>
+                <a:latin typeface="Arial" pitchFamily="34" charset="0"/>
+                <a:ea typeface="Arial" pitchFamily="34" charset="-122"/>
+                <a:cs typeface="Arial" pitchFamily="34" charset="-120"/>
+              </a:rPr>
+              <a:t>OF DUBBEL</a:t>
+            </a:r>
+            <a:endParaRPr lang="en-US" sz="800" dirty="0"/>
+          </a:p>
+        </p:txBody>
+      </p:sp>
+      <p:sp>
+        <p:nvSpPr>
+          <p:cNvPr id="43" name="Text 41"/>
+          <p:cNvSpPr txBox="1"/>
+          <p:nvPr/>
+        </p:nvSpPr>
+        <p:spPr>
+          <a:xfrm>
+            <a:off x="8242279" y="2959093"/>
+            <a:ext cx="3124192" cy="355599"/>
+          </a:xfrm>
+          <a:prstGeom prst="rect">
+            <a:avLst/>
+          </a:prstGeom>
+          <a:noFill/>
+          <a:ln/>
+        </p:spPr>
+        <p:txBody>
+          <a:bodyPr wrap="square" lIns="0" tIns="0" rIns="0" bIns="0" rtlCol="0" anchor="ctr"/>
+          <a:lstStyle/>
+          <a:p>
+            <a:pPr indent="0" marL="0">
+              <a:lnSpc>
+                <a:spcPct val="115000"/>
+              </a:lnSpc>
+              <a:buNone/>
+            </a:pPr>
+            <a:r>
+              <a:rPr lang="en-US" sz="1250" b="1" dirty="0">
+                <a:solidFill>
+                  <a:srgbClr val="1C2230"/>
+                </a:solidFill>
+                <a:latin typeface="Arial" pitchFamily="34" charset="0"/>
+                <a:ea typeface="Arial" pitchFamily="34" charset="-122"/>
+                <a:cs typeface="Arial" pitchFamily="34" charset="-120"/>
+              </a:rPr>
+              <a:t>Acht beldagen per vier weken</a:t>
+            </a:r>
+            <a:endParaRPr lang="en-US" sz="1250" dirty="0"/>
+          </a:p>
+        </p:txBody>
+      </p:sp>
+      <p:sp>
+        <p:nvSpPr>
+          <p:cNvPr id="44" name="Text 42"/>
+          <p:cNvSpPr txBox="1"/>
+          <p:nvPr/>
+        </p:nvSpPr>
+        <p:spPr>
+          <a:xfrm>
+            <a:off x="8242279" y="3378192"/>
+            <a:ext cx="2578094" cy="350519"/>
+          </a:xfrm>
+          <a:prstGeom prst="rect">
+            <a:avLst/>
+          </a:prstGeom>
+          <a:noFill/>
+          <a:ln/>
+        </p:spPr>
+        <p:txBody>
+          <a:bodyPr wrap="square" lIns="0" tIns="0" rIns="0" bIns="0" rtlCol="0" anchor="ctr"/>
+          <a:lstStyle/>
+          <a:p>
+            <a:pPr indent="0" marL="0">
+              <a:buNone/>
+            </a:pPr>
+            <a:r>
+              <a:rPr lang="en-US" sz="950" dirty="0">
+                <a:solidFill>
+                  <a:srgbClr val="6F6A5C"/>
+                </a:solidFill>
+                <a:latin typeface="Arial" pitchFamily="34" charset="0"/>
+                <a:ea typeface="Arial" pitchFamily="34" charset="-122"/>
+                <a:cs typeface="Arial" pitchFamily="34" charset="-120"/>
+              </a:rPr>
+              <a:t>Beldagen per periode</a:t>
+            </a:r>
+            <a:endParaRPr lang="en-US" sz="950" dirty="0"/>
+          </a:p>
+        </p:txBody>
+      </p:sp>
+      <p:sp>
+        <p:nvSpPr>
+          <p:cNvPr id="45" name="Text 43"/>
+          <p:cNvSpPr txBox="1"/>
+          <p:nvPr/>
+        </p:nvSpPr>
+        <p:spPr>
+          <a:xfrm>
+            <a:off x="10540974" y="3378192"/>
+            <a:ext cx="825498" cy="350519"/>
+          </a:xfrm>
+          <a:prstGeom prst="rect">
+            <a:avLst/>
+          </a:prstGeom>
+          <a:noFill/>
+          <a:ln/>
+        </p:spPr>
+        <p:txBody>
+          <a:bodyPr wrap="square" lIns="0" tIns="0" rIns="0" bIns="0" rtlCol="0" anchor="ctr"/>
+          <a:lstStyle/>
+          <a:p>
+            <a:pPr algn="r" indent="0" marL="0">
+              <a:buNone/>
+            </a:pPr>
+            <a:r>
+              <a:rPr lang="en-US" sz="1150" b="1" dirty="0">
+                <a:solidFill>
+                  <a:srgbClr val="1C2230"/>
+                </a:solidFill>
+                <a:latin typeface="Arial" pitchFamily="34" charset="0"/>
+                <a:ea typeface="Arial" pitchFamily="34" charset="-122"/>
+                <a:cs typeface="Arial" pitchFamily="34" charset="-120"/>
+              </a:rPr>
+              <a:t>8</a:t>
+            </a:r>
+            <a:endParaRPr lang="en-US" sz="1150" dirty="0"/>
+          </a:p>
+        </p:txBody>
+      </p:sp>
+      <p:sp>
+        <p:nvSpPr>
+          <p:cNvPr id="46" name="Shape 44"/>
+          <p:cNvSpPr/>
+          <p:nvPr/>
+        </p:nvSpPr>
+        <p:spPr>
+          <a:xfrm>
+            <a:off x="8242279" y="3728711"/>
             <a:ext cx="3124192" cy="0"/>
           </a:xfrm>
           <a:prstGeom prst="line">
@@ -6776,13 +7361,13 @@
       </p:sp>
       <p:sp>
         <p:nvSpPr>
-          <p:cNvPr id="30" name="Text 28"/>
-          <p:cNvSpPr txBox="1"/>
-          <p:nvPr/>
-        </p:nvSpPr>
-        <p:spPr>
-          <a:xfrm>
-            <a:off x="4533889" y="3728711"/>
+          <p:cNvPr id="47" name="Text 45"/>
+          <p:cNvSpPr txBox="1"/>
+          <p:nvPr/>
+        </p:nvSpPr>
+        <p:spPr>
+          <a:xfrm>
+            <a:off x="8242279" y="3728711"/>
             <a:ext cx="2578094" cy="350519"/>
           </a:xfrm>
           <a:prstGeom prst="rect">
@@ -6815,13 +7400,13 @@
       </p:sp>
       <p:sp>
         <p:nvSpPr>
-          <p:cNvPr id="31" name="Text 29"/>
-          <p:cNvSpPr txBox="1"/>
-          <p:nvPr/>
-        </p:nvSpPr>
-        <p:spPr>
-          <a:xfrm>
-            <a:off x="6832583" y="3728711"/>
+          <p:cNvPr id="48" name="Text 46"/>
+          <p:cNvSpPr txBox="1"/>
+          <p:nvPr/>
+        </p:nvSpPr>
+        <p:spPr>
+          <a:xfrm>
+            <a:off x="10540974" y="3728711"/>
             <a:ext cx="825498" cy="350519"/>
           </a:xfrm>
           <a:prstGeom prst="rect">
@@ -6846,7 +7431,7 @@
                 <a:ea typeface="Arial" pitchFamily="34" charset="-122"/>
                 <a:cs typeface="Arial" pitchFamily="34" charset="-120"/>
               </a:rPr>
-              <a:t>600</a:t>
+              <a:t>1.200</a:t>
             </a:r>
             <a:endParaRPr lang="en-US" sz="1150" dirty="0"/>
           </a:p>
@@ -6854,13 +7439,13 @@
       </p:sp>
       <p:sp>
         <p:nvSpPr>
-          <p:cNvPr id="32" name="Shape 30"/>
+          <p:cNvPr id="49" name="Shape 47"/>
           <p:cNvSpPr/>
           <p:nvPr/>
         </p:nvSpPr>
         <p:spPr>
           <a:xfrm>
-            <a:off x="4533889" y="4079230"/>
+            <a:off x="8242279" y="4079230"/>
             <a:ext cx="3124192" cy="0"/>
           </a:xfrm>
           <a:prstGeom prst="line">
@@ -6877,13 +7462,13 @@
       </p:sp>
       <p:sp>
         <p:nvSpPr>
-          <p:cNvPr id="33" name="Text 31"/>
-          <p:cNvSpPr txBox="1"/>
-          <p:nvPr/>
-        </p:nvSpPr>
-        <p:spPr>
-          <a:xfrm>
-            <a:off x="4533889" y="4079230"/>
+          <p:cNvPr id="50" name="Text 48"/>
+          <p:cNvSpPr txBox="1"/>
+          <p:nvPr/>
+        </p:nvSpPr>
+        <p:spPr>
+          <a:xfrm>
+            <a:off x="8242279" y="4079230"/>
             <a:ext cx="2578094" cy="350519"/>
           </a:xfrm>
           <a:prstGeom prst="rect">
@@ -6908,7 +7493,7 @@
                 <a:ea typeface="Arial" pitchFamily="34" charset="-122"/>
                 <a:cs typeface="Arial" pitchFamily="34" charset="-120"/>
               </a:rPr>
-              <a:t>Afspraken</a:t>
+              <a:t>Gekwalificeerde afspraken</a:t>
             </a:r>
             <a:endParaRPr lang="en-US" sz="950" dirty="0"/>
           </a:p>
@@ -6916,13 +7501,13 @@
       </p:sp>
       <p:sp>
         <p:nvSpPr>
-          <p:cNvPr id="34" name="Text 32"/>
-          <p:cNvSpPr txBox="1"/>
-          <p:nvPr/>
-        </p:nvSpPr>
-        <p:spPr>
-          <a:xfrm>
-            <a:off x="6832583" y="4079230"/>
+          <p:cNvPr id="51" name="Text 49"/>
+          <p:cNvSpPr txBox="1"/>
+          <p:nvPr/>
+        </p:nvSpPr>
+        <p:spPr>
+          <a:xfrm>
+            <a:off x="10540974" y="4079230"/>
             <a:ext cx="825498" cy="350519"/>
           </a:xfrm>
           <a:prstGeom prst="rect">
@@ -6947,7 +7532,7 @@
                 <a:ea typeface="Arial" pitchFamily="34" charset="-122"/>
                 <a:cs typeface="Arial" pitchFamily="34" charset="-120"/>
               </a:rPr>
-              <a:t>± 10</a:t>
+              <a:t>20</a:t>
             </a:r>
             <a:endParaRPr lang="en-US" sz="1150" dirty="0"/>
           </a:p>
@@ -6955,13 +7540,13 @@
       </p:sp>
       <p:sp>
         <p:nvSpPr>
-          <p:cNvPr id="35" name="Shape 33"/>
+          <p:cNvPr id="52" name="Shape 50"/>
           <p:cNvSpPr/>
           <p:nvPr/>
         </p:nvSpPr>
         <p:spPr>
           <a:xfrm>
-            <a:off x="4533889" y="4429749"/>
+            <a:off x="8242279" y="4429749"/>
             <a:ext cx="3124192" cy="0"/>
           </a:xfrm>
           <a:prstGeom prst="line">
@@ -6978,13 +7563,13 @@
       </p:sp>
       <p:sp>
         <p:nvSpPr>
-          <p:cNvPr id="36" name="Text 34"/>
-          <p:cNvSpPr txBox="1"/>
-          <p:nvPr/>
-        </p:nvSpPr>
-        <p:spPr>
-          <a:xfrm>
-            <a:off x="4533889" y="4429749"/>
+          <p:cNvPr id="53" name="Text 51"/>
+          <p:cNvSpPr txBox="1"/>
+          <p:nvPr/>
+        </p:nvSpPr>
+        <p:spPr>
+          <a:xfrm>
+            <a:off x="8242279" y="4429749"/>
             <a:ext cx="2578094" cy="350519"/>
           </a:xfrm>
           <a:prstGeom prst="rect">
@@ -7017,13 +7602,13 @@
       </p:sp>
       <p:sp>
         <p:nvSpPr>
-          <p:cNvPr id="37" name="Text 35"/>
-          <p:cNvSpPr txBox="1"/>
-          <p:nvPr/>
-        </p:nvSpPr>
-        <p:spPr>
-          <a:xfrm>
-            <a:off x="6832583" y="4429749"/>
+          <p:cNvPr id="54" name="Text 52"/>
+          <p:cNvSpPr txBox="1"/>
+          <p:nvPr/>
+        </p:nvSpPr>
+        <p:spPr>
+          <a:xfrm>
+            <a:off x="10540974" y="4429749"/>
             <a:ext cx="825498" cy="350519"/>
           </a:xfrm>
           <a:prstGeom prst="rect">
@@ -7048,7 +7633,7 @@
                 <a:ea typeface="Arial" pitchFamily="34" charset="-122"/>
                 <a:cs typeface="Arial" pitchFamily="34" charset="-120"/>
               </a:rPr>
-              <a:t>€ 600</a:t>
+              <a:t>€ 550</a:t>
             </a:r>
             <a:endParaRPr lang="en-US" sz="1150" dirty="0"/>
           </a:p>
@@ -7056,13 +7641,13 @@
       </p:sp>
       <p:sp>
         <p:nvSpPr>
-          <p:cNvPr id="38" name="Shape 36"/>
+          <p:cNvPr id="55" name="Shape 53"/>
           <p:cNvSpPr/>
           <p:nvPr/>
         </p:nvSpPr>
         <p:spPr>
           <a:xfrm>
-            <a:off x="4533889" y="4780268"/>
+            <a:off x="8242279" y="4780268"/>
             <a:ext cx="3124192" cy="0"/>
           </a:xfrm>
           <a:prstGeom prst="line">
@@ -7079,591 +7664,6 @@
       </p:sp>
       <p:sp>
         <p:nvSpPr>
-          <p:cNvPr id="39" name="Text 37"/>
-          <p:cNvSpPr txBox="1"/>
-          <p:nvPr/>
-        </p:nvSpPr>
-        <p:spPr>
-          <a:xfrm>
-            <a:off x="4533889" y="4780268"/>
-            <a:ext cx="2578094" cy="350519"/>
-          </a:xfrm>
-          <a:prstGeom prst="rect">
-            <a:avLst/>
-          </a:prstGeom>
-          <a:noFill/>
-          <a:ln/>
-        </p:spPr>
-        <p:txBody>
-          <a:bodyPr wrap="square" lIns="0" tIns="0" rIns="0" bIns="0" rtlCol="0" anchor="ctr"/>
-          <a:lstStyle/>
-          <a:p>
-            <a:pPr indent="0" marL="0">
-              <a:buNone/>
-            </a:pPr>
-            <a:r>
-              <a:rPr lang="en-US" sz="950" dirty="0">
-                <a:solidFill>
-                  <a:srgbClr val="6F6A5C"/>
-                </a:solidFill>
-                <a:latin typeface="Arial" pitchFamily="34" charset="0"/>
-                <a:ea typeface="Arial" pitchFamily="34" charset="-122"/>
-                <a:cs typeface="Arial" pitchFamily="34" charset="-120"/>
-              </a:rPr>
-              <a:t>Prijs per afspraak</a:t>
-            </a:r>
-            <a:endParaRPr lang="en-US" sz="950" dirty="0"/>
-          </a:p>
-        </p:txBody>
-      </p:sp>
-      <p:sp>
-        <p:nvSpPr>
-          <p:cNvPr id="40" name="Text 38"/>
-          <p:cNvSpPr txBox="1"/>
-          <p:nvPr/>
-        </p:nvSpPr>
-        <p:spPr>
-          <a:xfrm>
-            <a:off x="6832583" y="4780268"/>
-            <a:ext cx="825498" cy="350519"/>
-          </a:xfrm>
-          <a:prstGeom prst="rect">
-            <a:avLst/>
-          </a:prstGeom>
-          <a:noFill/>
-          <a:ln/>
-        </p:spPr>
-        <p:txBody>
-          <a:bodyPr wrap="square" lIns="0" tIns="0" rIns="0" bIns="0" rtlCol="0" anchor="ctr"/>
-          <a:lstStyle/>
-          <a:p>
-            <a:pPr algn="r" indent="0" marL="0">
-              <a:buNone/>
-            </a:pPr>
-            <a:r>
-              <a:rPr lang="en-US" sz="1150" b="1" dirty="0">
-                <a:solidFill>
-                  <a:srgbClr val="1C2230"/>
-                </a:solidFill>
-                <a:latin typeface="Arial" pitchFamily="34" charset="0"/>
-                <a:ea typeface="Arial" pitchFamily="34" charset="-122"/>
-                <a:cs typeface="Arial" pitchFamily="34" charset="-120"/>
-              </a:rPr>
-              <a:t>± € 240</a:t>
-            </a:r>
-            <a:endParaRPr lang="en-US" sz="1150" dirty="0"/>
-          </a:p>
-        </p:txBody>
-      </p:sp>
-      <p:sp>
-        <p:nvSpPr>
-          <p:cNvPr id="41" name="Shape 39"/>
-          <p:cNvSpPr/>
-          <p:nvPr/>
-        </p:nvSpPr>
-        <p:spPr>
-          <a:xfrm>
-            <a:off x="8026380" y="2489194"/>
-            <a:ext cx="3555991" cy="2768593"/>
-          </a:xfrm>
-          <a:prstGeom prst="roundRect">
-            <a:avLst>
-              <a:gd name="adj" fmla="val 3670"/>
-            </a:avLst>
-          </a:prstGeom>
-          <a:solidFill>
-            <a:srgbClr val="000000"/>
-          </a:solidFill>
-          <a:ln/>
-        </p:spPr>
-      </p:sp>
-      <p:sp>
-        <p:nvSpPr>
-          <p:cNvPr id="42" name="Text 40"/>
-          <p:cNvSpPr txBox="1"/>
-          <p:nvPr/>
-        </p:nvSpPr>
-        <p:spPr>
-          <a:xfrm>
-            <a:off x="8242279" y="2743193"/>
-            <a:ext cx="3124192" cy="190500"/>
-          </a:xfrm>
-          <a:prstGeom prst="rect">
-            <a:avLst/>
-          </a:prstGeom>
-          <a:noFill/>
-          <a:ln/>
-        </p:spPr>
-        <p:txBody>
-          <a:bodyPr wrap="square" lIns="0" tIns="0" rIns="0" bIns="0" rtlCol="0" anchor="ctr"/>
-          <a:lstStyle/>
-          <a:p>
-            <a:pPr indent="0" marL="0">
-              <a:buNone/>
-            </a:pPr>
-            <a:r>
-              <a:rPr lang="en-US" sz="800" b="1" spc="180" kern="0" dirty="0">
-                <a:solidFill>
-                  <a:srgbClr val="38B6FF"/>
-                </a:solidFill>
-                <a:latin typeface="Arial" pitchFamily="34" charset="0"/>
-                <a:ea typeface="Arial" pitchFamily="34" charset="-122"/>
-                <a:cs typeface="Arial" pitchFamily="34" charset="-120"/>
-              </a:rPr>
-              <a:t>OPSCHALEN</a:t>
-            </a:r>
-            <a:endParaRPr lang="en-US" sz="800" dirty="0"/>
-          </a:p>
-        </p:txBody>
-      </p:sp>
-      <p:sp>
-        <p:nvSpPr>
-          <p:cNvPr id="43" name="Text 41"/>
-          <p:cNvSpPr txBox="1"/>
-          <p:nvPr/>
-        </p:nvSpPr>
-        <p:spPr>
-          <a:xfrm>
-            <a:off x="8242279" y="2959093"/>
-            <a:ext cx="3124192" cy="355599"/>
-          </a:xfrm>
-          <a:prstGeom prst="rect">
-            <a:avLst/>
-          </a:prstGeom>
-          <a:noFill/>
-          <a:ln/>
-        </p:spPr>
-        <p:txBody>
-          <a:bodyPr wrap="square" lIns="0" tIns="0" rIns="0" bIns="0" rtlCol="0" anchor="ctr"/>
-          <a:lstStyle/>
-          <a:p>
-            <a:pPr indent="0" marL="0">
-              <a:lnSpc>
-                <a:spcPct val="115000"/>
-              </a:lnSpc>
-              <a:buNone/>
-            </a:pPr>
-            <a:r>
-              <a:rPr lang="en-US" sz="1250" b="1" dirty="0">
-                <a:solidFill>
-                  <a:srgbClr val="F2EFE6"/>
-                </a:solidFill>
-                <a:latin typeface="Arial" pitchFamily="34" charset="0"/>
-                <a:ea typeface="Arial" pitchFamily="34" charset="-122"/>
-                <a:cs typeface="Arial" pitchFamily="34" charset="-120"/>
-              </a:rPr>
-              <a:t>8 beldagen per werkperiode</a:t>
-            </a:r>
-            <a:endParaRPr lang="en-US" sz="1250" dirty="0"/>
-          </a:p>
-        </p:txBody>
-      </p:sp>
-      <p:sp>
-        <p:nvSpPr>
-          <p:cNvPr id="44" name="Text 42"/>
-          <p:cNvSpPr txBox="1"/>
-          <p:nvPr/>
-        </p:nvSpPr>
-        <p:spPr>
-          <a:xfrm>
-            <a:off x="8242279" y="3378192"/>
-            <a:ext cx="2578094" cy="350519"/>
-          </a:xfrm>
-          <a:prstGeom prst="rect">
-            <a:avLst/>
-          </a:prstGeom>
-          <a:noFill/>
-          <a:ln/>
-        </p:spPr>
-        <p:txBody>
-          <a:bodyPr wrap="square" lIns="0" tIns="0" rIns="0" bIns="0" rtlCol="0" anchor="ctr"/>
-          <a:lstStyle/>
-          <a:p>
-            <a:pPr indent="0" marL="0">
-              <a:buNone/>
-            </a:pPr>
-            <a:r>
-              <a:rPr lang="en-US" sz="950" dirty="0">
-                <a:solidFill>
-                  <a:srgbClr val="C2C8D2"/>
-                </a:solidFill>
-                <a:latin typeface="Arial" pitchFamily="34" charset="0"/>
-                <a:ea typeface="Arial" pitchFamily="34" charset="-122"/>
-                <a:cs typeface="Arial" pitchFamily="34" charset="-120"/>
-              </a:rPr>
-              <a:t>Beldagen</a:t>
-            </a:r>
-            <a:endParaRPr lang="en-US" sz="950" dirty="0"/>
-          </a:p>
-        </p:txBody>
-      </p:sp>
-      <p:sp>
-        <p:nvSpPr>
-          <p:cNvPr id="45" name="Text 43"/>
-          <p:cNvSpPr txBox="1"/>
-          <p:nvPr/>
-        </p:nvSpPr>
-        <p:spPr>
-          <a:xfrm>
-            <a:off x="10540974" y="3378192"/>
-            <a:ext cx="825498" cy="350519"/>
-          </a:xfrm>
-          <a:prstGeom prst="rect">
-            <a:avLst/>
-          </a:prstGeom>
-          <a:noFill/>
-          <a:ln/>
-        </p:spPr>
-        <p:txBody>
-          <a:bodyPr wrap="square" lIns="0" tIns="0" rIns="0" bIns="0" rtlCol="0" anchor="ctr"/>
-          <a:lstStyle/>
-          <a:p>
-            <a:pPr algn="r" indent="0" marL="0">
-              <a:buNone/>
-            </a:pPr>
-            <a:r>
-              <a:rPr lang="en-US" sz="1150" b="1" dirty="0">
-                <a:solidFill>
-                  <a:srgbClr val="38B6FF"/>
-                </a:solidFill>
-                <a:latin typeface="Arial" pitchFamily="34" charset="0"/>
-                <a:ea typeface="Arial" pitchFamily="34" charset="-122"/>
-                <a:cs typeface="Arial" pitchFamily="34" charset="-120"/>
-              </a:rPr>
-              <a:t>8</a:t>
-            </a:r>
-            <a:endParaRPr lang="en-US" sz="1150" dirty="0"/>
-          </a:p>
-        </p:txBody>
-      </p:sp>
-      <p:sp>
-        <p:nvSpPr>
-          <p:cNvPr id="46" name="Shape 44"/>
-          <p:cNvSpPr/>
-          <p:nvPr/>
-        </p:nvSpPr>
-        <p:spPr>
-          <a:xfrm>
-            <a:off x="8242279" y="3728711"/>
-            <a:ext cx="3124192" cy="0"/>
-          </a:xfrm>
-          <a:prstGeom prst="line">
-            <a:avLst/>
-          </a:prstGeom>
-          <a:noFill/>
-          <a:ln w="9525">
-            <a:solidFill>
-              <a:srgbClr val="3A4152"/>
-            </a:solidFill>
-            <a:prstDash val="solid"/>
-          </a:ln>
-        </p:spPr>
-      </p:sp>
-      <p:sp>
-        <p:nvSpPr>
-          <p:cNvPr id="47" name="Text 45"/>
-          <p:cNvSpPr txBox="1"/>
-          <p:nvPr/>
-        </p:nvSpPr>
-        <p:spPr>
-          <a:xfrm>
-            <a:off x="8242279" y="3728711"/>
-            <a:ext cx="2578094" cy="350519"/>
-          </a:xfrm>
-          <a:prstGeom prst="rect">
-            <a:avLst/>
-          </a:prstGeom>
-          <a:noFill/>
-          <a:ln/>
-        </p:spPr>
-        <p:txBody>
-          <a:bodyPr wrap="square" lIns="0" tIns="0" rIns="0" bIns="0" rtlCol="0" anchor="ctr"/>
-          <a:lstStyle/>
-          <a:p>
-            <a:pPr indent="0" marL="0">
-              <a:buNone/>
-            </a:pPr>
-            <a:r>
-              <a:rPr lang="en-US" sz="950" dirty="0">
-                <a:solidFill>
-                  <a:srgbClr val="C2C8D2"/>
-                </a:solidFill>
-                <a:latin typeface="Arial" pitchFamily="34" charset="0"/>
-                <a:ea typeface="Arial" pitchFamily="34" charset="-122"/>
-                <a:cs typeface="Arial" pitchFamily="34" charset="-120"/>
-              </a:rPr>
-              <a:t>Contactpogingen</a:t>
-            </a:r>
-            <a:endParaRPr lang="en-US" sz="950" dirty="0"/>
-          </a:p>
-        </p:txBody>
-      </p:sp>
-      <p:sp>
-        <p:nvSpPr>
-          <p:cNvPr id="48" name="Text 46"/>
-          <p:cNvSpPr txBox="1"/>
-          <p:nvPr/>
-        </p:nvSpPr>
-        <p:spPr>
-          <a:xfrm>
-            <a:off x="10540974" y="3728711"/>
-            <a:ext cx="825498" cy="350519"/>
-          </a:xfrm>
-          <a:prstGeom prst="rect">
-            <a:avLst/>
-          </a:prstGeom>
-          <a:noFill/>
-          <a:ln/>
-        </p:spPr>
-        <p:txBody>
-          <a:bodyPr wrap="square" lIns="0" tIns="0" rIns="0" bIns="0" rtlCol="0" anchor="ctr"/>
-          <a:lstStyle/>
-          <a:p>
-            <a:pPr algn="r" indent="0" marL="0">
-              <a:buNone/>
-            </a:pPr>
-            <a:r>
-              <a:rPr lang="en-US" sz="1150" b="1" dirty="0">
-                <a:solidFill>
-                  <a:srgbClr val="38B6FF"/>
-                </a:solidFill>
-                <a:latin typeface="Arial" pitchFamily="34" charset="0"/>
-                <a:ea typeface="Arial" pitchFamily="34" charset="-122"/>
-                <a:cs typeface="Arial" pitchFamily="34" charset="-120"/>
-              </a:rPr>
-              <a:t>1.200</a:t>
-            </a:r>
-            <a:endParaRPr lang="en-US" sz="1150" dirty="0"/>
-          </a:p>
-        </p:txBody>
-      </p:sp>
-      <p:sp>
-        <p:nvSpPr>
-          <p:cNvPr id="49" name="Shape 47"/>
-          <p:cNvSpPr/>
-          <p:nvPr/>
-        </p:nvSpPr>
-        <p:spPr>
-          <a:xfrm>
-            <a:off x="8242279" y="4079230"/>
-            <a:ext cx="3124192" cy="0"/>
-          </a:xfrm>
-          <a:prstGeom prst="line">
-            <a:avLst/>
-          </a:prstGeom>
-          <a:noFill/>
-          <a:ln w="9525">
-            <a:solidFill>
-              <a:srgbClr val="3A4152"/>
-            </a:solidFill>
-            <a:prstDash val="solid"/>
-          </a:ln>
-        </p:spPr>
-      </p:sp>
-      <p:sp>
-        <p:nvSpPr>
-          <p:cNvPr id="50" name="Text 48"/>
-          <p:cNvSpPr txBox="1"/>
-          <p:nvPr/>
-        </p:nvSpPr>
-        <p:spPr>
-          <a:xfrm>
-            <a:off x="8242279" y="4079230"/>
-            <a:ext cx="2578094" cy="350519"/>
-          </a:xfrm>
-          <a:prstGeom prst="rect">
-            <a:avLst/>
-          </a:prstGeom>
-          <a:noFill/>
-          <a:ln/>
-        </p:spPr>
-        <p:txBody>
-          <a:bodyPr wrap="square" lIns="0" tIns="0" rIns="0" bIns="0" rtlCol="0" anchor="ctr"/>
-          <a:lstStyle/>
-          <a:p>
-            <a:pPr indent="0" marL="0">
-              <a:buNone/>
-            </a:pPr>
-            <a:r>
-              <a:rPr lang="en-US" sz="950" dirty="0">
-                <a:solidFill>
-                  <a:srgbClr val="C2C8D2"/>
-                </a:solidFill>
-                <a:latin typeface="Arial" pitchFamily="34" charset="0"/>
-                <a:ea typeface="Arial" pitchFamily="34" charset="-122"/>
-                <a:cs typeface="Arial" pitchFamily="34" charset="-120"/>
-              </a:rPr>
-              <a:t>Afspraken</a:t>
-            </a:r>
-            <a:endParaRPr lang="en-US" sz="950" dirty="0"/>
-          </a:p>
-        </p:txBody>
-      </p:sp>
-      <p:sp>
-        <p:nvSpPr>
-          <p:cNvPr id="51" name="Text 49"/>
-          <p:cNvSpPr txBox="1"/>
-          <p:nvPr/>
-        </p:nvSpPr>
-        <p:spPr>
-          <a:xfrm>
-            <a:off x="10540974" y="4079230"/>
-            <a:ext cx="825498" cy="350519"/>
-          </a:xfrm>
-          <a:prstGeom prst="rect">
-            <a:avLst/>
-          </a:prstGeom>
-          <a:noFill/>
-          <a:ln/>
-        </p:spPr>
-        <p:txBody>
-          <a:bodyPr wrap="square" lIns="0" tIns="0" rIns="0" bIns="0" rtlCol="0" anchor="ctr"/>
-          <a:lstStyle/>
-          <a:p>
-            <a:pPr algn="r" indent="0" marL="0">
-              <a:buNone/>
-            </a:pPr>
-            <a:r>
-              <a:rPr lang="en-US" sz="1150" b="1" dirty="0">
-                <a:solidFill>
-                  <a:srgbClr val="38B6FF"/>
-                </a:solidFill>
-                <a:latin typeface="Arial" pitchFamily="34" charset="0"/>
-                <a:ea typeface="Arial" pitchFamily="34" charset="-122"/>
-                <a:cs typeface="Arial" pitchFamily="34" charset="-120"/>
-              </a:rPr>
-              <a:t>± 20</a:t>
-            </a:r>
-            <a:endParaRPr lang="en-US" sz="1150" dirty="0"/>
-          </a:p>
-        </p:txBody>
-      </p:sp>
-      <p:sp>
-        <p:nvSpPr>
-          <p:cNvPr id="52" name="Shape 50"/>
-          <p:cNvSpPr/>
-          <p:nvPr/>
-        </p:nvSpPr>
-        <p:spPr>
-          <a:xfrm>
-            <a:off x="8242279" y="4429749"/>
-            <a:ext cx="3124192" cy="0"/>
-          </a:xfrm>
-          <a:prstGeom prst="line">
-            <a:avLst/>
-          </a:prstGeom>
-          <a:noFill/>
-          <a:ln w="9525">
-            <a:solidFill>
-              <a:srgbClr val="3A4152"/>
-            </a:solidFill>
-            <a:prstDash val="solid"/>
-          </a:ln>
-        </p:spPr>
-      </p:sp>
-      <p:sp>
-        <p:nvSpPr>
-          <p:cNvPr id="53" name="Text 51"/>
-          <p:cNvSpPr txBox="1"/>
-          <p:nvPr/>
-        </p:nvSpPr>
-        <p:spPr>
-          <a:xfrm>
-            <a:off x="8242279" y="4429749"/>
-            <a:ext cx="2578094" cy="350519"/>
-          </a:xfrm>
-          <a:prstGeom prst="rect">
-            <a:avLst/>
-          </a:prstGeom>
-          <a:noFill/>
-          <a:ln/>
-        </p:spPr>
-        <p:txBody>
-          <a:bodyPr wrap="square" lIns="0" tIns="0" rIns="0" bIns="0" rtlCol="0" anchor="ctr"/>
-          <a:lstStyle/>
-          <a:p>
-            <a:pPr indent="0" marL="0">
-              <a:buNone/>
-            </a:pPr>
-            <a:r>
-              <a:rPr lang="en-US" sz="950" dirty="0">
-                <a:solidFill>
-                  <a:srgbClr val="C2C8D2"/>
-                </a:solidFill>
-                <a:latin typeface="Arial" pitchFamily="34" charset="0"/>
-                <a:ea typeface="Arial" pitchFamily="34" charset="-122"/>
-                <a:cs typeface="Arial" pitchFamily="34" charset="-120"/>
-              </a:rPr>
-              <a:t>Prijs per beldag</a:t>
-            </a:r>
-            <a:endParaRPr lang="en-US" sz="950" dirty="0"/>
-          </a:p>
-        </p:txBody>
-      </p:sp>
-      <p:sp>
-        <p:nvSpPr>
-          <p:cNvPr id="54" name="Text 52"/>
-          <p:cNvSpPr txBox="1"/>
-          <p:nvPr/>
-        </p:nvSpPr>
-        <p:spPr>
-          <a:xfrm>
-            <a:off x="10540974" y="4429749"/>
-            <a:ext cx="825498" cy="350519"/>
-          </a:xfrm>
-          <a:prstGeom prst="rect">
-            <a:avLst/>
-          </a:prstGeom>
-          <a:noFill/>
-          <a:ln/>
-        </p:spPr>
-        <p:txBody>
-          <a:bodyPr wrap="square" lIns="0" tIns="0" rIns="0" bIns="0" rtlCol="0" anchor="ctr"/>
-          <a:lstStyle/>
-          <a:p>
-            <a:pPr algn="r" indent="0" marL="0">
-              <a:buNone/>
-            </a:pPr>
-            <a:r>
-              <a:rPr lang="en-US" sz="1150" b="1" dirty="0">
-                <a:solidFill>
-                  <a:srgbClr val="38B6FF"/>
-                </a:solidFill>
-                <a:latin typeface="Arial" pitchFamily="34" charset="0"/>
-                <a:ea typeface="Arial" pitchFamily="34" charset="-122"/>
-                <a:cs typeface="Arial" pitchFamily="34" charset="-120"/>
-              </a:rPr>
-              <a:t>€ 550</a:t>
-            </a:r>
-            <a:endParaRPr lang="en-US" sz="1150" dirty="0"/>
-          </a:p>
-        </p:txBody>
-      </p:sp>
-      <p:sp>
-        <p:nvSpPr>
-          <p:cNvPr id="55" name="Shape 53"/>
-          <p:cNvSpPr/>
-          <p:nvPr/>
-        </p:nvSpPr>
-        <p:spPr>
-          <a:xfrm>
-            <a:off x="8242279" y="4780268"/>
-            <a:ext cx="3124192" cy="0"/>
-          </a:xfrm>
-          <a:prstGeom prst="line">
-            <a:avLst/>
-          </a:prstGeom>
-          <a:noFill/>
-          <a:ln w="9525">
-            <a:solidFill>
-              <a:srgbClr val="3A4152"/>
-            </a:solidFill>
-            <a:prstDash val="solid"/>
-          </a:ln>
-        </p:spPr>
-      </p:sp>
-      <p:sp>
-        <p:nvSpPr>
           <p:cNvPr id="56" name="Text 54"/>
           <p:cNvSpPr txBox="1"/>
           <p:nvPr/>
@@ -7689,13 +7689,13 @@
             <a:r>
               <a:rPr lang="en-US" sz="950" dirty="0">
                 <a:solidFill>
-                  <a:srgbClr val="C2C8D2"/>
-                </a:solidFill>
-                <a:latin typeface="Arial" pitchFamily="34" charset="0"/>
-                <a:ea typeface="Arial" pitchFamily="34" charset="-122"/>
-                <a:cs typeface="Arial" pitchFamily="34" charset="-120"/>
-              </a:rPr>
-              <a:t>Prijs per afspraak</a:t>
+                  <a:srgbClr val="6F6A5C"/>
+                </a:solidFill>
+                <a:latin typeface="Arial" pitchFamily="34" charset="0"/>
+                <a:ea typeface="Arial" pitchFamily="34" charset="-122"/>
+                <a:cs typeface="Arial" pitchFamily="34" charset="-120"/>
+              </a:rPr>
+              <a:t>Prijs per werkperiode</a:t>
             </a:r>
             <a:endParaRPr lang="en-US" sz="950" dirty="0"/>
           </a:p>
@@ -7728,13 +7728,13 @@
             <a:r>
               <a:rPr lang="en-US" sz="1150" b="1" dirty="0">
                 <a:solidFill>
-                  <a:srgbClr val="38B6FF"/>
-                </a:solidFill>
-                <a:latin typeface="Arial" pitchFamily="34" charset="0"/>
-                <a:ea typeface="Arial" pitchFamily="34" charset="-122"/>
-                <a:cs typeface="Arial" pitchFamily="34" charset="-120"/>
-              </a:rPr>
-              <a:t>± € 220</a:t>
+                  <a:srgbClr val="1C2230"/>
+                </a:solidFill>
+                <a:latin typeface="Arial" pitchFamily="34" charset="0"/>
+                <a:ea typeface="Arial" pitchFamily="34" charset="-122"/>
+                <a:cs typeface="Arial" pitchFamily="34" charset="-120"/>
+              </a:rPr>
+              <a:t>€ 4.400</a:t>
             </a:r>
             <a:endParaRPr lang="en-US" sz="1150" dirty="0"/>
           </a:p>
@@ -7793,7 +7793,7 @@
                 <a:ea typeface="Arial" pitchFamily="34" charset="-122"/>
                 <a:cs typeface="Arial" pitchFamily="34" charset="-120"/>
               </a:rPr>
-              <a:t>Je betaalt nu al bijna zeshonderd euro per beldag, alleen koop je er maar bijna drie per periode. Bij acht beldagen zakt de dagprijs naar 550 euro en de prijs per afspraak naar 220, met twee keer zoveel afspraken.</a:t>
+              <a:t>De dagprijs blijft gelijk aan wat je nu per beldag betaalt. Neem je het dubbele af, dan zakt die naar 550 euro per beldag en betaal je 220 euro per afspraak in plaats van 240.</a:t>
             </a:r>
             <a:endParaRPr lang="en-US" sz="1200" dirty="0"/>
           </a:p>
@@ -9307,7 +9307,7 @@
                 <a:ea typeface="Arial" pitchFamily="34" charset="-122"/>
                 <a:cs typeface="Arial" pitchFamily="34" charset="-120"/>
               </a:rPr>
-              <a:t>Niet gehaald is doorbellen</a:t>
+              <a:t>Niet gehaald is een gratis beldag</a:t>
             </a:r>
             <a:endParaRPr lang="en-US" sz="1200" dirty="0"/>
           </a:p>
@@ -9349,7 +9349,7 @@
                 <a:ea typeface="Arial" pitchFamily="34" charset="-122"/>
                 <a:cs typeface="Arial" pitchFamily="34" charset="-120"/>
               </a:rPr>
-              <a:t>We bellen door tot het aantal er staat, zonder extra factuur.</a:t>
+              <a:t>Onder de tien afspraken in een werkperiode, dan bellen we de volgende periode een dag extra zonder factuur.</a:t>
             </a:r>
             <a:endParaRPr lang="en-US" sz="950" dirty="0"/>
           </a:p>
@@ -18730,7 +18730,7 @@
                 <a:ea typeface="Arial" pitchFamily="34" charset="-122"/>
                 <a:cs typeface="Arial" pitchFamily="34" charset="-120"/>
               </a:rPr>
-              <a:t>De zes uur bellen maken we altijd vol, dus de bovenste drie liggen vast. Halen we de afspraken niet, dan bellen we door tot het aantal er staat, zonder dat daar een factuur tegenover staat.</a:t>
+              <a:t>De zes uur bellen maken we altijd vol, dus de bovenste drie liggen vast. Halen we de tien afspraken niet, dan krijgen jullie de volgende periode een beldag van ons cadeau.</a:t>
             </a:r>
             <a:endParaRPr lang="en-US" sz="1200" dirty="0"/>
           </a:p>

--- a/output/LINK. voorstel GrowOn Agency.pptx
+++ b/output/LINK. voorstel GrowOn Agency.pptx
@@ -4773,7 +4773,7 @@
                 <a:ea typeface="Arial" pitchFamily="34" charset="-122"/>
                 <a:cs typeface="Arial" pitchFamily="34" charset="-120"/>
               </a:rPr>
-              <a:t>Vier harde KPI's</a:t>
+              <a:t>Tien afspraken per periode</a:t>
             </a:r>
             <a:endParaRPr lang="en-US" sz="1150" dirty="0"/>
           </a:p>
@@ -4815,7 +4815,7 @@
                 <a:ea typeface="Arial" pitchFamily="34" charset="-122"/>
                 <a:cs typeface="Arial" pitchFamily="34" charset="-120"/>
               </a:rPr>
-              <a:t>Contactpogingen, gesproken bedrijven, terugbelafspraken en gekwalificeerde afspraken. Vastgelegd per beldag en zichtbaar in elke rapportage.</a:t>
+              <a:t>Dat is de afspraak waar je ons aan mag houden. Het aantal pogingen en gesprekken laten we zien in de rapportage, maar de tien afspraken zijn wat we garanderen.</a:t>
             </a:r>
             <a:endParaRPr lang="en-US" sz="875" dirty="0"/>
           </a:p>
@@ -9157,7 +9157,7 @@
                 <a:ea typeface="Arial" pitchFamily="34" charset="-122"/>
                 <a:cs typeface="Arial" pitchFamily="34" charset="-120"/>
               </a:rPr>
-              <a:t>Vier KPI's in de overeenkomst</a:t>
+              <a:t>Tien afspraken per werkperiode</a:t>
             </a:r>
             <a:endParaRPr lang="en-US" sz="1200" dirty="0"/>
           </a:p>
@@ -9199,7 +9199,7 @@
                 <a:ea typeface="Arial" pitchFamily="34" charset="-122"/>
                 <a:cs typeface="Arial" pitchFamily="34" charset="-120"/>
               </a:rPr>
-              <a:t>Pogingen, gesproken bedrijven, terugbelafspraken en gekwalificeerde afspraken, per beldag vastgelegd.</a:t>
+              <a:t>Dat is wat we garanderen bij vier beldagen. Alles eromheen laten we zien in de wekelijkse rapportage.</a:t>
             </a:r>
             <a:endParaRPr lang="en-US" sz="950" dirty="0"/>
           </a:p>
@@ -17677,7 +17677,7 @@
                 <a:ea typeface="Arial" pitchFamily="34" charset="-122"/>
                 <a:cs typeface="Arial" pitchFamily="34" charset="-120"/>
               </a:rPr>
-              <a:t>DE AFSPRAKEN DIE WE MET ELKAAR MAKEN</a:t>
+              <a:t>WAT JE KRIJGT</a:t>
             </a:r>
             <a:endParaRPr lang="en-US" sz="950" dirty="0"/>
           </a:p>
@@ -17719,7 +17719,7 @@
                 <a:ea typeface="Arial" pitchFamily="34" charset="-122"/>
                 <a:cs typeface="Arial" pitchFamily="34" charset="-120"/>
               </a:rPr>
-              <a:t>Vier cijfers waar je ons op mag </a:t>
+              <a:t>Eén belofte: </a:t>
             </a:r>
             <a:pPr algn="l" indent="0" marL="0">
               <a:lnSpc>
@@ -17736,7 +17736,7 @@
                 <a:ea typeface="Georgia" pitchFamily="34" charset="-122"/>
                 <a:cs typeface="Georgia" pitchFamily="34" charset="-120"/>
               </a:rPr>
-              <a:t>afrekenen</a:t>
+              <a:t>tien afspraken</a:t>
             </a:r>
             <a:pPr algn="l" indent="0" marL="0">
               <a:lnSpc>
@@ -17753,7 +17753,7 @@
                 <a:ea typeface="Arial" pitchFamily="34" charset="-122"/>
                 <a:cs typeface="Arial" pitchFamily="34" charset="-120"/>
               </a:rPr>
-              <a:t>.</a:t>
+              <a:t> per werkperiode.</a:t>
             </a:r>
             <a:endParaRPr lang="en-US" sz="3200" dirty="0"/>
           </a:p>
@@ -17768,11 +17768,11 @@
         <p:spPr>
           <a:xfrm>
             <a:off x="609598" y="2666993"/>
-            <a:ext cx="10972773" cy="2793993"/>
+            <a:ext cx="10972773" cy="2355844"/>
           </a:xfrm>
           <a:prstGeom prst="roundRect">
             <a:avLst>
-              <a:gd name="adj" fmla="val 3636"/>
+              <a:gd name="adj" fmla="val 4313"/>
             </a:avLst>
           </a:prstGeom>
           <a:ln w="9525">
@@ -17971,7 +17971,7 @@
         <p:spPr>
           <a:xfrm>
             <a:off x="888998" y="3136892"/>
-            <a:ext cx="2920993" cy="581024"/>
+            <a:ext cx="2920993" cy="628648"/>
           </a:xfrm>
           <a:prstGeom prst="rect">
             <a:avLst/>
@@ -17997,6 +17997,20 @@
               </a:rPr>
               <a:t>Contactpogingen</a:t>
             </a:r>
+            <a:pPr indent="0" marL="0">
+              <a:buNone/>
+            </a:pPr>
+            <a:r>
+              <a:rPr lang="en-US" sz="1000" i="1" dirty="0">
+                <a:solidFill>
+                  <a:srgbClr val="38B6FF"/>
+                </a:solidFill>
+                <a:latin typeface="Georgia" pitchFamily="34" charset="0"/>
+                <a:ea typeface="Georgia" pitchFamily="34" charset="-122"/>
+                <a:cs typeface="Georgia" pitchFamily="34" charset="-120"/>
+              </a:rPr>
+              <a:t>   vast</a:t>
+            </a:r>
             <a:endParaRPr lang="en-US" sz="1250" dirty="0"/>
           </a:p>
         </p:txBody>
@@ -18010,7 +18024,7 @@
         <p:spPr>
           <a:xfrm>
             <a:off x="3886190" y="3136892"/>
-            <a:ext cx="2349494" cy="581024"/>
+            <a:ext cx="2349494" cy="628648"/>
           </a:xfrm>
           <a:prstGeom prst="rect">
             <a:avLst/>
@@ -18049,7 +18063,7 @@
         <p:spPr>
           <a:xfrm>
             <a:off x="6324584" y="3136892"/>
-            <a:ext cx="2349494" cy="581024"/>
+            <a:ext cx="2349494" cy="628648"/>
           </a:xfrm>
           <a:prstGeom prst="rect">
             <a:avLst/>
@@ -18088,7 +18102,7 @@
         <p:spPr>
           <a:xfrm>
             <a:off x="8737578" y="3136892"/>
-            <a:ext cx="2539994" cy="581024"/>
+            <a:ext cx="2539994" cy="628648"/>
           </a:xfrm>
           <a:prstGeom prst="rect">
             <a:avLst/>
@@ -18126,7 +18140,7 @@
         </p:nvSpPr>
         <p:spPr>
           <a:xfrm>
-            <a:off x="609598" y="3717916"/>
+            <a:off x="609598" y="3765541"/>
             <a:ext cx="10972773" cy="0"/>
           </a:xfrm>
           <a:prstGeom prst="line">
@@ -18149,8 +18163,8 @@
         </p:nvSpPr>
         <p:spPr>
           <a:xfrm>
-            <a:off x="888998" y="3717916"/>
-            <a:ext cx="2920993" cy="581024"/>
+            <a:off x="888998" y="3765541"/>
+            <a:ext cx="2920993" cy="628648"/>
           </a:xfrm>
           <a:prstGeom prst="rect">
             <a:avLst/>
@@ -18176,6 +18190,20 @@
               </a:rPr>
               <a:t>Bedrijven gesproken</a:t>
             </a:r>
+            <a:pPr indent="0" marL="0">
+              <a:buNone/>
+            </a:pPr>
+            <a:r>
+              <a:rPr lang="en-US" sz="1000" i="1" dirty="0">
+                <a:solidFill>
+                  <a:srgbClr val="38B6FF"/>
+                </a:solidFill>
+                <a:latin typeface="Georgia" pitchFamily="34" charset="0"/>
+                <a:ea typeface="Georgia" pitchFamily="34" charset="-122"/>
+                <a:cs typeface="Georgia" pitchFamily="34" charset="-120"/>
+              </a:rPr>
+              <a:t>   verwachting</a:t>
+            </a:r>
             <a:endParaRPr lang="en-US" sz="1250" dirty="0"/>
           </a:p>
         </p:txBody>
@@ -18188,8 +18216,8 @@
         </p:nvSpPr>
         <p:spPr>
           <a:xfrm>
-            <a:off x="3886190" y="3717916"/>
-            <a:ext cx="2349494" cy="581024"/>
+            <a:off x="3886190" y="3765541"/>
+            <a:ext cx="2349494" cy="628648"/>
           </a:xfrm>
           <a:prstGeom prst="rect">
             <a:avLst/>
@@ -18227,8 +18255,8 @@
         </p:nvSpPr>
         <p:spPr>
           <a:xfrm>
-            <a:off x="6324584" y="3717916"/>
-            <a:ext cx="2349494" cy="581024"/>
+            <a:off x="6324584" y="3765541"/>
+            <a:ext cx="2349494" cy="628648"/>
           </a:xfrm>
           <a:prstGeom prst="rect">
             <a:avLst/>
@@ -18266,8 +18294,8 @@
         </p:nvSpPr>
         <p:spPr>
           <a:xfrm>
-            <a:off x="8737578" y="3717916"/>
-            <a:ext cx="2539994" cy="581024"/>
+            <a:off x="8737578" y="3765541"/>
+            <a:ext cx="2539994" cy="628648"/>
           </a:xfrm>
           <a:prstGeom prst="rect">
             <a:avLst/>
@@ -18305,7 +18333,29 @@
         </p:nvSpPr>
         <p:spPr>
           <a:xfrm>
-            <a:off x="609598" y="4298939"/>
+            <a:off x="615948" y="4394189"/>
+            <a:ext cx="10960073" cy="628648"/>
+          </a:xfrm>
+          <a:prstGeom prst="rect">
+            <a:avLst/>
+          </a:prstGeom>
+          <a:solidFill>
+            <a:srgbClr val="38B6FF">
+              <a:alpha val="11000"/>
+            </a:srgbClr>
+          </a:solidFill>
+          <a:ln/>
+        </p:spPr>
+      </p:sp>
+      <p:sp>
+        <p:nvSpPr>
+          <p:cNvPr id="23" name="Shape 21"/>
+          <p:cNvSpPr/>
+          <p:nvPr/>
+        </p:nvSpPr>
+        <p:spPr>
+          <a:xfrm>
+            <a:off x="609598" y="4394189"/>
             <a:ext cx="10972773" cy="0"/>
           </a:xfrm>
           <a:prstGeom prst="line">
@@ -18322,14 +18372,14 @@
       </p:sp>
       <p:sp>
         <p:nvSpPr>
-          <p:cNvPr id="23" name="Text 21"/>
-          <p:cNvSpPr txBox="1"/>
-          <p:nvPr/>
-        </p:nvSpPr>
-        <p:spPr>
-          <a:xfrm>
-            <a:off x="888998" y="4298939"/>
-            <a:ext cx="2920993" cy="581024"/>
+          <p:cNvPr id="24" name="Text 22"/>
+          <p:cNvSpPr txBox="1"/>
+          <p:nvPr/>
+        </p:nvSpPr>
+        <p:spPr>
+          <a:xfrm>
+            <a:off x="888998" y="4394189"/>
+            <a:ext cx="2920993" cy="628648"/>
           </a:xfrm>
           <a:prstGeom prst="rect">
             <a:avLst/>
@@ -18353,7 +18403,21 @@
                 <a:ea typeface="Arial" pitchFamily="34" charset="-122"/>
                 <a:cs typeface="Arial" pitchFamily="34" charset="-120"/>
               </a:rPr>
-              <a:t>Terugbelafspraken</a:t>
+              <a:t>Afspraken</a:t>
+            </a:r>
+            <a:pPr indent="0" marL="0">
+              <a:buNone/>
+            </a:pPr>
+            <a:r>
+              <a:rPr lang="en-US" sz="1000" i="1" dirty="0">
+                <a:solidFill>
+                  <a:srgbClr val="38B6FF"/>
+                </a:solidFill>
+                <a:latin typeface="Georgia" pitchFamily="34" charset="0"/>
+                <a:ea typeface="Georgia" pitchFamily="34" charset="-122"/>
+                <a:cs typeface="Georgia" pitchFamily="34" charset="-120"/>
+              </a:rPr>
+              <a:t>   gegarandeerd</a:t>
             </a:r>
             <a:endParaRPr lang="en-US" sz="1250" dirty="0"/>
           </a:p>
@@ -18361,14 +18425,14 @@
       </p:sp>
       <p:sp>
         <p:nvSpPr>
-          <p:cNvPr id="24" name="Text 22"/>
-          <p:cNvSpPr txBox="1"/>
-          <p:nvPr/>
-        </p:nvSpPr>
-        <p:spPr>
-          <a:xfrm>
-            <a:off x="3886190" y="4298939"/>
-            <a:ext cx="2349494" cy="581024"/>
+          <p:cNvPr id="25" name="Text 23"/>
+          <p:cNvSpPr txBox="1"/>
+          <p:nvPr/>
+        </p:nvSpPr>
+        <p:spPr>
+          <a:xfrm>
+            <a:off x="3886190" y="4394189"/>
+            <a:ext cx="2349494" cy="628648"/>
           </a:xfrm>
           <a:prstGeom prst="rect">
             <a:avLst/>
@@ -18392,7 +18456,7 @@
                 <a:ea typeface="Arial" pitchFamily="34" charset="-122"/>
                 <a:cs typeface="Arial" pitchFamily="34" charset="-120"/>
               </a:rPr>
-              <a:t>± 35</a:t>
+              <a:t>2,5</a:t>
             </a:r>
             <a:endParaRPr lang="en-US" sz="1250" dirty="0"/>
           </a:p>
@@ -18400,14 +18464,14 @@
       </p:sp>
       <p:sp>
         <p:nvSpPr>
-          <p:cNvPr id="25" name="Text 23"/>
-          <p:cNvSpPr txBox="1"/>
-          <p:nvPr/>
-        </p:nvSpPr>
-        <p:spPr>
-          <a:xfrm>
-            <a:off x="6324584" y="4298939"/>
-            <a:ext cx="2349494" cy="581024"/>
+          <p:cNvPr id="26" name="Text 24"/>
+          <p:cNvSpPr txBox="1"/>
+          <p:nvPr/>
+        </p:nvSpPr>
+        <p:spPr>
+          <a:xfrm>
+            <a:off x="6324584" y="4394189"/>
+            <a:ext cx="2349494" cy="628648"/>
           </a:xfrm>
           <a:prstGeom prst="rect">
             <a:avLst/>
@@ -18431,7 +18495,7 @@
                 <a:ea typeface="Arial" pitchFamily="34" charset="-122"/>
                 <a:cs typeface="Arial" pitchFamily="34" charset="-120"/>
               </a:rPr>
-              <a:t>± 140</a:t>
+              <a:t>10</a:t>
             </a:r>
             <a:endParaRPr lang="en-US" sz="1250" dirty="0"/>
           </a:p>
@@ -18439,14 +18503,14 @@
       </p:sp>
       <p:sp>
         <p:nvSpPr>
-          <p:cNvPr id="26" name="Text 24"/>
-          <p:cNvSpPr txBox="1"/>
-          <p:nvPr/>
-        </p:nvSpPr>
-        <p:spPr>
-          <a:xfrm>
-            <a:off x="8737578" y="4298939"/>
-            <a:ext cx="2539994" cy="581024"/>
+          <p:cNvPr id="27" name="Text 25"/>
+          <p:cNvSpPr txBox="1"/>
+          <p:nvPr/>
+        </p:nvSpPr>
+        <p:spPr>
+          <a:xfrm>
+            <a:off x="8737578" y="4394189"/>
+            <a:ext cx="2539994" cy="628648"/>
           </a:xfrm>
           <a:prstGeom prst="rect">
             <a:avLst/>
@@ -18470,7 +18534,7 @@
                 <a:ea typeface="Arial" pitchFamily="34" charset="-122"/>
                 <a:cs typeface="Arial" pitchFamily="34" charset="-120"/>
               </a:rPr>
-              <a:t>± 280</a:t>
+              <a:t>20</a:t>
             </a:r>
             <a:endParaRPr lang="en-US" sz="1250" dirty="0"/>
           </a:p>
@@ -18478,208 +18542,7 @@
       </p:sp>
       <p:sp>
         <p:nvSpPr>
-          <p:cNvPr id="27" name="Shape 25"/>
-          <p:cNvSpPr/>
-          <p:nvPr/>
-        </p:nvSpPr>
-        <p:spPr>
-          <a:xfrm>
-            <a:off x="615948" y="4879963"/>
-            <a:ext cx="10960073" cy="581024"/>
-          </a:xfrm>
-          <a:prstGeom prst="rect">
-            <a:avLst/>
-          </a:prstGeom>
-          <a:solidFill>
-            <a:srgbClr val="38B6FF">
-              <a:alpha val="11000"/>
-            </a:srgbClr>
-          </a:solidFill>
-          <a:ln/>
-        </p:spPr>
-      </p:sp>
-      <p:sp>
-        <p:nvSpPr>
           <p:cNvPr id="28" name="Shape 26"/>
-          <p:cNvSpPr/>
-          <p:nvPr/>
-        </p:nvSpPr>
-        <p:spPr>
-          <a:xfrm>
-            <a:off x="609598" y="4879963"/>
-            <a:ext cx="10972773" cy="0"/>
-          </a:xfrm>
-          <a:prstGeom prst="line">
-            <a:avLst/>
-          </a:prstGeom>
-          <a:noFill/>
-          <a:ln w="9525">
-            <a:solidFill>
-              <a:srgbClr val="3A4152"/>
-            </a:solidFill>
-            <a:prstDash val="solid"/>
-          </a:ln>
-        </p:spPr>
-      </p:sp>
-      <p:sp>
-        <p:nvSpPr>
-          <p:cNvPr id="29" name="Text 27"/>
-          <p:cNvSpPr txBox="1"/>
-          <p:nvPr/>
-        </p:nvSpPr>
-        <p:spPr>
-          <a:xfrm>
-            <a:off x="888998" y="4879963"/>
-            <a:ext cx="2920993" cy="581024"/>
-          </a:xfrm>
-          <a:prstGeom prst="rect">
-            <a:avLst/>
-          </a:prstGeom>
-          <a:noFill/>
-          <a:ln/>
-        </p:spPr>
-        <p:txBody>
-          <a:bodyPr wrap="square" lIns="0" tIns="0" rIns="0" bIns="0" rtlCol="0" anchor="ctr"/>
-          <a:lstStyle/>
-          <a:p>
-            <a:pPr indent="0" marL="0">
-              <a:buNone/>
-            </a:pPr>
-            <a:r>
-              <a:rPr lang="en-US" sz="1250" b="1" dirty="0">
-                <a:solidFill>
-                  <a:srgbClr val="F2EFE6"/>
-                </a:solidFill>
-                <a:latin typeface="Arial" pitchFamily="34" charset="0"/>
-                <a:ea typeface="Arial" pitchFamily="34" charset="-122"/>
-                <a:cs typeface="Arial" pitchFamily="34" charset="-120"/>
-              </a:rPr>
-              <a:t>Gekwalificeerde afspraken</a:t>
-            </a:r>
-            <a:endParaRPr lang="en-US" sz="1250" dirty="0"/>
-          </a:p>
-        </p:txBody>
-      </p:sp>
-      <p:sp>
-        <p:nvSpPr>
-          <p:cNvPr id="30" name="Text 28"/>
-          <p:cNvSpPr txBox="1"/>
-          <p:nvPr/>
-        </p:nvSpPr>
-        <p:spPr>
-          <a:xfrm>
-            <a:off x="3886190" y="4879963"/>
-            <a:ext cx="2349494" cy="581024"/>
-          </a:xfrm>
-          <a:prstGeom prst="rect">
-            <a:avLst/>
-          </a:prstGeom>
-          <a:noFill/>
-          <a:ln/>
-        </p:spPr>
-        <p:txBody>
-          <a:bodyPr wrap="square" lIns="0" tIns="0" rIns="0" bIns="0" rtlCol="0" anchor="ctr"/>
-          <a:lstStyle/>
-          <a:p>
-            <a:pPr indent="0" marL="0">
-              <a:buNone/>
-            </a:pPr>
-            <a:r>
-              <a:rPr lang="en-US" sz="1250" b="1" dirty="0">
-                <a:solidFill>
-                  <a:srgbClr val="F2EFE6"/>
-                </a:solidFill>
-                <a:latin typeface="Arial" pitchFamily="34" charset="0"/>
-                <a:ea typeface="Arial" pitchFamily="34" charset="-122"/>
-                <a:cs typeface="Arial" pitchFamily="34" charset="-120"/>
-              </a:rPr>
-              <a:t>2,5</a:t>
-            </a:r>
-            <a:endParaRPr lang="en-US" sz="1250" dirty="0"/>
-          </a:p>
-        </p:txBody>
-      </p:sp>
-      <p:sp>
-        <p:nvSpPr>
-          <p:cNvPr id="31" name="Text 29"/>
-          <p:cNvSpPr txBox="1"/>
-          <p:nvPr/>
-        </p:nvSpPr>
-        <p:spPr>
-          <a:xfrm>
-            <a:off x="6324584" y="4879963"/>
-            <a:ext cx="2349494" cy="581024"/>
-          </a:xfrm>
-          <a:prstGeom prst="rect">
-            <a:avLst/>
-          </a:prstGeom>
-          <a:noFill/>
-          <a:ln/>
-        </p:spPr>
-        <p:txBody>
-          <a:bodyPr wrap="square" lIns="0" tIns="0" rIns="0" bIns="0" rtlCol="0" anchor="ctr"/>
-          <a:lstStyle/>
-          <a:p>
-            <a:pPr indent="0" marL="0">
-              <a:buNone/>
-            </a:pPr>
-            <a:r>
-              <a:rPr lang="en-US" sz="1250" b="1" dirty="0">
-                <a:solidFill>
-                  <a:srgbClr val="F2EFE6"/>
-                </a:solidFill>
-                <a:latin typeface="Arial" pitchFamily="34" charset="0"/>
-                <a:ea typeface="Arial" pitchFamily="34" charset="-122"/>
-                <a:cs typeface="Arial" pitchFamily="34" charset="-120"/>
-              </a:rPr>
-              <a:t>10</a:t>
-            </a:r>
-            <a:endParaRPr lang="en-US" sz="1250" dirty="0"/>
-          </a:p>
-        </p:txBody>
-      </p:sp>
-      <p:sp>
-        <p:nvSpPr>
-          <p:cNvPr id="32" name="Text 30"/>
-          <p:cNvSpPr txBox="1"/>
-          <p:nvPr/>
-        </p:nvSpPr>
-        <p:spPr>
-          <a:xfrm>
-            <a:off x="8737578" y="4879963"/>
-            <a:ext cx="2539994" cy="581024"/>
-          </a:xfrm>
-          <a:prstGeom prst="rect">
-            <a:avLst/>
-          </a:prstGeom>
-          <a:noFill/>
-          <a:ln/>
-        </p:spPr>
-        <p:txBody>
-          <a:bodyPr wrap="square" lIns="0" tIns="0" rIns="0" bIns="0" rtlCol="0" anchor="ctr"/>
-          <a:lstStyle/>
-          <a:p>
-            <a:pPr indent="0" marL="0">
-              <a:buNone/>
-            </a:pPr>
-            <a:r>
-              <a:rPr lang="en-US" sz="1250" b="1" dirty="0">
-                <a:solidFill>
-                  <a:srgbClr val="F2EFE6"/>
-                </a:solidFill>
-                <a:latin typeface="Arial" pitchFamily="34" charset="0"/>
-                <a:ea typeface="Arial" pitchFamily="34" charset="-122"/>
-                <a:cs typeface="Arial" pitchFamily="34" charset="-120"/>
-              </a:rPr>
-              <a:t>20</a:t>
-            </a:r>
-            <a:endParaRPr lang="en-US" sz="1250" dirty="0"/>
-          </a:p>
-        </p:txBody>
-      </p:sp>
-      <p:sp>
-        <p:nvSpPr>
-          <p:cNvPr id="33" name="Shape 31"/>
           <p:cNvSpPr/>
           <p:nvPr/>
         </p:nvSpPr>
@@ -18699,7 +18562,7 @@
       </p:sp>
       <p:sp>
         <p:nvSpPr>
-          <p:cNvPr id="34" name="Text 32"/>
+          <p:cNvPr id="29" name="Text 27"/>
           <p:cNvSpPr txBox="1"/>
           <p:nvPr/>
         </p:nvSpPr>
@@ -18730,7 +18593,7 @@
                 <a:ea typeface="Arial" pitchFamily="34" charset="-122"/>
                 <a:cs typeface="Arial" pitchFamily="34" charset="-120"/>
               </a:rPr>
-              <a:t>De zes uur bellen maken we altijd vol, dus de bovenste drie liggen vast. Halen we de tien afspraken niet, dan krijgen jullie de volgende periode een beldag van ons cadeau.</a:t>
+              <a:t>De zes uur bellen maken we altijd vol, dus die honderdvijftig pogingen staan. Garanderen doen we alleen de tien afspraken, en halen we die niet, dan krijgen jullie een beldag cadeau.</a:t>
             </a:r>
             <a:endParaRPr lang="en-US" sz="1200" dirty="0"/>
           </a:p>

--- a/output/LINK. voorstel GrowOn Agency.pptx
+++ b/output/LINK. voorstel GrowOn Agency.pptx
@@ -5994,11 +5994,11 @@
         <p:spPr>
           <a:xfrm>
             <a:off x="609598" y="2489194"/>
-            <a:ext cx="3555991" cy="2768593"/>
+            <a:ext cx="2657468" cy="2768593"/>
           </a:xfrm>
           <a:prstGeom prst="roundRect">
             <a:avLst>
-              <a:gd name="adj" fmla="val 3670"/>
+              <a:gd name="adj" fmla="val 3823"/>
             </a:avLst>
           </a:prstGeom>
           <a:solidFill>
@@ -6015,8 +6015,8 @@
         </p:nvSpPr>
         <p:spPr>
           <a:xfrm>
-            <a:off x="825498" y="2743193"/>
-            <a:ext cx="3124192" cy="190500"/>
+            <a:off x="774698" y="2743193"/>
+            <a:ext cx="2327269" cy="190500"/>
           </a:xfrm>
           <a:prstGeom prst="rect">
             <a:avLst/>
@@ -6054,8 +6054,8 @@
         </p:nvSpPr>
         <p:spPr>
           <a:xfrm>
-            <a:off x="825498" y="2959093"/>
-            <a:ext cx="3124192" cy="355599"/>
+            <a:off x="774698" y="2959093"/>
+            <a:ext cx="2327269" cy="355599"/>
           </a:xfrm>
           <a:prstGeom prst="rect">
             <a:avLst/>
@@ -6074,7 +6074,7 @@
               <a:buNone/>
             </a:pPr>
             <a:r>
-              <a:rPr lang="en-US" sz="1250" b="1" dirty="0">
+              <a:rPr lang="en-US" sz="1050" b="1" dirty="0">
                 <a:solidFill>
                   <a:srgbClr val="1C2230"/>
                 </a:solidFill>
@@ -6082,9 +6082,9 @@
                 <a:ea typeface="Arial" pitchFamily="34" charset="-122"/>
                 <a:cs typeface="Arial" pitchFamily="34" charset="-120"/>
               </a:rPr>
-              <a:t>Zoals het de afgelopen twaalf weken liep</a:t>
-            </a:r>
-            <a:endParaRPr lang="en-US" sz="1250" dirty="0"/>
+              <a:t>Zoals het nu loopt</a:t>
+            </a:r>
+            <a:endParaRPr lang="en-US" sz="1050" dirty="0"/>
           </a:p>
         </p:txBody>
       </p:sp>
@@ -6096,24 +6096,24 @@
         </p:nvSpPr>
         <p:spPr>
           <a:xfrm>
-            <a:off x="825498" y="3378192"/>
-            <a:ext cx="2578094" cy="350519"/>
-          </a:xfrm>
-          <a:prstGeom prst="rect">
-            <a:avLst/>
-          </a:prstGeom>
-          <a:noFill/>
-          <a:ln/>
-        </p:spPr>
-        <p:txBody>
-          <a:bodyPr wrap="square" lIns="0" tIns="0" rIns="0" bIns="0" rtlCol="0" anchor="ctr"/>
-          <a:lstStyle/>
-          <a:p>
-            <a:pPr indent="0" marL="0">
-              <a:buNone/>
-            </a:pPr>
-            <a:r>
-              <a:rPr lang="en-US" sz="950" dirty="0">
+            <a:off x="774698" y="3378192"/>
+            <a:ext cx="1730371" cy="350519"/>
+          </a:xfrm>
+          <a:prstGeom prst="rect">
+            <a:avLst/>
+          </a:prstGeom>
+          <a:noFill/>
+          <a:ln/>
+        </p:spPr>
+        <p:txBody>
+          <a:bodyPr wrap="square" lIns="0" tIns="0" rIns="0" bIns="0" rtlCol="0" anchor="ctr"/>
+          <a:lstStyle/>
+          <a:p>
+            <a:pPr indent="0" marL="0">
+              <a:buNone/>
+            </a:pPr>
+            <a:r>
+              <a:rPr lang="en-US" sz="800" dirty="0">
                 <a:solidFill>
                   <a:srgbClr val="6F6A5C"/>
                 </a:solidFill>
@@ -6121,9 +6121,9 @@
                 <a:ea typeface="Arial" pitchFamily="34" charset="-122"/>
                 <a:cs typeface="Arial" pitchFamily="34" charset="-120"/>
               </a:rPr>
-              <a:t>Beldagen per periode</a:t>
-            </a:r>
-            <a:endParaRPr lang="en-US" sz="950" dirty="0"/>
+              <a:t>Beldagen</a:t>
+            </a:r>
+            <a:endParaRPr lang="en-US" sz="800" dirty="0"/>
           </a:p>
         </p:txBody>
       </p:sp>
@@ -6135,7 +6135,7 @@
         </p:nvSpPr>
         <p:spPr>
           <a:xfrm>
-            <a:off x="3124192" y="3378192"/>
+            <a:off x="2276469" y="3378192"/>
             <a:ext cx="825498" cy="350519"/>
           </a:xfrm>
           <a:prstGeom prst="rect">
@@ -6152,7 +6152,7 @@
               <a:buNone/>
             </a:pPr>
             <a:r>
-              <a:rPr lang="en-US" sz="1150" b="1" dirty="0">
+              <a:rPr lang="en-US" sz="1000" b="1" dirty="0">
                 <a:solidFill>
                   <a:srgbClr val="1C2230"/>
                 </a:solidFill>
@@ -6162,7 +6162,7 @@
               </a:rPr>
               <a:t>± 2,7</a:t>
             </a:r>
-            <a:endParaRPr lang="en-US" sz="1150" dirty="0"/>
+            <a:endParaRPr lang="en-US" sz="1000" dirty="0"/>
           </a:p>
         </p:txBody>
       </p:sp>
@@ -6174,8 +6174,8 @@
         </p:nvSpPr>
         <p:spPr>
           <a:xfrm>
-            <a:off x="825498" y="3728711"/>
-            <a:ext cx="3124192" cy="0"/>
+            <a:off x="774698" y="3728711"/>
+            <a:ext cx="2327269" cy="0"/>
           </a:xfrm>
           <a:prstGeom prst="line">
             <a:avLst/>
@@ -6197,24 +6197,24 @@
         </p:nvSpPr>
         <p:spPr>
           <a:xfrm>
-            <a:off x="825498" y="3728711"/>
-            <a:ext cx="2578094" cy="350519"/>
-          </a:xfrm>
-          <a:prstGeom prst="rect">
-            <a:avLst/>
-          </a:prstGeom>
-          <a:noFill/>
-          <a:ln/>
-        </p:spPr>
-        <p:txBody>
-          <a:bodyPr wrap="square" lIns="0" tIns="0" rIns="0" bIns="0" rtlCol="0" anchor="ctr"/>
-          <a:lstStyle/>
-          <a:p>
-            <a:pPr indent="0" marL="0">
-              <a:buNone/>
-            </a:pPr>
-            <a:r>
-              <a:rPr lang="en-US" sz="950" dirty="0">
+            <a:off x="774698" y="3728711"/>
+            <a:ext cx="1730371" cy="350519"/>
+          </a:xfrm>
+          <a:prstGeom prst="rect">
+            <a:avLst/>
+          </a:prstGeom>
+          <a:noFill/>
+          <a:ln/>
+        </p:spPr>
+        <p:txBody>
+          <a:bodyPr wrap="square" lIns="0" tIns="0" rIns="0" bIns="0" rtlCol="0" anchor="ctr"/>
+          <a:lstStyle/>
+          <a:p>
+            <a:pPr indent="0" marL="0">
+              <a:buNone/>
+            </a:pPr>
+            <a:r>
+              <a:rPr lang="en-US" sz="800" dirty="0">
                 <a:solidFill>
                   <a:srgbClr val="6F6A5C"/>
                 </a:solidFill>
@@ -6224,7 +6224,7 @@
               </a:rPr>
               <a:t>Contactpogingen</a:t>
             </a:r>
-            <a:endParaRPr lang="en-US" sz="950" dirty="0"/>
+            <a:endParaRPr lang="en-US" sz="800" dirty="0"/>
           </a:p>
         </p:txBody>
       </p:sp>
@@ -6236,7 +6236,7 @@
         </p:nvSpPr>
         <p:spPr>
           <a:xfrm>
-            <a:off x="3124192" y="3728711"/>
+            <a:off x="2276469" y="3728711"/>
             <a:ext cx="825498" cy="350519"/>
           </a:xfrm>
           <a:prstGeom prst="rect">
@@ -6253,7 +6253,7 @@
               <a:buNone/>
             </a:pPr>
             <a:r>
-              <a:rPr lang="en-US" sz="1150" b="1" dirty="0">
+              <a:rPr lang="en-US" sz="1000" b="1" dirty="0">
                 <a:solidFill>
                   <a:srgbClr val="1C2230"/>
                 </a:solidFill>
@@ -6263,7 +6263,7 @@
               </a:rPr>
               <a:t>± 400</a:t>
             </a:r>
-            <a:endParaRPr lang="en-US" sz="1150" dirty="0"/>
+            <a:endParaRPr lang="en-US" sz="1000" dirty="0"/>
           </a:p>
         </p:txBody>
       </p:sp>
@@ -6275,8 +6275,8 @@
         </p:nvSpPr>
         <p:spPr>
           <a:xfrm>
-            <a:off x="825498" y="4079230"/>
-            <a:ext cx="3124192" cy="0"/>
+            <a:off x="774698" y="4079230"/>
+            <a:ext cx="2327269" cy="0"/>
           </a:xfrm>
           <a:prstGeom prst="line">
             <a:avLst/>
@@ -6298,24 +6298,24 @@
         </p:nvSpPr>
         <p:spPr>
           <a:xfrm>
-            <a:off x="825498" y="4079230"/>
-            <a:ext cx="2578094" cy="350519"/>
-          </a:xfrm>
-          <a:prstGeom prst="rect">
-            <a:avLst/>
-          </a:prstGeom>
-          <a:noFill/>
-          <a:ln/>
-        </p:spPr>
-        <p:txBody>
-          <a:bodyPr wrap="square" lIns="0" tIns="0" rIns="0" bIns="0" rtlCol="0" anchor="ctr"/>
-          <a:lstStyle/>
-          <a:p>
-            <a:pPr indent="0" marL="0">
-              <a:buNone/>
-            </a:pPr>
-            <a:r>
-              <a:rPr lang="en-US" sz="950" dirty="0">
+            <a:off x="774698" y="4079230"/>
+            <a:ext cx="1730371" cy="350519"/>
+          </a:xfrm>
+          <a:prstGeom prst="rect">
+            <a:avLst/>
+          </a:prstGeom>
+          <a:noFill/>
+          <a:ln/>
+        </p:spPr>
+        <p:txBody>
+          <a:bodyPr wrap="square" lIns="0" tIns="0" rIns="0" bIns="0" rtlCol="0" anchor="ctr"/>
+          <a:lstStyle/>
+          <a:p>
+            <a:pPr indent="0" marL="0">
+              <a:buNone/>
+            </a:pPr>
+            <a:r>
+              <a:rPr lang="en-US" sz="800" dirty="0">
                 <a:solidFill>
                   <a:srgbClr val="6F6A5C"/>
                 </a:solidFill>
@@ -6323,9 +6323,9 @@
                 <a:ea typeface="Arial" pitchFamily="34" charset="-122"/>
                 <a:cs typeface="Arial" pitchFamily="34" charset="-120"/>
               </a:rPr>
-              <a:t>Gekwalificeerde afspraken</a:t>
-            </a:r>
-            <a:endParaRPr lang="en-US" sz="950" dirty="0"/>
+              <a:t>Afspraken</a:t>
+            </a:r>
+            <a:endParaRPr lang="en-US" sz="800" dirty="0"/>
           </a:p>
         </p:txBody>
       </p:sp>
@@ -6337,7 +6337,7 @@
         </p:nvSpPr>
         <p:spPr>
           <a:xfrm>
-            <a:off x="3124192" y="4079230"/>
+            <a:off x="2276469" y="4079230"/>
             <a:ext cx="825498" cy="350519"/>
           </a:xfrm>
           <a:prstGeom prst="rect">
@@ -6354,7 +6354,7 @@
               <a:buNone/>
             </a:pPr>
             <a:r>
-              <a:rPr lang="en-US" sz="1150" b="1" dirty="0">
+              <a:rPr lang="en-US" sz="1000" b="1" dirty="0">
                 <a:solidFill>
                   <a:srgbClr val="1C2230"/>
                 </a:solidFill>
@@ -6364,7 +6364,7 @@
               </a:rPr>
               <a:t>± 8</a:t>
             </a:r>
-            <a:endParaRPr lang="en-US" sz="1150" dirty="0"/>
+            <a:endParaRPr lang="en-US" sz="1000" dirty="0"/>
           </a:p>
         </p:txBody>
       </p:sp>
@@ -6376,8 +6376,8 @@
         </p:nvSpPr>
         <p:spPr>
           <a:xfrm>
-            <a:off x="825498" y="4429749"/>
-            <a:ext cx="3124192" cy="0"/>
+            <a:off x="774698" y="4429749"/>
+            <a:ext cx="2327269" cy="0"/>
           </a:xfrm>
           <a:prstGeom prst="line">
             <a:avLst/>
@@ -6399,24 +6399,24 @@
         </p:nvSpPr>
         <p:spPr>
           <a:xfrm>
-            <a:off x="825498" y="4429749"/>
-            <a:ext cx="2578094" cy="350519"/>
-          </a:xfrm>
-          <a:prstGeom prst="rect">
-            <a:avLst/>
-          </a:prstGeom>
-          <a:noFill/>
-          <a:ln/>
-        </p:spPr>
-        <p:txBody>
-          <a:bodyPr wrap="square" lIns="0" tIns="0" rIns="0" bIns="0" rtlCol="0" anchor="ctr"/>
-          <a:lstStyle/>
-          <a:p>
-            <a:pPr indent="0" marL="0">
-              <a:buNone/>
-            </a:pPr>
-            <a:r>
-              <a:rPr lang="en-US" sz="950" dirty="0">
+            <a:off x="774698" y="4429749"/>
+            <a:ext cx="1730371" cy="350519"/>
+          </a:xfrm>
+          <a:prstGeom prst="rect">
+            <a:avLst/>
+          </a:prstGeom>
+          <a:noFill/>
+          <a:ln/>
+        </p:spPr>
+        <p:txBody>
+          <a:bodyPr wrap="square" lIns="0" tIns="0" rIns="0" bIns="0" rtlCol="0" anchor="ctr"/>
+          <a:lstStyle/>
+          <a:p>
+            <a:pPr indent="0" marL="0">
+              <a:buNone/>
+            </a:pPr>
+            <a:r>
+              <a:rPr lang="en-US" sz="800" dirty="0">
                 <a:solidFill>
                   <a:srgbClr val="6F6A5C"/>
                 </a:solidFill>
@@ -6424,9 +6424,9 @@
                 <a:ea typeface="Arial" pitchFamily="34" charset="-122"/>
                 <a:cs typeface="Arial" pitchFamily="34" charset="-120"/>
               </a:rPr>
-              <a:t>Prijs per beldag</a:t>
-            </a:r>
-            <a:endParaRPr lang="en-US" sz="950" dirty="0"/>
+              <a:t>Per beldag</a:t>
+            </a:r>
+            <a:endParaRPr lang="en-US" sz="800" dirty="0"/>
           </a:p>
         </p:txBody>
       </p:sp>
@@ -6438,7 +6438,7 @@
         </p:nvSpPr>
         <p:spPr>
           <a:xfrm>
-            <a:off x="3124192" y="4429749"/>
+            <a:off x="2276469" y="4429749"/>
             <a:ext cx="825498" cy="350519"/>
           </a:xfrm>
           <a:prstGeom prst="rect">
@@ -6455,7 +6455,7 @@
               <a:buNone/>
             </a:pPr>
             <a:r>
-              <a:rPr lang="en-US" sz="1150" b="1" dirty="0">
+              <a:rPr lang="en-US" sz="1000" b="1" dirty="0">
                 <a:solidFill>
                   <a:srgbClr val="1C2230"/>
                 </a:solidFill>
@@ -6465,7 +6465,7 @@
               </a:rPr>
               <a:t>± € 593</a:t>
             </a:r>
-            <a:endParaRPr lang="en-US" sz="1150" dirty="0"/>
+            <a:endParaRPr lang="en-US" sz="1000" dirty="0"/>
           </a:p>
         </p:txBody>
       </p:sp>
@@ -6477,8 +6477,8 @@
         </p:nvSpPr>
         <p:spPr>
           <a:xfrm>
-            <a:off x="825498" y="4780268"/>
-            <a:ext cx="3124192" cy="0"/>
+            <a:off x="774698" y="4780268"/>
+            <a:ext cx="2327269" cy="0"/>
           </a:xfrm>
           <a:prstGeom prst="line">
             <a:avLst/>
@@ -6500,24 +6500,24 @@
         </p:nvSpPr>
         <p:spPr>
           <a:xfrm>
-            <a:off x="825498" y="4780268"/>
-            <a:ext cx="2578094" cy="350519"/>
-          </a:xfrm>
-          <a:prstGeom prst="rect">
-            <a:avLst/>
-          </a:prstGeom>
-          <a:noFill/>
-          <a:ln/>
-        </p:spPr>
-        <p:txBody>
-          <a:bodyPr wrap="square" lIns="0" tIns="0" rIns="0" bIns="0" rtlCol="0" anchor="ctr"/>
-          <a:lstStyle/>
-          <a:p>
-            <a:pPr indent="0" marL="0">
-              <a:buNone/>
-            </a:pPr>
-            <a:r>
-              <a:rPr lang="en-US" sz="950" dirty="0">
+            <a:off x="774698" y="4780268"/>
+            <a:ext cx="1730371" cy="350519"/>
+          </a:xfrm>
+          <a:prstGeom prst="rect">
+            <a:avLst/>
+          </a:prstGeom>
+          <a:noFill/>
+          <a:ln/>
+        </p:spPr>
+        <p:txBody>
+          <a:bodyPr wrap="square" lIns="0" tIns="0" rIns="0" bIns="0" rtlCol="0" anchor="ctr"/>
+          <a:lstStyle/>
+          <a:p>
+            <a:pPr indent="0" marL="0">
+              <a:buNone/>
+            </a:pPr>
+            <a:r>
+              <a:rPr lang="en-US" sz="800" dirty="0">
                 <a:solidFill>
                   <a:srgbClr val="6F6A5C"/>
                 </a:solidFill>
@@ -6525,9 +6525,9 @@
                 <a:ea typeface="Arial" pitchFamily="34" charset="-122"/>
                 <a:cs typeface="Arial" pitchFamily="34" charset="-120"/>
               </a:rPr>
-              <a:t>Prijs per werkperiode</a:t>
-            </a:r>
-            <a:endParaRPr lang="en-US" sz="950" dirty="0"/>
+              <a:t>Per werkperiode</a:t>
+            </a:r>
+            <a:endParaRPr lang="en-US" sz="800" dirty="0"/>
           </a:p>
         </p:txBody>
       </p:sp>
@@ -6539,7 +6539,7 @@
         </p:nvSpPr>
         <p:spPr>
           <a:xfrm>
-            <a:off x="3124192" y="4780268"/>
+            <a:off x="2276469" y="4780268"/>
             <a:ext cx="825498" cy="350519"/>
           </a:xfrm>
           <a:prstGeom prst="rect">
@@ -6556,7 +6556,7 @@
               <a:buNone/>
             </a:pPr>
             <a:r>
-              <a:rPr lang="en-US" sz="1150" b="1" dirty="0">
+              <a:rPr lang="en-US" sz="1000" b="1" dirty="0">
                 <a:solidFill>
                   <a:srgbClr val="1C2230"/>
                 </a:solidFill>
@@ -6566,7 +6566,7 @@
               </a:rPr>
               <a:t>€ 1.600</a:t>
             </a:r>
-            <a:endParaRPr lang="en-US" sz="1150" dirty="0"/>
+            <a:endParaRPr lang="en-US" sz="1000" dirty="0"/>
           </a:p>
         </p:txBody>
       </p:sp>
@@ -6578,12 +6578,12 @@
         </p:nvSpPr>
         <p:spPr>
           <a:xfrm>
-            <a:off x="4317989" y="2489194"/>
-            <a:ext cx="3555991" cy="2768593"/>
+            <a:off x="3381367" y="2489194"/>
+            <a:ext cx="2657468" cy="2768593"/>
           </a:xfrm>
           <a:prstGeom prst="roundRect">
             <a:avLst>
-              <a:gd name="adj" fmla="val 3670"/>
+              <a:gd name="adj" fmla="val 3823"/>
             </a:avLst>
           </a:prstGeom>
           <a:solidFill>
@@ -6600,8 +6600,8 @@
         </p:nvSpPr>
         <p:spPr>
           <a:xfrm>
-            <a:off x="4533889" y="2743193"/>
-            <a:ext cx="3124192" cy="190500"/>
+            <a:off x="3546466" y="2743193"/>
+            <a:ext cx="2327269" cy="190500"/>
           </a:xfrm>
           <a:prstGeom prst="rect">
             <a:avLst/>
@@ -6625,7 +6625,7 @@
                 <a:ea typeface="Arial" pitchFamily="34" charset="-122"/>
                 <a:cs typeface="Arial" pitchFamily="34" charset="-120"/>
               </a:rPr>
-              <a:t>VANAF WERKPERIODE 4</a:t>
+              <a:t>VOORSTEL</a:t>
             </a:r>
             <a:endParaRPr lang="en-US" sz="800" dirty="0"/>
           </a:p>
@@ -6639,8 +6639,8 @@
         </p:nvSpPr>
         <p:spPr>
           <a:xfrm>
-            <a:off x="4533889" y="2959093"/>
-            <a:ext cx="3124192" cy="355599"/>
+            <a:off x="3546466" y="2959093"/>
+            <a:ext cx="2327269" cy="355599"/>
           </a:xfrm>
           <a:prstGeom prst="rect">
             <a:avLst/>
@@ -6659,7 +6659,7 @@
               <a:buNone/>
             </a:pPr>
             <a:r>
-              <a:rPr lang="en-US" sz="1250" b="1" dirty="0">
+              <a:rPr lang="en-US" sz="1050" b="1" dirty="0">
                 <a:solidFill>
                   <a:srgbClr val="F2EFE6"/>
                 </a:solidFill>
@@ -6667,9 +6667,9 @@
                 <a:ea typeface="Arial" pitchFamily="34" charset="-122"/>
                 <a:cs typeface="Arial" pitchFamily="34" charset="-120"/>
               </a:rPr>
-              <a:t>Vier beldagen per vier weken</a:t>
-            </a:r>
-            <a:endParaRPr lang="en-US" sz="1250" dirty="0"/>
+              <a:t>Vier beldagen</a:t>
+            </a:r>
+            <a:endParaRPr lang="en-US" sz="1050" dirty="0"/>
           </a:p>
         </p:txBody>
       </p:sp>
@@ -6681,24 +6681,24 @@
         </p:nvSpPr>
         <p:spPr>
           <a:xfrm>
-            <a:off x="4533889" y="3378192"/>
-            <a:ext cx="2578094" cy="350519"/>
-          </a:xfrm>
-          <a:prstGeom prst="rect">
-            <a:avLst/>
-          </a:prstGeom>
-          <a:noFill/>
-          <a:ln/>
-        </p:spPr>
-        <p:txBody>
-          <a:bodyPr wrap="square" lIns="0" tIns="0" rIns="0" bIns="0" rtlCol="0" anchor="ctr"/>
-          <a:lstStyle/>
-          <a:p>
-            <a:pPr indent="0" marL="0">
-              <a:buNone/>
-            </a:pPr>
-            <a:r>
-              <a:rPr lang="en-US" sz="950" dirty="0">
+            <a:off x="3546466" y="3378192"/>
+            <a:ext cx="1730371" cy="350519"/>
+          </a:xfrm>
+          <a:prstGeom prst="rect">
+            <a:avLst/>
+          </a:prstGeom>
+          <a:noFill/>
+          <a:ln/>
+        </p:spPr>
+        <p:txBody>
+          <a:bodyPr wrap="square" lIns="0" tIns="0" rIns="0" bIns="0" rtlCol="0" anchor="ctr"/>
+          <a:lstStyle/>
+          <a:p>
+            <a:pPr indent="0" marL="0">
+              <a:buNone/>
+            </a:pPr>
+            <a:r>
+              <a:rPr lang="en-US" sz="800" dirty="0">
                 <a:solidFill>
                   <a:srgbClr val="C2C8D2"/>
                 </a:solidFill>
@@ -6706,9 +6706,9 @@
                 <a:ea typeface="Arial" pitchFamily="34" charset="-122"/>
                 <a:cs typeface="Arial" pitchFamily="34" charset="-120"/>
               </a:rPr>
-              <a:t>Beldagen per periode</a:t>
-            </a:r>
-            <a:endParaRPr lang="en-US" sz="950" dirty="0"/>
+              <a:t>Beldagen</a:t>
+            </a:r>
+            <a:endParaRPr lang="en-US" sz="800" dirty="0"/>
           </a:p>
         </p:txBody>
       </p:sp>
@@ -6720,7 +6720,7 @@
         </p:nvSpPr>
         <p:spPr>
           <a:xfrm>
-            <a:off x="6832583" y="3378192"/>
+            <a:off x="5048237" y="3378192"/>
             <a:ext cx="825498" cy="350519"/>
           </a:xfrm>
           <a:prstGeom prst="rect">
@@ -6737,7 +6737,7 @@
               <a:buNone/>
             </a:pPr>
             <a:r>
-              <a:rPr lang="en-US" sz="1150" b="1" dirty="0">
+              <a:rPr lang="en-US" sz="1000" b="1" dirty="0">
                 <a:solidFill>
                   <a:srgbClr val="38B6FF"/>
                 </a:solidFill>
@@ -6747,7 +6747,7 @@
               </a:rPr>
               <a:t>4</a:t>
             </a:r>
-            <a:endParaRPr lang="en-US" sz="1150" dirty="0"/>
+            <a:endParaRPr lang="en-US" sz="1000" dirty="0"/>
           </a:p>
         </p:txBody>
       </p:sp>
@@ -6759,8 +6759,8 @@
         </p:nvSpPr>
         <p:spPr>
           <a:xfrm>
-            <a:off x="4533889" y="3728711"/>
-            <a:ext cx="3124192" cy="0"/>
+            <a:off x="3546466" y="3728711"/>
+            <a:ext cx="2327269" cy="0"/>
           </a:xfrm>
           <a:prstGeom prst="line">
             <a:avLst/>
@@ -6782,24 +6782,24 @@
         </p:nvSpPr>
         <p:spPr>
           <a:xfrm>
-            <a:off x="4533889" y="3728711"/>
-            <a:ext cx="2578094" cy="350519"/>
-          </a:xfrm>
-          <a:prstGeom prst="rect">
-            <a:avLst/>
-          </a:prstGeom>
-          <a:noFill/>
-          <a:ln/>
-        </p:spPr>
-        <p:txBody>
-          <a:bodyPr wrap="square" lIns="0" tIns="0" rIns="0" bIns="0" rtlCol="0" anchor="ctr"/>
-          <a:lstStyle/>
-          <a:p>
-            <a:pPr indent="0" marL="0">
-              <a:buNone/>
-            </a:pPr>
-            <a:r>
-              <a:rPr lang="en-US" sz="950" dirty="0">
+            <a:off x="3546466" y="3728711"/>
+            <a:ext cx="1730371" cy="350519"/>
+          </a:xfrm>
+          <a:prstGeom prst="rect">
+            <a:avLst/>
+          </a:prstGeom>
+          <a:noFill/>
+          <a:ln/>
+        </p:spPr>
+        <p:txBody>
+          <a:bodyPr wrap="square" lIns="0" tIns="0" rIns="0" bIns="0" rtlCol="0" anchor="ctr"/>
+          <a:lstStyle/>
+          <a:p>
+            <a:pPr indent="0" marL="0">
+              <a:buNone/>
+            </a:pPr>
+            <a:r>
+              <a:rPr lang="en-US" sz="800" dirty="0">
                 <a:solidFill>
                   <a:srgbClr val="C2C8D2"/>
                 </a:solidFill>
@@ -6809,7 +6809,7 @@
               </a:rPr>
               <a:t>Contactpogingen</a:t>
             </a:r>
-            <a:endParaRPr lang="en-US" sz="950" dirty="0"/>
+            <a:endParaRPr lang="en-US" sz="800" dirty="0"/>
           </a:p>
         </p:txBody>
       </p:sp>
@@ -6821,7 +6821,7 @@
         </p:nvSpPr>
         <p:spPr>
           <a:xfrm>
-            <a:off x="6832583" y="3728711"/>
+            <a:off x="5048237" y="3728711"/>
             <a:ext cx="825498" cy="350519"/>
           </a:xfrm>
           <a:prstGeom prst="rect">
@@ -6838,7 +6838,7 @@
               <a:buNone/>
             </a:pPr>
             <a:r>
-              <a:rPr lang="en-US" sz="1150" b="1" dirty="0">
+              <a:rPr lang="en-US" sz="1000" b="1" dirty="0">
                 <a:solidFill>
                   <a:srgbClr val="38B6FF"/>
                 </a:solidFill>
@@ -6848,7 +6848,7 @@
               </a:rPr>
               <a:t>600</a:t>
             </a:r>
-            <a:endParaRPr lang="en-US" sz="1150" dirty="0"/>
+            <a:endParaRPr lang="en-US" sz="1000" dirty="0"/>
           </a:p>
         </p:txBody>
       </p:sp>
@@ -6860,8 +6860,8 @@
         </p:nvSpPr>
         <p:spPr>
           <a:xfrm>
-            <a:off x="4533889" y="4079230"/>
-            <a:ext cx="3124192" cy="0"/>
+            <a:off x="3546466" y="4079230"/>
+            <a:ext cx="2327269" cy="0"/>
           </a:xfrm>
           <a:prstGeom prst="line">
             <a:avLst/>
@@ -6883,24 +6883,24 @@
         </p:nvSpPr>
         <p:spPr>
           <a:xfrm>
-            <a:off x="4533889" y="4079230"/>
-            <a:ext cx="2578094" cy="350519"/>
-          </a:xfrm>
-          <a:prstGeom prst="rect">
-            <a:avLst/>
-          </a:prstGeom>
-          <a:noFill/>
-          <a:ln/>
-        </p:spPr>
-        <p:txBody>
-          <a:bodyPr wrap="square" lIns="0" tIns="0" rIns="0" bIns="0" rtlCol="0" anchor="ctr"/>
-          <a:lstStyle/>
-          <a:p>
-            <a:pPr indent="0" marL="0">
-              <a:buNone/>
-            </a:pPr>
-            <a:r>
-              <a:rPr lang="en-US" sz="950" dirty="0">
+            <a:off x="3546466" y="4079230"/>
+            <a:ext cx="1730371" cy="350519"/>
+          </a:xfrm>
+          <a:prstGeom prst="rect">
+            <a:avLst/>
+          </a:prstGeom>
+          <a:noFill/>
+          <a:ln/>
+        </p:spPr>
+        <p:txBody>
+          <a:bodyPr wrap="square" lIns="0" tIns="0" rIns="0" bIns="0" rtlCol="0" anchor="ctr"/>
+          <a:lstStyle/>
+          <a:p>
+            <a:pPr indent="0" marL="0">
+              <a:buNone/>
+            </a:pPr>
+            <a:r>
+              <a:rPr lang="en-US" sz="800" dirty="0">
                 <a:solidFill>
                   <a:srgbClr val="C2C8D2"/>
                 </a:solidFill>
@@ -6908,9 +6908,9 @@
                 <a:ea typeface="Arial" pitchFamily="34" charset="-122"/>
                 <a:cs typeface="Arial" pitchFamily="34" charset="-120"/>
               </a:rPr>
-              <a:t>Gekwalificeerde afspraken</a:t>
-            </a:r>
-            <a:endParaRPr lang="en-US" sz="950" dirty="0"/>
+              <a:t>Afspraken</a:t>
+            </a:r>
+            <a:endParaRPr lang="en-US" sz="800" dirty="0"/>
           </a:p>
         </p:txBody>
       </p:sp>
@@ -6922,7 +6922,7 @@
         </p:nvSpPr>
         <p:spPr>
           <a:xfrm>
-            <a:off x="6832583" y="4079230"/>
+            <a:off x="5048237" y="4079230"/>
             <a:ext cx="825498" cy="350519"/>
           </a:xfrm>
           <a:prstGeom prst="rect">
@@ -6939,7 +6939,7 @@
               <a:buNone/>
             </a:pPr>
             <a:r>
-              <a:rPr lang="en-US" sz="1150" b="1" dirty="0">
+              <a:rPr lang="en-US" sz="1000" b="1" dirty="0">
                 <a:solidFill>
                   <a:srgbClr val="38B6FF"/>
                 </a:solidFill>
@@ -6949,7 +6949,7 @@
               </a:rPr>
               <a:t>10</a:t>
             </a:r>
-            <a:endParaRPr lang="en-US" sz="1150" dirty="0"/>
+            <a:endParaRPr lang="en-US" sz="1000" dirty="0"/>
           </a:p>
         </p:txBody>
       </p:sp>
@@ -6961,8 +6961,8 @@
         </p:nvSpPr>
         <p:spPr>
           <a:xfrm>
-            <a:off x="4533889" y="4429749"/>
-            <a:ext cx="3124192" cy="0"/>
+            <a:off x="3546466" y="4429749"/>
+            <a:ext cx="2327269" cy="0"/>
           </a:xfrm>
           <a:prstGeom prst="line">
             <a:avLst/>
@@ -6984,24 +6984,24 @@
         </p:nvSpPr>
         <p:spPr>
           <a:xfrm>
-            <a:off x="4533889" y="4429749"/>
-            <a:ext cx="2578094" cy="350519"/>
-          </a:xfrm>
-          <a:prstGeom prst="rect">
-            <a:avLst/>
-          </a:prstGeom>
-          <a:noFill/>
-          <a:ln/>
-        </p:spPr>
-        <p:txBody>
-          <a:bodyPr wrap="square" lIns="0" tIns="0" rIns="0" bIns="0" rtlCol="0" anchor="ctr"/>
-          <a:lstStyle/>
-          <a:p>
-            <a:pPr indent="0" marL="0">
-              <a:buNone/>
-            </a:pPr>
-            <a:r>
-              <a:rPr lang="en-US" sz="950" dirty="0">
+            <a:off x="3546466" y="4429749"/>
+            <a:ext cx="1730371" cy="350519"/>
+          </a:xfrm>
+          <a:prstGeom prst="rect">
+            <a:avLst/>
+          </a:prstGeom>
+          <a:noFill/>
+          <a:ln/>
+        </p:spPr>
+        <p:txBody>
+          <a:bodyPr wrap="square" lIns="0" tIns="0" rIns="0" bIns="0" rtlCol="0" anchor="ctr"/>
+          <a:lstStyle/>
+          <a:p>
+            <a:pPr indent="0" marL="0">
+              <a:buNone/>
+            </a:pPr>
+            <a:r>
+              <a:rPr lang="en-US" sz="800" dirty="0">
                 <a:solidFill>
                   <a:srgbClr val="C2C8D2"/>
                 </a:solidFill>
@@ -7009,9 +7009,9 @@
                 <a:ea typeface="Arial" pitchFamily="34" charset="-122"/>
                 <a:cs typeface="Arial" pitchFamily="34" charset="-120"/>
               </a:rPr>
-              <a:t>Prijs per beldag</a:t>
-            </a:r>
-            <a:endParaRPr lang="en-US" sz="950" dirty="0"/>
+              <a:t>Per beldag</a:t>
+            </a:r>
+            <a:endParaRPr lang="en-US" sz="800" dirty="0"/>
           </a:p>
         </p:txBody>
       </p:sp>
@@ -7023,7 +7023,7 @@
         </p:nvSpPr>
         <p:spPr>
           <a:xfrm>
-            <a:off x="6832583" y="4429749"/>
+            <a:off x="5048237" y="4429749"/>
             <a:ext cx="825498" cy="350519"/>
           </a:xfrm>
           <a:prstGeom prst="rect">
@@ -7040,7 +7040,7 @@
               <a:buNone/>
             </a:pPr>
             <a:r>
-              <a:rPr lang="en-US" sz="1150" b="1" dirty="0">
+              <a:rPr lang="en-US" sz="1000" b="1" dirty="0">
                 <a:solidFill>
                   <a:srgbClr val="38B6FF"/>
                 </a:solidFill>
@@ -7050,7 +7050,7 @@
               </a:rPr>
               <a:t>€ 600</a:t>
             </a:r>
-            <a:endParaRPr lang="en-US" sz="1150" dirty="0"/>
+            <a:endParaRPr lang="en-US" sz="1000" dirty="0"/>
           </a:p>
         </p:txBody>
       </p:sp>
@@ -7062,8 +7062,8 @@
         </p:nvSpPr>
         <p:spPr>
           <a:xfrm>
-            <a:off x="4533889" y="4780268"/>
-            <a:ext cx="3124192" cy="0"/>
+            <a:off x="3546466" y="4780268"/>
+            <a:ext cx="2327269" cy="0"/>
           </a:xfrm>
           <a:prstGeom prst="line">
             <a:avLst/>
@@ -7085,24 +7085,24 @@
         </p:nvSpPr>
         <p:spPr>
           <a:xfrm>
-            <a:off x="4533889" y="4780268"/>
-            <a:ext cx="2578094" cy="350519"/>
-          </a:xfrm>
-          <a:prstGeom prst="rect">
-            <a:avLst/>
-          </a:prstGeom>
-          <a:noFill/>
-          <a:ln/>
-        </p:spPr>
-        <p:txBody>
-          <a:bodyPr wrap="square" lIns="0" tIns="0" rIns="0" bIns="0" rtlCol="0" anchor="ctr"/>
-          <a:lstStyle/>
-          <a:p>
-            <a:pPr indent="0" marL="0">
-              <a:buNone/>
-            </a:pPr>
-            <a:r>
-              <a:rPr lang="en-US" sz="950" dirty="0">
+            <a:off x="3546466" y="4780268"/>
+            <a:ext cx="1730371" cy="350519"/>
+          </a:xfrm>
+          <a:prstGeom prst="rect">
+            <a:avLst/>
+          </a:prstGeom>
+          <a:noFill/>
+          <a:ln/>
+        </p:spPr>
+        <p:txBody>
+          <a:bodyPr wrap="square" lIns="0" tIns="0" rIns="0" bIns="0" rtlCol="0" anchor="ctr"/>
+          <a:lstStyle/>
+          <a:p>
+            <a:pPr indent="0" marL="0">
+              <a:buNone/>
+            </a:pPr>
+            <a:r>
+              <a:rPr lang="en-US" sz="800" dirty="0">
                 <a:solidFill>
                   <a:srgbClr val="C2C8D2"/>
                 </a:solidFill>
@@ -7110,9 +7110,9 @@
                 <a:ea typeface="Arial" pitchFamily="34" charset="-122"/>
                 <a:cs typeface="Arial" pitchFamily="34" charset="-120"/>
               </a:rPr>
-              <a:t>Prijs per werkperiode</a:t>
-            </a:r>
-            <a:endParaRPr lang="en-US" sz="950" dirty="0"/>
+              <a:t>Per werkperiode</a:t>
+            </a:r>
+            <a:endParaRPr lang="en-US" sz="800" dirty="0"/>
           </a:p>
         </p:txBody>
       </p:sp>
@@ -7124,7 +7124,7 @@
         </p:nvSpPr>
         <p:spPr>
           <a:xfrm>
-            <a:off x="6832583" y="4780268"/>
+            <a:off x="5048237" y="4780268"/>
             <a:ext cx="825498" cy="350519"/>
           </a:xfrm>
           <a:prstGeom prst="rect">
@@ -7141,7 +7141,7 @@
               <a:buNone/>
             </a:pPr>
             <a:r>
-              <a:rPr lang="en-US" sz="1150" b="1" dirty="0">
+              <a:rPr lang="en-US" sz="1000" b="1" dirty="0">
                 <a:solidFill>
                   <a:srgbClr val="38B6FF"/>
                 </a:solidFill>
@@ -7151,7 +7151,7 @@
               </a:rPr>
               <a:t>€ 2.400</a:t>
             </a:r>
-            <a:endParaRPr lang="en-US" sz="1150" dirty="0"/>
+            <a:endParaRPr lang="en-US" sz="1000" dirty="0"/>
           </a:p>
         </p:txBody>
       </p:sp>
@@ -7163,12 +7163,12 @@
         </p:nvSpPr>
         <p:spPr>
           <a:xfrm>
-            <a:off x="8026380" y="2489194"/>
-            <a:ext cx="3555991" cy="2768593"/>
+            <a:off x="6153135" y="2489194"/>
+            <a:ext cx="2657468" cy="2768593"/>
           </a:xfrm>
           <a:prstGeom prst="roundRect">
             <a:avLst>
-              <a:gd name="adj" fmla="val 3670"/>
+              <a:gd name="adj" fmla="val 3823"/>
             </a:avLst>
           </a:prstGeom>
           <a:solidFill>
@@ -7185,8 +7185,8 @@
         </p:nvSpPr>
         <p:spPr>
           <a:xfrm>
-            <a:off x="8242279" y="2743193"/>
-            <a:ext cx="3124192" cy="190500"/>
+            <a:off x="6318234" y="2743193"/>
+            <a:ext cx="2327269" cy="190500"/>
           </a:xfrm>
           <a:prstGeom prst="rect">
             <a:avLst/>
@@ -7210,7 +7210,7 @@
                 <a:ea typeface="Arial" pitchFamily="34" charset="-122"/>
                 <a:cs typeface="Arial" pitchFamily="34" charset="-120"/>
               </a:rPr>
-              <a:t>OF DUBBEL</a:t>
+              <a:t>OF</a:t>
             </a:r>
             <a:endParaRPr lang="en-US" sz="800" dirty="0"/>
           </a:p>
@@ -7224,8 +7224,8 @@
         </p:nvSpPr>
         <p:spPr>
           <a:xfrm>
-            <a:off x="8242279" y="2959093"/>
-            <a:ext cx="3124192" cy="355599"/>
+            <a:off x="6318234" y="2959093"/>
+            <a:ext cx="2327269" cy="355599"/>
           </a:xfrm>
           <a:prstGeom prst="rect">
             <a:avLst/>
@@ -7244,7 +7244,7 @@
               <a:buNone/>
             </a:pPr>
             <a:r>
-              <a:rPr lang="en-US" sz="1250" b="1" dirty="0">
+              <a:rPr lang="en-US" sz="1050" b="1" dirty="0">
                 <a:solidFill>
                   <a:srgbClr val="1C2230"/>
                 </a:solidFill>
@@ -7252,9 +7252,9 @@
                 <a:ea typeface="Arial" pitchFamily="34" charset="-122"/>
                 <a:cs typeface="Arial" pitchFamily="34" charset="-120"/>
               </a:rPr>
-              <a:t>Acht beldagen per vier weken</a:t>
-            </a:r>
-            <a:endParaRPr lang="en-US" sz="1250" dirty="0"/>
+              <a:t>Zes beldagen</a:t>
+            </a:r>
+            <a:endParaRPr lang="en-US" sz="1050" dirty="0"/>
           </a:p>
         </p:txBody>
       </p:sp>
@@ -7266,24 +7266,24 @@
         </p:nvSpPr>
         <p:spPr>
           <a:xfrm>
-            <a:off x="8242279" y="3378192"/>
-            <a:ext cx="2578094" cy="350519"/>
-          </a:xfrm>
-          <a:prstGeom prst="rect">
-            <a:avLst/>
-          </a:prstGeom>
-          <a:noFill/>
-          <a:ln/>
-        </p:spPr>
-        <p:txBody>
-          <a:bodyPr wrap="square" lIns="0" tIns="0" rIns="0" bIns="0" rtlCol="0" anchor="ctr"/>
-          <a:lstStyle/>
-          <a:p>
-            <a:pPr indent="0" marL="0">
-              <a:buNone/>
-            </a:pPr>
-            <a:r>
-              <a:rPr lang="en-US" sz="950" dirty="0">
+            <a:off x="6318234" y="3378192"/>
+            <a:ext cx="1730371" cy="350519"/>
+          </a:xfrm>
+          <a:prstGeom prst="rect">
+            <a:avLst/>
+          </a:prstGeom>
+          <a:noFill/>
+          <a:ln/>
+        </p:spPr>
+        <p:txBody>
+          <a:bodyPr wrap="square" lIns="0" tIns="0" rIns="0" bIns="0" rtlCol="0" anchor="ctr"/>
+          <a:lstStyle/>
+          <a:p>
+            <a:pPr indent="0" marL="0">
+              <a:buNone/>
+            </a:pPr>
+            <a:r>
+              <a:rPr lang="en-US" sz="800" dirty="0">
                 <a:solidFill>
                   <a:srgbClr val="6F6A5C"/>
                 </a:solidFill>
@@ -7291,9 +7291,9 @@
                 <a:ea typeface="Arial" pitchFamily="34" charset="-122"/>
                 <a:cs typeface="Arial" pitchFamily="34" charset="-120"/>
               </a:rPr>
-              <a:t>Beldagen per periode</a:t>
-            </a:r>
-            <a:endParaRPr lang="en-US" sz="950" dirty="0"/>
+              <a:t>Beldagen</a:t>
+            </a:r>
+            <a:endParaRPr lang="en-US" sz="800" dirty="0"/>
           </a:p>
         </p:txBody>
       </p:sp>
@@ -7305,7 +7305,7 @@
         </p:nvSpPr>
         <p:spPr>
           <a:xfrm>
-            <a:off x="10540974" y="3378192"/>
+            <a:off x="7820005" y="3378192"/>
             <a:ext cx="825498" cy="350519"/>
           </a:xfrm>
           <a:prstGeom prst="rect">
@@ -7322,7 +7322,7 @@
               <a:buNone/>
             </a:pPr>
             <a:r>
-              <a:rPr lang="en-US" sz="1150" b="1" dirty="0">
+              <a:rPr lang="en-US" sz="1000" b="1" dirty="0">
                 <a:solidFill>
                   <a:srgbClr val="1C2230"/>
                 </a:solidFill>
@@ -7330,9 +7330,9 @@
                 <a:ea typeface="Arial" pitchFamily="34" charset="-122"/>
                 <a:cs typeface="Arial" pitchFamily="34" charset="-120"/>
               </a:rPr>
-              <a:t>8</a:t>
-            </a:r>
-            <a:endParaRPr lang="en-US" sz="1150" dirty="0"/>
+              <a:t>6</a:t>
+            </a:r>
+            <a:endParaRPr lang="en-US" sz="1000" dirty="0"/>
           </a:p>
         </p:txBody>
       </p:sp>
@@ -7344,8 +7344,8 @@
         </p:nvSpPr>
         <p:spPr>
           <a:xfrm>
-            <a:off x="8242279" y="3728711"/>
-            <a:ext cx="3124192" cy="0"/>
+            <a:off x="6318234" y="3728711"/>
+            <a:ext cx="2327269" cy="0"/>
           </a:xfrm>
           <a:prstGeom prst="line">
             <a:avLst/>
@@ -7367,24 +7367,24 @@
         </p:nvSpPr>
         <p:spPr>
           <a:xfrm>
-            <a:off x="8242279" y="3728711"/>
-            <a:ext cx="2578094" cy="350519"/>
-          </a:xfrm>
-          <a:prstGeom prst="rect">
-            <a:avLst/>
-          </a:prstGeom>
-          <a:noFill/>
-          <a:ln/>
-        </p:spPr>
-        <p:txBody>
-          <a:bodyPr wrap="square" lIns="0" tIns="0" rIns="0" bIns="0" rtlCol="0" anchor="ctr"/>
-          <a:lstStyle/>
-          <a:p>
-            <a:pPr indent="0" marL="0">
-              <a:buNone/>
-            </a:pPr>
-            <a:r>
-              <a:rPr lang="en-US" sz="950" dirty="0">
+            <a:off x="6318234" y="3728711"/>
+            <a:ext cx="1730371" cy="350519"/>
+          </a:xfrm>
+          <a:prstGeom prst="rect">
+            <a:avLst/>
+          </a:prstGeom>
+          <a:noFill/>
+          <a:ln/>
+        </p:spPr>
+        <p:txBody>
+          <a:bodyPr wrap="square" lIns="0" tIns="0" rIns="0" bIns="0" rtlCol="0" anchor="ctr"/>
+          <a:lstStyle/>
+          <a:p>
+            <a:pPr indent="0" marL="0">
+              <a:buNone/>
+            </a:pPr>
+            <a:r>
+              <a:rPr lang="en-US" sz="800" dirty="0">
                 <a:solidFill>
                   <a:srgbClr val="6F6A5C"/>
                 </a:solidFill>
@@ -7394,7 +7394,7 @@
               </a:rPr>
               <a:t>Contactpogingen</a:t>
             </a:r>
-            <a:endParaRPr lang="en-US" sz="950" dirty="0"/>
+            <a:endParaRPr lang="en-US" sz="800" dirty="0"/>
           </a:p>
         </p:txBody>
       </p:sp>
@@ -7406,7 +7406,7 @@
         </p:nvSpPr>
         <p:spPr>
           <a:xfrm>
-            <a:off x="10540974" y="3728711"/>
+            <a:off x="7820005" y="3728711"/>
             <a:ext cx="825498" cy="350519"/>
           </a:xfrm>
           <a:prstGeom prst="rect">
@@ -7423,7 +7423,7 @@
               <a:buNone/>
             </a:pPr>
             <a:r>
-              <a:rPr lang="en-US" sz="1150" b="1" dirty="0">
+              <a:rPr lang="en-US" sz="1000" b="1" dirty="0">
                 <a:solidFill>
                   <a:srgbClr val="1C2230"/>
                 </a:solidFill>
@@ -7431,9 +7431,9 @@
                 <a:ea typeface="Arial" pitchFamily="34" charset="-122"/>
                 <a:cs typeface="Arial" pitchFamily="34" charset="-120"/>
               </a:rPr>
-              <a:t>1.200</a:t>
-            </a:r>
-            <a:endParaRPr lang="en-US" sz="1150" dirty="0"/>
+              <a:t>900</a:t>
+            </a:r>
+            <a:endParaRPr lang="en-US" sz="1000" dirty="0"/>
           </a:p>
         </p:txBody>
       </p:sp>
@@ -7445,8 +7445,8 @@
         </p:nvSpPr>
         <p:spPr>
           <a:xfrm>
-            <a:off x="8242279" y="4079230"/>
-            <a:ext cx="3124192" cy="0"/>
+            <a:off x="6318234" y="4079230"/>
+            <a:ext cx="2327269" cy="0"/>
           </a:xfrm>
           <a:prstGeom prst="line">
             <a:avLst/>
@@ -7468,24 +7468,24 @@
         </p:nvSpPr>
         <p:spPr>
           <a:xfrm>
-            <a:off x="8242279" y="4079230"/>
-            <a:ext cx="2578094" cy="350519"/>
-          </a:xfrm>
-          <a:prstGeom prst="rect">
-            <a:avLst/>
-          </a:prstGeom>
-          <a:noFill/>
-          <a:ln/>
-        </p:spPr>
-        <p:txBody>
-          <a:bodyPr wrap="square" lIns="0" tIns="0" rIns="0" bIns="0" rtlCol="0" anchor="ctr"/>
-          <a:lstStyle/>
-          <a:p>
-            <a:pPr indent="0" marL="0">
-              <a:buNone/>
-            </a:pPr>
-            <a:r>
-              <a:rPr lang="en-US" sz="950" dirty="0">
+            <a:off x="6318234" y="4079230"/>
+            <a:ext cx="1730371" cy="350519"/>
+          </a:xfrm>
+          <a:prstGeom prst="rect">
+            <a:avLst/>
+          </a:prstGeom>
+          <a:noFill/>
+          <a:ln/>
+        </p:spPr>
+        <p:txBody>
+          <a:bodyPr wrap="square" lIns="0" tIns="0" rIns="0" bIns="0" rtlCol="0" anchor="ctr"/>
+          <a:lstStyle/>
+          <a:p>
+            <a:pPr indent="0" marL="0">
+              <a:buNone/>
+            </a:pPr>
+            <a:r>
+              <a:rPr lang="en-US" sz="800" dirty="0">
                 <a:solidFill>
                   <a:srgbClr val="6F6A5C"/>
                 </a:solidFill>
@@ -7493,9 +7493,9 @@
                 <a:ea typeface="Arial" pitchFamily="34" charset="-122"/>
                 <a:cs typeface="Arial" pitchFamily="34" charset="-120"/>
               </a:rPr>
-              <a:t>Gekwalificeerde afspraken</a:t>
-            </a:r>
-            <a:endParaRPr lang="en-US" sz="950" dirty="0"/>
+              <a:t>Afspraken</a:t>
+            </a:r>
+            <a:endParaRPr lang="en-US" sz="800" dirty="0"/>
           </a:p>
         </p:txBody>
       </p:sp>
@@ -7507,7 +7507,7 @@
         </p:nvSpPr>
         <p:spPr>
           <a:xfrm>
-            <a:off x="10540974" y="4079230"/>
+            <a:off x="7820005" y="4079230"/>
             <a:ext cx="825498" cy="350519"/>
           </a:xfrm>
           <a:prstGeom prst="rect">
@@ -7524,7 +7524,7 @@
               <a:buNone/>
             </a:pPr>
             <a:r>
-              <a:rPr lang="en-US" sz="1150" b="1" dirty="0">
+              <a:rPr lang="en-US" sz="1000" b="1" dirty="0">
                 <a:solidFill>
                   <a:srgbClr val="1C2230"/>
                 </a:solidFill>
@@ -7532,9 +7532,9 @@
                 <a:ea typeface="Arial" pitchFamily="34" charset="-122"/>
                 <a:cs typeface="Arial" pitchFamily="34" charset="-120"/>
               </a:rPr>
-              <a:t>20</a:t>
-            </a:r>
-            <a:endParaRPr lang="en-US" sz="1150" dirty="0"/>
+              <a:t>15</a:t>
+            </a:r>
+            <a:endParaRPr lang="en-US" sz="1000" dirty="0"/>
           </a:p>
         </p:txBody>
       </p:sp>
@@ -7546,8 +7546,8 @@
         </p:nvSpPr>
         <p:spPr>
           <a:xfrm>
-            <a:off x="8242279" y="4429749"/>
-            <a:ext cx="3124192" cy="0"/>
+            <a:off x="6318234" y="4429749"/>
+            <a:ext cx="2327269" cy="0"/>
           </a:xfrm>
           <a:prstGeom prst="line">
             <a:avLst/>
@@ -7569,24 +7569,24 @@
         </p:nvSpPr>
         <p:spPr>
           <a:xfrm>
-            <a:off x="8242279" y="4429749"/>
-            <a:ext cx="2578094" cy="350519"/>
-          </a:xfrm>
-          <a:prstGeom prst="rect">
-            <a:avLst/>
-          </a:prstGeom>
-          <a:noFill/>
-          <a:ln/>
-        </p:spPr>
-        <p:txBody>
-          <a:bodyPr wrap="square" lIns="0" tIns="0" rIns="0" bIns="0" rtlCol="0" anchor="ctr"/>
-          <a:lstStyle/>
-          <a:p>
-            <a:pPr indent="0" marL="0">
-              <a:buNone/>
-            </a:pPr>
-            <a:r>
-              <a:rPr lang="en-US" sz="950" dirty="0">
+            <a:off x="6318234" y="4429749"/>
+            <a:ext cx="1730371" cy="350519"/>
+          </a:xfrm>
+          <a:prstGeom prst="rect">
+            <a:avLst/>
+          </a:prstGeom>
+          <a:noFill/>
+          <a:ln/>
+        </p:spPr>
+        <p:txBody>
+          <a:bodyPr wrap="square" lIns="0" tIns="0" rIns="0" bIns="0" rtlCol="0" anchor="ctr"/>
+          <a:lstStyle/>
+          <a:p>
+            <a:pPr indent="0" marL="0">
+              <a:buNone/>
+            </a:pPr>
+            <a:r>
+              <a:rPr lang="en-US" sz="800" dirty="0">
                 <a:solidFill>
                   <a:srgbClr val="6F6A5C"/>
                 </a:solidFill>
@@ -7594,9 +7594,9 @@
                 <a:ea typeface="Arial" pitchFamily="34" charset="-122"/>
                 <a:cs typeface="Arial" pitchFamily="34" charset="-120"/>
               </a:rPr>
-              <a:t>Prijs per beldag</a:t>
-            </a:r>
-            <a:endParaRPr lang="en-US" sz="950" dirty="0"/>
+              <a:t>Per beldag</a:t>
+            </a:r>
+            <a:endParaRPr lang="en-US" sz="800" dirty="0"/>
           </a:p>
         </p:txBody>
       </p:sp>
@@ -7608,7 +7608,7 @@
         </p:nvSpPr>
         <p:spPr>
           <a:xfrm>
-            <a:off x="10540974" y="4429749"/>
+            <a:off x="7820005" y="4429749"/>
             <a:ext cx="825498" cy="350519"/>
           </a:xfrm>
           <a:prstGeom prst="rect">
@@ -7625,7 +7625,7 @@
               <a:buNone/>
             </a:pPr>
             <a:r>
-              <a:rPr lang="en-US" sz="1150" b="1" dirty="0">
+              <a:rPr lang="en-US" sz="1000" b="1" dirty="0">
                 <a:solidFill>
                   <a:srgbClr val="1C2230"/>
                 </a:solidFill>
@@ -7633,9 +7633,9 @@
                 <a:ea typeface="Arial" pitchFamily="34" charset="-122"/>
                 <a:cs typeface="Arial" pitchFamily="34" charset="-120"/>
               </a:rPr>
-              <a:t>€ 550</a:t>
-            </a:r>
-            <a:endParaRPr lang="en-US" sz="1150" dirty="0"/>
+              <a:t>€ 575</a:t>
+            </a:r>
+            <a:endParaRPr lang="en-US" sz="1000" dirty="0"/>
           </a:p>
         </p:txBody>
       </p:sp>
@@ -7647,8 +7647,8 @@
         </p:nvSpPr>
         <p:spPr>
           <a:xfrm>
-            <a:off x="8242279" y="4780268"/>
-            <a:ext cx="3124192" cy="0"/>
+            <a:off x="6318234" y="4780268"/>
+            <a:ext cx="2327269" cy="0"/>
           </a:xfrm>
           <a:prstGeom prst="line">
             <a:avLst/>
@@ -7670,24 +7670,24 @@
         </p:nvSpPr>
         <p:spPr>
           <a:xfrm>
-            <a:off x="8242279" y="4780268"/>
-            <a:ext cx="2578094" cy="350519"/>
-          </a:xfrm>
-          <a:prstGeom prst="rect">
-            <a:avLst/>
-          </a:prstGeom>
-          <a:noFill/>
-          <a:ln/>
-        </p:spPr>
-        <p:txBody>
-          <a:bodyPr wrap="square" lIns="0" tIns="0" rIns="0" bIns="0" rtlCol="0" anchor="ctr"/>
-          <a:lstStyle/>
-          <a:p>
-            <a:pPr indent="0" marL="0">
-              <a:buNone/>
-            </a:pPr>
-            <a:r>
-              <a:rPr lang="en-US" sz="950" dirty="0">
+            <a:off x="6318234" y="4780268"/>
+            <a:ext cx="1730371" cy="350519"/>
+          </a:xfrm>
+          <a:prstGeom prst="rect">
+            <a:avLst/>
+          </a:prstGeom>
+          <a:noFill/>
+          <a:ln/>
+        </p:spPr>
+        <p:txBody>
+          <a:bodyPr wrap="square" lIns="0" tIns="0" rIns="0" bIns="0" rtlCol="0" anchor="ctr"/>
+          <a:lstStyle/>
+          <a:p>
+            <a:pPr indent="0" marL="0">
+              <a:buNone/>
+            </a:pPr>
+            <a:r>
+              <a:rPr lang="en-US" sz="800" dirty="0">
                 <a:solidFill>
                   <a:srgbClr val="6F6A5C"/>
                 </a:solidFill>
@@ -7695,9 +7695,9 @@
                 <a:ea typeface="Arial" pitchFamily="34" charset="-122"/>
                 <a:cs typeface="Arial" pitchFamily="34" charset="-120"/>
               </a:rPr>
-              <a:t>Prijs per werkperiode</a:t>
-            </a:r>
-            <a:endParaRPr lang="en-US" sz="950" dirty="0"/>
+              <a:t>Per werkperiode</a:t>
+            </a:r>
+            <a:endParaRPr lang="en-US" sz="800" dirty="0"/>
           </a:p>
         </p:txBody>
       </p:sp>
@@ -7709,7 +7709,7 @@
         </p:nvSpPr>
         <p:spPr>
           <a:xfrm>
-            <a:off x="10540974" y="4780268"/>
+            <a:off x="7820005" y="4780268"/>
             <a:ext cx="825498" cy="350519"/>
           </a:xfrm>
           <a:prstGeom prst="rect">
@@ -7726,7 +7726,7 @@
               <a:buNone/>
             </a:pPr>
             <a:r>
-              <a:rPr lang="en-US" sz="1150" b="1" dirty="0">
+              <a:rPr lang="en-US" sz="1000" b="1" dirty="0">
                 <a:solidFill>
                   <a:srgbClr val="1C2230"/>
                 </a:solidFill>
@@ -7734,15 +7734,600 @@
                 <a:ea typeface="Arial" pitchFamily="34" charset="-122"/>
                 <a:cs typeface="Arial" pitchFamily="34" charset="-120"/>
               </a:rPr>
+              <a:t>€ 3.450</a:t>
+            </a:r>
+            <a:endParaRPr lang="en-US" sz="1000" dirty="0"/>
+          </a:p>
+        </p:txBody>
+      </p:sp>
+      <p:sp>
+        <p:nvSpPr>
+          <p:cNvPr id="58" name="Shape 56"/>
+          <p:cNvSpPr/>
+          <p:nvPr/>
+        </p:nvSpPr>
+        <p:spPr>
+          <a:xfrm>
+            <a:off x="8924903" y="2489194"/>
+            <a:ext cx="2657468" cy="2768593"/>
+          </a:xfrm>
+          <a:prstGeom prst="roundRect">
+            <a:avLst>
+              <a:gd name="adj" fmla="val 3823"/>
+            </a:avLst>
+          </a:prstGeom>
+          <a:solidFill>
+            <a:srgbClr val="F8F4EB"/>
+          </a:solidFill>
+          <a:ln/>
+        </p:spPr>
+      </p:sp>
+      <p:sp>
+        <p:nvSpPr>
+          <p:cNvPr id="59" name="Text 57"/>
+          <p:cNvSpPr txBox="1"/>
+          <p:nvPr/>
+        </p:nvSpPr>
+        <p:spPr>
+          <a:xfrm>
+            <a:off x="9090002" y="2743193"/>
+            <a:ext cx="2327269" cy="190500"/>
+          </a:xfrm>
+          <a:prstGeom prst="rect">
+            <a:avLst/>
+          </a:prstGeom>
+          <a:noFill/>
+          <a:ln/>
+        </p:spPr>
+        <p:txBody>
+          <a:bodyPr wrap="square" lIns="0" tIns="0" rIns="0" bIns="0" rtlCol="0" anchor="ctr"/>
+          <a:lstStyle/>
+          <a:p>
+            <a:pPr indent="0" marL="0">
+              <a:buNone/>
+            </a:pPr>
+            <a:r>
+              <a:rPr lang="en-US" sz="800" b="1" spc="180" kern="0" dirty="0">
+                <a:solidFill>
+                  <a:srgbClr val="6F6A5C"/>
+                </a:solidFill>
+                <a:latin typeface="Arial" pitchFamily="34" charset="0"/>
+                <a:ea typeface="Arial" pitchFamily="34" charset="-122"/>
+                <a:cs typeface="Arial" pitchFamily="34" charset="-120"/>
+              </a:rPr>
+              <a:t>OF</a:t>
+            </a:r>
+            <a:endParaRPr lang="en-US" sz="800" dirty="0"/>
+          </a:p>
+        </p:txBody>
+      </p:sp>
+      <p:sp>
+        <p:nvSpPr>
+          <p:cNvPr id="60" name="Text 58"/>
+          <p:cNvSpPr txBox="1"/>
+          <p:nvPr/>
+        </p:nvSpPr>
+        <p:spPr>
+          <a:xfrm>
+            <a:off x="9090002" y="2959093"/>
+            <a:ext cx="2327269" cy="355599"/>
+          </a:xfrm>
+          <a:prstGeom prst="rect">
+            <a:avLst/>
+          </a:prstGeom>
+          <a:noFill/>
+          <a:ln/>
+        </p:spPr>
+        <p:txBody>
+          <a:bodyPr wrap="square" lIns="0" tIns="0" rIns="0" bIns="0" rtlCol="0" anchor="ctr"/>
+          <a:lstStyle/>
+          <a:p>
+            <a:pPr indent="0" marL="0">
+              <a:lnSpc>
+                <a:spcPct val="115000"/>
+              </a:lnSpc>
+              <a:buNone/>
+            </a:pPr>
+            <a:r>
+              <a:rPr lang="en-US" sz="1050" b="1" dirty="0">
+                <a:solidFill>
+                  <a:srgbClr val="1C2230"/>
+                </a:solidFill>
+                <a:latin typeface="Arial" pitchFamily="34" charset="0"/>
+                <a:ea typeface="Arial" pitchFamily="34" charset="-122"/>
+                <a:cs typeface="Arial" pitchFamily="34" charset="-120"/>
+              </a:rPr>
+              <a:t>Acht beldagen</a:t>
+            </a:r>
+            <a:endParaRPr lang="en-US" sz="1050" dirty="0"/>
+          </a:p>
+        </p:txBody>
+      </p:sp>
+      <p:sp>
+        <p:nvSpPr>
+          <p:cNvPr id="61" name="Text 59"/>
+          <p:cNvSpPr txBox="1"/>
+          <p:nvPr/>
+        </p:nvSpPr>
+        <p:spPr>
+          <a:xfrm>
+            <a:off x="9090002" y="3378192"/>
+            <a:ext cx="1730371" cy="350519"/>
+          </a:xfrm>
+          <a:prstGeom prst="rect">
+            <a:avLst/>
+          </a:prstGeom>
+          <a:noFill/>
+          <a:ln/>
+        </p:spPr>
+        <p:txBody>
+          <a:bodyPr wrap="square" lIns="0" tIns="0" rIns="0" bIns="0" rtlCol="0" anchor="ctr"/>
+          <a:lstStyle/>
+          <a:p>
+            <a:pPr indent="0" marL="0">
+              <a:buNone/>
+            </a:pPr>
+            <a:r>
+              <a:rPr lang="en-US" sz="800" dirty="0">
+                <a:solidFill>
+                  <a:srgbClr val="6F6A5C"/>
+                </a:solidFill>
+                <a:latin typeface="Arial" pitchFamily="34" charset="0"/>
+                <a:ea typeface="Arial" pitchFamily="34" charset="-122"/>
+                <a:cs typeface="Arial" pitchFamily="34" charset="-120"/>
+              </a:rPr>
+              <a:t>Beldagen</a:t>
+            </a:r>
+            <a:endParaRPr lang="en-US" sz="800" dirty="0"/>
+          </a:p>
+        </p:txBody>
+      </p:sp>
+      <p:sp>
+        <p:nvSpPr>
+          <p:cNvPr id="62" name="Text 60"/>
+          <p:cNvSpPr txBox="1"/>
+          <p:nvPr/>
+        </p:nvSpPr>
+        <p:spPr>
+          <a:xfrm>
+            <a:off x="10591774" y="3378192"/>
+            <a:ext cx="825498" cy="350519"/>
+          </a:xfrm>
+          <a:prstGeom prst="rect">
+            <a:avLst/>
+          </a:prstGeom>
+          <a:noFill/>
+          <a:ln/>
+        </p:spPr>
+        <p:txBody>
+          <a:bodyPr wrap="square" lIns="0" tIns="0" rIns="0" bIns="0" rtlCol="0" anchor="ctr"/>
+          <a:lstStyle/>
+          <a:p>
+            <a:pPr algn="r" indent="0" marL="0">
+              <a:buNone/>
+            </a:pPr>
+            <a:r>
+              <a:rPr lang="en-US" sz="1000" b="1" dirty="0">
+                <a:solidFill>
+                  <a:srgbClr val="1C2230"/>
+                </a:solidFill>
+                <a:latin typeface="Arial" pitchFamily="34" charset="0"/>
+                <a:ea typeface="Arial" pitchFamily="34" charset="-122"/>
+                <a:cs typeface="Arial" pitchFamily="34" charset="-120"/>
+              </a:rPr>
+              <a:t>8</a:t>
+            </a:r>
+            <a:endParaRPr lang="en-US" sz="1000" dirty="0"/>
+          </a:p>
+        </p:txBody>
+      </p:sp>
+      <p:sp>
+        <p:nvSpPr>
+          <p:cNvPr id="63" name="Shape 61"/>
+          <p:cNvSpPr/>
+          <p:nvPr/>
+        </p:nvSpPr>
+        <p:spPr>
+          <a:xfrm>
+            <a:off x="9090002" y="3728711"/>
+            <a:ext cx="2327269" cy="0"/>
+          </a:xfrm>
+          <a:prstGeom prst="line">
+            <a:avLst/>
+          </a:prstGeom>
+          <a:noFill/>
+          <a:ln w="9525">
+            <a:solidFill>
+              <a:srgbClr val="D8D2C4"/>
+            </a:solidFill>
+            <a:prstDash val="solid"/>
+          </a:ln>
+        </p:spPr>
+      </p:sp>
+      <p:sp>
+        <p:nvSpPr>
+          <p:cNvPr id="64" name="Text 62"/>
+          <p:cNvSpPr txBox="1"/>
+          <p:nvPr/>
+        </p:nvSpPr>
+        <p:spPr>
+          <a:xfrm>
+            <a:off x="9090002" y="3728711"/>
+            <a:ext cx="1730371" cy="350519"/>
+          </a:xfrm>
+          <a:prstGeom prst="rect">
+            <a:avLst/>
+          </a:prstGeom>
+          <a:noFill/>
+          <a:ln/>
+        </p:spPr>
+        <p:txBody>
+          <a:bodyPr wrap="square" lIns="0" tIns="0" rIns="0" bIns="0" rtlCol="0" anchor="ctr"/>
+          <a:lstStyle/>
+          <a:p>
+            <a:pPr indent="0" marL="0">
+              <a:buNone/>
+            </a:pPr>
+            <a:r>
+              <a:rPr lang="en-US" sz="800" dirty="0">
+                <a:solidFill>
+                  <a:srgbClr val="6F6A5C"/>
+                </a:solidFill>
+                <a:latin typeface="Arial" pitchFamily="34" charset="0"/>
+                <a:ea typeface="Arial" pitchFamily="34" charset="-122"/>
+                <a:cs typeface="Arial" pitchFamily="34" charset="-120"/>
+              </a:rPr>
+              <a:t>Contactpogingen</a:t>
+            </a:r>
+            <a:endParaRPr lang="en-US" sz="800" dirty="0"/>
+          </a:p>
+        </p:txBody>
+      </p:sp>
+      <p:sp>
+        <p:nvSpPr>
+          <p:cNvPr id="65" name="Text 63"/>
+          <p:cNvSpPr txBox="1"/>
+          <p:nvPr/>
+        </p:nvSpPr>
+        <p:spPr>
+          <a:xfrm>
+            <a:off x="10591774" y="3728711"/>
+            <a:ext cx="825498" cy="350519"/>
+          </a:xfrm>
+          <a:prstGeom prst="rect">
+            <a:avLst/>
+          </a:prstGeom>
+          <a:noFill/>
+          <a:ln/>
+        </p:spPr>
+        <p:txBody>
+          <a:bodyPr wrap="square" lIns="0" tIns="0" rIns="0" bIns="0" rtlCol="0" anchor="ctr"/>
+          <a:lstStyle/>
+          <a:p>
+            <a:pPr algn="r" indent="0" marL="0">
+              <a:buNone/>
+            </a:pPr>
+            <a:r>
+              <a:rPr lang="en-US" sz="1000" b="1" dirty="0">
+                <a:solidFill>
+                  <a:srgbClr val="1C2230"/>
+                </a:solidFill>
+                <a:latin typeface="Arial" pitchFamily="34" charset="0"/>
+                <a:ea typeface="Arial" pitchFamily="34" charset="-122"/>
+                <a:cs typeface="Arial" pitchFamily="34" charset="-120"/>
+              </a:rPr>
+              <a:t>1.200</a:t>
+            </a:r>
+            <a:endParaRPr lang="en-US" sz="1000" dirty="0"/>
+          </a:p>
+        </p:txBody>
+      </p:sp>
+      <p:sp>
+        <p:nvSpPr>
+          <p:cNvPr id="66" name="Shape 64"/>
+          <p:cNvSpPr/>
+          <p:nvPr/>
+        </p:nvSpPr>
+        <p:spPr>
+          <a:xfrm>
+            <a:off x="9090002" y="4079230"/>
+            <a:ext cx="2327269" cy="0"/>
+          </a:xfrm>
+          <a:prstGeom prst="line">
+            <a:avLst/>
+          </a:prstGeom>
+          <a:noFill/>
+          <a:ln w="9525">
+            <a:solidFill>
+              <a:srgbClr val="D8D2C4"/>
+            </a:solidFill>
+            <a:prstDash val="solid"/>
+          </a:ln>
+        </p:spPr>
+      </p:sp>
+      <p:sp>
+        <p:nvSpPr>
+          <p:cNvPr id="67" name="Text 65"/>
+          <p:cNvSpPr txBox="1"/>
+          <p:nvPr/>
+        </p:nvSpPr>
+        <p:spPr>
+          <a:xfrm>
+            <a:off x="9090002" y="4079230"/>
+            <a:ext cx="1730371" cy="350519"/>
+          </a:xfrm>
+          <a:prstGeom prst="rect">
+            <a:avLst/>
+          </a:prstGeom>
+          <a:noFill/>
+          <a:ln/>
+        </p:spPr>
+        <p:txBody>
+          <a:bodyPr wrap="square" lIns="0" tIns="0" rIns="0" bIns="0" rtlCol="0" anchor="ctr"/>
+          <a:lstStyle/>
+          <a:p>
+            <a:pPr indent="0" marL="0">
+              <a:buNone/>
+            </a:pPr>
+            <a:r>
+              <a:rPr lang="en-US" sz="800" dirty="0">
+                <a:solidFill>
+                  <a:srgbClr val="6F6A5C"/>
+                </a:solidFill>
+                <a:latin typeface="Arial" pitchFamily="34" charset="0"/>
+                <a:ea typeface="Arial" pitchFamily="34" charset="-122"/>
+                <a:cs typeface="Arial" pitchFamily="34" charset="-120"/>
+              </a:rPr>
+              <a:t>Afspraken</a:t>
+            </a:r>
+            <a:endParaRPr lang="en-US" sz="800" dirty="0"/>
+          </a:p>
+        </p:txBody>
+      </p:sp>
+      <p:sp>
+        <p:nvSpPr>
+          <p:cNvPr id="68" name="Text 66"/>
+          <p:cNvSpPr txBox="1"/>
+          <p:nvPr/>
+        </p:nvSpPr>
+        <p:spPr>
+          <a:xfrm>
+            <a:off x="10591774" y="4079230"/>
+            <a:ext cx="825498" cy="350519"/>
+          </a:xfrm>
+          <a:prstGeom prst="rect">
+            <a:avLst/>
+          </a:prstGeom>
+          <a:noFill/>
+          <a:ln/>
+        </p:spPr>
+        <p:txBody>
+          <a:bodyPr wrap="square" lIns="0" tIns="0" rIns="0" bIns="0" rtlCol="0" anchor="ctr"/>
+          <a:lstStyle/>
+          <a:p>
+            <a:pPr algn="r" indent="0" marL="0">
+              <a:buNone/>
+            </a:pPr>
+            <a:r>
+              <a:rPr lang="en-US" sz="1000" b="1" dirty="0">
+                <a:solidFill>
+                  <a:srgbClr val="1C2230"/>
+                </a:solidFill>
+                <a:latin typeface="Arial" pitchFamily="34" charset="0"/>
+                <a:ea typeface="Arial" pitchFamily="34" charset="-122"/>
+                <a:cs typeface="Arial" pitchFamily="34" charset="-120"/>
+              </a:rPr>
+              <a:t>20</a:t>
+            </a:r>
+            <a:endParaRPr lang="en-US" sz="1000" dirty="0"/>
+          </a:p>
+        </p:txBody>
+      </p:sp>
+      <p:sp>
+        <p:nvSpPr>
+          <p:cNvPr id="69" name="Shape 67"/>
+          <p:cNvSpPr/>
+          <p:nvPr/>
+        </p:nvSpPr>
+        <p:spPr>
+          <a:xfrm>
+            <a:off x="9090002" y="4429749"/>
+            <a:ext cx="2327269" cy="0"/>
+          </a:xfrm>
+          <a:prstGeom prst="line">
+            <a:avLst/>
+          </a:prstGeom>
+          <a:noFill/>
+          <a:ln w="9525">
+            <a:solidFill>
+              <a:srgbClr val="D8D2C4"/>
+            </a:solidFill>
+            <a:prstDash val="solid"/>
+          </a:ln>
+        </p:spPr>
+      </p:sp>
+      <p:sp>
+        <p:nvSpPr>
+          <p:cNvPr id="70" name="Text 68"/>
+          <p:cNvSpPr txBox="1"/>
+          <p:nvPr/>
+        </p:nvSpPr>
+        <p:spPr>
+          <a:xfrm>
+            <a:off x="9090002" y="4429749"/>
+            <a:ext cx="1730371" cy="350519"/>
+          </a:xfrm>
+          <a:prstGeom prst="rect">
+            <a:avLst/>
+          </a:prstGeom>
+          <a:noFill/>
+          <a:ln/>
+        </p:spPr>
+        <p:txBody>
+          <a:bodyPr wrap="square" lIns="0" tIns="0" rIns="0" bIns="0" rtlCol="0" anchor="ctr"/>
+          <a:lstStyle/>
+          <a:p>
+            <a:pPr indent="0" marL="0">
+              <a:buNone/>
+            </a:pPr>
+            <a:r>
+              <a:rPr lang="en-US" sz="800" dirty="0">
+                <a:solidFill>
+                  <a:srgbClr val="6F6A5C"/>
+                </a:solidFill>
+                <a:latin typeface="Arial" pitchFamily="34" charset="0"/>
+                <a:ea typeface="Arial" pitchFamily="34" charset="-122"/>
+                <a:cs typeface="Arial" pitchFamily="34" charset="-120"/>
+              </a:rPr>
+              <a:t>Per beldag</a:t>
+            </a:r>
+            <a:endParaRPr lang="en-US" sz="800" dirty="0"/>
+          </a:p>
+        </p:txBody>
+      </p:sp>
+      <p:sp>
+        <p:nvSpPr>
+          <p:cNvPr id="71" name="Text 69"/>
+          <p:cNvSpPr txBox="1"/>
+          <p:nvPr/>
+        </p:nvSpPr>
+        <p:spPr>
+          <a:xfrm>
+            <a:off x="10591774" y="4429749"/>
+            <a:ext cx="825498" cy="350519"/>
+          </a:xfrm>
+          <a:prstGeom prst="rect">
+            <a:avLst/>
+          </a:prstGeom>
+          <a:noFill/>
+          <a:ln/>
+        </p:spPr>
+        <p:txBody>
+          <a:bodyPr wrap="square" lIns="0" tIns="0" rIns="0" bIns="0" rtlCol="0" anchor="ctr"/>
+          <a:lstStyle/>
+          <a:p>
+            <a:pPr algn="r" indent="0" marL="0">
+              <a:buNone/>
+            </a:pPr>
+            <a:r>
+              <a:rPr lang="en-US" sz="1000" b="1" dirty="0">
+                <a:solidFill>
+                  <a:srgbClr val="1C2230"/>
+                </a:solidFill>
+                <a:latin typeface="Arial" pitchFamily="34" charset="0"/>
+                <a:ea typeface="Arial" pitchFamily="34" charset="-122"/>
+                <a:cs typeface="Arial" pitchFamily="34" charset="-120"/>
+              </a:rPr>
+              <a:t>€ 550</a:t>
+            </a:r>
+            <a:endParaRPr lang="en-US" sz="1000" dirty="0"/>
+          </a:p>
+        </p:txBody>
+      </p:sp>
+      <p:sp>
+        <p:nvSpPr>
+          <p:cNvPr id="72" name="Shape 70"/>
+          <p:cNvSpPr/>
+          <p:nvPr/>
+        </p:nvSpPr>
+        <p:spPr>
+          <a:xfrm>
+            <a:off x="9090002" y="4780268"/>
+            <a:ext cx="2327269" cy="0"/>
+          </a:xfrm>
+          <a:prstGeom prst="line">
+            <a:avLst/>
+          </a:prstGeom>
+          <a:noFill/>
+          <a:ln w="9525">
+            <a:solidFill>
+              <a:srgbClr val="D8D2C4"/>
+            </a:solidFill>
+            <a:prstDash val="solid"/>
+          </a:ln>
+        </p:spPr>
+      </p:sp>
+      <p:sp>
+        <p:nvSpPr>
+          <p:cNvPr id="73" name="Text 71"/>
+          <p:cNvSpPr txBox="1"/>
+          <p:nvPr/>
+        </p:nvSpPr>
+        <p:spPr>
+          <a:xfrm>
+            <a:off x="9090002" y="4780268"/>
+            <a:ext cx="1730371" cy="350519"/>
+          </a:xfrm>
+          <a:prstGeom prst="rect">
+            <a:avLst/>
+          </a:prstGeom>
+          <a:noFill/>
+          <a:ln/>
+        </p:spPr>
+        <p:txBody>
+          <a:bodyPr wrap="square" lIns="0" tIns="0" rIns="0" bIns="0" rtlCol="0" anchor="ctr"/>
+          <a:lstStyle/>
+          <a:p>
+            <a:pPr indent="0" marL="0">
+              <a:buNone/>
+            </a:pPr>
+            <a:r>
+              <a:rPr lang="en-US" sz="800" dirty="0">
+                <a:solidFill>
+                  <a:srgbClr val="6F6A5C"/>
+                </a:solidFill>
+                <a:latin typeface="Arial" pitchFamily="34" charset="0"/>
+                <a:ea typeface="Arial" pitchFamily="34" charset="-122"/>
+                <a:cs typeface="Arial" pitchFamily="34" charset="-120"/>
+              </a:rPr>
+              <a:t>Per werkperiode</a:t>
+            </a:r>
+            <a:endParaRPr lang="en-US" sz="800" dirty="0"/>
+          </a:p>
+        </p:txBody>
+      </p:sp>
+      <p:sp>
+        <p:nvSpPr>
+          <p:cNvPr id="74" name="Text 72"/>
+          <p:cNvSpPr txBox="1"/>
+          <p:nvPr/>
+        </p:nvSpPr>
+        <p:spPr>
+          <a:xfrm>
+            <a:off x="10591774" y="4780268"/>
+            <a:ext cx="825498" cy="350519"/>
+          </a:xfrm>
+          <a:prstGeom prst="rect">
+            <a:avLst/>
+          </a:prstGeom>
+          <a:noFill/>
+          <a:ln/>
+        </p:spPr>
+        <p:txBody>
+          <a:bodyPr wrap="square" lIns="0" tIns="0" rIns="0" bIns="0" rtlCol="0" anchor="ctr"/>
+          <a:lstStyle/>
+          <a:p>
+            <a:pPr algn="r" indent="0" marL="0">
+              <a:buNone/>
+            </a:pPr>
+            <a:r>
+              <a:rPr lang="en-US" sz="1000" b="1" dirty="0">
+                <a:solidFill>
+                  <a:srgbClr val="1C2230"/>
+                </a:solidFill>
+                <a:latin typeface="Arial" pitchFamily="34" charset="0"/>
+                <a:ea typeface="Arial" pitchFamily="34" charset="-122"/>
+                <a:cs typeface="Arial" pitchFamily="34" charset="-120"/>
+              </a:rPr>
               <a:t>€ 4.400</a:t>
             </a:r>
-            <a:endParaRPr lang="en-US" sz="1150" dirty="0"/>
-          </a:p>
-        </p:txBody>
-      </p:sp>
-      <p:sp>
-        <p:nvSpPr>
-          <p:cNvPr id="58" name="Shape 56"/>
+            <a:endParaRPr lang="en-US" sz="1000" dirty="0"/>
+          </a:p>
+        </p:txBody>
+      </p:sp>
+      <p:sp>
+        <p:nvSpPr>
+          <p:cNvPr id="75" name="Shape 73"/>
           <p:cNvSpPr/>
           <p:nvPr/>
         </p:nvSpPr>
@@ -7762,7 +8347,7 @@
       </p:sp>
       <p:sp>
         <p:nvSpPr>
-          <p:cNvPr id="59" name="Text 57"/>
+          <p:cNvPr id="76" name="Text 74"/>
           <p:cNvSpPr txBox="1"/>
           <p:nvPr/>
         </p:nvSpPr>
@@ -7793,7 +8378,7 @@
                 <a:ea typeface="Arial" pitchFamily="34" charset="-122"/>
                 <a:cs typeface="Arial" pitchFamily="34" charset="-120"/>
               </a:rPr>
-              <a:t>De dagprijs blijft gelijk aan wat je nu per beldag betaalt. Neem je het dubbele af, dan zakt die naar 550 euro per beldag en betaal je 220 euro per afspraak in plaats van 240.</a:t>
+              <a:t>De dagprijs blijft gelijk aan wat je nu per beldag betaalt. Neem je er meer af, dan zakt die naar 575 of 550 euro per beldag.</a:t>
             </a:r>
             <a:endParaRPr lang="en-US" sz="1200" dirty="0"/>
           </a:p>
@@ -17933,7 +18518,7 @@
                 <a:ea typeface="Arial" pitchFamily="34" charset="-122"/>
                 <a:cs typeface="Arial" pitchFamily="34" charset="-120"/>
               </a:rPr>
-              <a:t>PER 8 BELDAGEN</a:t>
+              <a:t>PER 6 BELDAGEN</a:t>
             </a:r>
             <a:endParaRPr lang="en-US" sz="800" dirty="0"/>
           </a:p>
@@ -18126,7 +18711,7 @@
                 <a:ea typeface="Arial" pitchFamily="34" charset="-122"/>
                 <a:cs typeface="Arial" pitchFamily="34" charset="-120"/>
               </a:rPr>
-              <a:t>1.200</a:t>
+              <a:t>900</a:t>
             </a:r>
             <a:endParaRPr lang="en-US" sz="1250" dirty="0"/>
           </a:p>
@@ -18319,7 +18904,7 @@
                 <a:ea typeface="Arial" pitchFamily="34" charset="-122"/>
                 <a:cs typeface="Arial" pitchFamily="34" charset="-120"/>
               </a:rPr>
-              <a:t>± 720</a:t>
+              <a:t>± 540</a:t>
             </a:r>
             <a:endParaRPr lang="en-US" sz="1250" dirty="0"/>
           </a:p>
@@ -18534,7 +19119,7 @@
                 <a:ea typeface="Arial" pitchFamily="34" charset="-122"/>
                 <a:cs typeface="Arial" pitchFamily="34" charset="-120"/>
               </a:rPr>
-              <a:t>20</a:t>
+              <a:t>15</a:t>
             </a:r>
             <a:endParaRPr lang="en-US" sz="1250" dirty="0"/>
           </a:p>
@@ -18593,7 +19178,7 @@
                 <a:ea typeface="Arial" pitchFamily="34" charset="-122"/>
                 <a:cs typeface="Arial" pitchFamily="34" charset="-120"/>
               </a:rPr>
-              <a:t>De zes uur bellen maken we altijd vol, dus die honderdvijftig pogingen staan. Garanderen doen we alleen de tien afspraken, en halen we die niet, dan krijgen jullie een beldag cadeau.</a:t>
+              <a:t>De honderdvijftig pogingen per beldag staan vast. Hoeveel bedrijven we spreken hangt af van de bereikbaarheid. Garanderen doen we alleen de tien afspraken, en halen we die niet, dan krijgen jullie een beldag cadeau.</a:t>
             </a:r>
             <a:endParaRPr lang="en-US" sz="1200" dirty="0"/>
           </a:p>

--- a/output/LINK. voorstel GrowOn Agency.pptx
+++ b/output/LINK. voorstel GrowOn Agency.pptx
@@ -4643,7 +4643,7 @@
                 <a:ea typeface="Arial" pitchFamily="34" charset="-122"/>
                 <a:cs typeface="Arial" pitchFamily="34" charset="-120"/>
               </a:rPr>
-              <a:t>Je betaalt per beldag, vooraf gefactureerd per werkperiode. Geen nacalculatie, geen kosten per afspraak en geen succesfee meer.</a:t>
+              <a:t>Je betaalt per beldag, vooraf gefactureerd per werkperiode. Geen nacalculatie en geen kosten per afspraak.</a:t>
             </a:r>
             <a:endParaRPr lang="en-US" sz="875" dirty="0"/>
           </a:p>
@@ -5117,7 +5117,7 @@
                 <a:ea typeface="Arial" pitchFamily="34" charset="-122"/>
                 <a:cs typeface="Arial" pitchFamily="34" charset="-120"/>
               </a:rPr>
-              <a:t>Elke periode opnieuw kiezen</a:t>
+              <a:t>Succesfee van 5 procent</a:t>
             </a:r>
             <a:endParaRPr lang="en-US" sz="1150" dirty="0"/>
           </a:p>
@@ -5159,7 +5159,7 @@
                 <a:ea typeface="Arial" pitchFamily="34" charset="-122"/>
                 <a:cs typeface="Arial" pitchFamily="34" charset="-120"/>
               </a:rPr>
-              <a:t>Jullie bepalen per werkperiode het aantal beldagen, vanaf vier. Een maand opzegtermijn, geen jaarcontract en geen opstartkosten meer.</a:t>
+              <a:t>Over de omzet die een klant uit onze afspraken jullie in het eerste jaar oplevert. Zo blijven wij sturen op afspraken die ook echt klant worden, niet op aantallen.</a:t>
             </a:r>
             <a:endParaRPr lang="en-US" sz="875" dirty="0"/>
           </a:p>
@@ -5701,7 +5701,7 @@
                 <a:ea typeface="Arial" pitchFamily="34" charset="-122"/>
                 <a:cs typeface="Arial" pitchFamily="34" charset="-120"/>
               </a:rPr>
-              <a:t>Prijs staat vast tot en met 2027</a:t>
+              <a:t>Succesfee van 5% blijft ongewijzigd</a:t>
             </a:r>
             <a:endParaRPr lang="en-US" sz="900" dirty="0"/>
           </a:p>
@@ -10342,7 +10342,7 @@
                 <a:ea typeface="Arial" pitchFamily="34" charset="-122"/>
                 <a:cs typeface="Arial" pitchFamily="34" charset="-120"/>
               </a:rPr>
-              <a:t>Prijs vast tot en met 2027</a:t>
+              <a:t>Succesfee van 5 procent</a:t>
             </a:r>
             <a:endParaRPr lang="en-US" sz="1200" dirty="0"/>
           </a:p>
@@ -10384,7 +10384,7 @@
                 <a:ea typeface="Arial" pitchFamily="34" charset="-122"/>
                 <a:cs typeface="Arial" pitchFamily="34" charset="-120"/>
               </a:rPr>
-              <a:t>De dagprijs en de staffel blijven ongewijzigd. Geen jaarlijkse indexatie.</a:t>
+              <a:t>Ongewijzigd ten opzichte van nu. Over het eerste jaar omzet uit een klant die uit onze afspraken komt.</a:t>
             </a:r>
             <a:endParaRPr lang="en-US" sz="950" dirty="0"/>
           </a:p>

--- a/output/LINK. voorstel GrowOn Agency.pptx
+++ b/output/LINK. voorstel GrowOn Agency.pptx
@@ -4987,7 +4987,7 @@
                 <a:ea typeface="Arial" pitchFamily="34" charset="-122"/>
                 <a:cs typeface="Arial" pitchFamily="34" charset="-120"/>
               </a:rPr>
-              <a:t>Komt een werkperiode onder de tien afspraken, dan bellen we de volgende periode een dag extra die niet op de rekening komt.</a:t>
+              <a:t>Staan de tien afspraken er na zeshonderd pogingen niet, dan bellen we een dag extra die niet op de rekening komt. Maximaal een per werkperiode.</a:t>
             </a:r>
             <a:endParaRPr lang="en-US" sz="875" dirty="0"/>
           </a:p>
@@ -5638,7 +5638,7 @@
                 <a:ea typeface="Arial" pitchFamily="34" charset="-122"/>
                 <a:cs typeface="Arial" pitchFamily="34" charset="-120"/>
               </a:rPr>
-              <a:t>Niet gehaald is een gratis beldag</a:t>
+              <a:t>Maximaal één gratis inhaaldag</a:t>
             </a:r>
             <a:endParaRPr lang="en-US" sz="900" dirty="0"/>
           </a:p>
@@ -9934,7 +9934,7 @@
                 <a:ea typeface="Arial" pitchFamily="34" charset="-122"/>
                 <a:cs typeface="Arial" pitchFamily="34" charset="-120"/>
               </a:rPr>
-              <a:t>Onder de tien afspraken in een werkperiode, dan bellen we de volgende periode een dag extra zonder factuur.</a:t>
+              <a:t>Maximaal een per werkperiode. Halen we het dan nog niet, dan gaan we om tafel over lijst, script of kwalificatie.</a:t>
             </a:r>
             <a:endParaRPr lang="en-US" sz="950" dirty="0"/>
           </a:p>
@@ -18304,7 +18304,7 @@
                 <a:ea typeface="Arial" pitchFamily="34" charset="-122"/>
                 <a:cs typeface="Arial" pitchFamily="34" charset="-120"/>
               </a:rPr>
-              <a:t>Eén belofte: </a:t>
+              <a:t>Tien afspraken per werkperiode, </a:t>
             </a:r>
             <a:pPr algn="l" indent="0" marL="0">
               <a:lnSpc>
@@ -18321,7 +18321,7 @@
                 <a:ea typeface="Georgia" pitchFamily="34" charset="-122"/>
                 <a:cs typeface="Georgia" pitchFamily="34" charset="-120"/>
               </a:rPr>
-              <a:t>tien afspraken</a:t>
+              <a:t>hoe dan ook</a:t>
             </a:r>
             <a:pPr algn="l" indent="0" marL="0">
               <a:lnSpc>
@@ -18338,7 +18338,7 @@
                 <a:ea typeface="Arial" pitchFamily="34" charset="-122"/>
                 <a:cs typeface="Arial" pitchFamily="34" charset="-120"/>
               </a:rPr>
-              <a:t> per werkperiode.</a:t>
+              <a:t>.</a:t>
             </a:r>
             <a:endParaRPr lang="en-US" sz="3200" dirty="0"/>
           </a:p>
@@ -18594,7 +18594,7 @@
                 <a:ea typeface="Georgia" pitchFamily="34" charset="-122"/>
                 <a:cs typeface="Georgia" pitchFamily="34" charset="-120"/>
               </a:rPr>
-              <a:t>   vast</a:t>
+              <a:t>   ondergrens</a:t>
             </a:r>
             <a:endParaRPr lang="en-US" sz="1250" dirty="0"/>
           </a:p>
@@ -19178,7 +19178,7 @@
                 <a:ea typeface="Arial" pitchFamily="34" charset="-122"/>
                 <a:cs typeface="Arial" pitchFamily="34" charset="-120"/>
               </a:rPr>
-              <a:t>De honderdvijftig pogingen per beldag staan vast. Hoeveel bedrijven we spreken hangt af van de bereikbaarheid. Garanderen doen we alleen de tien afspraken, en halen we die niet, dan krijgen jullie een beldag cadeau.</a:t>
+              <a:t>Staan de tien afspraken er eerder, dan gebruiken we de resterende tijd voor de bellijst en de terugbelafspraken van de volgende periode. Staan ze er na zeshonderd pogingen niet, dan bellen we een extra dag die niet op de rekening komt.</a:t>
             </a:r>
             <a:endParaRPr lang="en-US" sz="1200" dirty="0"/>
           </a:p>

--- a/output/LINK. voorstel GrowOn Agency.pptx
+++ b/output/LINK. voorstel GrowOn Agency.pptx
@@ -2786,7 +2786,7 @@
                 <a:ea typeface="Arial" pitchFamily="34" charset="-122"/>
                 <a:cs typeface="Arial" pitchFamily="34" charset="-120"/>
               </a:rPr>
-              <a:t>Er verandert weinig. Zelfde team, zelfde bellijst en dezelfde wekelijkse rapportage. Vanaf werkperiode 4 rekenen we in beldagen, met harde aantallen en een scherpere afspraak over wat een afspraak is.</a:t>
+              <a:t>Er verandert weinig. Zelfde team, zelfde bellijst en dezelfde prijs per beldag. Wat erbij komt: twee afspraken meer per periode, vaste aantallen op papier en een gratis beldag als we die niet halen.</a:t>
             </a:r>
             <a:endParaRPr lang="en-US" sz="1400" dirty="0"/>
           </a:p>
@@ -3141,7 +3141,7 @@
                 <a:ea typeface="Arial" pitchFamily="34" charset="-122"/>
                 <a:cs typeface="Arial" pitchFamily="34" charset="-120"/>
               </a:rPr>
-              <a:t>WAT ER VERANDERT</a:t>
+              <a:t>WAT HET JE OPLEVERT</a:t>
             </a:r>
             <a:endParaRPr lang="en-US" sz="950" dirty="0"/>
           </a:p>
@@ -3183,7 +3183,7 @@
                 <a:ea typeface="Arial" pitchFamily="34" charset="-122"/>
                 <a:cs typeface="Arial" pitchFamily="34" charset="-120"/>
               </a:rPr>
-              <a:t>Hetzelfde werk, nu met </a:t>
+              <a:t>Meer afspraken, </a:t>
             </a:r>
             <a:pPr algn="l" indent="0" marL="0">
               <a:lnSpc>
@@ -3200,7 +3200,7 @@
                 <a:ea typeface="Georgia" pitchFamily="34" charset="-122"/>
                 <a:cs typeface="Georgia" pitchFamily="34" charset="-120"/>
               </a:rPr>
-              <a:t>harde aantallen</a:t>
+              <a:t>dezelfde dagprijs</a:t>
             </a:r>
             <a:pPr algn="l" indent="0" marL="0">
               <a:lnSpc>
@@ -5616,7 +5616,7 @@
                 <a:ea typeface="Arial" pitchFamily="34" charset="-122"/>
                 <a:cs typeface="Arial" pitchFamily="34" charset="-120"/>
               </a:rPr>
-              <a:t>De dagprijs blijft gelijk aan wat je nu per beldag betaalt. Neem je er meer af, dan zakt die naar 575 of 550 euro per beldag.</a:t>
+              <a:t>Je betaalt per beldag wat je nu al betaalt. Wat erbij komt: twee afspraken meer, vaste aantallen op papier en een gratis beldag als we ze niet halen.</a:t>
             </a:r>
             <a:endParaRPr lang="en-US" sz="1200" dirty="0"/>
           </a:p>
@@ -6853,7 +6853,7 @@
                 <a:ea typeface="Arial" pitchFamily="34" charset="-122"/>
                 <a:cs typeface="Arial" pitchFamily="34" charset="-120"/>
               </a:rPr>
-              <a:t>Werkperiodes van 4 weken</a:t>
+              <a:t>Tien afspraken per werkperiode</a:t>
             </a:r>
             <a:endParaRPr lang="en-US" sz="1200" dirty="0"/>
           </a:p>
@@ -6895,7 +6895,7 @@
                 <a:ea typeface="Arial" pitchFamily="34" charset="-122"/>
                 <a:cs typeface="Arial" pitchFamily="34" charset="-120"/>
               </a:rPr>
-              <a:t>Vooraf gefactureerd, per werkperiode. Geen nacalculatie achteraf.</a:t>
+              <a:t>Vastgelegd. Halen we ze niet, dan krijg je een extra beldag van ons.</a:t>
             </a:r>
             <a:endParaRPr lang="en-US" sz="950" dirty="0"/>
           </a:p>
@@ -6980,7 +6980,7 @@
                 <a:ea typeface="Arial" pitchFamily="34" charset="-122"/>
                 <a:cs typeface="Arial" pitchFamily="34" charset="-120"/>
               </a:rPr>
-              <a:t>Tien afspraken per werkperiode</a:t>
+              <a:t>Prijs vast tot en met 2027</a:t>
             </a:r>
             <a:endParaRPr lang="en-US" sz="1200" dirty="0"/>
           </a:p>
@@ -7022,7 +7022,7 @@
                 <a:ea typeface="Arial" pitchFamily="34" charset="-122"/>
                 <a:cs typeface="Arial" pitchFamily="34" charset="-120"/>
               </a:rPr>
-              <a:t>Dat is wat we garanderen bij vier beldagen. Alles eromheen laten we zien in de wekelijkse rapportage.</a:t>
+              <a:t>De dagprijs en de staffel blijven ongewijzigd. Geen jaarlijkse indexatie.</a:t>
             </a:r>
             <a:endParaRPr lang="en-US" sz="950" dirty="0"/>
           </a:p>
@@ -7130,7 +7130,7 @@
                 <a:ea typeface="Arial" pitchFamily="34" charset="-122"/>
                 <a:cs typeface="Arial" pitchFamily="34" charset="-120"/>
               </a:rPr>
-              <a:t>Niet gehaald is een gratis beldag</a:t>
+              <a:t>Geen opstartkosten meer</a:t>
             </a:r>
             <a:endParaRPr lang="en-US" sz="1200" dirty="0"/>
           </a:p>
@@ -7172,7 +7172,7 @@
                 <a:ea typeface="Arial" pitchFamily="34" charset="-122"/>
                 <a:cs typeface="Arial" pitchFamily="34" charset="-120"/>
               </a:rPr>
-              <a:t>Maximaal een per werkperiode. Halen we het dan nog niet, dan gaan we om tafel over lijst, script of kwalificatie.</a:t>
+              <a:t>De inrichting staat. Die fee is eenmalig geweest.</a:t>
             </a:r>
             <a:endParaRPr lang="en-US" sz="950" dirty="0"/>
           </a:p>
@@ -7280,7 +7280,7 @@
                 <a:ea typeface="Arial" pitchFamily="34" charset="-122"/>
                 <a:cs typeface="Arial" pitchFamily="34" charset="-120"/>
               </a:rPr>
-              <a:t>Kwalificatie-eisen samen vastgesteld</a:t>
+              <a:t>Maand opzegtermijn</a:t>
             </a:r>
             <a:endParaRPr lang="en-US" sz="1200" dirty="0"/>
           </a:p>
@@ -7322,7 +7322,7 @@
                 <a:ea typeface="Arial" pitchFamily="34" charset="-122"/>
                 <a:cs typeface="Arial" pitchFamily="34" charset="-120"/>
               </a:rPr>
-              <a:t>Bij de start van werkperiode 4 leggen we samen vast wanneer een afspraak meetelt.</a:t>
+              <a:t>Geen jaarcontract. Jullie zitten nergens aan vast.</a:t>
             </a:r>
             <a:endParaRPr lang="en-US" sz="950" dirty="0"/>
           </a:p>
@@ -7430,7 +7430,7 @@
                 <a:ea typeface="Arial" pitchFamily="34" charset="-122"/>
                 <a:cs typeface="Arial" pitchFamily="34" charset="-120"/>
               </a:rPr>
-              <a:t>Op- en afschalen</a:t>
+              <a:t>Op- en afschalen per periode</a:t>
             </a:r>
             <a:endParaRPr lang="en-US" sz="1200" dirty="0"/>
           </a:p>
@@ -7472,7 +7472,7 @@
                 <a:ea typeface="Arial" pitchFamily="34" charset="-122"/>
                 <a:cs typeface="Arial" pitchFamily="34" charset="-120"/>
               </a:rPr>
-              <a:t>Per werkperiode bepalen jullie het aantal beldagen, vanaf vier.</a:t>
+              <a:t>Jullie bepalen het aantal beldagen, vanaf vier.</a:t>
             </a:r>
             <a:endParaRPr lang="en-US" sz="950" dirty="0"/>
           </a:p>
@@ -7580,7 +7580,7 @@
                 <a:ea typeface="Arial" pitchFamily="34" charset="-122"/>
                 <a:cs typeface="Arial" pitchFamily="34" charset="-120"/>
               </a:rPr>
-              <a:t>Succesfee van 5 procent</a:t>
+              <a:t>Kwalificatie samen vastgesteld</a:t>
             </a:r>
             <a:endParaRPr lang="en-US" sz="1200" dirty="0"/>
           </a:p>
@@ -7622,7 +7622,7 @@
                 <a:ea typeface="Arial" pitchFamily="34" charset="-122"/>
                 <a:cs typeface="Arial" pitchFamily="34" charset="-120"/>
               </a:rPr>
-              <a:t>Ongewijzigd ten opzichte van nu. Over het eerste jaar omzet uit een klant die uit onze afspraken komt.</a:t>
+              <a:t>Bij de start van werkperiode 4 leggen we samen vast wanneer een afspraak meetelt.</a:t>
             </a:r>
             <a:endParaRPr lang="en-US" sz="950" dirty="0"/>
           </a:p>
@@ -7730,7 +7730,7 @@
                 <a:ea typeface="Arial" pitchFamily="34" charset="-122"/>
                 <a:cs typeface="Arial" pitchFamily="34" charset="-120"/>
               </a:rPr>
-              <a:t>Maand opzegtermijn</a:t>
+              <a:t>Succesfee van 5 procent</a:t>
             </a:r>
             <a:endParaRPr lang="en-US" sz="1200" dirty="0"/>
           </a:p>
@@ -7772,7 +7772,7 @@
                 <a:ea typeface="Arial" pitchFamily="34" charset="-122"/>
                 <a:cs typeface="Arial" pitchFamily="34" charset="-120"/>
               </a:rPr>
-              <a:t>Geen jaarcontract en geen opstartkosten meer.</a:t>
+              <a:t>Ongewijzigd. Wij verdienen pas echt als een afspraak klant wordt.</a:t>
             </a:r>
             <a:endParaRPr lang="en-US" sz="950" dirty="0"/>
           </a:p>
@@ -15298,7 +15298,7 @@
                 <a:ea typeface="Arial" pitchFamily="34" charset="-122"/>
                 <a:cs typeface="Arial" pitchFamily="34" charset="-120"/>
               </a:rPr>
-              <a:t>Komt een werkperiode onder de tien afspraken uit, dan bellen we een extra dag die niet op de rekening komt. Maximaal een per periode.</a:t>
+              <a:t>Halen we de tien afspraken in een werkperiode niet, dan bellen we een extra dag die niet op de rekening komt. Een mindere periode kost jullie dus niets extra.</a:t>
             </a:r>
             <a:endParaRPr lang="en-US" sz="1200" dirty="0"/>
           </a:p>
@@ -15500,7 +15500,7 @@
                 <a:ea typeface="Arial" pitchFamily="34" charset="-122"/>
                 <a:cs typeface="Arial" pitchFamily="34" charset="-120"/>
               </a:rPr>
-              <a:t>HOE WE AFREKENEN</a:t>
+              <a:t>WAT JE ERVOOR TERUGKRIJGT</a:t>
             </a:r>
             <a:endParaRPr lang="en-US" sz="950" dirty="0"/>
           </a:p>
@@ -15748,7 +15748,7 @@
                 <a:ea typeface="Arial" pitchFamily="34" charset="-122"/>
                 <a:cs typeface="Arial" pitchFamily="34" charset="-120"/>
               </a:rPr>
-              <a:t>Je betaalt per beldag, vooraf gefactureerd per werkperiode. Geen nacalculatie en geen kosten per afspraak.</a:t>
+              <a:t>Je weet vooraf precies wat een werkperiode kost. Geen nacalculatie, geen kosten per afspraak en geen rekening achteraf.</a:t>
             </a:r>
             <a:endParaRPr lang="en-US" sz="875" dirty="0"/>
           </a:p>
@@ -15920,7 +15920,7 @@
                 <a:ea typeface="Arial" pitchFamily="34" charset="-122"/>
                 <a:cs typeface="Arial" pitchFamily="34" charset="-120"/>
               </a:rPr>
-              <a:t>Dat is de afspraak waar je ons aan mag houden. Het aantal pogingen en gesprekken laten we zien in de rapportage, maar de tien afspraken zijn wat we garanderen.</a:t>
+              <a:t>Twee meer dan je nu krijgt, voor dezelfde prijs per beldag. Dat is het getal waar je ons aan mag houden.</a:t>
             </a:r>
             <a:endParaRPr lang="en-US" sz="875" dirty="0"/>
           </a:p>
@@ -16092,7 +16092,7 @@
                 <a:ea typeface="Arial" pitchFamily="34" charset="-122"/>
                 <a:cs typeface="Arial" pitchFamily="34" charset="-120"/>
               </a:rPr>
-              <a:t>Staan de tien afspraken er na zeshonderd pogingen niet, dan bellen we een dag extra die niet op de rekening komt. Maximaal een per werkperiode.</a:t>
+              <a:t>Halen we de tien niet, dan bellen we een dag extra op onze kosten. Het risico van een mindere periode ligt bij ons.</a:t>
             </a:r>
             <a:endParaRPr lang="en-US" sz="875" dirty="0"/>
           </a:p>
@@ -16264,7 +16264,7 @@
                 <a:ea typeface="Arial" pitchFamily="34" charset="-122"/>
                 <a:cs typeface="Arial" pitchFamily="34" charset="-120"/>
               </a:rPr>
-              <a:t>Over de omzet die een klant uit onze afspraken jullie in het eerste jaar oplevert. Zo blijven wij sturen op afspraken die ook echt klant worden, niet op aantallen.</a:t>
+              <a:t>Ongewijzigd ten opzichte van nu. Wij verdienen pas echt als een afspraak klant wordt, dus sturen we op kwaliteit en niet op aantallen.</a:t>
             </a:r>
             <a:endParaRPr lang="en-US" sz="875" dirty="0"/>
           </a:p>

--- a/output/LINK. voorstel GrowOn Agency.pptx
+++ b/output/LINK. voorstel GrowOn Agency.pptx
@@ -9333,7 +9333,7 @@
                 <a:ea typeface="Arial" pitchFamily="34" charset="-122"/>
                 <a:cs typeface="Arial" pitchFamily="34" charset="-120"/>
               </a:rPr>
-              <a:t>Eén persoon die jullie campagne kent, van script tot rapportage.</a:t>
+              <a:t>Eén persoon die jullie campagne kent, van kick-off tot rapportage.</a:t>
             </a:r>
             <a:endParaRPr lang="en-US" sz="950" dirty="0"/>
           </a:p>
@@ -16467,7 +16467,7 @@
         <p:spPr>
           <a:xfrm>
             <a:off x="3733791" y="5245087"/>
-            <a:ext cx="3555991" cy="215899"/>
+            <a:ext cx="3746491" cy="215899"/>
           </a:xfrm>
           <a:prstGeom prst="rect">
             <a:avLst/>
@@ -16513,7 +16513,7 @@
         </p:blipFill>
         <p:spPr>
           <a:xfrm>
-            <a:off x="7340582" y="5276837"/>
+            <a:off x="7556481" y="5276837"/>
             <a:ext cx="127000" cy="127000"/>
           </a:xfrm>
           <a:prstGeom prst="rect">
@@ -16529,8 +16529,8 @@
         </p:nvSpPr>
         <p:spPr>
           <a:xfrm>
-            <a:off x="7543781" y="5245087"/>
-            <a:ext cx="3555991" cy="215899"/>
+            <a:off x="7759681" y="5245087"/>
+            <a:ext cx="3746491" cy="215899"/>
           </a:xfrm>
           <a:prstGeom prst="rect">
             <a:avLst/>
@@ -16593,7 +16593,7 @@
         <p:spPr>
           <a:xfrm>
             <a:off x="3733791" y="5499086"/>
-            <a:ext cx="3555991" cy="215899"/>
+            <a:ext cx="3746491" cy="215899"/>
           </a:xfrm>
           <a:prstGeom prst="rect">
             <a:avLst/>
@@ -16639,7 +16639,7 @@
         </p:blipFill>
         <p:spPr>
           <a:xfrm>
-            <a:off x="7340582" y="5530836"/>
+            <a:off x="7556481" y="5530836"/>
             <a:ext cx="127000" cy="127000"/>
           </a:xfrm>
           <a:prstGeom prst="rect">
@@ -16655,8 +16655,8 @@
         </p:nvSpPr>
         <p:spPr>
           <a:xfrm>
-            <a:off x="7543781" y="5499086"/>
-            <a:ext cx="3555991" cy="215899"/>
+            <a:off x="7759681" y="5499086"/>
+            <a:ext cx="3746491" cy="215899"/>
           </a:xfrm>
           <a:prstGeom prst="rect">
             <a:avLst/>
@@ -16719,7 +16719,7 @@
         <p:spPr>
           <a:xfrm>
             <a:off x="3733791" y="5753086"/>
-            <a:ext cx="3555991" cy="215899"/>
+            <a:ext cx="3746491" cy="215899"/>
           </a:xfrm>
           <a:prstGeom prst="rect">
             <a:avLst/>
@@ -16765,7 +16765,7 @@
         </p:blipFill>
         <p:spPr>
           <a:xfrm>
-            <a:off x="7340582" y="5784836"/>
+            <a:off x="7556481" y="5784836"/>
             <a:ext cx="127000" cy="127000"/>
           </a:xfrm>
           <a:prstGeom prst="rect">
@@ -16781,8 +16781,8 @@
         </p:nvSpPr>
         <p:spPr>
           <a:xfrm>
-            <a:off x="7543781" y="5753086"/>
-            <a:ext cx="3555991" cy="215899"/>
+            <a:off x="7759681" y="5753086"/>
+            <a:ext cx="3746491" cy="215899"/>
           </a:xfrm>
           <a:prstGeom prst="rect">
             <a:avLst/>
